--- a/Дефекты_и_разработки_по_Пилоту.pptx
+++ b/Дефекты_и_разработки_по_Пилоту.pptx
@@ -3109,8 +3109,8 @@
         </p:blipFill>
         <p:spPr>
           <a:xfrm>
-            <a:off x="9646920" y="73152"/>
-            <a:ext cx="2148840" cy="792454"/>
+            <a:off x="9377172" y="102412"/>
+            <a:ext cx="2423160" cy="893618"/>
           </a:xfrm>
           <a:prstGeom prst="rect">
             <a:avLst/>
@@ -3125,8 +3125,8 @@
         </p:nvSpPr>
         <p:spPr>
           <a:xfrm>
-            <a:off x="320040" y="109728"/>
-            <a:ext cx="8686800" cy="502920"/>
+            <a:off x="561441" y="330098"/>
+            <a:ext cx="7772400" cy="411480"/>
           </a:xfrm>
           <a:prstGeom prst="rect">
             <a:avLst/>
@@ -3161,8 +3161,8 @@
           <p:nvPr/>
         </p:nvGraphicFramePr>
         <p:xfrm>
-          <a:off x="320040" y="685800"/>
-          <a:ext cx="10469880" cy="5806440"/>
+          <a:off x="533095" y="1030528"/>
+          <a:ext cx="11415367" cy="5488223"/>
         </p:xfrm>
         <a:graphic>
           <a:graphicData uri="http://schemas.openxmlformats.org/drawingml/2006/table">
@@ -3171,20 +3171,30 @@
                 <a:tableStyleId>{5C22544A-7EE6-4342-B048-85BDC9FD1C3A}</a:tableStyleId>
               </a:tblPr>
               <a:tblGrid>
-                <a:gridCol w="411480"/>
-                <a:gridCol w="777240"/>
-                <a:gridCol w="3429000"/>
-                <a:gridCol w="3246120"/>
-                <a:gridCol w="1097280"/>
-                <a:gridCol w="1508760"/>
+                <a:gridCol w="480974"/>
+                <a:gridCol w="863193"/>
+                <a:gridCol w="3704234"/>
+                <a:gridCol w="3461004"/>
+                <a:gridCol w="1194206"/>
+                <a:gridCol w="1711756"/>
               </a:tblGrid>
-              <a:tr h="725805">
-                <a:tc>
-                  <a:txBody>
-                    <a:bodyPr/>
-                    <a:lstStyle/>
-                    <a:p>
-                      <a:pPr algn="ctr"/>
+              <a:tr h="738835">
+                <a:tc>
+                  <a:txBody>
+                    <a:bodyPr/>
+                    <a:lstStyle/>
+                    <a:p>
+                      <a:pPr algn="ctr">
+                        <a:lnSpc>
+                          <a:spcPct val="100000"/>
+                        </a:lnSpc>
+                        <a:spcBef>
+                          <a:spcPts val="0"/>
+                        </a:spcBef>
+                        <a:spcAft>
+                          <a:spcPts val="0"/>
+                        </a:spcAft>
+                      </a:pPr>
                       <a:r>
                         <a:rPr sz="1200" b="1">
                           <a:solidFill>
@@ -3196,7 +3206,7 @@
                       </a:r>
                     </a:p>
                   </a:txBody>
-                  <a:tcPr anchor="ctr" marL="50800" marR="50800" marT="25400" marB="25400">
+                  <a:tcPr anchor="ctr" marL="38100" marR="38100" marT="25400" marB="25400">
                     <a:solidFill>
                       <a:srgbClr val="AF182E"/>
                     </a:solidFill>
@@ -3227,7 +3237,17 @@
                     <a:bodyPr/>
                     <a:lstStyle/>
                     <a:p>
-                      <a:pPr algn="ctr"/>
+                      <a:pPr algn="ctr">
+                        <a:lnSpc>
+                          <a:spcPct val="100000"/>
+                        </a:lnSpc>
+                        <a:spcBef>
+                          <a:spcPts val="0"/>
+                        </a:spcBef>
+                        <a:spcAft>
+                          <a:spcPts val="0"/>
+                        </a:spcAft>
+                      </a:pPr>
                       <a:r>
                         <a:rPr sz="1200" b="1">
                           <a:solidFill>
@@ -3239,7 +3259,7 @@
                       </a:r>
                     </a:p>
                   </a:txBody>
-                  <a:tcPr anchor="ctr" marL="50800" marR="50800" marT="25400" marB="25400">
+                  <a:tcPr anchor="ctr" marL="38100" marR="38100" marT="25400" marB="25400">
                     <a:solidFill>
                       <a:srgbClr val="AF182E"/>
                     </a:solidFill>
@@ -3270,7 +3290,17 @@
                     <a:bodyPr/>
                     <a:lstStyle/>
                     <a:p>
-                      <a:pPr algn="ctr"/>
+                      <a:pPr algn="ctr">
+                        <a:lnSpc>
+                          <a:spcPct val="100000"/>
+                        </a:lnSpc>
+                        <a:spcBef>
+                          <a:spcPts val="0"/>
+                        </a:spcBef>
+                        <a:spcAft>
+                          <a:spcPts val="0"/>
+                        </a:spcAft>
+                      </a:pPr>
                       <a:r>
                         <a:rPr sz="1200" b="1">
                           <a:solidFill>
@@ -3282,7 +3312,7 @@
                       </a:r>
                     </a:p>
                   </a:txBody>
-                  <a:tcPr anchor="ctr" marL="50800" marR="50800" marT="25400" marB="25400">
+                  <a:tcPr anchor="ctr" marL="38100" marR="38100" marT="25400" marB="25400">
                     <a:solidFill>
                       <a:srgbClr val="AF182E"/>
                     </a:solidFill>
@@ -3313,7 +3343,17 @@
                     <a:bodyPr/>
                     <a:lstStyle/>
                     <a:p>
-                      <a:pPr algn="ctr"/>
+                      <a:pPr algn="ctr">
+                        <a:lnSpc>
+                          <a:spcPct val="100000"/>
+                        </a:lnSpc>
+                        <a:spcBef>
+                          <a:spcPts val="0"/>
+                        </a:spcBef>
+                        <a:spcAft>
+                          <a:spcPts val="0"/>
+                        </a:spcAft>
+                      </a:pPr>
                       <a:r>
                         <a:rPr sz="1200" b="1">
                           <a:solidFill>
@@ -3325,7 +3365,7 @@
                       </a:r>
                     </a:p>
                   </a:txBody>
-                  <a:tcPr anchor="ctr" marL="50800" marR="50800" marT="25400" marB="25400">
+                  <a:tcPr anchor="ctr" marL="38100" marR="38100" marT="25400" marB="25400">
                     <a:solidFill>
                       <a:srgbClr val="AF182E"/>
                     </a:solidFill>
@@ -3356,7 +3396,17 @@
                     <a:bodyPr/>
                     <a:lstStyle/>
                     <a:p>
-                      <a:pPr algn="ctr"/>
+                      <a:pPr algn="ctr">
+                        <a:lnSpc>
+                          <a:spcPct val="100000"/>
+                        </a:lnSpc>
+                        <a:spcBef>
+                          <a:spcPts val="0"/>
+                        </a:spcBef>
+                        <a:spcAft>
+                          <a:spcPts val="0"/>
+                        </a:spcAft>
+                      </a:pPr>
                       <a:r>
                         <a:rPr sz="1200" b="1">
                           <a:solidFill>
@@ -3371,7 +3421,7 @@
                       </a:r>
                     </a:p>
                   </a:txBody>
-                  <a:tcPr anchor="ctr" marL="50800" marR="50800" marT="25400" marB="25400">
+                  <a:tcPr anchor="ctr" marL="38100" marR="38100" marT="25400" marB="25400">
                     <a:solidFill>
                       <a:srgbClr val="AF182E"/>
                     </a:solidFill>
@@ -3402,7 +3452,17 @@
                     <a:bodyPr/>
                     <a:lstStyle/>
                     <a:p>
-                      <a:pPr algn="ctr"/>
+                      <a:pPr algn="ctr">
+                        <a:lnSpc>
+                          <a:spcPct val="100000"/>
+                        </a:lnSpc>
+                        <a:spcBef>
+                          <a:spcPts val="0"/>
+                        </a:spcBef>
+                        <a:spcAft>
+                          <a:spcPts val="0"/>
+                        </a:spcAft>
+                      </a:pPr>
                       <a:r>
                         <a:rPr sz="1200" b="1">
                           <a:solidFill>
@@ -3414,7 +3474,7 @@
                       </a:r>
                     </a:p>
                   </a:txBody>
-                  <a:tcPr anchor="ctr" marL="50800" marR="50800" marT="25400" marB="25400">
+                  <a:tcPr anchor="ctr" marL="38100" marR="38100" marT="25400" marB="25400">
                     <a:solidFill>
                       <a:srgbClr val="AF182E"/>
                     </a:solidFill>
@@ -3441,13 +3501,23 @@
                   </a:tcPr>
                 </a:tc>
               </a:tr>
-              <a:tr h="725805">
-                <a:tc>
-                  <a:txBody>
-                    <a:bodyPr/>
-                    <a:lstStyle/>
-                    <a:p>
-                      <a:pPr algn="ctr"/>
+              <a:tr h="678484">
+                <a:tc>
+                  <a:txBody>
+                    <a:bodyPr/>
+                    <a:lstStyle/>
+                    <a:p>
+                      <a:pPr algn="ctr">
+                        <a:lnSpc>
+                          <a:spcPct val="100000"/>
+                        </a:lnSpc>
+                        <a:spcBef>
+                          <a:spcPts val="0"/>
+                        </a:spcBef>
+                        <a:spcAft>
+                          <a:spcPts val="0"/>
+                        </a:spcAft>
+                      </a:pPr>
                       <a:r>
                         <a:rPr sz="1100" b="0">
                           <a:solidFill>
@@ -3459,7 +3529,7 @@
                       </a:r>
                     </a:p>
                   </a:txBody>
-                  <a:tcPr anchor="ctr" marL="50800" marR="50800" marT="25400" marB="25400">
+                  <a:tcPr anchor="ctr" marL="38100" marR="38100" marT="25400" marB="25400">
                     <a:solidFill>
                       <a:srgbClr val="FFFFFF"/>
                     </a:solidFill>
@@ -3490,7 +3560,17 @@
                     <a:bodyPr/>
                     <a:lstStyle/>
                     <a:p>
-                      <a:pPr algn="l"/>
+                      <a:pPr algn="l">
+                        <a:lnSpc>
+                          <a:spcPct val="100000"/>
+                        </a:lnSpc>
+                        <a:spcBef>
+                          <a:spcPts val="0"/>
+                        </a:spcBef>
+                        <a:spcAft>
+                          <a:spcPts val="0"/>
+                        </a:spcAft>
+                      </a:pPr>
                       <a:r>
                         <a:rPr sz="1100" b="0">
                           <a:solidFill>
@@ -3502,7 +3582,7 @@
                       </a:r>
                     </a:p>
                   </a:txBody>
-                  <a:tcPr anchor="ctr" marL="50800" marR="50800" marT="25400" marB="25400">
+                  <a:tcPr anchor="ctr" marL="38100" marR="38100" marT="25400" marB="25400">
                     <a:solidFill>
                       <a:srgbClr val="FFFFFF"/>
                     </a:solidFill>
@@ -3533,7 +3613,17 @@
                     <a:bodyPr/>
                     <a:lstStyle/>
                     <a:p>
-                      <a:pPr algn="l"/>
+                      <a:pPr algn="l">
+                        <a:lnSpc>
+                          <a:spcPct val="100000"/>
+                        </a:lnSpc>
+                        <a:spcBef>
+                          <a:spcPts val="0"/>
+                        </a:spcBef>
+                        <a:spcAft>
+                          <a:spcPts val="0"/>
+                        </a:spcAft>
+                      </a:pPr>
                       <a:r>
                         <a:rPr sz="1100" b="0">
                           <a:solidFill>
@@ -3545,7 +3635,7 @@
                       </a:r>
                     </a:p>
                   </a:txBody>
-                  <a:tcPr anchor="ctr" marL="50800" marR="50800" marT="25400" marB="25400">
+                  <a:tcPr anchor="ctr" marL="38100" marR="38100" marT="25400" marB="25400">
                     <a:solidFill>
                       <a:srgbClr val="FFFFFF"/>
                     </a:solidFill>
@@ -3576,7 +3666,17 @@
                     <a:bodyPr/>
                     <a:lstStyle/>
                     <a:p>
-                      <a:pPr algn="l"/>
+                      <a:pPr algn="l">
+                        <a:lnSpc>
+                          <a:spcPct val="100000"/>
+                        </a:lnSpc>
+                        <a:spcBef>
+                          <a:spcPts val="0"/>
+                        </a:spcBef>
+                        <a:spcAft>
+                          <a:spcPts val="0"/>
+                        </a:spcAft>
+                      </a:pPr>
                       <a:r>
                         <a:rPr sz="1100" b="0">
                           <a:solidFill>
@@ -3588,7 +3688,7 @@
                       </a:r>
                     </a:p>
                   </a:txBody>
-                  <a:tcPr anchor="ctr" marL="50800" marR="50800" marT="25400" marB="25400">
+                  <a:tcPr anchor="ctr" marL="38100" marR="38100" marT="25400" marB="25400">
                     <a:solidFill>
                       <a:srgbClr val="FFFFFF"/>
                     </a:solidFill>
@@ -3619,7 +3719,17 @@
                     <a:bodyPr/>
                     <a:lstStyle/>
                     <a:p>
-                      <a:pPr algn="ctr"/>
+                      <a:pPr algn="r">
+                        <a:lnSpc>
+                          <a:spcPct val="100000"/>
+                        </a:lnSpc>
+                        <a:spcBef>
+                          <a:spcPts val="0"/>
+                        </a:spcBef>
+                        <a:spcAft>
+                          <a:spcPts val="0"/>
+                        </a:spcAft>
+                      </a:pPr>
                       <a:r>
                         <a:rPr sz="1100" b="0">
                           <a:solidFill>
@@ -3631,7 +3741,7 @@
                       </a:r>
                     </a:p>
                   </a:txBody>
-                  <a:tcPr anchor="ctr" marL="50800" marR="50800" marT="25400" marB="25400">
+                  <a:tcPr anchor="ctr" marL="38100" marR="38100" marT="25400" marB="25400">
                     <a:solidFill>
                       <a:srgbClr val="FFFFFF"/>
                     </a:solidFill>
@@ -3662,7 +3772,17 @@
                     <a:bodyPr/>
                     <a:lstStyle/>
                     <a:p>
-                      <a:pPr algn="l"/>
+                      <a:pPr algn="l">
+                        <a:lnSpc>
+                          <a:spcPct val="100000"/>
+                        </a:lnSpc>
+                        <a:spcBef>
+                          <a:spcPts val="0"/>
+                        </a:spcBef>
+                        <a:spcAft>
+                          <a:spcPts val="0"/>
+                        </a:spcAft>
+                      </a:pPr>
                       <a:r>
                         <a:rPr sz="1100" b="0">
                           <a:solidFill>
@@ -3674,7 +3794,7 @@
                       </a:r>
                     </a:p>
                   </a:txBody>
-                  <a:tcPr anchor="ctr" marL="50800" marR="50800" marT="25400" marB="25400">
+                  <a:tcPr anchor="ctr" marL="38100" marR="38100" marT="25400" marB="25400">
                     <a:solidFill>
                       <a:srgbClr val="FFFFFF"/>
                     </a:solidFill>
@@ -3701,13 +3821,23 @@
                   </a:tcPr>
                 </a:tc>
               </a:tr>
-              <a:tr h="725805">
-                <a:tc>
-                  <a:txBody>
-                    <a:bodyPr/>
-                    <a:lstStyle/>
-                    <a:p>
-                      <a:pPr algn="ctr"/>
+              <a:tr h="678484">
+                <a:tc>
+                  <a:txBody>
+                    <a:bodyPr/>
+                    <a:lstStyle/>
+                    <a:p>
+                      <a:pPr algn="ctr">
+                        <a:lnSpc>
+                          <a:spcPct val="100000"/>
+                        </a:lnSpc>
+                        <a:spcBef>
+                          <a:spcPts val="0"/>
+                        </a:spcBef>
+                        <a:spcAft>
+                          <a:spcPts val="0"/>
+                        </a:spcAft>
+                      </a:pPr>
                       <a:r>
                         <a:rPr sz="1100" b="0">
                           <a:solidFill>
@@ -3719,7 +3849,7 @@
                       </a:r>
                     </a:p>
                   </a:txBody>
-                  <a:tcPr anchor="ctr" marL="50800" marR="50800" marT="25400" marB="25400">
+                  <a:tcPr anchor="ctr" marL="38100" marR="38100" marT="25400" marB="25400">
                     <a:solidFill>
                       <a:srgbClr val="F8E7E8"/>
                     </a:solidFill>
@@ -3750,7 +3880,17 @@
                     <a:bodyPr/>
                     <a:lstStyle/>
                     <a:p>
-                      <a:pPr algn="l"/>
+                      <a:pPr algn="l">
+                        <a:lnSpc>
+                          <a:spcPct val="100000"/>
+                        </a:lnSpc>
+                        <a:spcBef>
+                          <a:spcPts val="0"/>
+                        </a:spcBef>
+                        <a:spcAft>
+                          <a:spcPts val="0"/>
+                        </a:spcAft>
+                      </a:pPr>
                       <a:r>
                         <a:rPr sz="1100" b="0">
                           <a:solidFill>
@@ -3762,7 +3902,7 @@
                       </a:r>
                     </a:p>
                   </a:txBody>
-                  <a:tcPr anchor="ctr" marL="50800" marR="50800" marT="25400" marB="25400">
+                  <a:tcPr anchor="ctr" marL="38100" marR="38100" marT="25400" marB="25400">
                     <a:solidFill>
                       <a:srgbClr val="F8E7E8"/>
                     </a:solidFill>
@@ -3793,7 +3933,17 @@
                     <a:bodyPr/>
                     <a:lstStyle/>
                     <a:p>
-                      <a:pPr algn="l"/>
+                      <a:pPr algn="l">
+                        <a:lnSpc>
+                          <a:spcPct val="100000"/>
+                        </a:lnSpc>
+                        <a:spcBef>
+                          <a:spcPts val="0"/>
+                        </a:spcBef>
+                        <a:spcAft>
+                          <a:spcPts val="0"/>
+                        </a:spcAft>
+                      </a:pPr>
                       <a:r>
                         <a:rPr sz="1100" b="0">
                           <a:solidFill>
@@ -3805,7 +3955,7 @@
                       </a:r>
                     </a:p>
                   </a:txBody>
-                  <a:tcPr anchor="ctr" marL="50800" marR="50800" marT="25400" marB="25400">
+                  <a:tcPr anchor="ctr" marL="38100" marR="38100" marT="25400" marB="25400">
                     <a:solidFill>
                       <a:srgbClr val="F8E7E8"/>
                     </a:solidFill>
@@ -3836,7 +3986,17 @@
                     <a:bodyPr/>
                     <a:lstStyle/>
                     <a:p>
-                      <a:pPr algn="l"/>
+                      <a:pPr algn="l">
+                        <a:lnSpc>
+                          <a:spcPct val="100000"/>
+                        </a:lnSpc>
+                        <a:spcBef>
+                          <a:spcPts val="0"/>
+                        </a:spcBef>
+                        <a:spcAft>
+                          <a:spcPts val="0"/>
+                        </a:spcAft>
+                      </a:pPr>
                       <a:r>
                         <a:rPr sz="1100" b="0">
                           <a:solidFill>
@@ -3848,7 +4008,7 @@
                       </a:r>
                     </a:p>
                   </a:txBody>
-                  <a:tcPr anchor="ctr" marL="50800" marR="50800" marT="25400" marB="25400">
+                  <a:tcPr anchor="ctr" marL="38100" marR="38100" marT="25400" marB="25400">
                     <a:solidFill>
                       <a:srgbClr val="F8E7E8"/>
                     </a:solidFill>
@@ -3879,7 +4039,17 @@
                     <a:bodyPr/>
                     <a:lstStyle/>
                     <a:p>
-                      <a:pPr algn="ctr"/>
+                      <a:pPr algn="r">
+                        <a:lnSpc>
+                          <a:spcPct val="100000"/>
+                        </a:lnSpc>
+                        <a:spcBef>
+                          <a:spcPts val="0"/>
+                        </a:spcBef>
+                        <a:spcAft>
+                          <a:spcPts val="0"/>
+                        </a:spcAft>
+                      </a:pPr>
                       <a:r>
                         <a:rPr sz="1100" b="0">
                           <a:solidFill>
@@ -3891,7 +4061,7 @@
                       </a:r>
                     </a:p>
                   </a:txBody>
-                  <a:tcPr anchor="ctr" marL="50800" marR="50800" marT="25400" marB="25400">
+                  <a:tcPr anchor="ctr" marL="38100" marR="38100" marT="25400" marB="25400">
                     <a:solidFill>
                       <a:srgbClr val="F8E7E8"/>
                     </a:solidFill>
@@ -3922,7 +4092,17 @@
                     <a:bodyPr/>
                     <a:lstStyle/>
                     <a:p>
-                      <a:pPr algn="l"/>
+                      <a:pPr algn="l">
+                        <a:lnSpc>
+                          <a:spcPct val="100000"/>
+                        </a:lnSpc>
+                        <a:spcBef>
+                          <a:spcPts val="0"/>
+                        </a:spcBef>
+                        <a:spcAft>
+                          <a:spcPts val="0"/>
+                        </a:spcAft>
+                      </a:pPr>
                       <a:r>
                         <a:rPr sz="1100" b="0">
                           <a:solidFill>
@@ -3934,7 +4114,7 @@
                       </a:r>
                     </a:p>
                   </a:txBody>
-                  <a:tcPr anchor="ctr" marL="50800" marR="50800" marT="25400" marB="25400">
+                  <a:tcPr anchor="ctr" marL="38100" marR="38100" marT="25400" marB="25400">
                     <a:solidFill>
                       <a:srgbClr val="F8E7E8"/>
                     </a:solidFill>
@@ -3961,13 +4141,23 @@
                   </a:tcPr>
                 </a:tc>
               </a:tr>
-              <a:tr h="725805">
-                <a:tc>
-                  <a:txBody>
-                    <a:bodyPr/>
-                    <a:lstStyle/>
-                    <a:p>
-                      <a:pPr algn="ctr"/>
+              <a:tr h="678484">
+                <a:tc>
+                  <a:txBody>
+                    <a:bodyPr/>
+                    <a:lstStyle/>
+                    <a:p>
+                      <a:pPr algn="ctr">
+                        <a:lnSpc>
+                          <a:spcPct val="100000"/>
+                        </a:lnSpc>
+                        <a:spcBef>
+                          <a:spcPts val="0"/>
+                        </a:spcBef>
+                        <a:spcAft>
+                          <a:spcPts val="0"/>
+                        </a:spcAft>
+                      </a:pPr>
                       <a:r>
                         <a:rPr sz="1100" b="0">
                           <a:solidFill>
@@ -3979,7 +4169,7 @@
                       </a:r>
                     </a:p>
                   </a:txBody>
-                  <a:tcPr anchor="ctr" marL="50800" marR="50800" marT="25400" marB="25400">
+                  <a:tcPr anchor="ctr" marL="38100" marR="38100" marT="25400" marB="25400">
                     <a:solidFill>
                       <a:srgbClr val="FFFFFF"/>
                     </a:solidFill>
@@ -4010,7 +4200,17 @@
                     <a:bodyPr/>
                     <a:lstStyle/>
                     <a:p>
-                      <a:pPr algn="l"/>
+                      <a:pPr algn="l">
+                        <a:lnSpc>
+                          <a:spcPct val="100000"/>
+                        </a:lnSpc>
+                        <a:spcBef>
+                          <a:spcPts val="0"/>
+                        </a:spcBef>
+                        <a:spcAft>
+                          <a:spcPts val="0"/>
+                        </a:spcAft>
+                      </a:pPr>
                       <a:r>
                         <a:rPr sz="1100" b="0">
                           <a:solidFill>
@@ -4022,7 +4222,7 @@
                       </a:r>
                     </a:p>
                   </a:txBody>
-                  <a:tcPr anchor="ctr" marL="50800" marR="50800" marT="25400" marB="25400">
+                  <a:tcPr anchor="ctr" marL="38100" marR="38100" marT="25400" marB="25400">
                     <a:solidFill>
                       <a:srgbClr val="FFFFFF"/>
                     </a:solidFill>
@@ -4053,7 +4253,17 @@
                     <a:bodyPr/>
                     <a:lstStyle/>
                     <a:p>
-                      <a:pPr algn="l"/>
+                      <a:pPr algn="l">
+                        <a:lnSpc>
+                          <a:spcPct val="100000"/>
+                        </a:lnSpc>
+                        <a:spcBef>
+                          <a:spcPts val="0"/>
+                        </a:spcBef>
+                        <a:spcAft>
+                          <a:spcPts val="0"/>
+                        </a:spcAft>
+                      </a:pPr>
                       <a:r>
                         <a:rPr sz="1100" b="0">
                           <a:solidFill>
@@ -4065,7 +4275,7 @@
                       </a:r>
                     </a:p>
                   </a:txBody>
-                  <a:tcPr anchor="ctr" marL="50800" marR="50800" marT="25400" marB="25400">
+                  <a:tcPr anchor="ctr" marL="38100" marR="38100" marT="25400" marB="25400">
                     <a:solidFill>
                       <a:srgbClr val="FFFFFF"/>
                     </a:solidFill>
@@ -4096,7 +4306,17 @@
                     <a:bodyPr/>
                     <a:lstStyle/>
                     <a:p>
-                      <a:pPr algn="l"/>
+                      <a:pPr algn="l">
+                        <a:lnSpc>
+                          <a:spcPct val="100000"/>
+                        </a:lnSpc>
+                        <a:spcBef>
+                          <a:spcPts val="0"/>
+                        </a:spcBef>
+                        <a:spcAft>
+                          <a:spcPts val="0"/>
+                        </a:spcAft>
+                      </a:pPr>
                       <a:r>
                         <a:rPr sz="1100" b="0">
                           <a:solidFill>
@@ -4108,7 +4328,7 @@
                       </a:r>
                     </a:p>
                   </a:txBody>
-                  <a:tcPr anchor="ctr" marL="50800" marR="50800" marT="25400" marB="25400">
+                  <a:tcPr anchor="ctr" marL="38100" marR="38100" marT="25400" marB="25400">
                     <a:solidFill>
                       <a:srgbClr val="FFFFFF"/>
                     </a:solidFill>
@@ -4139,7 +4359,17 @@
                     <a:bodyPr/>
                     <a:lstStyle/>
                     <a:p>
-                      <a:pPr algn="ctr"/>
+                      <a:pPr algn="r">
+                        <a:lnSpc>
+                          <a:spcPct val="100000"/>
+                        </a:lnSpc>
+                        <a:spcBef>
+                          <a:spcPts val="0"/>
+                        </a:spcBef>
+                        <a:spcAft>
+                          <a:spcPts val="0"/>
+                        </a:spcAft>
+                      </a:pPr>
                       <a:r>
                         <a:rPr sz="1100" b="0">
                           <a:solidFill>
@@ -4151,7 +4381,7 @@
                       </a:r>
                     </a:p>
                   </a:txBody>
-                  <a:tcPr anchor="ctr" marL="50800" marR="50800" marT="25400" marB="25400">
+                  <a:tcPr anchor="ctr" marL="38100" marR="38100" marT="25400" marB="25400">
                     <a:solidFill>
                       <a:srgbClr val="FFFFFF"/>
                     </a:solidFill>
@@ -4182,7 +4412,17 @@
                     <a:bodyPr/>
                     <a:lstStyle/>
                     <a:p>
-                      <a:pPr algn="l"/>
+                      <a:pPr algn="l">
+                        <a:lnSpc>
+                          <a:spcPct val="100000"/>
+                        </a:lnSpc>
+                        <a:spcBef>
+                          <a:spcPts val="0"/>
+                        </a:spcBef>
+                        <a:spcAft>
+                          <a:spcPts val="0"/>
+                        </a:spcAft>
+                      </a:pPr>
                       <a:r>
                         <a:rPr sz="1100" b="0">
                           <a:solidFill>
@@ -4194,7 +4434,7 @@
                       </a:r>
                     </a:p>
                   </a:txBody>
-                  <a:tcPr anchor="ctr" marL="50800" marR="50800" marT="25400" marB="25400">
+                  <a:tcPr anchor="ctr" marL="38100" marR="38100" marT="25400" marB="25400">
                     <a:solidFill>
                       <a:srgbClr val="FFFFFF"/>
                     </a:solidFill>
@@ -4221,13 +4461,23 @@
                   </a:tcPr>
                 </a:tc>
               </a:tr>
-              <a:tr h="725805">
-                <a:tc>
-                  <a:txBody>
-                    <a:bodyPr/>
-                    <a:lstStyle/>
-                    <a:p>
-                      <a:pPr algn="ctr"/>
+              <a:tr h="678484">
+                <a:tc>
+                  <a:txBody>
+                    <a:bodyPr/>
+                    <a:lstStyle/>
+                    <a:p>
+                      <a:pPr algn="ctr">
+                        <a:lnSpc>
+                          <a:spcPct val="100000"/>
+                        </a:lnSpc>
+                        <a:spcBef>
+                          <a:spcPts val="0"/>
+                        </a:spcBef>
+                        <a:spcAft>
+                          <a:spcPts val="0"/>
+                        </a:spcAft>
+                      </a:pPr>
                       <a:r>
                         <a:rPr sz="1100" b="0">
                           <a:solidFill>
@@ -4239,7 +4489,7 @@
                       </a:r>
                     </a:p>
                   </a:txBody>
-                  <a:tcPr anchor="ctr" marL="50800" marR="50800" marT="25400" marB="25400">
+                  <a:tcPr anchor="ctr" marL="38100" marR="38100" marT="25400" marB="25400">
                     <a:solidFill>
                       <a:srgbClr val="F8E7E8"/>
                     </a:solidFill>
@@ -4270,7 +4520,17 @@
                     <a:bodyPr/>
                     <a:lstStyle/>
                     <a:p>
-                      <a:pPr algn="l"/>
+                      <a:pPr algn="l">
+                        <a:lnSpc>
+                          <a:spcPct val="100000"/>
+                        </a:lnSpc>
+                        <a:spcBef>
+                          <a:spcPts val="0"/>
+                        </a:spcBef>
+                        <a:spcAft>
+                          <a:spcPts val="0"/>
+                        </a:spcAft>
+                      </a:pPr>
                       <a:r>
                         <a:rPr sz="1100" b="0">
                           <a:solidFill>
@@ -4282,7 +4542,7 @@
                       </a:r>
                     </a:p>
                   </a:txBody>
-                  <a:tcPr anchor="ctr" marL="50800" marR="50800" marT="25400" marB="25400">
+                  <a:tcPr anchor="ctr" marL="38100" marR="38100" marT="25400" marB="25400">
                     <a:solidFill>
                       <a:srgbClr val="F8E7E8"/>
                     </a:solidFill>
@@ -4313,7 +4573,17 @@
                     <a:bodyPr/>
                     <a:lstStyle/>
                     <a:p>
-                      <a:pPr algn="l"/>
+                      <a:pPr algn="l">
+                        <a:lnSpc>
+                          <a:spcPct val="100000"/>
+                        </a:lnSpc>
+                        <a:spcBef>
+                          <a:spcPts val="0"/>
+                        </a:spcBef>
+                        <a:spcAft>
+                          <a:spcPts val="0"/>
+                        </a:spcAft>
+                      </a:pPr>
                       <a:r>
                         <a:rPr sz="1100" b="0">
                           <a:solidFill>
@@ -4325,7 +4595,7 @@
                       </a:r>
                     </a:p>
                   </a:txBody>
-                  <a:tcPr anchor="ctr" marL="50800" marR="50800" marT="25400" marB="25400">
+                  <a:tcPr anchor="ctr" marL="38100" marR="38100" marT="25400" marB="25400">
                     <a:solidFill>
                       <a:srgbClr val="F8E7E8"/>
                     </a:solidFill>
@@ -4356,7 +4626,17 @@
                     <a:bodyPr/>
                     <a:lstStyle/>
                     <a:p>
-                      <a:pPr algn="l"/>
+                      <a:pPr algn="l">
+                        <a:lnSpc>
+                          <a:spcPct val="100000"/>
+                        </a:lnSpc>
+                        <a:spcBef>
+                          <a:spcPts val="0"/>
+                        </a:spcBef>
+                        <a:spcAft>
+                          <a:spcPts val="0"/>
+                        </a:spcAft>
+                      </a:pPr>
                       <a:r>
                         <a:rPr sz="1100" b="0">
                           <a:solidFill>
@@ -4368,7 +4648,7 @@
                       </a:r>
                     </a:p>
                   </a:txBody>
-                  <a:tcPr anchor="ctr" marL="50800" marR="50800" marT="25400" marB="25400">
+                  <a:tcPr anchor="ctr" marL="38100" marR="38100" marT="25400" marB="25400">
                     <a:solidFill>
                       <a:srgbClr val="F8E7E8"/>
                     </a:solidFill>
@@ -4399,7 +4679,17 @@
                     <a:bodyPr/>
                     <a:lstStyle/>
                     <a:p>
-                      <a:pPr algn="ctr"/>
+                      <a:pPr algn="r">
+                        <a:lnSpc>
+                          <a:spcPct val="100000"/>
+                        </a:lnSpc>
+                        <a:spcBef>
+                          <a:spcPts val="0"/>
+                        </a:spcBef>
+                        <a:spcAft>
+                          <a:spcPts val="0"/>
+                        </a:spcAft>
+                      </a:pPr>
                       <a:r>
                         <a:rPr sz="1100" b="0">
                           <a:solidFill>
@@ -4411,7 +4701,7 @@
                       </a:r>
                     </a:p>
                   </a:txBody>
-                  <a:tcPr anchor="ctr" marL="50800" marR="50800" marT="25400" marB="25400">
+                  <a:tcPr anchor="ctr" marL="38100" marR="38100" marT="25400" marB="25400">
                     <a:solidFill>
                       <a:srgbClr val="F8E7E8"/>
                     </a:solidFill>
@@ -4442,7 +4732,17 @@
                     <a:bodyPr/>
                     <a:lstStyle/>
                     <a:p>
-                      <a:pPr algn="l"/>
+                      <a:pPr algn="l">
+                        <a:lnSpc>
+                          <a:spcPct val="100000"/>
+                        </a:lnSpc>
+                        <a:spcBef>
+                          <a:spcPts val="0"/>
+                        </a:spcBef>
+                        <a:spcAft>
+                          <a:spcPts val="0"/>
+                        </a:spcAft>
+                      </a:pPr>
                       <a:r>
                         <a:rPr sz="1100" b="0">
                           <a:solidFill>
@@ -4454,7 +4754,7 @@
                       </a:r>
                     </a:p>
                   </a:txBody>
-                  <a:tcPr anchor="ctr" marL="50800" marR="50800" marT="25400" marB="25400">
+                  <a:tcPr anchor="ctr" marL="38100" marR="38100" marT="25400" marB="25400">
                     <a:solidFill>
                       <a:srgbClr val="F8E7E8"/>
                     </a:solidFill>
@@ -4481,13 +4781,23 @@
                   </a:tcPr>
                 </a:tc>
               </a:tr>
-              <a:tr h="725805">
-                <a:tc>
-                  <a:txBody>
-                    <a:bodyPr/>
-                    <a:lstStyle/>
-                    <a:p>
-                      <a:pPr algn="ctr"/>
+              <a:tr h="678484">
+                <a:tc>
+                  <a:txBody>
+                    <a:bodyPr/>
+                    <a:lstStyle/>
+                    <a:p>
+                      <a:pPr algn="ctr">
+                        <a:lnSpc>
+                          <a:spcPct val="100000"/>
+                        </a:lnSpc>
+                        <a:spcBef>
+                          <a:spcPts val="0"/>
+                        </a:spcBef>
+                        <a:spcAft>
+                          <a:spcPts val="0"/>
+                        </a:spcAft>
+                      </a:pPr>
                       <a:r>
                         <a:rPr sz="1100" b="0">
                           <a:solidFill>
@@ -4499,7 +4809,7 @@
                       </a:r>
                     </a:p>
                   </a:txBody>
-                  <a:tcPr anchor="ctr" marL="50800" marR="50800" marT="25400" marB="25400">
+                  <a:tcPr anchor="ctr" marL="38100" marR="38100" marT="25400" marB="25400">
                     <a:solidFill>
                       <a:srgbClr val="FFFFFF"/>
                     </a:solidFill>
@@ -4530,7 +4840,17 @@
                     <a:bodyPr/>
                     <a:lstStyle/>
                     <a:p>
-                      <a:pPr algn="l"/>
+                      <a:pPr algn="l">
+                        <a:lnSpc>
+                          <a:spcPct val="100000"/>
+                        </a:lnSpc>
+                        <a:spcBef>
+                          <a:spcPts val="0"/>
+                        </a:spcBef>
+                        <a:spcAft>
+                          <a:spcPts val="0"/>
+                        </a:spcAft>
+                      </a:pPr>
                       <a:r>
                         <a:rPr sz="1100" b="0">
                           <a:solidFill>
@@ -4542,7 +4862,7 @@
                       </a:r>
                     </a:p>
                   </a:txBody>
-                  <a:tcPr anchor="ctr" marL="50800" marR="50800" marT="25400" marB="25400">
+                  <a:tcPr anchor="ctr" marL="38100" marR="38100" marT="25400" marB="25400">
                     <a:solidFill>
                       <a:srgbClr val="FFFFFF"/>
                     </a:solidFill>
@@ -4573,7 +4893,17 @@
                     <a:bodyPr/>
                     <a:lstStyle/>
                     <a:p>
-                      <a:pPr algn="l"/>
+                      <a:pPr algn="l">
+                        <a:lnSpc>
+                          <a:spcPct val="100000"/>
+                        </a:lnSpc>
+                        <a:spcBef>
+                          <a:spcPts val="0"/>
+                        </a:spcBef>
+                        <a:spcAft>
+                          <a:spcPts val="0"/>
+                        </a:spcAft>
+                      </a:pPr>
                       <a:r>
                         <a:rPr sz="1100" b="0">
                           <a:solidFill>
@@ -4585,7 +4915,7 @@
                       </a:r>
                     </a:p>
                   </a:txBody>
-                  <a:tcPr anchor="ctr" marL="50800" marR="50800" marT="25400" marB="25400">
+                  <a:tcPr anchor="ctr" marL="38100" marR="38100" marT="25400" marB="25400">
                     <a:solidFill>
                       <a:srgbClr val="FFFFFF"/>
                     </a:solidFill>
@@ -4616,7 +4946,17 @@
                     <a:bodyPr/>
                     <a:lstStyle/>
                     <a:p>
-                      <a:pPr algn="l"/>
+                      <a:pPr algn="l">
+                        <a:lnSpc>
+                          <a:spcPct val="100000"/>
+                        </a:lnSpc>
+                        <a:spcBef>
+                          <a:spcPts val="0"/>
+                        </a:spcBef>
+                        <a:spcAft>
+                          <a:spcPts val="0"/>
+                        </a:spcAft>
+                      </a:pPr>
                       <a:r>
                         <a:rPr sz="1100" b="0">
                           <a:solidFill>
@@ -4628,7 +4968,7 @@
                       </a:r>
                     </a:p>
                   </a:txBody>
-                  <a:tcPr anchor="ctr" marL="50800" marR="50800" marT="25400" marB="25400">
+                  <a:tcPr anchor="ctr" marL="38100" marR="38100" marT="25400" marB="25400">
                     <a:solidFill>
                       <a:srgbClr val="FFFFFF"/>
                     </a:solidFill>
@@ -4659,10 +4999,20 @@
                     <a:bodyPr/>
                     <a:lstStyle/>
                     <a:p>
-                      <a:pPr algn="ctr"/>
-                    </a:p>
-                  </a:txBody>
-                  <a:tcPr anchor="ctr" marL="50800" marR="50800" marT="25400" marB="25400">
+                      <a:pPr algn="r">
+                        <a:lnSpc>
+                          <a:spcPct val="100000"/>
+                        </a:lnSpc>
+                        <a:spcBef>
+                          <a:spcPts val="0"/>
+                        </a:spcBef>
+                        <a:spcAft>
+                          <a:spcPts val="0"/>
+                        </a:spcAft>
+                      </a:pPr>
+                    </a:p>
+                  </a:txBody>
+                  <a:tcPr anchor="ctr" marL="38100" marR="38100" marT="25400" marB="25400">
                     <a:solidFill>
                       <a:srgbClr val="FFFFFF"/>
                     </a:solidFill>
@@ -4693,7 +5043,17 @@
                     <a:bodyPr/>
                     <a:lstStyle/>
                     <a:p>
-                      <a:pPr algn="l"/>
+                      <a:pPr algn="l">
+                        <a:lnSpc>
+                          <a:spcPct val="100000"/>
+                        </a:lnSpc>
+                        <a:spcBef>
+                          <a:spcPts val="0"/>
+                        </a:spcBef>
+                        <a:spcAft>
+                          <a:spcPts val="0"/>
+                        </a:spcAft>
+                      </a:pPr>
                       <a:r>
                         <a:rPr sz="1100" b="0">
                           <a:solidFill>
@@ -4705,7 +5065,7 @@
                       </a:r>
                     </a:p>
                   </a:txBody>
-                  <a:tcPr anchor="ctr" marL="50800" marR="50800" marT="25400" marB="25400">
+                  <a:tcPr anchor="ctr" marL="38100" marR="38100" marT="25400" marB="25400">
                     <a:solidFill>
                       <a:srgbClr val="FFFFFF"/>
                     </a:solidFill>
@@ -4732,13 +5092,23 @@
                   </a:tcPr>
                 </a:tc>
               </a:tr>
-              <a:tr h="725805">
-                <a:tc>
-                  <a:txBody>
-                    <a:bodyPr/>
-                    <a:lstStyle/>
-                    <a:p>
-                      <a:pPr algn="ctr"/>
+              <a:tr h="678484">
+                <a:tc>
+                  <a:txBody>
+                    <a:bodyPr/>
+                    <a:lstStyle/>
+                    <a:p>
+                      <a:pPr algn="ctr">
+                        <a:lnSpc>
+                          <a:spcPct val="100000"/>
+                        </a:lnSpc>
+                        <a:spcBef>
+                          <a:spcPts val="0"/>
+                        </a:spcBef>
+                        <a:spcAft>
+                          <a:spcPts val="0"/>
+                        </a:spcAft>
+                      </a:pPr>
                       <a:r>
                         <a:rPr sz="1100" b="0">
                           <a:solidFill>
@@ -4750,7 +5120,7 @@
                       </a:r>
                     </a:p>
                   </a:txBody>
-                  <a:tcPr anchor="ctr" marL="50800" marR="50800" marT="25400" marB="25400">
+                  <a:tcPr anchor="ctr" marL="38100" marR="38100" marT="25400" marB="25400">
                     <a:solidFill>
                       <a:srgbClr val="F8E7E8"/>
                     </a:solidFill>
@@ -4781,7 +5151,17 @@
                     <a:bodyPr/>
                     <a:lstStyle/>
                     <a:p>
-                      <a:pPr algn="l"/>
+                      <a:pPr algn="l">
+                        <a:lnSpc>
+                          <a:spcPct val="100000"/>
+                        </a:lnSpc>
+                        <a:spcBef>
+                          <a:spcPts val="0"/>
+                        </a:spcBef>
+                        <a:spcAft>
+                          <a:spcPts val="0"/>
+                        </a:spcAft>
+                      </a:pPr>
                       <a:r>
                         <a:rPr sz="1100" b="0">
                           <a:solidFill>
@@ -4793,7 +5173,7 @@
                       </a:r>
                     </a:p>
                   </a:txBody>
-                  <a:tcPr anchor="ctr" marL="50800" marR="50800" marT="25400" marB="25400">
+                  <a:tcPr anchor="ctr" marL="38100" marR="38100" marT="25400" marB="25400">
                     <a:solidFill>
                       <a:srgbClr val="F8E7E8"/>
                     </a:solidFill>
@@ -4824,7 +5204,17 @@
                     <a:bodyPr/>
                     <a:lstStyle/>
                     <a:p>
-                      <a:pPr algn="l"/>
+                      <a:pPr algn="l">
+                        <a:lnSpc>
+                          <a:spcPct val="100000"/>
+                        </a:lnSpc>
+                        <a:spcBef>
+                          <a:spcPts val="0"/>
+                        </a:spcBef>
+                        <a:spcAft>
+                          <a:spcPts val="0"/>
+                        </a:spcAft>
+                      </a:pPr>
                       <a:r>
                         <a:rPr sz="1100" b="0">
                           <a:solidFill>
@@ -4836,7 +5226,7 @@
                       </a:r>
                     </a:p>
                   </a:txBody>
-                  <a:tcPr anchor="ctr" marL="50800" marR="50800" marT="25400" marB="25400">
+                  <a:tcPr anchor="ctr" marL="38100" marR="38100" marT="25400" marB="25400">
                     <a:solidFill>
                       <a:srgbClr val="F8E7E8"/>
                     </a:solidFill>
@@ -4867,7 +5257,17 @@
                     <a:bodyPr/>
                     <a:lstStyle/>
                     <a:p>
-                      <a:pPr algn="l"/>
+                      <a:pPr algn="l">
+                        <a:lnSpc>
+                          <a:spcPct val="100000"/>
+                        </a:lnSpc>
+                        <a:spcBef>
+                          <a:spcPts val="0"/>
+                        </a:spcBef>
+                        <a:spcAft>
+                          <a:spcPts val="0"/>
+                        </a:spcAft>
+                      </a:pPr>
                       <a:r>
                         <a:rPr sz="1100" b="0">
                           <a:solidFill>
@@ -4879,7 +5279,7 @@
                       </a:r>
                     </a:p>
                   </a:txBody>
-                  <a:tcPr anchor="ctr" marL="50800" marR="50800" marT="25400" marB="25400">
+                  <a:tcPr anchor="ctr" marL="38100" marR="38100" marT="25400" marB="25400">
                     <a:solidFill>
                       <a:srgbClr val="F8E7E8"/>
                     </a:solidFill>
@@ -4910,7 +5310,17 @@
                     <a:bodyPr/>
                     <a:lstStyle/>
                     <a:p>
-                      <a:pPr algn="ctr"/>
+                      <a:pPr algn="r">
+                        <a:lnSpc>
+                          <a:spcPct val="100000"/>
+                        </a:lnSpc>
+                        <a:spcBef>
+                          <a:spcPts val="0"/>
+                        </a:spcBef>
+                        <a:spcAft>
+                          <a:spcPts val="0"/>
+                        </a:spcAft>
+                      </a:pPr>
                       <a:r>
                         <a:rPr sz="1100" b="0">
                           <a:solidFill>
@@ -4922,7 +5332,7 @@
                       </a:r>
                     </a:p>
                   </a:txBody>
-                  <a:tcPr anchor="ctr" marL="50800" marR="50800" marT="25400" marB="25400">
+                  <a:tcPr anchor="ctr" marL="38100" marR="38100" marT="25400" marB="25400">
                     <a:solidFill>
                       <a:srgbClr val="F8E7E8"/>
                     </a:solidFill>
@@ -4953,7 +5363,17 @@
                     <a:bodyPr/>
                     <a:lstStyle/>
                     <a:p>
-                      <a:pPr algn="l"/>
+                      <a:pPr algn="l">
+                        <a:lnSpc>
+                          <a:spcPct val="100000"/>
+                        </a:lnSpc>
+                        <a:spcBef>
+                          <a:spcPts val="0"/>
+                        </a:spcBef>
+                        <a:spcAft>
+                          <a:spcPts val="0"/>
+                        </a:spcAft>
+                      </a:pPr>
                       <a:r>
                         <a:rPr sz="1100" b="0">
                           <a:solidFill>
@@ -4965,7 +5385,7 @@
                       </a:r>
                     </a:p>
                   </a:txBody>
-                  <a:tcPr anchor="ctr" marL="50800" marR="50800" marT="25400" marB="25400">
+                  <a:tcPr anchor="ctr" marL="38100" marR="38100" marT="25400" marB="25400">
                     <a:solidFill>
                       <a:srgbClr val="F8E7E8"/>
                     </a:solidFill>
@@ -4992,13 +5412,23 @@
                   </a:tcPr>
                 </a:tc>
               </a:tr>
-              <a:tr h="725805">
-                <a:tc>
-                  <a:txBody>
-                    <a:bodyPr/>
-                    <a:lstStyle/>
-                    <a:p>
-                      <a:pPr algn="ctr"/>
+              <a:tr h="678484">
+                <a:tc>
+                  <a:txBody>
+                    <a:bodyPr/>
+                    <a:lstStyle/>
+                    <a:p>
+                      <a:pPr algn="ctr">
+                        <a:lnSpc>
+                          <a:spcPct val="100000"/>
+                        </a:lnSpc>
+                        <a:spcBef>
+                          <a:spcPts val="0"/>
+                        </a:spcBef>
+                        <a:spcAft>
+                          <a:spcPts val="0"/>
+                        </a:spcAft>
+                      </a:pPr>
                       <a:r>
                         <a:rPr sz="1100" b="0">
                           <a:solidFill>
@@ -5010,7 +5440,7 @@
                       </a:r>
                     </a:p>
                   </a:txBody>
-                  <a:tcPr anchor="ctr" marL="50800" marR="50800" marT="25400" marB="25400">
+                  <a:tcPr anchor="ctr" marL="38100" marR="38100" marT="25400" marB="25400">
                     <a:solidFill>
                       <a:srgbClr val="FFFFFF"/>
                     </a:solidFill>
@@ -5041,7 +5471,17 @@
                     <a:bodyPr/>
                     <a:lstStyle/>
                     <a:p>
-                      <a:pPr algn="l"/>
+                      <a:pPr algn="l">
+                        <a:lnSpc>
+                          <a:spcPct val="100000"/>
+                        </a:lnSpc>
+                        <a:spcBef>
+                          <a:spcPts val="0"/>
+                        </a:spcBef>
+                        <a:spcAft>
+                          <a:spcPts val="0"/>
+                        </a:spcAft>
+                      </a:pPr>
                       <a:r>
                         <a:rPr sz="1100" b="0">
                           <a:solidFill>
@@ -5053,7 +5493,7 @@
                       </a:r>
                     </a:p>
                   </a:txBody>
-                  <a:tcPr anchor="ctr" marL="50800" marR="50800" marT="25400" marB="25400">
+                  <a:tcPr anchor="ctr" marL="38100" marR="38100" marT="25400" marB="25400">
                     <a:solidFill>
                       <a:srgbClr val="FFFFFF"/>
                     </a:solidFill>
@@ -5084,7 +5524,17 @@
                     <a:bodyPr/>
                     <a:lstStyle/>
                     <a:p>
-                      <a:pPr algn="l"/>
+                      <a:pPr algn="l">
+                        <a:lnSpc>
+                          <a:spcPct val="100000"/>
+                        </a:lnSpc>
+                        <a:spcBef>
+                          <a:spcPts val="0"/>
+                        </a:spcBef>
+                        <a:spcAft>
+                          <a:spcPts val="0"/>
+                        </a:spcAft>
+                      </a:pPr>
                       <a:r>
                         <a:rPr sz="1100" b="0">
                           <a:solidFill>
@@ -5096,7 +5546,7 @@
                       </a:r>
                     </a:p>
                   </a:txBody>
-                  <a:tcPr anchor="ctr" marL="50800" marR="50800" marT="25400" marB="25400">
+                  <a:tcPr anchor="ctr" marL="38100" marR="38100" marT="25400" marB="25400">
                     <a:solidFill>
                       <a:srgbClr val="FFFFFF"/>
                     </a:solidFill>
@@ -5127,7 +5577,17 @@
                     <a:bodyPr/>
                     <a:lstStyle/>
                     <a:p>
-                      <a:pPr algn="l"/>
+                      <a:pPr algn="l">
+                        <a:lnSpc>
+                          <a:spcPct val="100000"/>
+                        </a:lnSpc>
+                        <a:spcBef>
+                          <a:spcPts val="0"/>
+                        </a:spcBef>
+                        <a:spcAft>
+                          <a:spcPts val="0"/>
+                        </a:spcAft>
+                      </a:pPr>
                       <a:r>
                         <a:rPr sz="1100" b="0">
                           <a:solidFill>
@@ -5139,7 +5599,7 @@
                       </a:r>
                     </a:p>
                   </a:txBody>
-                  <a:tcPr anchor="ctr" marL="50800" marR="50800" marT="25400" marB="25400">
+                  <a:tcPr anchor="ctr" marL="38100" marR="38100" marT="25400" marB="25400">
                     <a:solidFill>
                       <a:srgbClr val="FFFFFF"/>
                     </a:solidFill>
@@ -5170,7 +5630,17 @@
                     <a:bodyPr/>
                     <a:lstStyle/>
                     <a:p>
-                      <a:pPr algn="ctr"/>
+                      <a:pPr algn="r">
+                        <a:lnSpc>
+                          <a:spcPct val="100000"/>
+                        </a:lnSpc>
+                        <a:spcBef>
+                          <a:spcPts val="0"/>
+                        </a:spcBef>
+                        <a:spcAft>
+                          <a:spcPts val="0"/>
+                        </a:spcAft>
+                      </a:pPr>
                       <a:r>
                         <a:rPr sz="1100" b="0">
                           <a:solidFill>
@@ -5182,7 +5652,7 @@
                       </a:r>
                     </a:p>
                   </a:txBody>
-                  <a:tcPr anchor="ctr" marL="50800" marR="50800" marT="25400" marB="25400">
+                  <a:tcPr anchor="ctr" marL="38100" marR="38100" marT="25400" marB="25400">
                     <a:solidFill>
                       <a:srgbClr val="FFFFFF"/>
                     </a:solidFill>
@@ -5213,7 +5683,17 @@
                     <a:bodyPr/>
                     <a:lstStyle/>
                     <a:p>
-                      <a:pPr algn="l"/>
+                      <a:pPr algn="l">
+                        <a:lnSpc>
+                          <a:spcPct val="100000"/>
+                        </a:lnSpc>
+                        <a:spcBef>
+                          <a:spcPts val="0"/>
+                        </a:spcBef>
+                        <a:spcAft>
+                          <a:spcPts val="0"/>
+                        </a:spcAft>
+                      </a:pPr>
                       <a:r>
                         <a:rPr sz="1100" b="0">
                           <a:solidFill>
@@ -5225,7 +5705,7 @@
                       </a:r>
                     </a:p>
                   </a:txBody>
-                  <a:tcPr anchor="ctr" marL="50800" marR="50800" marT="25400" marB="25400">
+                  <a:tcPr anchor="ctr" marL="38100" marR="38100" marT="25400" marB="25400">
                     <a:solidFill>
                       <a:srgbClr val="FFFFFF"/>
                     </a:solidFill>
@@ -5290,8 +5770,8 @@
         </p:blipFill>
         <p:spPr>
           <a:xfrm>
-            <a:off x="9646920" y="73152"/>
-            <a:ext cx="2148840" cy="792454"/>
+            <a:off x="9377172" y="102412"/>
+            <a:ext cx="2423160" cy="893618"/>
           </a:xfrm>
           <a:prstGeom prst="rect">
             <a:avLst/>
@@ -5306,8 +5786,8 @@
         </p:nvSpPr>
         <p:spPr>
           <a:xfrm>
-            <a:off x="320040" y="109728"/>
-            <a:ext cx="8686800" cy="502920"/>
+            <a:off x="561441" y="330098"/>
+            <a:ext cx="7772400" cy="411480"/>
           </a:xfrm>
           <a:prstGeom prst="rect">
             <a:avLst/>
@@ -5342,8 +5822,8 @@
           <p:nvPr/>
         </p:nvGraphicFramePr>
         <p:xfrm>
-          <a:off x="320040" y="685800"/>
-          <a:ext cx="10469880" cy="5806440"/>
+          <a:off x="533095" y="1030528"/>
+          <a:ext cx="11415367" cy="5488223"/>
         </p:xfrm>
         <a:graphic>
           <a:graphicData uri="http://schemas.openxmlformats.org/drawingml/2006/table">
@@ -5352,20 +5832,30 @@
                 <a:tableStyleId>{5C22544A-7EE6-4342-B048-85BDC9FD1C3A}</a:tableStyleId>
               </a:tblPr>
               <a:tblGrid>
-                <a:gridCol w="411480"/>
-                <a:gridCol w="777240"/>
-                <a:gridCol w="3429000"/>
-                <a:gridCol w="3246120"/>
-                <a:gridCol w="1097280"/>
-                <a:gridCol w="1508760"/>
+                <a:gridCol w="480974"/>
+                <a:gridCol w="863193"/>
+                <a:gridCol w="3704234"/>
+                <a:gridCol w="3461004"/>
+                <a:gridCol w="1194206"/>
+                <a:gridCol w="1711756"/>
               </a:tblGrid>
-              <a:tr h="725805">
-                <a:tc>
-                  <a:txBody>
-                    <a:bodyPr/>
-                    <a:lstStyle/>
-                    <a:p>
-                      <a:pPr algn="ctr"/>
+              <a:tr h="738835">
+                <a:tc>
+                  <a:txBody>
+                    <a:bodyPr/>
+                    <a:lstStyle/>
+                    <a:p>
+                      <a:pPr algn="ctr">
+                        <a:lnSpc>
+                          <a:spcPct val="100000"/>
+                        </a:lnSpc>
+                        <a:spcBef>
+                          <a:spcPts val="0"/>
+                        </a:spcBef>
+                        <a:spcAft>
+                          <a:spcPts val="0"/>
+                        </a:spcAft>
+                      </a:pPr>
                       <a:r>
                         <a:rPr sz="1200" b="1">
                           <a:solidFill>
@@ -5377,7 +5867,7 @@
                       </a:r>
                     </a:p>
                   </a:txBody>
-                  <a:tcPr anchor="ctr" marL="50800" marR="50800" marT="25400" marB="25400">
+                  <a:tcPr anchor="ctr" marL="38100" marR="38100" marT="25400" marB="25400">
                     <a:solidFill>
                       <a:srgbClr val="AF182E"/>
                     </a:solidFill>
@@ -5408,7 +5898,17 @@
                     <a:bodyPr/>
                     <a:lstStyle/>
                     <a:p>
-                      <a:pPr algn="ctr"/>
+                      <a:pPr algn="ctr">
+                        <a:lnSpc>
+                          <a:spcPct val="100000"/>
+                        </a:lnSpc>
+                        <a:spcBef>
+                          <a:spcPts val="0"/>
+                        </a:spcBef>
+                        <a:spcAft>
+                          <a:spcPts val="0"/>
+                        </a:spcAft>
+                      </a:pPr>
                       <a:r>
                         <a:rPr sz="1200" b="1">
                           <a:solidFill>
@@ -5420,7 +5920,7 @@
                       </a:r>
                     </a:p>
                   </a:txBody>
-                  <a:tcPr anchor="ctr" marL="50800" marR="50800" marT="25400" marB="25400">
+                  <a:tcPr anchor="ctr" marL="38100" marR="38100" marT="25400" marB="25400">
                     <a:solidFill>
                       <a:srgbClr val="AF182E"/>
                     </a:solidFill>
@@ -5451,7 +5951,17 @@
                     <a:bodyPr/>
                     <a:lstStyle/>
                     <a:p>
-                      <a:pPr algn="ctr"/>
+                      <a:pPr algn="ctr">
+                        <a:lnSpc>
+                          <a:spcPct val="100000"/>
+                        </a:lnSpc>
+                        <a:spcBef>
+                          <a:spcPts val="0"/>
+                        </a:spcBef>
+                        <a:spcAft>
+                          <a:spcPts val="0"/>
+                        </a:spcAft>
+                      </a:pPr>
                       <a:r>
                         <a:rPr sz="1200" b="1">
                           <a:solidFill>
@@ -5463,7 +5973,7 @@
                       </a:r>
                     </a:p>
                   </a:txBody>
-                  <a:tcPr anchor="ctr" marL="50800" marR="50800" marT="25400" marB="25400">
+                  <a:tcPr anchor="ctr" marL="38100" marR="38100" marT="25400" marB="25400">
                     <a:solidFill>
                       <a:srgbClr val="AF182E"/>
                     </a:solidFill>
@@ -5494,7 +6004,17 @@
                     <a:bodyPr/>
                     <a:lstStyle/>
                     <a:p>
-                      <a:pPr algn="ctr"/>
+                      <a:pPr algn="ctr">
+                        <a:lnSpc>
+                          <a:spcPct val="100000"/>
+                        </a:lnSpc>
+                        <a:spcBef>
+                          <a:spcPts val="0"/>
+                        </a:spcBef>
+                        <a:spcAft>
+                          <a:spcPts val="0"/>
+                        </a:spcAft>
+                      </a:pPr>
                       <a:r>
                         <a:rPr sz="1200" b="1">
                           <a:solidFill>
@@ -5506,7 +6026,7 @@
                       </a:r>
                     </a:p>
                   </a:txBody>
-                  <a:tcPr anchor="ctr" marL="50800" marR="50800" marT="25400" marB="25400">
+                  <a:tcPr anchor="ctr" marL="38100" marR="38100" marT="25400" marB="25400">
                     <a:solidFill>
                       <a:srgbClr val="AF182E"/>
                     </a:solidFill>
@@ -5537,7 +6057,17 @@
                     <a:bodyPr/>
                     <a:lstStyle/>
                     <a:p>
-                      <a:pPr algn="ctr"/>
+                      <a:pPr algn="ctr">
+                        <a:lnSpc>
+                          <a:spcPct val="100000"/>
+                        </a:lnSpc>
+                        <a:spcBef>
+                          <a:spcPts val="0"/>
+                        </a:spcBef>
+                        <a:spcAft>
+                          <a:spcPts val="0"/>
+                        </a:spcAft>
+                      </a:pPr>
                       <a:r>
                         <a:rPr sz="1200" b="1">
                           <a:solidFill>
@@ -5552,7 +6082,7 @@
                       </a:r>
                     </a:p>
                   </a:txBody>
-                  <a:tcPr anchor="ctr" marL="50800" marR="50800" marT="25400" marB="25400">
+                  <a:tcPr anchor="ctr" marL="38100" marR="38100" marT="25400" marB="25400">
                     <a:solidFill>
                       <a:srgbClr val="AF182E"/>
                     </a:solidFill>
@@ -5583,7 +6113,17 @@
                     <a:bodyPr/>
                     <a:lstStyle/>
                     <a:p>
-                      <a:pPr algn="ctr"/>
+                      <a:pPr algn="ctr">
+                        <a:lnSpc>
+                          <a:spcPct val="100000"/>
+                        </a:lnSpc>
+                        <a:spcBef>
+                          <a:spcPts val="0"/>
+                        </a:spcBef>
+                        <a:spcAft>
+                          <a:spcPts val="0"/>
+                        </a:spcAft>
+                      </a:pPr>
                       <a:r>
                         <a:rPr sz="1200" b="1">
                           <a:solidFill>
@@ -5595,7 +6135,7 @@
                       </a:r>
                     </a:p>
                   </a:txBody>
-                  <a:tcPr anchor="ctr" marL="50800" marR="50800" marT="25400" marB="25400">
+                  <a:tcPr anchor="ctr" marL="38100" marR="38100" marT="25400" marB="25400">
                     <a:solidFill>
                       <a:srgbClr val="AF182E"/>
                     </a:solidFill>
@@ -5622,13 +6162,23 @@
                   </a:tcPr>
                 </a:tc>
               </a:tr>
-              <a:tr h="725805">
-                <a:tc>
-                  <a:txBody>
-                    <a:bodyPr/>
-                    <a:lstStyle/>
-                    <a:p>
-                      <a:pPr algn="ctr"/>
+              <a:tr h="678484">
+                <a:tc>
+                  <a:txBody>
+                    <a:bodyPr/>
+                    <a:lstStyle/>
+                    <a:p>
+                      <a:pPr algn="ctr">
+                        <a:lnSpc>
+                          <a:spcPct val="100000"/>
+                        </a:lnSpc>
+                        <a:spcBef>
+                          <a:spcPts val="0"/>
+                        </a:spcBef>
+                        <a:spcAft>
+                          <a:spcPts val="0"/>
+                        </a:spcAft>
+                      </a:pPr>
                       <a:r>
                         <a:rPr sz="1100" b="0">
                           <a:solidFill>
@@ -5640,7 +6190,7 @@
                       </a:r>
                     </a:p>
                   </a:txBody>
-                  <a:tcPr anchor="ctr" marL="50800" marR="50800" marT="25400" marB="25400">
+                  <a:tcPr anchor="ctr" marL="38100" marR="38100" marT="25400" marB="25400">
                     <a:solidFill>
                       <a:srgbClr val="FFFFFF"/>
                     </a:solidFill>
@@ -5671,7 +6221,17 @@
                     <a:bodyPr/>
                     <a:lstStyle/>
                     <a:p>
-                      <a:pPr algn="l"/>
+                      <a:pPr algn="l">
+                        <a:lnSpc>
+                          <a:spcPct val="100000"/>
+                        </a:lnSpc>
+                        <a:spcBef>
+                          <a:spcPts val="0"/>
+                        </a:spcBef>
+                        <a:spcAft>
+                          <a:spcPts val="0"/>
+                        </a:spcAft>
+                      </a:pPr>
                       <a:r>
                         <a:rPr sz="1100" b="0">
                           <a:solidFill>
@@ -5683,7 +6243,7 @@
                       </a:r>
                     </a:p>
                   </a:txBody>
-                  <a:tcPr anchor="ctr" marL="50800" marR="50800" marT="25400" marB="25400">
+                  <a:tcPr anchor="ctr" marL="38100" marR="38100" marT="25400" marB="25400">
                     <a:solidFill>
                       <a:srgbClr val="FFFFFF"/>
                     </a:solidFill>
@@ -5714,7 +6274,17 @@
                     <a:bodyPr/>
                     <a:lstStyle/>
                     <a:p>
-                      <a:pPr algn="l"/>
+                      <a:pPr algn="l">
+                        <a:lnSpc>
+                          <a:spcPct val="100000"/>
+                        </a:lnSpc>
+                        <a:spcBef>
+                          <a:spcPts val="0"/>
+                        </a:spcBef>
+                        <a:spcAft>
+                          <a:spcPts val="0"/>
+                        </a:spcAft>
+                      </a:pPr>
                       <a:r>
                         <a:rPr sz="1100" b="0">
                           <a:solidFill>
@@ -5726,7 +6296,7 @@
                       </a:r>
                     </a:p>
                   </a:txBody>
-                  <a:tcPr anchor="ctr" marL="50800" marR="50800" marT="25400" marB="25400">
+                  <a:tcPr anchor="ctr" marL="38100" marR="38100" marT="25400" marB="25400">
                     <a:solidFill>
                       <a:srgbClr val="FFFFFF"/>
                     </a:solidFill>
@@ -5757,7 +6327,17 @@
                     <a:bodyPr/>
                     <a:lstStyle/>
                     <a:p>
-                      <a:pPr algn="l"/>
+                      <a:pPr algn="l">
+                        <a:lnSpc>
+                          <a:spcPct val="100000"/>
+                        </a:lnSpc>
+                        <a:spcBef>
+                          <a:spcPts val="0"/>
+                        </a:spcBef>
+                        <a:spcAft>
+                          <a:spcPts val="0"/>
+                        </a:spcAft>
+                      </a:pPr>
                       <a:r>
                         <a:rPr sz="1100" b="0">
                           <a:solidFill>
@@ -5769,7 +6349,7 @@
                       </a:r>
                     </a:p>
                   </a:txBody>
-                  <a:tcPr anchor="ctr" marL="50800" marR="50800" marT="25400" marB="25400">
+                  <a:tcPr anchor="ctr" marL="38100" marR="38100" marT="25400" marB="25400">
                     <a:solidFill>
                       <a:srgbClr val="FFFFFF"/>
                     </a:solidFill>
@@ -5800,7 +6380,17 @@
                     <a:bodyPr/>
                     <a:lstStyle/>
                     <a:p>
-                      <a:pPr algn="ctr"/>
+                      <a:pPr algn="r">
+                        <a:lnSpc>
+                          <a:spcPct val="100000"/>
+                        </a:lnSpc>
+                        <a:spcBef>
+                          <a:spcPts val="0"/>
+                        </a:spcBef>
+                        <a:spcAft>
+                          <a:spcPts val="0"/>
+                        </a:spcAft>
+                      </a:pPr>
                       <a:r>
                         <a:rPr sz="1100" b="0">
                           <a:solidFill>
@@ -5812,7 +6402,7 @@
                       </a:r>
                     </a:p>
                   </a:txBody>
-                  <a:tcPr anchor="ctr" marL="50800" marR="50800" marT="25400" marB="25400">
+                  <a:tcPr anchor="ctr" marL="38100" marR="38100" marT="25400" marB="25400">
                     <a:solidFill>
                       <a:srgbClr val="FFFFFF"/>
                     </a:solidFill>
@@ -5843,7 +6433,17 @@
                     <a:bodyPr/>
                     <a:lstStyle/>
                     <a:p>
-                      <a:pPr algn="l"/>
+                      <a:pPr algn="l">
+                        <a:lnSpc>
+                          <a:spcPct val="100000"/>
+                        </a:lnSpc>
+                        <a:spcBef>
+                          <a:spcPts val="0"/>
+                        </a:spcBef>
+                        <a:spcAft>
+                          <a:spcPts val="0"/>
+                        </a:spcAft>
+                      </a:pPr>
                       <a:r>
                         <a:rPr sz="1100" b="0">
                           <a:solidFill>
@@ -5855,7 +6455,7 @@
                       </a:r>
                     </a:p>
                   </a:txBody>
-                  <a:tcPr anchor="ctr" marL="50800" marR="50800" marT="25400" marB="25400">
+                  <a:tcPr anchor="ctr" marL="38100" marR="38100" marT="25400" marB="25400">
                     <a:solidFill>
                       <a:srgbClr val="FFFFFF"/>
                     </a:solidFill>
@@ -5882,13 +6482,23 @@
                   </a:tcPr>
                 </a:tc>
               </a:tr>
-              <a:tr h="725805">
-                <a:tc>
-                  <a:txBody>
-                    <a:bodyPr/>
-                    <a:lstStyle/>
-                    <a:p>
-                      <a:pPr algn="ctr"/>
+              <a:tr h="678484">
+                <a:tc>
+                  <a:txBody>
+                    <a:bodyPr/>
+                    <a:lstStyle/>
+                    <a:p>
+                      <a:pPr algn="ctr">
+                        <a:lnSpc>
+                          <a:spcPct val="100000"/>
+                        </a:lnSpc>
+                        <a:spcBef>
+                          <a:spcPts val="0"/>
+                        </a:spcBef>
+                        <a:spcAft>
+                          <a:spcPts val="0"/>
+                        </a:spcAft>
+                      </a:pPr>
                       <a:r>
                         <a:rPr sz="1100" b="0">
                           <a:solidFill>
@@ -5900,7 +6510,7 @@
                       </a:r>
                     </a:p>
                   </a:txBody>
-                  <a:tcPr anchor="ctr" marL="50800" marR="50800" marT="25400" marB="25400">
+                  <a:tcPr anchor="ctr" marL="38100" marR="38100" marT="25400" marB="25400">
                     <a:solidFill>
                       <a:srgbClr val="F8E7E8"/>
                     </a:solidFill>
@@ -5931,7 +6541,17 @@
                     <a:bodyPr/>
                     <a:lstStyle/>
                     <a:p>
-                      <a:pPr algn="l"/>
+                      <a:pPr algn="l">
+                        <a:lnSpc>
+                          <a:spcPct val="100000"/>
+                        </a:lnSpc>
+                        <a:spcBef>
+                          <a:spcPts val="0"/>
+                        </a:spcBef>
+                        <a:spcAft>
+                          <a:spcPts val="0"/>
+                        </a:spcAft>
+                      </a:pPr>
                       <a:r>
                         <a:rPr sz="1100" b="0">
                           <a:solidFill>
@@ -5943,7 +6563,7 @@
                       </a:r>
                     </a:p>
                   </a:txBody>
-                  <a:tcPr anchor="ctr" marL="50800" marR="50800" marT="25400" marB="25400">
+                  <a:tcPr anchor="ctr" marL="38100" marR="38100" marT="25400" marB="25400">
                     <a:solidFill>
                       <a:srgbClr val="F8E7E8"/>
                     </a:solidFill>
@@ -5974,7 +6594,17 @@
                     <a:bodyPr/>
                     <a:lstStyle/>
                     <a:p>
-                      <a:pPr algn="l"/>
+                      <a:pPr algn="l">
+                        <a:lnSpc>
+                          <a:spcPct val="100000"/>
+                        </a:lnSpc>
+                        <a:spcBef>
+                          <a:spcPts val="0"/>
+                        </a:spcBef>
+                        <a:spcAft>
+                          <a:spcPts val="0"/>
+                        </a:spcAft>
+                      </a:pPr>
                       <a:r>
                         <a:rPr sz="1100" b="0">
                           <a:solidFill>
@@ -5986,7 +6616,7 @@
                       </a:r>
                     </a:p>
                   </a:txBody>
-                  <a:tcPr anchor="ctr" marL="50800" marR="50800" marT="25400" marB="25400">
+                  <a:tcPr anchor="ctr" marL="38100" marR="38100" marT="25400" marB="25400">
                     <a:solidFill>
                       <a:srgbClr val="F8E7E8"/>
                     </a:solidFill>
@@ -6017,7 +6647,17 @@
                     <a:bodyPr/>
                     <a:lstStyle/>
                     <a:p>
-                      <a:pPr algn="l"/>
+                      <a:pPr algn="l">
+                        <a:lnSpc>
+                          <a:spcPct val="100000"/>
+                        </a:lnSpc>
+                        <a:spcBef>
+                          <a:spcPts val="0"/>
+                        </a:spcBef>
+                        <a:spcAft>
+                          <a:spcPts val="0"/>
+                        </a:spcAft>
+                      </a:pPr>
                       <a:r>
                         <a:rPr sz="1100" b="0">
                           <a:solidFill>
@@ -6029,7 +6669,7 @@
                       </a:r>
                     </a:p>
                   </a:txBody>
-                  <a:tcPr anchor="ctr" marL="50800" marR="50800" marT="25400" marB="25400">
+                  <a:tcPr anchor="ctr" marL="38100" marR="38100" marT="25400" marB="25400">
                     <a:solidFill>
                       <a:srgbClr val="F8E7E8"/>
                     </a:solidFill>
@@ -6060,7 +6700,17 @@
                     <a:bodyPr/>
                     <a:lstStyle/>
                     <a:p>
-                      <a:pPr algn="ctr"/>
+                      <a:pPr algn="r">
+                        <a:lnSpc>
+                          <a:spcPct val="100000"/>
+                        </a:lnSpc>
+                        <a:spcBef>
+                          <a:spcPts val="0"/>
+                        </a:spcBef>
+                        <a:spcAft>
+                          <a:spcPts val="0"/>
+                        </a:spcAft>
+                      </a:pPr>
                       <a:r>
                         <a:rPr sz="1100" b="0">
                           <a:solidFill>
@@ -6072,7 +6722,7 @@
                       </a:r>
                     </a:p>
                   </a:txBody>
-                  <a:tcPr anchor="ctr" marL="50800" marR="50800" marT="25400" marB="25400">
+                  <a:tcPr anchor="ctr" marL="38100" marR="38100" marT="25400" marB="25400">
                     <a:solidFill>
                       <a:srgbClr val="F8E7E8"/>
                     </a:solidFill>
@@ -6103,7 +6753,17 @@
                     <a:bodyPr/>
                     <a:lstStyle/>
                     <a:p>
-                      <a:pPr algn="l"/>
+                      <a:pPr algn="l">
+                        <a:lnSpc>
+                          <a:spcPct val="100000"/>
+                        </a:lnSpc>
+                        <a:spcBef>
+                          <a:spcPts val="0"/>
+                        </a:spcBef>
+                        <a:spcAft>
+                          <a:spcPts val="0"/>
+                        </a:spcAft>
+                      </a:pPr>
                       <a:r>
                         <a:rPr sz="1100" b="0">
                           <a:solidFill>
@@ -6115,7 +6775,7 @@
                       </a:r>
                     </a:p>
                   </a:txBody>
-                  <a:tcPr anchor="ctr" marL="50800" marR="50800" marT="25400" marB="25400">
+                  <a:tcPr anchor="ctr" marL="38100" marR="38100" marT="25400" marB="25400">
                     <a:solidFill>
                       <a:srgbClr val="F8E7E8"/>
                     </a:solidFill>
@@ -6142,13 +6802,23 @@
                   </a:tcPr>
                 </a:tc>
               </a:tr>
-              <a:tr h="725805">
-                <a:tc>
-                  <a:txBody>
-                    <a:bodyPr/>
-                    <a:lstStyle/>
-                    <a:p>
-                      <a:pPr algn="ctr"/>
+              <a:tr h="678484">
+                <a:tc>
+                  <a:txBody>
+                    <a:bodyPr/>
+                    <a:lstStyle/>
+                    <a:p>
+                      <a:pPr algn="ctr">
+                        <a:lnSpc>
+                          <a:spcPct val="100000"/>
+                        </a:lnSpc>
+                        <a:spcBef>
+                          <a:spcPts val="0"/>
+                        </a:spcBef>
+                        <a:spcAft>
+                          <a:spcPts val="0"/>
+                        </a:spcAft>
+                      </a:pPr>
                       <a:r>
                         <a:rPr sz="1100" b="0">
                           <a:solidFill>
@@ -6160,7 +6830,7 @@
                       </a:r>
                     </a:p>
                   </a:txBody>
-                  <a:tcPr anchor="ctr" marL="50800" marR="50800" marT="25400" marB="25400">
+                  <a:tcPr anchor="ctr" marL="38100" marR="38100" marT="25400" marB="25400">
                     <a:solidFill>
                       <a:srgbClr val="FFFFFF"/>
                     </a:solidFill>
@@ -6191,7 +6861,17 @@
                     <a:bodyPr/>
                     <a:lstStyle/>
                     <a:p>
-                      <a:pPr algn="l"/>
+                      <a:pPr algn="l">
+                        <a:lnSpc>
+                          <a:spcPct val="100000"/>
+                        </a:lnSpc>
+                        <a:spcBef>
+                          <a:spcPts val="0"/>
+                        </a:spcBef>
+                        <a:spcAft>
+                          <a:spcPts val="0"/>
+                        </a:spcAft>
+                      </a:pPr>
                       <a:r>
                         <a:rPr sz="1100" b="0">
                           <a:solidFill>
@@ -6203,7 +6883,7 @@
                       </a:r>
                     </a:p>
                   </a:txBody>
-                  <a:tcPr anchor="ctr" marL="50800" marR="50800" marT="25400" marB="25400">
+                  <a:tcPr anchor="ctr" marL="38100" marR="38100" marT="25400" marB="25400">
                     <a:solidFill>
                       <a:srgbClr val="FFFFFF"/>
                     </a:solidFill>
@@ -6234,7 +6914,17 @@
                     <a:bodyPr/>
                     <a:lstStyle/>
                     <a:p>
-                      <a:pPr algn="l"/>
+                      <a:pPr algn="l">
+                        <a:lnSpc>
+                          <a:spcPct val="100000"/>
+                        </a:lnSpc>
+                        <a:spcBef>
+                          <a:spcPts val="0"/>
+                        </a:spcBef>
+                        <a:spcAft>
+                          <a:spcPts val="0"/>
+                        </a:spcAft>
+                      </a:pPr>
                       <a:r>
                         <a:rPr sz="1100" b="0">
                           <a:solidFill>
@@ -6246,7 +6936,7 @@
                       </a:r>
                     </a:p>
                   </a:txBody>
-                  <a:tcPr anchor="ctr" marL="50800" marR="50800" marT="25400" marB="25400">
+                  <a:tcPr anchor="ctr" marL="38100" marR="38100" marT="25400" marB="25400">
                     <a:solidFill>
                       <a:srgbClr val="FFFFFF"/>
                     </a:solidFill>
@@ -6277,7 +6967,17 @@
                     <a:bodyPr/>
                     <a:lstStyle/>
                     <a:p>
-                      <a:pPr algn="l"/>
+                      <a:pPr algn="l">
+                        <a:lnSpc>
+                          <a:spcPct val="100000"/>
+                        </a:lnSpc>
+                        <a:spcBef>
+                          <a:spcPts val="0"/>
+                        </a:spcBef>
+                        <a:spcAft>
+                          <a:spcPts val="0"/>
+                        </a:spcAft>
+                      </a:pPr>
                       <a:r>
                         <a:rPr sz="1100" b="0">
                           <a:solidFill>
@@ -6289,7 +6989,7 @@
                       </a:r>
                     </a:p>
                   </a:txBody>
-                  <a:tcPr anchor="ctr" marL="50800" marR="50800" marT="25400" marB="25400">
+                  <a:tcPr anchor="ctr" marL="38100" marR="38100" marT="25400" marB="25400">
                     <a:solidFill>
                       <a:srgbClr val="FFFFFF"/>
                     </a:solidFill>
@@ -6320,7 +7020,17 @@
                     <a:bodyPr/>
                     <a:lstStyle/>
                     <a:p>
-                      <a:pPr algn="ctr"/>
+                      <a:pPr algn="r">
+                        <a:lnSpc>
+                          <a:spcPct val="100000"/>
+                        </a:lnSpc>
+                        <a:spcBef>
+                          <a:spcPts val="0"/>
+                        </a:spcBef>
+                        <a:spcAft>
+                          <a:spcPts val="0"/>
+                        </a:spcAft>
+                      </a:pPr>
                       <a:r>
                         <a:rPr sz="1100" b="0">
                           <a:solidFill>
@@ -6332,7 +7042,7 @@
                       </a:r>
                     </a:p>
                   </a:txBody>
-                  <a:tcPr anchor="ctr" marL="50800" marR="50800" marT="25400" marB="25400">
+                  <a:tcPr anchor="ctr" marL="38100" marR="38100" marT="25400" marB="25400">
                     <a:solidFill>
                       <a:srgbClr val="FFFFFF"/>
                     </a:solidFill>
@@ -6363,7 +7073,17 @@
                     <a:bodyPr/>
                     <a:lstStyle/>
                     <a:p>
-                      <a:pPr algn="l"/>
+                      <a:pPr algn="l">
+                        <a:lnSpc>
+                          <a:spcPct val="100000"/>
+                        </a:lnSpc>
+                        <a:spcBef>
+                          <a:spcPts val="0"/>
+                        </a:spcBef>
+                        <a:spcAft>
+                          <a:spcPts val="0"/>
+                        </a:spcAft>
+                      </a:pPr>
                       <a:r>
                         <a:rPr sz="1100" b="0">
                           <a:solidFill>
@@ -6375,7 +7095,7 @@
                       </a:r>
                     </a:p>
                   </a:txBody>
-                  <a:tcPr anchor="ctr" marL="50800" marR="50800" marT="25400" marB="25400">
+                  <a:tcPr anchor="ctr" marL="38100" marR="38100" marT="25400" marB="25400">
                     <a:solidFill>
                       <a:srgbClr val="FFFFFF"/>
                     </a:solidFill>
@@ -6402,13 +7122,23 @@
                   </a:tcPr>
                 </a:tc>
               </a:tr>
-              <a:tr h="725805">
-                <a:tc>
-                  <a:txBody>
-                    <a:bodyPr/>
-                    <a:lstStyle/>
-                    <a:p>
-                      <a:pPr algn="ctr"/>
+              <a:tr h="678484">
+                <a:tc>
+                  <a:txBody>
+                    <a:bodyPr/>
+                    <a:lstStyle/>
+                    <a:p>
+                      <a:pPr algn="ctr">
+                        <a:lnSpc>
+                          <a:spcPct val="100000"/>
+                        </a:lnSpc>
+                        <a:spcBef>
+                          <a:spcPts val="0"/>
+                        </a:spcBef>
+                        <a:spcAft>
+                          <a:spcPts val="0"/>
+                        </a:spcAft>
+                      </a:pPr>
                       <a:r>
                         <a:rPr sz="1100" b="0">
                           <a:solidFill>
@@ -6420,7 +7150,7 @@
                       </a:r>
                     </a:p>
                   </a:txBody>
-                  <a:tcPr anchor="ctr" marL="50800" marR="50800" marT="25400" marB="25400">
+                  <a:tcPr anchor="ctr" marL="38100" marR="38100" marT="25400" marB="25400">
                     <a:solidFill>
                       <a:srgbClr val="F8E7E8"/>
                     </a:solidFill>
@@ -6451,7 +7181,17 @@
                     <a:bodyPr/>
                     <a:lstStyle/>
                     <a:p>
-                      <a:pPr algn="l"/>
+                      <a:pPr algn="l">
+                        <a:lnSpc>
+                          <a:spcPct val="100000"/>
+                        </a:lnSpc>
+                        <a:spcBef>
+                          <a:spcPts val="0"/>
+                        </a:spcBef>
+                        <a:spcAft>
+                          <a:spcPts val="0"/>
+                        </a:spcAft>
+                      </a:pPr>
                       <a:r>
                         <a:rPr sz="1100" b="0">
                           <a:solidFill>
@@ -6463,7 +7203,7 @@
                       </a:r>
                     </a:p>
                   </a:txBody>
-                  <a:tcPr anchor="ctr" marL="50800" marR="50800" marT="25400" marB="25400">
+                  <a:tcPr anchor="ctr" marL="38100" marR="38100" marT="25400" marB="25400">
                     <a:solidFill>
                       <a:srgbClr val="F8E7E8"/>
                     </a:solidFill>
@@ -6494,7 +7234,17 @@
                     <a:bodyPr/>
                     <a:lstStyle/>
                     <a:p>
-                      <a:pPr algn="l"/>
+                      <a:pPr algn="l">
+                        <a:lnSpc>
+                          <a:spcPct val="100000"/>
+                        </a:lnSpc>
+                        <a:spcBef>
+                          <a:spcPts val="0"/>
+                        </a:spcBef>
+                        <a:spcAft>
+                          <a:spcPts val="0"/>
+                        </a:spcAft>
+                      </a:pPr>
                       <a:r>
                         <a:rPr sz="1100" b="0">
                           <a:solidFill>
@@ -6506,7 +7256,7 @@
                       </a:r>
                     </a:p>
                   </a:txBody>
-                  <a:tcPr anchor="ctr" marL="50800" marR="50800" marT="25400" marB="25400">
+                  <a:tcPr anchor="ctr" marL="38100" marR="38100" marT="25400" marB="25400">
                     <a:solidFill>
                       <a:srgbClr val="F8E7E8"/>
                     </a:solidFill>
@@ -6537,7 +7287,17 @@
                     <a:bodyPr/>
                     <a:lstStyle/>
                     <a:p>
-                      <a:pPr algn="l"/>
+                      <a:pPr algn="l">
+                        <a:lnSpc>
+                          <a:spcPct val="100000"/>
+                        </a:lnSpc>
+                        <a:spcBef>
+                          <a:spcPts val="0"/>
+                        </a:spcBef>
+                        <a:spcAft>
+                          <a:spcPts val="0"/>
+                        </a:spcAft>
+                      </a:pPr>
                       <a:r>
                         <a:rPr sz="1100" b="0">
                           <a:solidFill>
@@ -6549,7 +7309,7 @@
                       </a:r>
                     </a:p>
                   </a:txBody>
-                  <a:tcPr anchor="ctr" marL="50800" marR="50800" marT="25400" marB="25400">
+                  <a:tcPr anchor="ctr" marL="38100" marR="38100" marT="25400" marB="25400">
                     <a:solidFill>
                       <a:srgbClr val="F8E7E8"/>
                     </a:solidFill>
@@ -6580,7 +7340,17 @@
                     <a:bodyPr/>
                     <a:lstStyle/>
                     <a:p>
-                      <a:pPr algn="ctr"/>
+                      <a:pPr algn="r">
+                        <a:lnSpc>
+                          <a:spcPct val="100000"/>
+                        </a:lnSpc>
+                        <a:spcBef>
+                          <a:spcPts val="0"/>
+                        </a:spcBef>
+                        <a:spcAft>
+                          <a:spcPts val="0"/>
+                        </a:spcAft>
+                      </a:pPr>
                       <a:r>
                         <a:rPr sz="1100" b="0">
                           <a:solidFill>
@@ -6592,7 +7362,7 @@
                       </a:r>
                     </a:p>
                   </a:txBody>
-                  <a:tcPr anchor="ctr" marL="50800" marR="50800" marT="25400" marB="25400">
+                  <a:tcPr anchor="ctr" marL="38100" marR="38100" marT="25400" marB="25400">
                     <a:solidFill>
                       <a:srgbClr val="F8E7E8"/>
                     </a:solidFill>
@@ -6623,7 +7393,17 @@
                     <a:bodyPr/>
                     <a:lstStyle/>
                     <a:p>
-                      <a:pPr algn="l"/>
+                      <a:pPr algn="l">
+                        <a:lnSpc>
+                          <a:spcPct val="100000"/>
+                        </a:lnSpc>
+                        <a:spcBef>
+                          <a:spcPts val="0"/>
+                        </a:spcBef>
+                        <a:spcAft>
+                          <a:spcPts val="0"/>
+                        </a:spcAft>
+                      </a:pPr>
                       <a:r>
                         <a:rPr sz="1100" b="0">
                           <a:solidFill>
@@ -6635,7 +7415,7 @@
                       </a:r>
                     </a:p>
                   </a:txBody>
-                  <a:tcPr anchor="ctr" marL="50800" marR="50800" marT="25400" marB="25400">
+                  <a:tcPr anchor="ctr" marL="38100" marR="38100" marT="25400" marB="25400">
                     <a:solidFill>
                       <a:srgbClr val="F8E7E8"/>
                     </a:solidFill>
@@ -6662,13 +7442,23 @@
                   </a:tcPr>
                 </a:tc>
               </a:tr>
-              <a:tr h="725805">
-                <a:tc>
-                  <a:txBody>
-                    <a:bodyPr/>
-                    <a:lstStyle/>
-                    <a:p>
-                      <a:pPr algn="ctr"/>
+              <a:tr h="678484">
+                <a:tc>
+                  <a:txBody>
+                    <a:bodyPr/>
+                    <a:lstStyle/>
+                    <a:p>
+                      <a:pPr algn="ctr">
+                        <a:lnSpc>
+                          <a:spcPct val="100000"/>
+                        </a:lnSpc>
+                        <a:spcBef>
+                          <a:spcPts val="0"/>
+                        </a:spcBef>
+                        <a:spcAft>
+                          <a:spcPts val="0"/>
+                        </a:spcAft>
+                      </a:pPr>
                       <a:r>
                         <a:rPr sz="1100" b="0">
                           <a:solidFill>
@@ -6680,7 +7470,7 @@
                       </a:r>
                     </a:p>
                   </a:txBody>
-                  <a:tcPr anchor="ctr" marL="50800" marR="50800" marT="25400" marB="25400">
+                  <a:tcPr anchor="ctr" marL="38100" marR="38100" marT="25400" marB="25400">
                     <a:solidFill>
                       <a:srgbClr val="FFFFFF"/>
                     </a:solidFill>
@@ -6711,7 +7501,17 @@
                     <a:bodyPr/>
                     <a:lstStyle/>
                     <a:p>
-                      <a:pPr algn="l"/>
+                      <a:pPr algn="l">
+                        <a:lnSpc>
+                          <a:spcPct val="100000"/>
+                        </a:lnSpc>
+                        <a:spcBef>
+                          <a:spcPts val="0"/>
+                        </a:spcBef>
+                        <a:spcAft>
+                          <a:spcPts val="0"/>
+                        </a:spcAft>
+                      </a:pPr>
                       <a:r>
                         <a:rPr sz="1100" b="0">
                           <a:solidFill>
@@ -6723,7 +7523,7 @@
                       </a:r>
                     </a:p>
                   </a:txBody>
-                  <a:tcPr anchor="ctr" marL="50800" marR="50800" marT="25400" marB="25400">
+                  <a:tcPr anchor="ctr" marL="38100" marR="38100" marT="25400" marB="25400">
                     <a:solidFill>
                       <a:srgbClr val="FFFFFF"/>
                     </a:solidFill>
@@ -6754,7 +7554,17 @@
                     <a:bodyPr/>
                     <a:lstStyle/>
                     <a:p>
-                      <a:pPr algn="l"/>
+                      <a:pPr algn="l">
+                        <a:lnSpc>
+                          <a:spcPct val="100000"/>
+                        </a:lnSpc>
+                        <a:spcBef>
+                          <a:spcPts val="0"/>
+                        </a:spcBef>
+                        <a:spcAft>
+                          <a:spcPts val="0"/>
+                        </a:spcAft>
+                      </a:pPr>
                       <a:r>
                         <a:rPr sz="1100" b="0">
                           <a:solidFill>
@@ -6766,7 +7576,7 @@
                       </a:r>
                     </a:p>
                   </a:txBody>
-                  <a:tcPr anchor="ctr" marL="50800" marR="50800" marT="25400" marB="25400">
+                  <a:tcPr anchor="ctr" marL="38100" marR="38100" marT="25400" marB="25400">
                     <a:solidFill>
                       <a:srgbClr val="FFFFFF"/>
                     </a:solidFill>
@@ -6797,7 +7607,17 @@
                     <a:bodyPr/>
                     <a:lstStyle/>
                     <a:p>
-                      <a:pPr algn="l"/>
+                      <a:pPr algn="l">
+                        <a:lnSpc>
+                          <a:spcPct val="100000"/>
+                        </a:lnSpc>
+                        <a:spcBef>
+                          <a:spcPts val="0"/>
+                        </a:spcBef>
+                        <a:spcAft>
+                          <a:spcPts val="0"/>
+                        </a:spcAft>
+                      </a:pPr>
                       <a:r>
                         <a:rPr sz="1100" b="0">
                           <a:solidFill>
@@ -6809,7 +7629,7 @@
                       </a:r>
                     </a:p>
                   </a:txBody>
-                  <a:tcPr anchor="ctr" marL="50800" marR="50800" marT="25400" marB="25400">
+                  <a:tcPr anchor="ctr" marL="38100" marR="38100" marT="25400" marB="25400">
                     <a:solidFill>
                       <a:srgbClr val="FFFFFF"/>
                     </a:solidFill>
@@ -6840,7 +7660,17 @@
                     <a:bodyPr/>
                     <a:lstStyle/>
                     <a:p>
-                      <a:pPr algn="ctr"/>
+                      <a:pPr algn="r">
+                        <a:lnSpc>
+                          <a:spcPct val="100000"/>
+                        </a:lnSpc>
+                        <a:spcBef>
+                          <a:spcPts val="0"/>
+                        </a:spcBef>
+                        <a:spcAft>
+                          <a:spcPts val="0"/>
+                        </a:spcAft>
+                      </a:pPr>
                       <a:r>
                         <a:rPr sz="1100" b="0">
                           <a:solidFill>
@@ -6852,7 +7682,7 @@
                       </a:r>
                     </a:p>
                   </a:txBody>
-                  <a:tcPr anchor="ctr" marL="50800" marR="50800" marT="25400" marB="25400">
+                  <a:tcPr anchor="ctr" marL="38100" marR="38100" marT="25400" marB="25400">
                     <a:solidFill>
                       <a:srgbClr val="FFFFFF"/>
                     </a:solidFill>
@@ -6883,7 +7713,17 @@
                     <a:bodyPr/>
                     <a:lstStyle/>
                     <a:p>
-                      <a:pPr algn="l"/>
+                      <a:pPr algn="l">
+                        <a:lnSpc>
+                          <a:spcPct val="100000"/>
+                        </a:lnSpc>
+                        <a:spcBef>
+                          <a:spcPts val="0"/>
+                        </a:spcBef>
+                        <a:spcAft>
+                          <a:spcPts val="0"/>
+                        </a:spcAft>
+                      </a:pPr>
                       <a:r>
                         <a:rPr sz="1100" b="0">
                           <a:solidFill>
@@ -6895,7 +7735,7 @@
                       </a:r>
                     </a:p>
                   </a:txBody>
-                  <a:tcPr anchor="ctr" marL="50800" marR="50800" marT="25400" marB="25400">
+                  <a:tcPr anchor="ctr" marL="38100" marR="38100" marT="25400" marB="25400">
                     <a:solidFill>
                       <a:srgbClr val="FFFFFF"/>
                     </a:solidFill>
@@ -6922,13 +7762,23 @@
                   </a:tcPr>
                 </a:tc>
               </a:tr>
-              <a:tr h="725805">
-                <a:tc>
-                  <a:txBody>
-                    <a:bodyPr/>
-                    <a:lstStyle/>
-                    <a:p>
-                      <a:pPr algn="ctr"/>
+              <a:tr h="678484">
+                <a:tc>
+                  <a:txBody>
+                    <a:bodyPr/>
+                    <a:lstStyle/>
+                    <a:p>
+                      <a:pPr algn="ctr">
+                        <a:lnSpc>
+                          <a:spcPct val="100000"/>
+                        </a:lnSpc>
+                        <a:spcBef>
+                          <a:spcPts val="0"/>
+                        </a:spcBef>
+                        <a:spcAft>
+                          <a:spcPts val="0"/>
+                        </a:spcAft>
+                      </a:pPr>
                       <a:r>
                         <a:rPr sz="1100" b="0">
                           <a:solidFill>
@@ -6940,7 +7790,7 @@
                       </a:r>
                     </a:p>
                   </a:txBody>
-                  <a:tcPr anchor="ctr" marL="50800" marR="50800" marT="25400" marB="25400">
+                  <a:tcPr anchor="ctr" marL="38100" marR="38100" marT="25400" marB="25400">
                     <a:solidFill>
                       <a:srgbClr val="F8E7E8"/>
                     </a:solidFill>
@@ -6971,7 +7821,17 @@
                     <a:bodyPr/>
                     <a:lstStyle/>
                     <a:p>
-                      <a:pPr algn="l"/>
+                      <a:pPr algn="l">
+                        <a:lnSpc>
+                          <a:spcPct val="100000"/>
+                        </a:lnSpc>
+                        <a:spcBef>
+                          <a:spcPts val="0"/>
+                        </a:spcBef>
+                        <a:spcAft>
+                          <a:spcPts val="0"/>
+                        </a:spcAft>
+                      </a:pPr>
                       <a:r>
                         <a:rPr sz="1100" b="0">
                           <a:solidFill>
@@ -6983,7 +7843,7 @@
                       </a:r>
                     </a:p>
                   </a:txBody>
-                  <a:tcPr anchor="ctr" marL="50800" marR="50800" marT="25400" marB="25400">
+                  <a:tcPr anchor="ctr" marL="38100" marR="38100" marT="25400" marB="25400">
                     <a:solidFill>
                       <a:srgbClr val="F8E7E8"/>
                     </a:solidFill>
@@ -7014,7 +7874,17 @@
                     <a:bodyPr/>
                     <a:lstStyle/>
                     <a:p>
-                      <a:pPr algn="l"/>
+                      <a:pPr algn="l">
+                        <a:lnSpc>
+                          <a:spcPct val="100000"/>
+                        </a:lnSpc>
+                        <a:spcBef>
+                          <a:spcPts val="0"/>
+                        </a:spcBef>
+                        <a:spcAft>
+                          <a:spcPts val="0"/>
+                        </a:spcAft>
+                      </a:pPr>
                       <a:r>
                         <a:rPr sz="1100" b="0">
                           <a:solidFill>
@@ -7026,7 +7896,7 @@
                       </a:r>
                     </a:p>
                   </a:txBody>
-                  <a:tcPr anchor="ctr" marL="50800" marR="50800" marT="25400" marB="25400">
+                  <a:tcPr anchor="ctr" marL="38100" marR="38100" marT="25400" marB="25400">
                     <a:solidFill>
                       <a:srgbClr val="F8E7E8"/>
                     </a:solidFill>
@@ -7057,7 +7927,17 @@
                     <a:bodyPr/>
                     <a:lstStyle/>
                     <a:p>
-                      <a:pPr algn="l"/>
+                      <a:pPr algn="l">
+                        <a:lnSpc>
+                          <a:spcPct val="100000"/>
+                        </a:lnSpc>
+                        <a:spcBef>
+                          <a:spcPts val="0"/>
+                        </a:spcBef>
+                        <a:spcAft>
+                          <a:spcPts val="0"/>
+                        </a:spcAft>
+                      </a:pPr>
                       <a:r>
                         <a:rPr sz="1100" b="0">
                           <a:solidFill>
@@ -7069,7 +7949,7 @@
                       </a:r>
                     </a:p>
                   </a:txBody>
-                  <a:tcPr anchor="ctr" marL="50800" marR="50800" marT="25400" marB="25400">
+                  <a:tcPr anchor="ctr" marL="38100" marR="38100" marT="25400" marB="25400">
                     <a:solidFill>
                       <a:srgbClr val="F8E7E8"/>
                     </a:solidFill>
@@ -7100,7 +7980,17 @@
                     <a:bodyPr/>
                     <a:lstStyle/>
                     <a:p>
-                      <a:pPr algn="ctr"/>
+                      <a:pPr algn="r">
+                        <a:lnSpc>
+                          <a:spcPct val="100000"/>
+                        </a:lnSpc>
+                        <a:spcBef>
+                          <a:spcPts val="0"/>
+                        </a:spcBef>
+                        <a:spcAft>
+                          <a:spcPts val="0"/>
+                        </a:spcAft>
+                      </a:pPr>
                       <a:r>
                         <a:rPr sz="1100" b="0">
                           <a:solidFill>
@@ -7112,7 +8002,7 @@
                       </a:r>
                     </a:p>
                   </a:txBody>
-                  <a:tcPr anchor="ctr" marL="50800" marR="50800" marT="25400" marB="25400">
+                  <a:tcPr anchor="ctr" marL="38100" marR="38100" marT="25400" marB="25400">
                     <a:solidFill>
                       <a:srgbClr val="F8E7E8"/>
                     </a:solidFill>
@@ -7143,7 +8033,17 @@
                     <a:bodyPr/>
                     <a:lstStyle/>
                     <a:p>
-                      <a:pPr algn="l"/>
+                      <a:pPr algn="l">
+                        <a:lnSpc>
+                          <a:spcPct val="100000"/>
+                        </a:lnSpc>
+                        <a:spcBef>
+                          <a:spcPts val="0"/>
+                        </a:spcBef>
+                        <a:spcAft>
+                          <a:spcPts val="0"/>
+                        </a:spcAft>
+                      </a:pPr>
                       <a:r>
                         <a:rPr sz="1100" b="0">
                           <a:solidFill>
@@ -7155,7 +8055,7 @@
                       </a:r>
                     </a:p>
                   </a:txBody>
-                  <a:tcPr anchor="ctr" marL="50800" marR="50800" marT="25400" marB="25400">
+                  <a:tcPr anchor="ctr" marL="38100" marR="38100" marT="25400" marB="25400">
                     <a:solidFill>
                       <a:srgbClr val="F8E7E8"/>
                     </a:solidFill>
@@ -7182,13 +8082,23 @@
                   </a:tcPr>
                 </a:tc>
               </a:tr>
-              <a:tr h="725805">
-                <a:tc>
-                  <a:txBody>
-                    <a:bodyPr/>
-                    <a:lstStyle/>
-                    <a:p>
-                      <a:pPr algn="ctr"/>
+              <a:tr h="678484">
+                <a:tc>
+                  <a:txBody>
+                    <a:bodyPr/>
+                    <a:lstStyle/>
+                    <a:p>
+                      <a:pPr algn="ctr">
+                        <a:lnSpc>
+                          <a:spcPct val="100000"/>
+                        </a:lnSpc>
+                        <a:spcBef>
+                          <a:spcPts val="0"/>
+                        </a:spcBef>
+                        <a:spcAft>
+                          <a:spcPts val="0"/>
+                        </a:spcAft>
+                      </a:pPr>
                       <a:r>
                         <a:rPr sz="1100" b="0">
                           <a:solidFill>
@@ -7200,7 +8110,7 @@
                       </a:r>
                     </a:p>
                   </a:txBody>
-                  <a:tcPr anchor="ctr" marL="50800" marR="50800" marT="25400" marB="25400">
+                  <a:tcPr anchor="ctr" marL="38100" marR="38100" marT="25400" marB="25400">
                     <a:solidFill>
                       <a:srgbClr val="FFFFFF"/>
                     </a:solidFill>
@@ -7231,7 +8141,17 @@
                     <a:bodyPr/>
                     <a:lstStyle/>
                     <a:p>
-                      <a:pPr algn="l"/>
+                      <a:pPr algn="l">
+                        <a:lnSpc>
+                          <a:spcPct val="100000"/>
+                        </a:lnSpc>
+                        <a:spcBef>
+                          <a:spcPts val="0"/>
+                        </a:spcBef>
+                        <a:spcAft>
+                          <a:spcPts val="0"/>
+                        </a:spcAft>
+                      </a:pPr>
                       <a:r>
                         <a:rPr sz="1100" b="0">
                           <a:solidFill>
@@ -7243,7 +8163,7 @@
                       </a:r>
                     </a:p>
                   </a:txBody>
-                  <a:tcPr anchor="ctr" marL="50800" marR="50800" marT="25400" marB="25400">
+                  <a:tcPr anchor="ctr" marL="38100" marR="38100" marT="25400" marB="25400">
                     <a:solidFill>
                       <a:srgbClr val="FFFFFF"/>
                     </a:solidFill>
@@ -7274,7 +8194,17 @@
                     <a:bodyPr/>
                     <a:lstStyle/>
                     <a:p>
-                      <a:pPr algn="l"/>
+                      <a:pPr algn="l">
+                        <a:lnSpc>
+                          <a:spcPct val="100000"/>
+                        </a:lnSpc>
+                        <a:spcBef>
+                          <a:spcPts val="0"/>
+                        </a:spcBef>
+                        <a:spcAft>
+                          <a:spcPts val="0"/>
+                        </a:spcAft>
+                      </a:pPr>
                       <a:r>
                         <a:rPr sz="1100" b="0">
                           <a:solidFill>
@@ -7286,7 +8216,7 @@
                       </a:r>
                     </a:p>
                   </a:txBody>
-                  <a:tcPr anchor="ctr" marL="50800" marR="50800" marT="25400" marB="25400">
+                  <a:tcPr anchor="ctr" marL="38100" marR="38100" marT="25400" marB="25400">
                     <a:solidFill>
                       <a:srgbClr val="FFFFFF"/>
                     </a:solidFill>
@@ -7317,7 +8247,17 @@
                     <a:bodyPr/>
                     <a:lstStyle/>
                     <a:p>
-                      <a:pPr algn="l"/>
+                      <a:pPr algn="l">
+                        <a:lnSpc>
+                          <a:spcPct val="100000"/>
+                        </a:lnSpc>
+                        <a:spcBef>
+                          <a:spcPts val="0"/>
+                        </a:spcBef>
+                        <a:spcAft>
+                          <a:spcPts val="0"/>
+                        </a:spcAft>
+                      </a:pPr>
                       <a:r>
                         <a:rPr sz="1100" b="0">
                           <a:solidFill>
@@ -7329,7 +8269,7 @@
                       </a:r>
                     </a:p>
                   </a:txBody>
-                  <a:tcPr anchor="ctr" marL="50800" marR="50800" marT="25400" marB="25400">
+                  <a:tcPr anchor="ctr" marL="38100" marR="38100" marT="25400" marB="25400">
                     <a:solidFill>
                       <a:srgbClr val="FFFFFF"/>
                     </a:solidFill>
@@ -7360,7 +8300,17 @@
                     <a:bodyPr/>
                     <a:lstStyle/>
                     <a:p>
-                      <a:pPr algn="ctr"/>
+                      <a:pPr algn="r">
+                        <a:lnSpc>
+                          <a:spcPct val="100000"/>
+                        </a:lnSpc>
+                        <a:spcBef>
+                          <a:spcPts val="0"/>
+                        </a:spcBef>
+                        <a:spcAft>
+                          <a:spcPts val="0"/>
+                        </a:spcAft>
+                      </a:pPr>
                       <a:r>
                         <a:rPr sz="1100" b="0">
                           <a:solidFill>
@@ -7372,7 +8322,7 @@
                       </a:r>
                     </a:p>
                   </a:txBody>
-                  <a:tcPr anchor="ctr" marL="50800" marR="50800" marT="25400" marB="25400">
+                  <a:tcPr anchor="ctr" marL="38100" marR="38100" marT="25400" marB="25400">
                     <a:solidFill>
                       <a:srgbClr val="FFFFFF"/>
                     </a:solidFill>
@@ -7403,7 +8353,17 @@
                     <a:bodyPr/>
                     <a:lstStyle/>
                     <a:p>
-                      <a:pPr algn="l"/>
+                      <a:pPr algn="l">
+                        <a:lnSpc>
+                          <a:spcPct val="100000"/>
+                        </a:lnSpc>
+                        <a:spcBef>
+                          <a:spcPts val="0"/>
+                        </a:spcBef>
+                        <a:spcAft>
+                          <a:spcPts val="0"/>
+                        </a:spcAft>
+                      </a:pPr>
                       <a:r>
                         <a:rPr sz="1100" b="0">
                           <a:solidFill>
@@ -7415,7 +8375,7 @@
                       </a:r>
                     </a:p>
                   </a:txBody>
-                  <a:tcPr anchor="ctr" marL="50800" marR="50800" marT="25400" marB="25400">
+                  <a:tcPr anchor="ctr" marL="38100" marR="38100" marT="25400" marB="25400">
                     <a:solidFill>
                       <a:srgbClr val="FFFFFF"/>
                     </a:solidFill>
@@ -7480,8 +8440,8 @@
         </p:blipFill>
         <p:spPr>
           <a:xfrm>
-            <a:off x="9646920" y="73152"/>
-            <a:ext cx="2148840" cy="792454"/>
+            <a:off x="9377172" y="102412"/>
+            <a:ext cx="2423160" cy="893618"/>
           </a:xfrm>
           <a:prstGeom prst="rect">
             <a:avLst/>
@@ -7496,8 +8456,8 @@
         </p:nvSpPr>
         <p:spPr>
           <a:xfrm>
-            <a:off x="320040" y="109728"/>
-            <a:ext cx="8686800" cy="502920"/>
+            <a:off x="561441" y="330098"/>
+            <a:ext cx="7772400" cy="411480"/>
           </a:xfrm>
           <a:prstGeom prst="rect">
             <a:avLst/>
@@ -7532,8 +8492,8 @@
           <p:nvPr/>
         </p:nvGraphicFramePr>
         <p:xfrm>
-          <a:off x="320040" y="685800"/>
-          <a:ext cx="10469880" cy="5806440"/>
+          <a:off x="533095" y="1030528"/>
+          <a:ext cx="11415367" cy="5488223"/>
         </p:xfrm>
         <a:graphic>
           <a:graphicData uri="http://schemas.openxmlformats.org/drawingml/2006/table">
@@ -7542,20 +8502,30 @@
                 <a:tableStyleId>{5C22544A-7EE6-4342-B048-85BDC9FD1C3A}</a:tableStyleId>
               </a:tblPr>
               <a:tblGrid>
-                <a:gridCol w="411480"/>
-                <a:gridCol w="777240"/>
-                <a:gridCol w="3429000"/>
-                <a:gridCol w="3246120"/>
-                <a:gridCol w="1097280"/>
-                <a:gridCol w="1508760"/>
+                <a:gridCol w="480974"/>
+                <a:gridCol w="863193"/>
+                <a:gridCol w="3704234"/>
+                <a:gridCol w="3461004"/>
+                <a:gridCol w="1194206"/>
+                <a:gridCol w="1711756"/>
               </a:tblGrid>
-              <a:tr h="725805">
-                <a:tc>
-                  <a:txBody>
-                    <a:bodyPr/>
-                    <a:lstStyle/>
-                    <a:p>
-                      <a:pPr algn="ctr"/>
+              <a:tr h="738835">
+                <a:tc>
+                  <a:txBody>
+                    <a:bodyPr/>
+                    <a:lstStyle/>
+                    <a:p>
+                      <a:pPr algn="ctr">
+                        <a:lnSpc>
+                          <a:spcPct val="100000"/>
+                        </a:lnSpc>
+                        <a:spcBef>
+                          <a:spcPts val="0"/>
+                        </a:spcBef>
+                        <a:spcAft>
+                          <a:spcPts val="0"/>
+                        </a:spcAft>
+                      </a:pPr>
                       <a:r>
                         <a:rPr sz="1200" b="1">
                           <a:solidFill>
@@ -7567,7 +8537,7 @@
                       </a:r>
                     </a:p>
                   </a:txBody>
-                  <a:tcPr anchor="ctr" marL="50800" marR="50800" marT="25400" marB="25400">
+                  <a:tcPr anchor="ctr" marL="38100" marR="38100" marT="25400" marB="25400">
                     <a:solidFill>
                       <a:srgbClr val="AF182E"/>
                     </a:solidFill>
@@ -7598,7 +8568,17 @@
                     <a:bodyPr/>
                     <a:lstStyle/>
                     <a:p>
-                      <a:pPr algn="ctr"/>
+                      <a:pPr algn="ctr">
+                        <a:lnSpc>
+                          <a:spcPct val="100000"/>
+                        </a:lnSpc>
+                        <a:spcBef>
+                          <a:spcPts val="0"/>
+                        </a:spcBef>
+                        <a:spcAft>
+                          <a:spcPts val="0"/>
+                        </a:spcAft>
+                      </a:pPr>
                       <a:r>
                         <a:rPr sz="1200" b="1">
                           <a:solidFill>
@@ -7610,7 +8590,7 @@
                       </a:r>
                     </a:p>
                   </a:txBody>
-                  <a:tcPr anchor="ctr" marL="50800" marR="50800" marT="25400" marB="25400">
+                  <a:tcPr anchor="ctr" marL="38100" marR="38100" marT="25400" marB="25400">
                     <a:solidFill>
                       <a:srgbClr val="AF182E"/>
                     </a:solidFill>
@@ -7641,7 +8621,17 @@
                     <a:bodyPr/>
                     <a:lstStyle/>
                     <a:p>
-                      <a:pPr algn="ctr"/>
+                      <a:pPr algn="ctr">
+                        <a:lnSpc>
+                          <a:spcPct val="100000"/>
+                        </a:lnSpc>
+                        <a:spcBef>
+                          <a:spcPts val="0"/>
+                        </a:spcBef>
+                        <a:spcAft>
+                          <a:spcPts val="0"/>
+                        </a:spcAft>
+                      </a:pPr>
                       <a:r>
                         <a:rPr sz="1200" b="1">
                           <a:solidFill>
@@ -7653,7 +8643,7 @@
                       </a:r>
                     </a:p>
                   </a:txBody>
-                  <a:tcPr anchor="ctr" marL="50800" marR="50800" marT="25400" marB="25400">
+                  <a:tcPr anchor="ctr" marL="38100" marR="38100" marT="25400" marB="25400">
                     <a:solidFill>
                       <a:srgbClr val="AF182E"/>
                     </a:solidFill>
@@ -7684,7 +8674,17 @@
                     <a:bodyPr/>
                     <a:lstStyle/>
                     <a:p>
-                      <a:pPr algn="ctr"/>
+                      <a:pPr algn="ctr">
+                        <a:lnSpc>
+                          <a:spcPct val="100000"/>
+                        </a:lnSpc>
+                        <a:spcBef>
+                          <a:spcPts val="0"/>
+                        </a:spcBef>
+                        <a:spcAft>
+                          <a:spcPts val="0"/>
+                        </a:spcAft>
+                      </a:pPr>
                       <a:r>
                         <a:rPr sz="1200" b="1">
                           <a:solidFill>
@@ -7696,7 +8696,7 @@
                       </a:r>
                     </a:p>
                   </a:txBody>
-                  <a:tcPr anchor="ctr" marL="50800" marR="50800" marT="25400" marB="25400">
+                  <a:tcPr anchor="ctr" marL="38100" marR="38100" marT="25400" marB="25400">
                     <a:solidFill>
                       <a:srgbClr val="AF182E"/>
                     </a:solidFill>
@@ -7727,7 +8727,17 @@
                     <a:bodyPr/>
                     <a:lstStyle/>
                     <a:p>
-                      <a:pPr algn="ctr"/>
+                      <a:pPr algn="ctr">
+                        <a:lnSpc>
+                          <a:spcPct val="100000"/>
+                        </a:lnSpc>
+                        <a:spcBef>
+                          <a:spcPts val="0"/>
+                        </a:spcBef>
+                        <a:spcAft>
+                          <a:spcPts val="0"/>
+                        </a:spcAft>
+                      </a:pPr>
                       <a:r>
                         <a:rPr sz="1200" b="1">
                           <a:solidFill>
@@ -7742,7 +8752,7 @@
                       </a:r>
                     </a:p>
                   </a:txBody>
-                  <a:tcPr anchor="ctr" marL="50800" marR="50800" marT="25400" marB="25400">
+                  <a:tcPr anchor="ctr" marL="38100" marR="38100" marT="25400" marB="25400">
                     <a:solidFill>
                       <a:srgbClr val="AF182E"/>
                     </a:solidFill>
@@ -7773,7 +8783,17 @@
                     <a:bodyPr/>
                     <a:lstStyle/>
                     <a:p>
-                      <a:pPr algn="ctr"/>
+                      <a:pPr algn="ctr">
+                        <a:lnSpc>
+                          <a:spcPct val="100000"/>
+                        </a:lnSpc>
+                        <a:spcBef>
+                          <a:spcPts val="0"/>
+                        </a:spcBef>
+                        <a:spcAft>
+                          <a:spcPts val="0"/>
+                        </a:spcAft>
+                      </a:pPr>
                       <a:r>
                         <a:rPr sz="1200" b="1">
                           <a:solidFill>
@@ -7785,7 +8805,7 @@
                       </a:r>
                     </a:p>
                   </a:txBody>
-                  <a:tcPr anchor="ctr" marL="50800" marR="50800" marT="25400" marB="25400">
+                  <a:tcPr anchor="ctr" marL="38100" marR="38100" marT="25400" marB="25400">
                     <a:solidFill>
                       <a:srgbClr val="AF182E"/>
                     </a:solidFill>
@@ -7812,13 +8832,23 @@
                   </a:tcPr>
                 </a:tc>
               </a:tr>
-              <a:tr h="725805">
-                <a:tc>
-                  <a:txBody>
-                    <a:bodyPr/>
-                    <a:lstStyle/>
-                    <a:p>
-                      <a:pPr algn="ctr"/>
+              <a:tr h="678484">
+                <a:tc>
+                  <a:txBody>
+                    <a:bodyPr/>
+                    <a:lstStyle/>
+                    <a:p>
+                      <a:pPr algn="ctr">
+                        <a:lnSpc>
+                          <a:spcPct val="100000"/>
+                        </a:lnSpc>
+                        <a:spcBef>
+                          <a:spcPts val="0"/>
+                        </a:spcBef>
+                        <a:spcAft>
+                          <a:spcPts val="0"/>
+                        </a:spcAft>
+                      </a:pPr>
                       <a:r>
                         <a:rPr sz="1100" b="0">
                           <a:solidFill>
@@ -7830,7 +8860,7 @@
                       </a:r>
                     </a:p>
                   </a:txBody>
-                  <a:tcPr anchor="ctr" marL="50800" marR="50800" marT="25400" marB="25400">
+                  <a:tcPr anchor="ctr" marL="38100" marR="38100" marT="25400" marB="25400">
                     <a:solidFill>
                       <a:srgbClr val="FFFFFF"/>
                     </a:solidFill>
@@ -7861,7 +8891,17 @@
                     <a:bodyPr/>
                     <a:lstStyle/>
                     <a:p>
-                      <a:pPr algn="l"/>
+                      <a:pPr algn="l">
+                        <a:lnSpc>
+                          <a:spcPct val="100000"/>
+                        </a:lnSpc>
+                        <a:spcBef>
+                          <a:spcPts val="0"/>
+                        </a:spcBef>
+                        <a:spcAft>
+                          <a:spcPts val="0"/>
+                        </a:spcAft>
+                      </a:pPr>
                       <a:r>
                         <a:rPr sz="1100" b="0">
                           <a:solidFill>
@@ -7873,7 +8913,7 @@
                       </a:r>
                     </a:p>
                   </a:txBody>
-                  <a:tcPr anchor="ctr" marL="50800" marR="50800" marT="25400" marB="25400">
+                  <a:tcPr anchor="ctr" marL="38100" marR="38100" marT="25400" marB="25400">
                     <a:solidFill>
                       <a:srgbClr val="FFFFFF"/>
                     </a:solidFill>
@@ -7904,7 +8944,17 @@
                     <a:bodyPr/>
                     <a:lstStyle/>
                     <a:p>
-                      <a:pPr algn="l"/>
+                      <a:pPr algn="l">
+                        <a:lnSpc>
+                          <a:spcPct val="100000"/>
+                        </a:lnSpc>
+                        <a:spcBef>
+                          <a:spcPts val="0"/>
+                        </a:spcBef>
+                        <a:spcAft>
+                          <a:spcPts val="0"/>
+                        </a:spcAft>
+                      </a:pPr>
                       <a:r>
                         <a:rPr sz="1100" b="0">
                           <a:solidFill>
@@ -7916,7 +8966,7 @@
                       </a:r>
                     </a:p>
                   </a:txBody>
-                  <a:tcPr anchor="ctr" marL="50800" marR="50800" marT="25400" marB="25400">
+                  <a:tcPr anchor="ctr" marL="38100" marR="38100" marT="25400" marB="25400">
                     <a:solidFill>
                       <a:srgbClr val="FFFFFF"/>
                     </a:solidFill>
@@ -7947,7 +8997,17 @@
                     <a:bodyPr/>
                     <a:lstStyle/>
                     <a:p>
-                      <a:pPr algn="l"/>
+                      <a:pPr algn="l">
+                        <a:lnSpc>
+                          <a:spcPct val="100000"/>
+                        </a:lnSpc>
+                        <a:spcBef>
+                          <a:spcPts val="0"/>
+                        </a:spcBef>
+                        <a:spcAft>
+                          <a:spcPts val="0"/>
+                        </a:spcAft>
+                      </a:pPr>
                       <a:r>
                         <a:rPr sz="1100" b="0">
                           <a:solidFill>
@@ -7959,7 +9019,7 @@
                       </a:r>
                     </a:p>
                   </a:txBody>
-                  <a:tcPr anchor="ctr" marL="50800" marR="50800" marT="25400" marB="25400">
+                  <a:tcPr anchor="ctr" marL="38100" marR="38100" marT="25400" marB="25400">
                     <a:solidFill>
                       <a:srgbClr val="FFFFFF"/>
                     </a:solidFill>
@@ -7990,7 +9050,17 @@
                     <a:bodyPr/>
                     <a:lstStyle/>
                     <a:p>
-                      <a:pPr algn="ctr"/>
+                      <a:pPr algn="r">
+                        <a:lnSpc>
+                          <a:spcPct val="100000"/>
+                        </a:lnSpc>
+                        <a:spcBef>
+                          <a:spcPts val="0"/>
+                        </a:spcBef>
+                        <a:spcAft>
+                          <a:spcPts val="0"/>
+                        </a:spcAft>
+                      </a:pPr>
                       <a:r>
                         <a:rPr sz="1100" b="0">
                           <a:solidFill>
@@ -8002,7 +9072,7 @@
                       </a:r>
                     </a:p>
                   </a:txBody>
-                  <a:tcPr anchor="ctr" marL="50800" marR="50800" marT="25400" marB="25400">
+                  <a:tcPr anchor="ctr" marL="38100" marR="38100" marT="25400" marB="25400">
                     <a:solidFill>
                       <a:srgbClr val="FFFFFF"/>
                     </a:solidFill>
@@ -8033,7 +9103,17 @@
                     <a:bodyPr/>
                     <a:lstStyle/>
                     <a:p>
-                      <a:pPr algn="l"/>
+                      <a:pPr algn="l">
+                        <a:lnSpc>
+                          <a:spcPct val="100000"/>
+                        </a:lnSpc>
+                        <a:spcBef>
+                          <a:spcPts val="0"/>
+                        </a:spcBef>
+                        <a:spcAft>
+                          <a:spcPts val="0"/>
+                        </a:spcAft>
+                      </a:pPr>
                       <a:r>
                         <a:rPr sz="1100" b="0">
                           <a:solidFill>
@@ -8045,7 +9125,7 @@
                       </a:r>
                     </a:p>
                   </a:txBody>
-                  <a:tcPr anchor="ctr" marL="50800" marR="50800" marT="25400" marB="25400">
+                  <a:tcPr anchor="ctr" marL="38100" marR="38100" marT="25400" marB="25400">
                     <a:solidFill>
                       <a:srgbClr val="FFFFFF"/>
                     </a:solidFill>
@@ -8072,13 +9152,23 @@
                   </a:tcPr>
                 </a:tc>
               </a:tr>
-              <a:tr h="725805">
-                <a:tc>
-                  <a:txBody>
-                    <a:bodyPr/>
-                    <a:lstStyle/>
-                    <a:p>
-                      <a:pPr algn="ctr"/>
+              <a:tr h="678484">
+                <a:tc>
+                  <a:txBody>
+                    <a:bodyPr/>
+                    <a:lstStyle/>
+                    <a:p>
+                      <a:pPr algn="ctr">
+                        <a:lnSpc>
+                          <a:spcPct val="100000"/>
+                        </a:lnSpc>
+                        <a:spcBef>
+                          <a:spcPts val="0"/>
+                        </a:spcBef>
+                        <a:spcAft>
+                          <a:spcPts val="0"/>
+                        </a:spcAft>
+                      </a:pPr>
                       <a:r>
                         <a:rPr sz="1100" b="0">
                           <a:solidFill>
@@ -8090,7 +9180,7 @@
                       </a:r>
                     </a:p>
                   </a:txBody>
-                  <a:tcPr anchor="ctr" marL="50800" marR="50800" marT="25400" marB="25400">
+                  <a:tcPr anchor="ctr" marL="38100" marR="38100" marT="25400" marB="25400">
                     <a:solidFill>
                       <a:srgbClr val="F8E7E8"/>
                     </a:solidFill>
@@ -8121,7 +9211,17 @@
                     <a:bodyPr/>
                     <a:lstStyle/>
                     <a:p>
-                      <a:pPr algn="l"/>
+                      <a:pPr algn="l">
+                        <a:lnSpc>
+                          <a:spcPct val="100000"/>
+                        </a:lnSpc>
+                        <a:spcBef>
+                          <a:spcPts val="0"/>
+                        </a:spcBef>
+                        <a:spcAft>
+                          <a:spcPts val="0"/>
+                        </a:spcAft>
+                      </a:pPr>
                       <a:r>
                         <a:rPr sz="1100" b="0">
                           <a:solidFill>
@@ -8133,7 +9233,7 @@
                       </a:r>
                     </a:p>
                   </a:txBody>
-                  <a:tcPr anchor="ctr" marL="50800" marR="50800" marT="25400" marB="25400">
+                  <a:tcPr anchor="ctr" marL="38100" marR="38100" marT="25400" marB="25400">
                     <a:solidFill>
                       <a:srgbClr val="F8E7E8"/>
                     </a:solidFill>
@@ -8164,7 +9264,17 @@
                     <a:bodyPr/>
                     <a:lstStyle/>
                     <a:p>
-                      <a:pPr algn="l"/>
+                      <a:pPr algn="l">
+                        <a:lnSpc>
+                          <a:spcPct val="100000"/>
+                        </a:lnSpc>
+                        <a:spcBef>
+                          <a:spcPts val="0"/>
+                        </a:spcBef>
+                        <a:spcAft>
+                          <a:spcPts val="0"/>
+                        </a:spcAft>
+                      </a:pPr>
                       <a:r>
                         <a:rPr sz="1100" b="0">
                           <a:solidFill>
@@ -8176,7 +9286,7 @@
                       </a:r>
                     </a:p>
                   </a:txBody>
-                  <a:tcPr anchor="ctr" marL="50800" marR="50800" marT="25400" marB="25400">
+                  <a:tcPr anchor="ctr" marL="38100" marR="38100" marT="25400" marB="25400">
                     <a:solidFill>
                       <a:srgbClr val="F8E7E8"/>
                     </a:solidFill>
@@ -8207,7 +9317,17 @@
                     <a:bodyPr/>
                     <a:lstStyle/>
                     <a:p>
-                      <a:pPr algn="l"/>
+                      <a:pPr algn="l">
+                        <a:lnSpc>
+                          <a:spcPct val="100000"/>
+                        </a:lnSpc>
+                        <a:spcBef>
+                          <a:spcPts val="0"/>
+                        </a:spcBef>
+                        <a:spcAft>
+                          <a:spcPts val="0"/>
+                        </a:spcAft>
+                      </a:pPr>
                       <a:r>
                         <a:rPr sz="1100" b="0">
                           <a:solidFill>
@@ -8219,7 +9339,7 @@
                       </a:r>
                     </a:p>
                   </a:txBody>
-                  <a:tcPr anchor="ctr" marL="50800" marR="50800" marT="25400" marB="25400">
+                  <a:tcPr anchor="ctr" marL="38100" marR="38100" marT="25400" marB="25400">
                     <a:solidFill>
                       <a:srgbClr val="F8E7E8"/>
                     </a:solidFill>
@@ -8250,7 +9370,17 @@
                     <a:bodyPr/>
                     <a:lstStyle/>
                     <a:p>
-                      <a:pPr algn="ctr"/>
+                      <a:pPr algn="r">
+                        <a:lnSpc>
+                          <a:spcPct val="100000"/>
+                        </a:lnSpc>
+                        <a:spcBef>
+                          <a:spcPts val="0"/>
+                        </a:spcBef>
+                        <a:spcAft>
+                          <a:spcPts val="0"/>
+                        </a:spcAft>
+                      </a:pPr>
                       <a:r>
                         <a:rPr sz="1100" b="0">
                           <a:solidFill>
@@ -8262,7 +9392,7 @@
                       </a:r>
                     </a:p>
                   </a:txBody>
-                  <a:tcPr anchor="ctr" marL="50800" marR="50800" marT="25400" marB="25400">
+                  <a:tcPr anchor="ctr" marL="38100" marR="38100" marT="25400" marB="25400">
                     <a:solidFill>
                       <a:srgbClr val="F8E7E8"/>
                     </a:solidFill>
@@ -8293,7 +9423,17 @@
                     <a:bodyPr/>
                     <a:lstStyle/>
                     <a:p>
-                      <a:pPr algn="l"/>
+                      <a:pPr algn="l">
+                        <a:lnSpc>
+                          <a:spcPct val="100000"/>
+                        </a:lnSpc>
+                        <a:spcBef>
+                          <a:spcPts val="0"/>
+                        </a:spcBef>
+                        <a:spcAft>
+                          <a:spcPts val="0"/>
+                        </a:spcAft>
+                      </a:pPr>
                       <a:r>
                         <a:rPr sz="1100" b="0">
                           <a:solidFill>
@@ -8305,7 +9445,7 @@
                       </a:r>
                     </a:p>
                   </a:txBody>
-                  <a:tcPr anchor="ctr" marL="50800" marR="50800" marT="25400" marB="25400">
+                  <a:tcPr anchor="ctr" marL="38100" marR="38100" marT="25400" marB="25400">
                     <a:solidFill>
                       <a:srgbClr val="F8E7E8"/>
                     </a:solidFill>
@@ -8332,13 +9472,23 @@
                   </a:tcPr>
                 </a:tc>
               </a:tr>
-              <a:tr h="725805">
-                <a:tc>
-                  <a:txBody>
-                    <a:bodyPr/>
-                    <a:lstStyle/>
-                    <a:p>
-                      <a:pPr algn="ctr"/>
+              <a:tr h="678484">
+                <a:tc>
+                  <a:txBody>
+                    <a:bodyPr/>
+                    <a:lstStyle/>
+                    <a:p>
+                      <a:pPr algn="ctr">
+                        <a:lnSpc>
+                          <a:spcPct val="100000"/>
+                        </a:lnSpc>
+                        <a:spcBef>
+                          <a:spcPts val="0"/>
+                        </a:spcBef>
+                        <a:spcAft>
+                          <a:spcPts val="0"/>
+                        </a:spcAft>
+                      </a:pPr>
                       <a:r>
                         <a:rPr sz="1100" b="0">
                           <a:solidFill>
@@ -8350,7 +9500,7 @@
                       </a:r>
                     </a:p>
                   </a:txBody>
-                  <a:tcPr anchor="ctr" marL="50800" marR="50800" marT="25400" marB="25400">
+                  <a:tcPr anchor="ctr" marL="38100" marR="38100" marT="25400" marB="25400">
                     <a:solidFill>
                       <a:srgbClr val="FFFFFF"/>
                     </a:solidFill>
@@ -8381,7 +9531,17 @@
                     <a:bodyPr/>
                     <a:lstStyle/>
                     <a:p>
-                      <a:pPr algn="l"/>
+                      <a:pPr algn="l">
+                        <a:lnSpc>
+                          <a:spcPct val="100000"/>
+                        </a:lnSpc>
+                        <a:spcBef>
+                          <a:spcPts val="0"/>
+                        </a:spcBef>
+                        <a:spcAft>
+                          <a:spcPts val="0"/>
+                        </a:spcAft>
+                      </a:pPr>
                       <a:r>
                         <a:rPr sz="1100" b="0">
                           <a:solidFill>
@@ -8393,7 +9553,7 @@
                       </a:r>
                     </a:p>
                   </a:txBody>
-                  <a:tcPr anchor="ctr" marL="50800" marR="50800" marT="25400" marB="25400">
+                  <a:tcPr anchor="ctr" marL="38100" marR="38100" marT="25400" marB="25400">
                     <a:solidFill>
                       <a:srgbClr val="FFFFFF"/>
                     </a:solidFill>
@@ -8424,7 +9584,17 @@
                     <a:bodyPr/>
                     <a:lstStyle/>
                     <a:p>
-                      <a:pPr algn="l"/>
+                      <a:pPr algn="l">
+                        <a:lnSpc>
+                          <a:spcPct val="100000"/>
+                        </a:lnSpc>
+                        <a:spcBef>
+                          <a:spcPts val="0"/>
+                        </a:spcBef>
+                        <a:spcAft>
+                          <a:spcPts val="0"/>
+                        </a:spcAft>
+                      </a:pPr>
                       <a:r>
                         <a:rPr sz="1100" b="0">
                           <a:solidFill>
@@ -8436,7 +9606,7 @@
                       </a:r>
                     </a:p>
                   </a:txBody>
-                  <a:tcPr anchor="ctr" marL="50800" marR="50800" marT="25400" marB="25400">
+                  <a:tcPr anchor="ctr" marL="38100" marR="38100" marT="25400" marB="25400">
                     <a:solidFill>
                       <a:srgbClr val="FFFFFF"/>
                     </a:solidFill>
@@ -8467,7 +9637,17 @@
                     <a:bodyPr/>
                     <a:lstStyle/>
                     <a:p>
-                      <a:pPr algn="l"/>
+                      <a:pPr algn="l">
+                        <a:lnSpc>
+                          <a:spcPct val="100000"/>
+                        </a:lnSpc>
+                        <a:spcBef>
+                          <a:spcPts val="0"/>
+                        </a:spcBef>
+                        <a:spcAft>
+                          <a:spcPts val="0"/>
+                        </a:spcAft>
+                      </a:pPr>
                       <a:r>
                         <a:rPr sz="1100" b="0">
                           <a:solidFill>
@@ -8479,7 +9659,7 @@
                       </a:r>
                     </a:p>
                   </a:txBody>
-                  <a:tcPr anchor="ctr" marL="50800" marR="50800" marT="25400" marB="25400">
+                  <a:tcPr anchor="ctr" marL="38100" marR="38100" marT="25400" marB="25400">
                     <a:solidFill>
                       <a:srgbClr val="FFFFFF"/>
                     </a:solidFill>
@@ -8510,7 +9690,17 @@
                     <a:bodyPr/>
                     <a:lstStyle/>
                     <a:p>
-                      <a:pPr algn="ctr"/>
+                      <a:pPr algn="r">
+                        <a:lnSpc>
+                          <a:spcPct val="100000"/>
+                        </a:lnSpc>
+                        <a:spcBef>
+                          <a:spcPts val="0"/>
+                        </a:spcBef>
+                        <a:spcAft>
+                          <a:spcPts val="0"/>
+                        </a:spcAft>
+                      </a:pPr>
                       <a:r>
                         <a:rPr sz="1100" b="0">
                           <a:solidFill>
@@ -8522,7 +9712,7 @@
                       </a:r>
                     </a:p>
                   </a:txBody>
-                  <a:tcPr anchor="ctr" marL="50800" marR="50800" marT="25400" marB="25400">
+                  <a:tcPr anchor="ctr" marL="38100" marR="38100" marT="25400" marB="25400">
                     <a:solidFill>
                       <a:srgbClr val="FFFFFF"/>
                     </a:solidFill>
@@ -8553,7 +9743,17 @@
                     <a:bodyPr/>
                     <a:lstStyle/>
                     <a:p>
-                      <a:pPr algn="l"/>
+                      <a:pPr algn="l">
+                        <a:lnSpc>
+                          <a:spcPct val="100000"/>
+                        </a:lnSpc>
+                        <a:spcBef>
+                          <a:spcPts val="0"/>
+                        </a:spcBef>
+                        <a:spcAft>
+                          <a:spcPts val="0"/>
+                        </a:spcAft>
+                      </a:pPr>
                       <a:r>
                         <a:rPr sz="1100" b="0">
                           <a:solidFill>
@@ -8565,7 +9765,7 @@
                       </a:r>
                     </a:p>
                   </a:txBody>
-                  <a:tcPr anchor="ctr" marL="50800" marR="50800" marT="25400" marB="25400">
+                  <a:tcPr anchor="ctr" marL="38100" marR="38100" marT="25400" marB="25400">
                     <a:solidFill>
                       <a:srgbClr val="FFFFFF"/>
                     </a:solidFill>
@@ -8592,13 +9792,23 @@
                   </a:tcPr>
                 </a:tc>
               </a:tr>
-              <a:tr h="725805">
-                <a:tc>
-                  <a:txBody>
-                    <a:bodyPr/>
-                    <a:lstStyle/>
-                    <a:p>
-                      <a:pPr algn="ctr"/>
+              <a:tr h="678484">
+                <a:tc>
+                  <a:txBody>
+                    <a:bodyPr/>
+                    <a:lstStyle/>
+                    <a:p>
+                      <a:pPr algn="ctr">
+                        <a:lnSpc>
+                          <a:spcPct val="100000"/>
+                        </a:lnSpc>
+                        <a:spcBef>
+                          <a:spcPts val="0"/>
+                        </a:spcBef>
+                        <a:spcAft>
+                          <a:spcPts val="0"/>
+                        </a:spcAft>
+                      </a:pPr>
                       <a:r>
                         <a:rPr sz="1100" b="0">
                           <a:solidFill>
@@ -8610,7 +9820,7 @@
                       </a:r>
                     </a:p>
                   </a:txBody>
-                  <a:tcPr anchor="ctr" marL="50800" marR="50800" marT="25400" marB="25400">
+                  <a:tcPr anchor="ctr" marL="38100" marR="38100" marT="25400" marB="25400">
                     <a:solidFill>
                       <a:srgbClr val="F8E7E8"/>
                     </a:solidFill>
@@ -8641,7 +9851,17 @@
                     <a:bodyPr/>
                     <a:lstStyle/>
                     <a:p>
-                      <a:pPr algn="l"/>
+                      <a:pPr algn="l">
+                        <a:lnSpc>
+                          <a:spcPct val="100000"/>
+                        </a:lnSpc>
+                        <a:spcBef>
+                          <a:spcPts val="0"/>
+                        </a:spcBef>
+                        <a:spcAft>
+                          <a:spcPts val="0"/>
+                        </a:spcAft>
+                      </a:pPr>
                       <a:r>
                         <a:rPr sz="1100" b="0">
                           <a:solidFill>
@@ -8653,7 +9873,7 @@
                       </a:r>
                     </a:p>
                   </a:txBody>
-                  <a:tcPr anchor="ctr" marL="50800" marR="50800" marT="25400" marB="25400">
+                  <a:tcPr anchor="ctr" marL="38100" marR="38100" marT="25400" marB="25400">
                     <a:solidFill>
                       <a:srgbClr val="F8E7E8"/>
                     </a:solidFill>
@@ -8684,7 +9904,17 @@
                     <a:bodyPr/>
                     <a:lstStyle/>
                     <a:p>
-                      <a:pPr algn="l"/>
+                      <a:pPr algn="l">
+                        <a:lnSpc>
+                          <a:spcPct val="100000"/>
+                        </a:lnSpc>
+                        <a:spcBef>
+                          <a:spcPts val="0"/>
+                        </a:spcBef>
+                        <a:spcAft>
+                          <a:spcPts val="0"/>
+                        </a:spcAft>
+                      </a:pPr>
                       <a:r>
                         <a:rPr sz="1100" b="0">
                           <a:solidFill>
@@ -8696,7 +9926,7 @@
                       </a:r>
                     </a:p>
                   </a:txBody>
-                  <a:tcPr anchor="ctr" marL="50800" marR="50800" marT="25400" marB="25400">
+                  <a:tcPr anchor="ctr" marL="38100" marR="38100" marT="25400" marB="25400">
                     <a:solidFill>
                       <a:srgbClr val="F8E7E8"/>
                     </a:solidFill>
@@ -8727,7 +9957,17 @@
                     <a:bodyPr/>
                     <a:lstStyle/>
                     <a:p>
-                      <a:pPr algn="l"/>
+                      <a:pPr algn="l">
+                        <a:lnSpc>
+                          <a:spcPct val="100000"/>
+                        </a:lnSpc>
+                        <a:spcBef>
+                          <a:spcPts val="0"/>
+                        </a:spcBef>
+                        <a:spcAft>
+                          <a:spcPts val="0"/>
+                        </a:spcAft>
+                      </a:pPr>
                       <a:r>
                         <a:rPr sz="1100" b="0">
                           <a:solidFill>
@@ -8739,7 +9979,7 @@
                       </a:r>
                     </a:p>
                   </a:txBody>
-                  <a:tcPr anchor="ctr" marL="50800" marR="50800" marT="25400" marB="25400">
+                  <a:tcPr anchor="ctr" marL="38100" marR="38100" marT="25400" marB="25400">
                     <a:solidFill>
                       <a:srgbClr val="F8E7E8"/>
                     </a:solidFill>
@@ -8770,7 +10010,17 @@
                     <a:bodyPr/>
                     <a:lstStyle/>
                     <a:p>
-                      <a:pPr algn="ctr"/>
+                      <a:pPr algn="r">
+                        <a:lnSpc>
+                          <a:spcPct val="100000"/>
+                        </a:lnSpc>
+                        <a:spcBef>
+                          <a:spcPts val="0"/>
+                        </a:spcBef>
+                        <a:spcAft>
+                          <a:spcPts val="0"/>
+                        </a:spcAft>
+                      </a:pPr>
                       <a:r>
                         <a:rPr sz="1100" b="0">
                           <a:solidFill>
@@ -8782,7 +10032,7 @@
                       </a:r>
                     </a:p>
                   </a:txBody>
-                  <a:tcPr anchor="ctr" marL="50800" marR="50800" marT="25400" marB="25400">
+                  <a:tcPr anchor="ctr" marL="38100" marR="38100" marT="25400" marB="25400">
                     <a:solidFill>
                       <a:srgbClr val="F8E7E8"/>
                     </a:solidFill>
@@ -8813,7 +10063,17 @@
                     <a:bodyPr/>
                     <a:lstStyle/>
                     <a:p>
-                      <a:pPr algn="l"/>
+                      <a:pPr algn="l">
+                        <a:lnSpc>
+                          <a:spcPct val="100000"/>
+                        </a:lnSpc>
+                        <a:spcBef>
+                          <a:spcPts val="0"/>
+                        </a:spcBef>
+                        <a:spcAft>
+                          <a:spcPts val="0"/>
+                        </a:spcAft>
+                      </a:pPr>
                       <a:r>
                         <a:rPr sz="1100" b="0">
                           <a:solidFill>
@@ -8825,7 +10085,7 @@
                       </a:r>
                     </a:p>
                   </a:txBody>
-                  <a:tcPr anchor="ctr" marL="50800" marR="50800" marT="25400" marB="25400">
+                  <a:tcPr anchor="ctr" marL="38100" marR="38100" marT="25400" marB="25400">
                     <a:solidFill>
                       <a:srgbClr val="F8E7E8"/>
                     </a:solidFill>
@@ -8852,13 +10112,23 @@
                   </a:tcPr>
                 </a:tc>
               </a:tr>
-              <a:tr h="725805">
-                <a:tc>
-                  <a:txBody>
-                    <a:bodyPr/>
-                    <a:lstStyle/>
-                    <a:p>
-                      <a:pPr algn="ctr"/>
+              <a:tr h="678484">
+                <a:tc>
+                  <a:txBody>
+                    <a:bodyPr/>
+                    <a:lstStyle/>
+                    <a:p>
+                      <a:pPr algn="ctr">
+                        <a:lnSpc>
+                          <a:spcPct val="100000"/>
+                        </a:lnSpc>
+                        <a:spcBef>
+                          <a:spcPts val="0"/>
+                        </a:spcBef>
+                        <a:spcAft>
+                          <a:spcPts val="0"/>
+                        </a:spcAft>
+                      </a:pPr>
                       <a:r>
                         <a:rPr sz="1100" b="0">
                           <a:solidFill>
@@ -8870,7 +10140,7 @@
                       </a:r>
                     </a:p>
                   </a:txBody>
-                  <a:tcPr anchor="ctr" marL="50800" marR="50800" marT="25400" marB="25400">
+                  <a:tcPr anchor="ctr" marL="38100" marR="38100" marT="25400" marB="25400">
                     <a:solidFill>
                       <a:srgbClr val="FFFFFF"/>
                     </a:solidFill>
@@ -8901,7 +10171,17 @@
                     <a:bodyPr/>
                     <a:lstStyle/>
                     <a:p>
-                      <a:pPr algn="l"/>
+                      <a:pPr algn="l">
+                        <a:lnSpc>
+                          <a:spcPct val="100000"/>
+                        </a:lnSpc>
+                        <a:spcBef>
+                          <a:spcPts val="0"/>
+                        </a:spcBef>
+                        <a:spcAft>
+                          <a:spcPts val="0"/>
+                        </a:spcAft>
+                      </a:pPr>
                       <a:r>
                         <a:rPr sz="1100" b="0">
                           <a:solidFill>
@@ -8913,7 +10193,7 @@
                       </a:r>
                     </a:p>
                   </a:txBody>
-                  <a:tcPr anchor="ctr" marL="50800" marR="50800" marT="25400" marB="25400">
+                  <a:tcPr anchor="ctr" marL="38100" marR="38100" marT="25400" marB="25400">
                     <a:solidFill>
                       <a:srgbClr val="FFFFFF"/>
                     </a:solidFill>
@@ -8944,7 +10224,17 @@
                     <a:bodyPr/>
                     <a:lstStyle/>
                     <a:p>
-                      <a:pPr algn="l"/>
+                      <a:pPr algn="l">
+                        <a:lnSpc>
+                          <a:spcPct val="100000"/>
+                        </a:lnSpc>
+                        <a:spcBef>
+                          <a:spcPts val="0"/>
+                        </a:spcBef>
+                        <a:spcAft>
+                          <a:spcPts val="0"/>
+                        </a:spcAft>
+                      </a:pPr>
                       <a:r>
                         <a:rPr sz="1100" b="0">
                           <a:solidFill>
@@ -8956,7 +10246,7 @@
                       </a:r>
                     </a:p>
                   </a:txBody>
-                  <a:tcPr anchor="ctr" marL="50800" marR="50800" marT="25400" marB="25400">
+                  <a:tcPr anchor="ctr" marL="38100" marR="38100" marT="25400" marB="25400">
                     <a:solidFill>
                       <a:srgbClr val="FFFFFF"/>
                     </a:solidFill>
@@ -8987,7 +10277,17 @@
                     <a:bodyPr/>
                     <a:lstStyle/>
                     <a:p>
-                      <a:pPr algn="l"/>
+                      <a:pPr algn="l">
+                        <a:lnSpc>
+                          <a:spcPct val="100000"/>
+                        </a:lnSpc>
+                        <a:spcBef>
+                          <a:spcPts val="0"/>
+                        </a:spcBef>
+                        <a:spcAft>
+                          <a:spcPts val="0"/>
+                        </a:spcAft>
+                      </a:pPr>
                       <a:r>
                         <a:rPr sz="1100" b="0">
                           <a:solidFill>
@@ -8999,7 +10299,7 @@
                       </a:r>
                     </a:p>
                   </a:txBody>
-                  <a:tcPr anchor="ctr" marL="50800" marR="50800" marT="25400" marB="25400">
+                  <a:tcPr anchor="ctr" marL="38100" marR="38100" marT="25400" marB="25400">
                     <a:solidFill>
                       <a:srgbClr val="FFFFFF"/>
                     </a:solidFill>
@@ -9030,7 +10330,17 @@
                     <a:bodyPr/>
                     <a:lstStyle/>
                     <a:p>
-                      <a:pPr algn="ctr"/>
+                      <a:pPr algn="r">
+                        <a:lnSpc>
+                          <a:spcPct val="100000"/>
+                        </a:lnSpc>
+                        <a:spcBef>
+                          <a:spcPts val="0"/>
+                        </a:spcBef>
+                        <a:spcAft>
+                          <a:spcPts val="0"/>
+                        </a:spcAft>
+                      </a:pPr>
                       <a:r>
                         <a:rPr sz="1100" b="0">
                           <a:solidFill>
@@ -9042,7 +10352,7 @@
                       </a:r>
                     </a:p>
                   </a:txBody>
-                  <a:tcPr anchor="ctr" marL="50800" marR="50800" marT="25400" marB="25400">
+                  <a:tcPr anchor="ctr" marL="38100" marR="38100" marT="25400" marB="25400">
                     <a:solidFill>
                       <a:srgbClr val="FFFFFF"/>
                     </a:solidFill>
@@ -9073,7 +10383,17 @@
                     <a:bodyPr/>
                     <a:lstStyle/>
                     <a:p>
-                      <a:pPr algn="l"/>
+                      <a:pPr algn="l">
+                        <a:lnSpc>
+                          <a:spcPct val="100000"/>
+                        </a:lnSpc>
+                        <a:spcBef>
+                          <a:spcPts val="0"/>
+                        </a:spcBef>
+                        <a:spcAft>
+                          <a:spcPts val="0"/>
+                        </a:spcAft>
+                      </a:pPr>
                       <a:r>
                         <a:rPr sz="1100" b="0">
                           <a:solidFill>
@@ -9085,7 +10405,7 @@
                       </a:r>
                     </a:p>
                   </a:txBody>
-                  <a:tcPr anchor="ctr" marL="50800" marR="50800" marT="25400" marB="25400">
+                  <a:tcPr anchor="ctr" marL="38100" marR="38100" marT="25400" marB="25400">
                     <a:solidFill>
                       <a:srgbClr val="FFFFFF"/>
                     </a:solidFill>
@@ -9112,13 +10432,23 @@
                   </a:tcPr>
                 </a:tc>
               </a:tr>
-              <a:tr h="725805">
-                <a:tc>
-                  <a:txBody>
-                    <a:bodyPr/>
-                    <a:lstStyle/>
-                    <a:p>
-                      <a:pPr algn="ctr"/>
+              <a:tr h="678484">
+                <a:tc>
+                  <a:txBody>
+                    <a:bodyPr/>
+                    <a:lstStyle/>
+                    <a:p>
+                      <a:pPr algn="ctr">
+                        <a:lnSpc>
+                          <a:spcPct val="100000"/>
+                        </a:lnSpc>
+                        <a:spcBef>
+                          <a:spcPts val="0"/>
+                        </a:spcBef>
+                        <a:spcAft>
+                          <a:spcPts val="0"/>
+                        </a:spcAft>
+                      </a:pPr>
                       <a:r>
                         <a:rPr sz="1100" b="0">
                           <a:solidFill>
@@ -9130,7 +10460,7 @@
                       </a:r>
                     </a:p>
                   </a:txBody>
-                  <a:tcPr anchor="ctr" marL="50800" marR="50800" marT="25400" marB="25400">
+                  <a:tcPr anchor="ctr" marL="38100" marR="38100" marT="25400" marB="25400">
                     <a:solidFill>
                       <a:srgbClr val="F8E7E8"/>
                     </a:solidFill>
@@ -9161,7 +10491,17 @@
                     <a:bodyPr/>
                     <a:lstStyle/>
                     <a:p>
-                      <a:pPr algn="l"/>
+                      <a:pPr algn="l">
+                        <a:lnSpc>
+                          <a:spcPct val="100000"/>
+                        </a:lnSpc>
+                        <a:spcBef>
+                          <a:spcPts val="0"/>
+                        </a:spcBef>
+                        <a:spcAft>
+                          <a:spcPts val="0"/>
+                        </a:spcAft>
+                      </a:pPr>
                       <a:r>
                         <a:rPr sz="1100" b="0">
                           <a:solidFill>
@@ -9173,7 +10513,7 @@
                       </a:r>
                     </a:p>
                   </a:txBody>
-                  <a:tcPr anchor="ctr" marL="50800" marR="50800" marT="25400" marB="25400">
+                  <a:tcPr anchor="ctr" marL="38100" marR="38100" marT="25400" marB="25400">
                     <a:solidFill>
                       <a:srgbClr val="F8E7E8"/>
                     </a:solidFill>
@@ -9204,7 +10544,17 @@
                     <a:bodyPr/>
                     <a:lstStyle/>
                     <a:p>
-                      <a:pPr algn="l"/>
+                      <a:pPr algn="l">
+                        <a:lnSpc>
+                          <a:spcPct val="100000"/>
+                        </a:lnSpc>
+                        <a:spcBef>
+                          <a:spcPts val="0"/>
+                        </a:spcBef>
+                        <a:spcAft>
+                          <a:spcPts val="0"/>
+                        </a:spcAft>
+                      </a:pPr>
                       <a:r>
                         <a:rPr sz="1100" b="0">
                           <a:solidFill>
@@ -9216,7 +10566,7 @@
                       </a:r>
                     </a:p>
                   </a:txBody>
-                  <a:tcPr anchor="ctr" marL="50800" marR="50800" marT="25400" marB="25400">
+                  <a:tcPr anchor="ctr" marL="38100" marR="38100" marT="25400" marB="25400">
                     <a:solidFill>
                       <a:srgbClr val="F8E7E8"/>
                     </a:solidFill>
@@ -9247,7 +10597,17 @@
                     <a:bodyPr/>
                     <a:lstStyle/>
                     <a:p>
-                      <a:pPr algn="l"/>
+                      <a:pPr algn="l">
+                        <a:lnSpc>
+                          <a:spcPct val="100000"/>
+                        </a:lnSpc>
+                        <a:spcBef>
+                          <a:spcPts val="0"/>
+                        </a:spcBef>
+                        <a:spcAft>
+                          <a:spcPts val="0"/>
+                        </a:spcAft>
+                      </a:pPr>
                       <a:r>
                         <a:rPr sz="1100" b="0">
                           <a:solidFill>
@@ -9259,7 +10619,7 @@
                       </a:r>
                     </a:p>
                   </a:txBody>
-                  <a:tcPr anchor="ctr" marL="50800" marR="50800" marT="25400" marB="25400">
+                  <a:tcPr anchor="ctr" marL="38100" marR="38100" marT="25400" marB="25400">
                     <a:solidFill>
                       <a:srgbClr val="F8E7E8"/>
                     </a:solidFill>
@@ -9290,7 +10650,17 @@
                     <a:bodyPr/>
                     <a:lstStyle/>
                     <a:p>
-                      <a:pPr algn="ctr"/>
+                      <a:pPr algn="r">
+                        <a:lnSpc>
+                          <a:spcPct val="100000"/>
+                        </a:lnSpc>
+                        <a:spcBef>
+                          <a:spcPts val="0"/>
+                        </a:spcBef>
+                        <a:spcAft>
+                          <a:spcPts val="0"/>
+                        </a:spcAft>
+                      </a:pPr>
                       <a:r>
                         <a:rPr sz="1100" b="0">
                           <a:solidFill>
@@ -9302,7 +10672,7 @@
                       </a:r>
                     </a:p>
                   </a:txBody>
-                  <a:tcPr anchor="ctr" marL="50800" marR="50800" marT="25400" marB="25400">
+                  <a:tcPr anchor="ctr" marL="38100" marR="38100" marT="25400" marB="25400">
                     <a:solidFill>
                       <a:srgbClr val="F8E7E8"/>
                     </a:solidFill>
@@ -9333,7 +10703,17 @@
                     <a:bodyPr/>
                     <a:lstStyle/>
                     <a:p>
-                      <a:pPr algn="l"/>
+                      <a:pPr algn="l">
+                        <a:lnSpc>
+                          <a:spcPct val="100000"/>
+                        </a:lnSpc>
+                        <a:spcBef>
+                          <a:spcPts val="0"/>
+                        </a:spcBef>
+                        <a:spcAft>
+                          <a:spcPts val="0"/>
+                        </a:spcAft>
+                      </a:pPr>
                       <a:r>
                         <a:rPr sz="1100" b="0">
                           <a:solidFill>
@@ -9345,7 +10725,7 @@
                       </a:r>
                     </a:p>
                   </a:txBody>
-                  <a:tcPr anchor="ctr" marL="50800" marR="50800" marT="25400" marB="25400">
+                  <a:tcPr anchor="ctr" marL="38100" marR="38100" marT="25400" marB="25400">
                     <a:solidFill>
                       <a:srgbClr val="F8E7E8"/>
                     </a:solidFill>
@@ -9372,13 +10752,23 @@
                   </a:tcPr>
                 </a:tc>
               </a:tr>
-              <a:tr h="725805">
-                <a:tc>
-                  <a:txBody>
-                    <a:bodyPr/>
-                    <a:lstStyle/>
-                    <a:p>
-                      <a:pPr algn="ctr"/>
+              <a:tr h="678484">
+                <a:tc>
+                  <a:txBody>
+                    <a:bodyPr/>
+                    <a:lstStyle/>
+                    <a:p>
+                      <a:pPr algn="ctr">
+                        <a:lnSpc>
+                          <a:spcPct val="100000"/>
+                        </a:lnSpc>
+                        <a:spcBef>
+                          <a:spcPts val="0"/>
+                        </a:spcBef>
+                        <a:spcAft>
+                          <a:spcPts val="0"/>
+                        </a:spcAft>
+                      </a:pPr>
                       <a:r>
                         <a:rPr sz="1100" b="0">
                           <a:solidFill>
@@ -9390,7 +10780,7 @@
                       </a:r>
                     </a:p>
                   </a:txBody>
-                  <a:tcPr anchor="ctr" marL="50800" marR="50800" marT="25400" marB="25400">
+                  <a:tcPr anchor="ctr" marL="38100" marR="38100" marT="25400" marB="25400">
                     <a:solidFill>
                       <a:srgbClr val="FFFFFF"/>
                     </a:solidFill>
@@ -9421,7 +10811,17 @@
                     <a:bodyPr/>
                     <a:lstStyle/>
                     <a:p>
-                      <a:pPr algn="l"/>
+                      <a:pPr algn="l">
+                        <a:lnSpc>
+                          <a:spcPct val="100000"/>
+                        </a:lnSpc>
+                        <a:spcBef>
+                          <a:spcPts val="0"/>
+                        </a:spcBef>
+                        <a:spcAft>
+                          <a:spcPts val="0"/>
+                        </a:spcAft>
+                      </a:pPr>
                       <a:r>
                         <a:rPr sz="1100" b="0">
                           <a:solidFill>
@@ -9433,7 +10833,7 @@
                       </a:r>
                     </a:p>
                   </a:txBody>
-                  <a:tcPr anchor="ctr" marL="50800" marR="50800" marT="25400" marB="25400">
+                  <a:tcPr anchor="ctr" marL="38100" marR="38100" marT="25400" marB="25400">
                     <a:solidFill>
                       <a:srgbClr val="FFFFFF"/>
                     </a:solidFill>
@@ -9464,7 +10864,17 @@
                     <a:bodyPr/>
                     <a:lstStyle/>
                     <a:p>
-                      <a:pPr algn="l"/>
+                      <a:pPr algn="l">
+                        <a:lnSpc>
+                          <a:spcPct val="100000"/>
+                        </a:lnSpc>
+                        <a:spcBef>
+                          <a:spcPts val="0"/>
+                        </a:spcBef>
+                        <a:spcAft>
+                          <a:spcPts val="0"/>
+                        </a:spcAft>
+                      </a:pPr>
                       <a:r>
                         <a:rPr sz="1100" b="0">
                           <a:solidFill>
@@ -9476,7 +10886,7 @@
                       </a:r>
                     </a:p>
                   </a:txBody>
-                  <a:tcPr anchor="ctr" marL="50800" marR="50800" marT="25400" marB="25400">
+                  <a:tcPr anchor="ctr" marL="38100" marR="38100" marT="25400" marB="25400">
                     <a:solidFill>
                       <a:srgbClr val="FFFFFF"/>
                     </a:solidFill>
@@ -9507,7 +10917,17 @@
                     <a:bodyPr/>
                     <a:lstStyle/>
                     <a:p>
-                      <a:pPr algn="l"/>
+                      <a:pPr algn="l">
+                        <a:lnSpc>
+                          <a:spcPct val="100000"/>
+                        </a:lnSpc>
+                        <a:spcBef>
+                          <a:spcPts val="0"/>
+                        </a:spcBef>
+                        <a:spcAft>
+                          <a:spcPts val="0"/>
+                        </a:spcAft>
+                      </a:pPr>
                       <a:r>
                         <a:rPr sz="1100" b="0">
                           <a:solidFill>
@@ -9519,7 +10939,7 @@
                       </a:r>
                     </a:p>
                   </a:txBody>
-                  <a:tcPr anchor="ctr" marL="50800" marR="50800" marT="25400" marB="25400">
+                  <a:tcPr anchor="ctr" marL="38100" marR="38100" marT="25400" marB="25400">
                     <a:solidFill>
                       <a:srgbClr val="FFFFFF"/>
                     </a:solidFill>
@@ -9550,7 +10970,17 @@
                     <a:bodyPr/>
                     <a:lstStyle/>
                     <a:p>
-                      <a:pPr algn="ctr"/>
+                      <a:pPr algn="r">
+                        <a:lnSpc>
+                          <a:spcPct val="100000"/>
+                        </a:lnSpc>
+                        <a:spcBef>
+                          <a:spcPts val="0"/>
+                        </a:spcBef>
+                        <a:spcAft>
+                          <a:spcPts val="0"/>
+                        </a:spcAft>
+                      </a:pPr>
                       <a:r>
                         <a:rPr sz="1100" b="0">
                           <a:solidFill>
@@ -9562,7 +10992,7 @@
                       </a:r>
                     </a:p>
                   </a:txBody>
-                  <a:tcPr anchor="ctr" marL="50800" marR="50800" marT="25400" marB="25400">
+                  <a:tcPr anchor="ctr" marL="38100" marR="38100" marT="25400" marB="25400">
                     <a:solidFill>
                       <a:srgbClr val="FFFFFF"/>
                     </a:solidFill>
@@ -9593,7 +11023,17 @@
                     <a:bodyPr/>
                     <a:lstStyle/>
                     <a:p>
-                      <a:pPr algn="l"/>
+                      <a:pPr algn="l">
+                        <a:lnSpc>
+                          <a:spcPct val="100000"/>
+                        </a:lnSpc>
+                        <a:spcBef>
+                          <a:spcPts val="0"/>
+                        </a:spcBef>
+                        <a:spcAft>
+                          <a:spcPts val="0"/>
+                        </a:spcAft>
+                      </a:pPr>
                       <a:r>
                         <a:rPr sz="1100" b="0">
                           <a:solidFill>
@@ -9605,7 +11045,7 @@
                       </a:r>
                     </a:p>
                   </a:txBody>
-                  <a:tcPr anchor="ctr" marL="50800" marR="50800" marT="25400" marB="25400">
+                  <a:tcPr anchor="ctr" marL="38100" marR="38100" marT="25400" marB="25400">
                     <a:solidFill>
                       <a:srgbClr val="FFFFFF"/>
                     </a:solidFill>
@@ -9670,8 +11110,8 @@
         </p:blipFill>
         <p:spPr>
           <a:xfrm>
-            <a:off x="9646920" y="73152"/>
-            <a:ext cx="2148840" cy="792454"/>
+            <a:off x="9377172" y="102412"/>
+            <a:ext cx="2423160" cy="893618"/>
           </a:xfrm>
           <a:prstGeom prst="rect">
             <a:avLst/>
@@ -9686,8 +11126,8 @@
         </p:nvSpPr>
         <p:spPr>
           <a:xfrm>
-            <a:off x="320040" y="109728"/>
-            <a:ext cx="8686800" cy="502920"/>
+            <a:off x="561441" y="330098"/>
+            <a:ext cx="7772400" cy="411480"/>
           </a:xfrm>
           <a:prstGeom prst="rect">
             <a:avLst/>
@@ -9722,8 +11162,8 @@
           <p:nvPr/>
         </p:nvGraphicFramePr>
         <p:xfrm>
-          <a:off x="320040" y="685800"/>
-          <a:ext cx="10469880" cy="5806440"/>
+          <a:off x="533095" y="1030528"/>
+          <a:ext cx="11415367" cy="5488223"/>
         </p:xfrm>
         <a:graphic>
           <a:graphicData uri="http://schemas.openxmlformats.org/drawingml/2006/table">
@@ -9732,20 +11172,30 @@
                 <a:tableStyleId>{5C22544A-7EE6-4342-B048-85BDC9FD1C3A}</a:tableStyleId>
               </a:tblPr>
               <a:tblGrid>
-                <a:gridCol w="411480"/>
-                <a:gridCol w="777240"/>
-                <a:gridCol w="3429000"/>
-                <a:gridCol w="3246120"/>
-                <a:gridCol w="1097280"/>
-                <a:gridCol w="1508760"/>
+                <a:gridCol w="480974"/>
+                <a:gridCol w="863193"/>
+                <a:gridCol w="3704234"/>
+                <a:gridCol w="3461004"/>
+                <a:gridCol w="1194206"/>
+                <a:gridCol w="1711756"/>
               </a:tblGrid>
-              <a:tr h="725805">
-                <a:tc>
-                  <a:txBody>
-                    <a:bodyPr/>
-                    <a:lstStyle/>
-                    <a:p>
-                      <a:pPr algn="ctr"/>
+              <a:tr h="738835">
+                <a:tc>
+                  <a:txBody>
+                    <a:bodyPr/>
+                    <a:lstStyle/>
+                    <a:p>
+                      <a:pPr algn="ctr">
+                        <a:lnSpc>
+                          <a:spcPct val="100000"/>
+                        </a:lnSpc>
+                        <a:spcBef>
+                          <a:spcPts val="0"/>
+                        </a:spcBef>
+                        <a:spcAft>
+                          <a:spcPts val="0"/>
+                        </a:spcAft>
+                      </a:pPr>
                       <a:r>
                         <a:rPr sz="1200" b="1">
                           <a:solidFill>
@@ -9757,7 +11207,7 @@
                       </a:r>
                     </a:p>
                   </a:txBody>
-                  <a:tcPr anchor="ctr" marL="50800" marR="50800" marT="25400" marB="25400">
+                  <a:tcPr anchor="ctr" marL="38100" marR="38100" marT="25400" marB="25400">
                     <a:solidFill>
                       <a:srgbClr val="AF182E"/>
                     </a:solidFill>
@@ -9788,7 +11238,17 @@
                     <a:bodyPr/>
                     <a:lstStyle/>
                     <a:p>
-                      <a:pPr algn="ctr"/>
+                      <a:pPr algn="ctr">
+                        <a:lnSpc>
+                          <a:spcPct val="100000"/>
+                        </a:lnSpc>
+                        <a:spcBef>
+                          <a:spcPts val="0"/>
+                        </a:spcBef>
+                        <a:spcAft>
+                          <a:spcPts val="0"/>
+                        </a:spcAft>
+                      </a:pPr>
                       <a:r>
                         <a:rPr sz="1200" b="1">
                           <a:solidFill>
@@ -9800,7 +11260,7 @@
                       </a:r>
                     </a:p>
                   </a:txBody>
-                  <a:tcPr anchor="ctr" marL="50800" marR="50800" marT="25400" marB="25400">
+                  <a:tcPr anchor="ctr" marL="38100" marR="38100" marT="25400" marB="25400">
                     <a:solidFill>
                       <a:srgbClr val="AF182E"/>
                     </a:solidFill>
@@ -9831,7 +11291,17 @@
                     <a:bodyPr/>
                     <a:lstStyle/>
                     <a:p>
-                      <a:pPr algn="ctr"/>
+                      <a:pPr algn="ctr">
+                        <a:lnSpc>
+                          <a:spcPct val="100000"/>
+                        </a:lnSpc>
+                        <a:spcBef>
+                          <a:spcPts val="0"/>
+                        </a:spcBef>
+                        <a:spcAft>
+                          <a:spcPts val="0"/>
+                        </a:spcAft>
+                      </a:pPr>
                       <a:r>
                         <a:rPr sz="1200" b="1">
                           <a:solidFill>
@@ -9843,7 +11313,7 @@
                       </a:r>
                     </a:p>
                   </a:txBody>
-                  <a:tcPr anchor="ctr" marL="50800" marR="50800" marT="25400" marB="25400">
+                  <a:tcPr anchor="ctr" marL="38100" marR="38100" marT="25400" marB="25400">
                     <a:solidFill>
                       <a:srgbClr val="AF182E"/>
                     </a:solidFill>
@@ -9874,7 +11344,17 @@
                     <a:bodyPr/>
                     <a:lstStyle/>
                     <a:p>
-                      <a:pPr algn="ctr"/>
+                      <a:pPr algn="ctr">
+                        <a:lnSpc>
+                          <a:spcPct val="100000"/>
+                        </a:lnSpc>
+                        <a:spcBef>
+                          <a:spcPts val="0"/>
+                        </a:spcBef>
+                        <a:spcAft>
+                          <a:spcPts val="0"/>
+                        </a:spcAft>
+                      </a:pPr>
                       <a:r>
                         <a:rPr sz="1200" b="1">
                           <a:solidFill>
@@ -9886,7 +11366,7 @@
                       </a:r>
                     </a:p>
                   </a:txBody>
-                  <a:tcPr anchor="ctr" marL="50800" marR="50800" marT="25400" marB="25400">
+                  <a:tcPr anchor="ctr" marL="38100" marR="38100" marT="25400" marB="25400">
                     <a:solidFill>
                       <a:srgbClr val="AF182E"/>
                     </a:solidFill>
@@ -9917,7 +11397,17 @@
                     <a:bodyPr/>
                     <a:lstStyle/>
                     <a:p>
-                      <a:pPr algn="ctr"/>
+                      <a:pPr algn="ctr">
+                        <a:lnSpc>
+                          <a:spcPct val="100000"/>
+                        </a:lnSpc>
+                        <a:spcBef>
+                          <a:spcPts val="0"/>
+                        </a:spcBef>
+                        <a:spcAft>
+                          <a:spcPts val="0"/>
+                        </a:spcAft>
+                      </a:pPr>
                       <a:r>
                         <a:rPr sz="1200" b="1">
                           <a:solidFill>
@@ -9932,7 +11422,7 @@
                       </a:r>
                     </a:p>
                   </a:txBody>
-                  <a:tcPr anchor="ctr" marL="50800" marR="50800" marT="25400" marB="25400">
+                  <a:tcPr anchor="ctr" marL="38100" marR="38100" marT="25400" marB="25400">
                     <a:solidFill>
                       <a:srgbClr val="AF182E"/>
                     </a:solidFill>
@@ -9963,7 +11453,17 @@
                     <a:bodyPr/>
                     <a:lstStyle/>
                     <a:p>
-                      <a:pPr algn="ctr"/>
+                      <a:pPr algn="ctr">
+                        <a:lnSpc>
+                          <a:spcPct val="100000"/>
+                        </a:lnSpc>
+                        <a:spcBef>
+                          <a:spcPts val="0"/>
+                        </a:spcBef>
+                        <a:spcAft>
+                          <a:spcPts val="0"/>
+                        </a:spcAft>
+                      </a:pPr>
                       <a:r>
                         <a:rPr sz="1200" b="1">
                           <a:solidFill>
@@ -9975,7 +11475,7 @@
                       </a:r>
                     </a:p>
                   </a:txBody>
-                  <a:tcPr anchor="ctr" marL="50800" marR="50800" marT="25400" marB="25400">
+                  <a:tcPr anchor="ctr" marL="38100" marR="38100" marT="25400" marB="25400">
                     <a:solidFill>
                       <a:srgbClr val="AF182E"/>
                     </a:solidFill>
@@ -10002,13 +11502,23 @@
                   </a:tcPr>
                 </a:tc>
               </a:tr>
-              <a:tr h="725805">
-                <a:tc>
-                  <a:txBody>
-                    <a:bodyPr/>
-                    <a:lstStyle/>
-                    <a:p>
-                      <a:pPr algn="ctr"/>
+              <a:tr h="678484">
+                <a:tc>
+                  <a:txBody>
+                    <a:bodyPr/>
+                    <a:lstStyle/>
+                    <a:p>
+                      <a:pPr algn="ctr">
+                        <a:lnSpc>
+                          <a:spcPct val="100000"/>
+                        </a:lnSpc>
+                        <a:spcBef>
+                          <a:spcPts val="0"/>
+                        </a:spcBef>
+                        <a:spcAft>
+                          <a:spcPts val="0"/>
+                        </a:spcAft>
+                      </a:pPr>
                       <a:r>
                         <a:rPr sz="1100" b="0">
                           <a:solidFill>
@@ -10020,7 +11530,7 @@
                       </a:r>
                     </a:p>
                   </a:txBody>
-                  <a:tcPr anchor="ctr" marL="50800" marR="50800" marT="25400" marB="25400">
+                  <a:tcPr anchor="ctr" marL="38100" marR="38100" marT="25400" marB="25400">
                     <a:solidFill>
                       <a:srgbClr val="FFFFFF"/>
                     </a:solidFill>
@@ -10051,7 +11561,17 @@
                     <a:bodyPr/>
                     <a:lstStyle/>
                     <a:p>
-                      <a:pPr algn="l"/>
+                      <a:pPr algn="l">
+                        <a:lnSpc>
+                          <a:spcPct val="100000"/>
+                        </a:lnSpc>
+                        <a:spcBef>
+                          <a:spcPts val="0"/>
+                        </a:spcBef>
+                        <a:spcAft>
+                          <a:spcPts val="0"/>
+                        </a:spcAft>
+                      </a:pPr>
                       <a:r>
                         <a:rPr sz="1100" b="0">
                           <a:solidFill>
@@ -10063,7 +11583,7 @@
                       </a:r>
                     </a:p>
                   </a:txBody>
-                  <a:tcPr anchor="ctr" marL="50800" marR="50800" marT="25400" marB="25400">
+                  <a:tcPr anchor="ctr" marL="38100" marR="38100" marT="25400" marB="25400">
                     <a:solidFill>
                       <a:srgbClr val="FFFFFF"/>
                     </a:solidFill>
@@ -10094,7 +11614,17 @@
                     <a:bodyPr/>
                     <a:lstStyle/>
                     <a:p>
-                      <a:pPr algn="l"/>
+                      <a:pPr algn="l">
+                        <a:lnSpc>
+                          <a:spcPct val="100000"/>
+                        </a:lnSpc>
+                        <a:spcBef>
+                          <a:spcPts val="0"/>
+                        </a:spcBef>
+                        <a:spcAft>
+                          <a:spcPts val="0"/>
+                        </a:spcAft>
+                      </a:pPr>
                       <a:r>
                         <a:rPr sz="1100" b="0">
                           <a:solidFill>
@@ -10106,7 +11636,7 @@
                       </a:r>
                     </a:p>
                   </a:txBody>
-                  <a:tcPr anchor="ctr" marL="50800" marR="50800" marT="25400" marB="25400">
+                  <a:tcPr anchor="ctr" marL="38100" marR="38100" marT="25400" marB="25400">
                     <a:solidFill>
                       <a:srgbClr val="FFFFFF"/>
                     </a:solidFill>
@@ -10137,7 +11667,17 @@
                     <a:bodyPr/>
                     <a:lstStyle/>
                     <a:p>
-                      <a:pPr algn="l"/>
+                      <a:pPr algn="l">
+                        <a:lnSpc>
+                          <a:spcPct val="100000"/>
+                        </a:lnSpc>
+                        <a:spcBef>
+                          <a:spcPts val="0"/>
+                        </a:spcBef>
+                        <a:spcAft>
+                          <a:spcPts val="0"/>
+                        </a:spcAft>
+                      </a:pPr>
                       <a:r>
                         <a:rPr sz="1100" b="0">
                           <a:solidFill>
@@ -10149,7 +11689,7 @@
                       </a:r>
                     </a:p>
                   </a:txBody>
-                  <a:tcPr anchor="ctr" marL="50800" marR="50800" marT="25400" marB="25400">
+                  <a:tcPr anchor="ctr" marL="38100" marR="38100" marT="25400" marB="25400">
                     <a:solidFill>
                       <a:srgbClr val="FFFFFF"/>
                     </a:solidFill>
@@ -10180,7 +11720,17 @@
                     <a:bodyPr/>
                     <a:lstStyle/>
                     <a:p>
-                      <a:pPr algn="ctr"/>
+                      <a:pPr algn="r">
+                        <a:lnSpc>
+                          <a:spcPct val="100000"/>
+                        </a:lnSpc>
+                        <a:spcBef>
+                          <a:spcPts val="0"/>
+                        </a:spcBef>
+                        <a:spcAft>
+                          <a:spcPts val="0"/>
+                        </a:spcAft>
+                      </a:pPr>
                       <a:r>
                         <a:rPr sz="1100" b="0">
                           <a:solidFill>
@@ -10192,7 +11742,7 @@
                       </a:r>
                     </a:p>
                   </a:txBody>
-                  <a:tcPr anchor="ctr" marL="50800" marR="50800" marT="25400" marB="25400">
+                  <a:tcPr anchor="ctr" marL="38100" marR="38100" marT="25400" marB="25400">
                     <a:solidFill>
                       <a:srgbClr val="FFFFFF"/>
                     </a:solidFill>
@@ -10223,7 +11773,17 @@
                     <a:bodyPr/>
                     <a:lstStyle/>
                     <a:p>
-                      <a:pPr algn="l"/>
+                      <a:pPr algn="l">
+                        <a:lnSpc>
+                          <a:spcPct val="100000"/>
+                        </a:lnSpc>
+                        <a:spcBef>
+                          <a:spcPts val="0"/>
+                        </a:spcBef>
+                        <a:spcAft>
+                          <a:spcPts val="0"/>
+                        </a:spcAft>
+                      </a:pPr>
                       <a:r>
                         <a:rPr sz="1100" b="0">
                           <a:solidFill>
@@ -10235,7 +11795,7 @@
                       </a:r>
                     </a:p>
                   </a:txBody>
-                  <a:tcPr anchor="ctr" marL="50800" marR="50800" marT="25400" marB="25400">
+                  <a:tcPr anchor="ctr" marL="38100" marR="38100" marT="25400" marB="25400">
                     <a:solidFill>
                       <a:srgbClr val="FFFFFF"/>
                     </a:solidFill>
@@ -10262,13 +11822,23 @@
                   </a:tcPr>
                 </a:tc>
               </a:tr>
-              <a:tr h="725805">
-                <a:tc>
-                  <a:txBody>
-                    <a:bodyPr/>
-                    <a:lstStyle/>
-                    <a:p>
-                      <a:pPr algn="ctr"/>
+              <a:tr h="678484">
+                <a:tc>
+                  <a:txBody>
+                    <a:bodyPr/>
+                    <a:lstStyle/>
+                    <a:p>
+                      <a:pPr algn="ctr">
+                        <a:lnSpc>
+                          <a:spcPct val="100000"/>
+                        </a:lnSpc>
+                        <a:spcBef>
+                          <a:spcPts val="0"/>
+                        </a:spcBef>
+                        <a:spcAft>
+                          <a:spcPts val="0"/>
+                        </a:spcAft>
+                      </a:pPr>
                       <a:r>
                         <a:rPr sz="1100" b="0">
                           <a:solidFill>
@@ -10280,7 +11850,7 @@
                       </a:r>
                     </a:p>
                   </a:txBody>
-                  <a:tcPr anchor="ctr" marL="50800" marR="50800" marT="25400" marB="25400">
+                  <a:tcPr anchor="ctr" marL="38100" marR="38100" marT="25400" marB="25400">
                     <a:solidFill>
                       <a:srgbClr val="F8E7E8"/>
                     </a:solidFill>
@@ -10311,7 +11881,17 @@
                     <a:bodyPr/>
                     <a:lstStyle/>
                     <a:p>
-                      <a:pPr algn="l"/>
+                      <a:pPr algn="l">
+                        <a:lnSpc>
+                          <a:spcPct val="100000"/>
+                        </a:lnSpc>
+                        <a:spcBef>
+                          <a:spcPts val="0"/>
+                        </a:spcBef>
+                        <a:spcAft>
+                          <a:spcPts val="0"/>
+                        </a:spcAft>
+                      </a:pPr>
                       <a:r>
                         <a:rPr sz="1100" b="0">
                           <a:solidFill>
@@ -10323,7 +11903,7 @@
                       </a:r>
                     </a:p>
                   </a:txBody>
-                  <a:tcPr anchor="ctr" marL="50800" marR="50800" marT="25400" marB="25400">
+                  <a:tcPr anchor="ctr" marL="38100" marR="38100" marT="25400" marB="25400">
                     <a:solidFill>
                       <a:srgbClr val="F8E7E8"/>
                     </a:solidFill>
@@ -10354,7 +11934,17 @@
                     <a:bodyPr/>
                     <a:lstStyle/>
                     <a:p>
-                      <a:pPr algn="l"/>
+                      <a:pPr algn="l">
+                        <a:lnSpc>
+                          <a:spcPct val="100000"/>
+                        </a:lnSpc>
+                        <a:spcBef>
+                          <a:spcPts val="0"/>
+                        </a:spcBef>
+                        <a:spcAft>
+                          <a:spcPts val="0"/>
+                        </a:spcAft>
+                      </a:pPr>
                       <a:r>
                         <a:rPr sz="1100" b="0">
                           <a:solidFill>
@@ -10366,7 +11956,7 @@
                       </a:r>
                     </a:p>
                   </a:txBody>
-                  <a:tcPr anchor="ctr" marL="50800" marR="50800" marT="25400" marB="25400">
+                  <a:tcPr anchor="ctr" marL="38100" marR="38100" marT="25400" marB="25400">
                     <a:solidFill>
                       <a:srgbClr val="F8E7E8"/>
                     </a:solidFill>
@@ -10397,7 +11987,17 @@
                     <a:bodyPr/>
                     <a:lstStyle/>
                     <a:p>
-                      <a:pPr algn="l"/>
+                      <a:pPr algn="l">
+                        <a:lnSpc>
+                          <a:spcPct val="100000"/>
+                        </a:lnSpc>
+                        <a:spcBef>
+                          <a:spcPts val="0"/>
+                        </a:spcBef>
+                        <a:spcAft>
+                          <a:spcPts val="0"/>
+                        </a:spcAft>
+                      </a:pPr>
                       <a:r>
                         <a:rPr sz="1100" b="0">
                           <a:solidFill>
@@ -10409,7 +12009,7 @@
                       </a:r>
                     </a:p>
                   </a:txBody>
-                  <a:tcPr anchor="ctr" marL="50800" marR="50800" marT="25400" marB="25400">
+                  <a:tcPr anchor="ctr" marL="38100" marR="38100" marT="25400" marB="25400">
                     <a:solidFill>
                       <a:srgbClr val="F8E7E8"/>
                     </a:solidFill>
@@ -10440,7 +12040,17 @@
                     <a:bodyPr/>
                     <a:lstStyle/>
                     <a:p>
-                      <a:pPr algn="ctr"/>
+                      <a:pPr algn="r">
+                        <a:lnSpc>
+                          <a:spcPct val="100000"/>
+                        </a:lnSpc>
+                        <a:spcBef>
+                          <a:spcPts val="0"/>
+                        </a:spcBef>
+                        <a:spcAft>
+                          <a:spcPts val="0"/>
+                        </a:spcAft>
+                      </a:pPr>
                       <a:r>
                         <a:rPr sz="1100" b="0">
                           <a:solidFill>
@@ -10452,7 +12062,7 @@
                       </a:r>
                     </a:p>
                   </a:txBody>
-                  <a:tcPr anchor="ctr" marL="50800" marR="50800" marT="25400" marB="25400">
+                  <a:tcPr anchor="ctr" marL="38100" marR="38100" marT="25400" marB="25400">
                     <a:solidFill>
                       <a:srgbClr val="F8E7E8"/>
                     </a:solidFill>
@@ -10483,7 +12093,17 @@
                     <a:bodyPr/>
                     <a:lstStyle/>
                     <a:p>
-                      <a:pPr algn="l"/>
+                      <a:pPr algn="l">
+                        <a:lnSpc>
+                          <a:spcPct val="100000"/>
+                        </a:lnSpc>
+                        <a:spcBef>
+                          <a:spcPts val="0"/>
+                        </a:spcBef>
+                        <a:spcAft>
+                          <a:spcPts val="0"/>
+                        </a:spcAft>
+                      </a:pPr>
                       <a:r>
                         <a:rPr sz="1100" b="0">
                           <a:solidFill>
@@ -10495,7 +12115,7 @@
                       </a:r>
                     </a:p>
                   </a:txBody>
-                  <a:tcPr anchor="ctr" marL="50800" marR="50800" marT="25400" marB="25400">
+                  <a:tcPr anchor="ctr" marL="38100" marR="38100" marT="25400" marB="25400">
                     <a:solidFill>
                       <a:srgbClr val="F8E7E8"/>
                     </a:solidFill>
@@ -10522,13 +12142,23 @@
                   </a:tcPr>
                 </a:tc>
               </a:tr>
-              <a:tr h="725805">
-                <a:tc>
-                  <a:txBody>
-                    <a:bodyPr/>
-                    <a:lstStyle/>
-                    <a:p>
-                      <a:pPr algn="ctr"/>
+              <a:tr h="678484">
+                <a:tc>
+                  <a:txBody>
+                    <a:bodyPr/>
+                    <a:lstStyle/>
+                    <a:p>
+                      <a:pPr algn="ctr">
+                        <a:lnSpc>
+                          <a:spcPct val="100000"/>
+                        </a:lnSpc>
+                        <a:spcBef>
+                          <a:spcPts val="0"/>
+                        </a:spcBef>
+                        <a:spcAft>
+                          <a:spcPts val="0"/>
+                        </a:spcAft>
+                      </a:pPr>
                       <a:r>
                         <a:rPr sz="1100" b="0">
                           <a:solidFill>
@@ -10540,7 +12170,7 @@
                       </a:r>
                     </a:p>
                   </a:txBody>
-                  <a:tcPr anchor="ctr" marL="50800" marR="50800" marT="25400" marB="25400">
+                  <a:tcPr anchor="ctr" marL="38100" marR="38100" marT="25400" marB="25400">
                     <a:solidFill>
                       <a:srgbClr val="FFFFFF"/>
                     </a:solidFill>
@@ -10571,7 +12201,17 @@
                     <a:bodyPr/>
                     <a:lstStyle/>
                     <a:p>
-                      <a:pPr algn="l"/>
+                      <a:pPr algn="l">
+                        <a:lnSpc>
+                          <a:spcPct val="100000"/>
+                        </a:lnSpc>
+                        <a:spcBef>
+                          <a:spcPts val="0"/>
+                        </a:spcBef>
+                        <a:spcAft>
+                          <a:spcPts val="0"/>
+                        </a:spcAft>
+                      </a:pPr>
                       <a:r>
                         <a:rPr sz="1100" b="0">
                           <a:solidFill>
@@ -10583,7 +12223,7 @@
                       </a:r>
                     </a:p>
                   </a:txBody>
-                  <a:tcPr anchor="ctr" marL="50800" marR="50800" marT="25400" marB="25400">
+                  <a:tcPr anchor="ctr" marL="38100" marR="38100" marT="25400" marB="25400">
                     <a:solidFill>
                       <a:srgbClr val="FFFFFF"/>
                     </a:solidFill>
@@ -10614,7 +12254,17 @@
                     <a:bodyPr/>
                     <a:lstStyle/>
                     <a:p>
-                      <a:pPr algn="l"/>
+                      <a:pPr algn="l">
+                        <a:lnSpc>
+                          <a:spcPct val="100000"/>
+                        </a:lnSpc>
+                        <a:spcBef>
+                          <a:spcPts val="0"/>
+                        </a:spcBef>
+                        <a:spcAft>
+                          <a:spcPts val="0"/>
+                        </a:spcAft>
+                      </a:pPr>
                       <a:r>
                         <a:rPr sz="1100" b="0">
                           <a:solidFill>
@@ -10626,7 +12276,7 @@
                       </a:r>
                     </a:p>
                   </a:txBody>
-                  <a:tcPr anchor="ctr" marL="50800" marR="50800" marT="25400" marB="25400">
+                  <a:tcPr anchor="ctr" marL="38100" marR="38100" marT="25400" marB="25400">
                     <a:solidFill>
                       <a:srgbClr val="FFFFFF"/>
                     </a:solidFill>
@@ -10657,7 +12307,17 @@
                     <a:bodyPr/>
                     <a:lstStyle/>
                     <a:p>
-                      <a:pPr algn="l"/>
+                      <a:pPr algn="l">
+                        <a:lnSpc>
+                          <a:spcPct val="100000"/>
+                        </a:lnSpc>
+                        <a:spcBef>
+                          <a:spcPts val="0"/>
+                        </a:spcBef>
+                        <a:spcAft>
+                          <a:spcPts val="0"/>
+                        </a:spcAft>
+                      </a:pPr>
                       <a:r>
                         <a:rPr sz="1100" b="0">
                           <a:solidFill>
@@ -10669,7 +12329,7 @@
                       </a:r>
                     </a:p>
                   </a:txBody>
-                  <a:tcPr anchor="ctr" marL="50800" marR="50800" marT="25400" marB="25400">
+                  <a:tcPr anchor="ctr" marL="38100" marR="38100" marT="25400" marB="25400">
                     <a:solidFill>
                       <a:srgbClr val="FFFFFF"/>
                     </a:solidFill>
@@ -10700,10 +12360,20 @@
                     <a:bodyPr/>
                     <a:lstStyle/>
                     <a:p>
-                      <a:pPr algn="ctr"/>
-                    </a:p>
-                  </a:txBody>
-                  <a:tcPr anchor="ctr" marL="50800" marR="50800" marT="25400" marB="25400">
+                      <a:pPr algn="r">
+                        <a:lnSpc>
+                          <a:spcPct val="100000"/>
+                        </a:lnSpc>
+                        <a:spcBef>
+                          <a:spcPts val="0"/>
+                        </a:spcBef>
+                        <a:spcAft>
+                          <a:spcPts val="0"/>
+                        </a:spcAft>
+                      </a:pPr>
+                    </a:p>
+                  </a:txBody>
+                  <a:tcPr anchor="ctr" marL="38100" marR="38100" marT="25400" marB="25400">
                     <a:solidFill>
                       <a:srgbClr val="FFFFFF"/>
                     </a:solidFill>
@@ -10734,7 +12404,17 @@
                     <a:bodyPr/>
                     <a:lstStyle/>
                     <a:p>
-                      <a:pPr algn="l"/>
+                      <a:pPr algn="l">
+                        <a:lnSpc>
+                          <a:spcPct val="100000"/>
+                        </a:lnSpc>
+                        <a:spcBef>
+                          <a:spcPts val="0"/>
+                        </a:spcBef>
+                        <a:spcAft>
+                          <a:spcPts val="0"/>
+                        </a:spcAft>
+                      </a:pPr>
                       <a:r>
                         <a:rPr sz="1100" b="0">
                           <a:solidFill>
@@ -10746,7 +12426,7 @@
                       </a:r>
                     </a:p>
                   </a:txBody>
-                  <a:tcPr anchor="ctr" marL="50800" marR="50800" marT="25400" marB="25400">
+                  <a:tcPr anchor="ctr" marL="38100" marR="38100" marT="25400" marB="25400">
                     <a:solidFill>
                       <a:srgbClr val="FFFFFF"/>
                     </a:solidFill>
@@ -10773,13 +12453,23 @@
                   </a:tcPr>
                 </a:tc>
               </a:tr>
-              <a:tr h="725805">
-                <a:tc>
-                  <a:txBody>
-                    <a:bodyPr/>
-                    <a:lstStyle/>
-                    <a:p>
-                      <a:pPr algn="ctr"/>
+              <a:tr h="678484">
+                <a:tc>
+                  <a:txBody>
+                    <a:bodyPr/>
+                    <a:lstStyle/>
+                    <a:p>
+                      <a:pPr algn="ctr">
+                        <a:lnSpc>
+                          <a:spcPct val="100000"/>
+                        </a:lnSpc>
+                        <a:spcBef>
+                          <a:spcPts val="0"/>
+                        </a:spcBef>
+                        <a:spcAft>
+                          <a:spcPts val="0"/>
+                        </a:spcAft>
+                      </a:pPr>
                       <a:r>
                         <a:rPr sz="1100" b="0">
                           <a:solidFill>
@@ -10791,7 +12481,7 @@
                       </a:r>
                     </a:p>
                   </a:txBody>
-                  <a:tcPr anchor="ctr" marL="50800" marR="50800" marT="25400" marB="25400">
+                  <a:tcPr anchor="ctr" marL="38100" marR="38100" marT="25400" marB="25400">
                     <a:solidFill>
                       <a:srgbClr val="F8E7E8"/>
                     </a:solidFill>
@@ -10822,7 +12512,17 @@
                     <a:bodyPr/>
                     <a:lstStyle/>
                     <a:p>
-                      <a:pPr algn="l"/>
+                      <a:pPr algn="l">
+                        <a:lnSpc>
+                          <a:spcPct val="100000"/>
+                        </a:lnSpc>
+                        <a:spcBef>
+                          <a:spcPts val="0"/>
+                        </a:spcBef>
+                        <a:spcAft>
+                          <a:spcPts val="0"/>
+                        </a:spcAft>
+                      </a:pPr>
                       <a:r>
                         <a:rPr sz="1100" b="0">
                           <a:solidFill>
@@ -10834,7 +12534,7 @@
                       </a:r>
                     </a:p>
                   </a:txBody>
-                  <a:tcPr anchor="ctr" marL="50800" marR="50800" marT="25400" marB="25400">
+                  <a:tcPr anchor="ctr" marL="38100" marR="38100" marT="25400" marB="25400">
                     <a:solidFill>
                       <a:srgbClr val="F8E7E8"/>
                     </a:solidFill>
@@ -10865,7 +12565,17 @@
                     <a:bodyPr/>
                     <a:lstStyle/>
                     <a:p>
-                      <a:pPr algn="l"/>
+                      <a:pPr algn="l">
+                        <a:lnSpc>
+                          <a:spcPct val="100000"/>
+                        </a:lnSpc>
+                        <a:spcBef>
+                          <a:spcPts val="0"/>
+                        </a:spcBef>
+                        <a:spcAft>
+                          <a:spcPts val="0"/>
+                        </a:spcAft>
+                      </a:pPr>
                       <a:r>
                         <a:rPr sz="1100" b="0">
                           <a:solidFill>
@@ -10886,7 +12596,7 @@
                       </a:r>
                     </a:p>
                   </a:txBody>
-                  <a:tcPr anchor="ctr" marL="50800" marR="50800" marT="25400" marB="25400">
+                  <a:tcPr anchor="ctr" marL="38100" marR="38100" marT="25400" marB="25400">
                     <a:solidFill>
                       <a:srgbClr val="F8E7E8"/>
                     </a:solidFill>
@@ -10917,7 +12627,17 @@
                     <a:bodyPr/>
                     <a:lstStyle/>
                     <a:p>
-                      <a:pPr algn="l"/>
+                      <a:pPr algn="l">
+                        <a:lnSpc>
+                          <a:spcPct val="100000"/>
+                        </a:lnSpc>
+                        <a:spcBef>
+                          <a:spcPts val="0"/>
+                        </a:spcBef>
+                        <a:spcAft>
+                          <a:spcPts val="0"/>
+                        </a:spcAft>
+                      </a:pPr>
                       <a:r>
                         <a:rPr sz="1100" b="0">
                           <a:solidFill>
@@ -10929,7 +12649,7 @@
                       </a:r>
                     </a:p>
                   </a:txBody>
-                  <a:tcPr anchor="ctr" marL="50800" marR="50800" marT="25400" marB="25400">
+                  <a:tcPr anchor="ctr" marL="38100" marR="38100" marT="25400" marB="25400">
                     <a:solidFill>
                       <a:srgbClr val="F8E7E8"/>
                     </a:solidFill>
@@ -10960,7 +12680,17 @@
                     <a:bodyPr/>
                     <a:lstStyle/>
                     <a:p>
-                      <a:pPr algn="ctr"/>
+                      <a:pPr algn="r">
+                        <a:lnSpc>
+                          <a:spcPct val="100000"/>
+                        </a:lnSpc>
+                        <a:spcBef>
+                          <a:spcPts val="0"/>
+                        </a:spcBef>
+                        <a:spcAft>
+                          <a:spcPts val="0"/>
+                        </a:spcAft>
+                      </a:pPr>
                       <a:r>
                         <a:rPr sz="1100" b="0">
                           <a:solidFill>
@@ -10972,7 +12702,7 @@
                       </a:r>
                     </a:p>
                   </a:txBody>
-                  <a:tcPr anchor="ctr" marL="50800" marR="50800" marT="25400" marB="25400">
+                  <a:tcPr anchor="ctr" marL="38100" marR="38100" marT="25400" marB="25400">
                     <a:solidFill>
                       <a:srgbClr val="F8E7E8"/>
                     </a:solidFill>
@@ -11003,7 +12733,17 @@
                     <a:bodyPr/>
                     <a:lstStyle/>
                     <a:p>
-                      <a:pPr algn="l"/>
+                      <a:pPr algn="l">
+                        <a:lnSpc>
+                          <a:spcPct val="100000"/>
+                        </a:lnSpc>
+                        <a:spcBef>
+                          <a:spcPts val="0"/>
+                        </a:spcBef>
+                        <a:spcAft>
+                          <a:spcPts val="0"/>
+                        </a:spcAft>
+                      </a:pPr>
                       <a:r>
                         <a:rPr sz="1100" b="0">
                           <a:solidFill>
@@ -11015,7 +12755,7 @@
                       </a:r>
                     </a:p>
                   </a:txBody>
-                  <a:tcPr anchor="ctr" marL="50800" marR="50800" marT="25400" marB="25400">
+                  <a:tcPr anchor="ctr" marL="38100" marR="38100" marT="25400" marB="25400">
                     <a:solidFill>
                       <a:srgbClr val="F8E7E8"/>
                     </a:solidFill>
@@ -11042,13 +12782,23 @@
                   </a:tcPr>
                 </a:tc>
               </a:tr>
-              <a:tr h="725805">
-                <a:tc>
-                  <a:txBody>
-                    <a:bodyPr/>
-                    <a:lstStyle/>
-                    <a:p>
-                      <a:pPr algn="ctr"/>
+              <a:tr h="678484">
+                <a:tc>
+                  <a:txBody>
+                    <a:bodyPr/>
+                    <a:lstStyle/>
+                    <a:p>
+                      <a:pPr algn="ctr">
+                        <a:lnSpc>
+                          <a:spcPct val="100000"/>
+                        </a:lnSpc>
+                        <a:spcBef>
+                          <a:spcPts val="0"/>
+                        </a:spcBef>
+                        <a:spcAft>
+                          <a:spcPts val="0"/>
+                        </a:spcAft>
+                      </a:pPr>
                       <a:r>
                         <a:rPr sz="1100" b="0">
                           <a:solidFill>
@@ -11060,7 +12810,7 @@
                       </a:r>
                     </a:p>
                   </a:txBody>
-                  <a:tcPr anchor="ctr" marL="50800" marR="50800" marT="25400" marB="25400">
+                  <a:tcPr anchor="ctr" marL="38100" marR="38100" marT="25400" marB="25400">
                     <a:solidFill>
                       <a:srgbClr val="FFFFFF"/>
                     </a:solidFill>
@@ -11091,7 +12841,17 @@
                     <a:bodyPr/>
                     <a:lstStyle/>
                     <a:p>
-                      <a:pPr algn="l"/>
+                      <a:pPr algn="l">
+                        <a:lnSpc>
+                          <a:spcPct val="100000"/>
+                        </a:lnSpc>
+                        <a:spcBef>
+                          <a:spcPts val="0"/>
+                        </a:spcBef>
+                        <a:spcAft>
+                          <a:spcPts val="0"/>
+                        </a:spcAft>
+                      </a:pPr>
                       <a:r>
                         <a:rPr sz="1100" b="0">
                           <a:solidFill>
@@ -11103,7 +12863,7 @@
                       </a:r>
                     </a:p>
                   </a:txBody>
-                  <a:tcPr anchor="ctr" marL="50800" marR="50800" marT="25400" marB="25400">
+                  <a:tcPr anchor="ctr" marL="38100" marR="38100" marT="25400" marB="25400">
                     <a:solidFill>
                       <a:srgbClr val="FFFFFF"/>
                     </a:solidFill>
@@ -11134,7 +12894,17 @@
                     <a:bodyPr/>
                     <a:lstStyle/>
                     <a:p>
-                      <a:pPr algn="l"/>
+                      <a:pPr algn="l">
+                        <a:lnSpc>
+                          <a:spcPct val="100000"/>
+                        </a:lnSpc>
+                        <a:spcBef>
+                          <a:spcPts val="0"/>
+                        </a:spcBef>
+                        <a:spcAft>
+                          <a:spcPts val="0"/>
+                        </a:spcAft>
+                      </a:pPr>
                       <a:r>
                         <a:rPr sz="1100" b="0">
                           <a:solidFill>
@@ -11146,7 +12916,7 @@
                       </a:r>
                     </a:p>
                   </a:txBody>
-                  <a:tcPr anchor="ctr" marL="50800" marR="50800" marT="25400" marB="25400">
+                  <a:tcPr anchor="ctr" marL="38100" marR="38100" marT="25400" marB="25400">
                     <a:solidFill>
                       <a:srgbClr val="FFFFFF"/>
                     </a:solidFill>
@@ -11177,7 +12947,17 @@
                     <a:bodyPr/>
                     <a:lstStyle/>
                     <a:p>
-                      <a:pPr algn="l"/>
+                      <a:pPr algn="l">
+                        <a:lnSpc>
+                          <a:spcPct val="100000"/>
+                        </a:lnSpc>
+                        <a:spcBef>
+                          <a:spcPts val="0"/>
+                        </a:spcBef>
+                        <a:spcAft>
+                          <a:spcPts val="0"/>
+                        </a:spcAft>
+                      </a:pPr>
                       <a:r>
                         <a:rPr sz="1100" b="0">
                           <a:solidFill>
@@ -11189,7 +12969,7 @@
                       </a:r>
                     </a:p>
                   </a:txBody>
-                  <a:tcPr anchor="ctr" marL="50800" marR="50800" marT="25400" marB="25400">
+                  <a:tcPr anchor="ctr" marL="38100" marR="38100" marT="25400" marB="25400">
                     <a:solidFill>
                       <a:srgbClr val="FFFFFF"/>
                     </a:solidFill>
@@ -11220,7 +13000,17 @@
                     <a:bodyPr/>
                     <a:lstStyle/>
                     <a:p>
-                      <a:pPr algn="ctr"/>
+                      <a:pPr algn="r">
+                        <a:lnSpc>
+                          <a:spcPct val="100000"/>
+                        </a:lnSpc>
+                        <a:spcBef>
+                          <a:spcPts val="0"/>
+                        </a:spcBef>
+                        <a:spcAft>
+                          <a:spcPts val="0"/>
+                        </a:spcAft>
+                      </a:pPr>
                       <a:r>
                         <a:rPr sz="1100" b="0">
                           <a:solidFill>
@@ -11232,7 +13022,7 @@
                       </a:r>
                     </a:p>
                   </a:txBody>
-                  <a:tcPr anchor="ctr" marL="50800" marR="50800" marT="25400" marB="25400">
+                  <a:tcPr anchor="ctr" marL="38100" marR="38100" marT="25400" marB="25400">
                     <a:solidFill>
                       <a:srgbClr val="FFFFFF"/>
                     </a:solidFill>
@@ -11263,7 +13053,17 @@
                     <a:bodyPr/>
                     <a:lstStyle/>
                     <a:p>
-                      <a:pPr algn="l"/>
+                      <a:pPr algn="l">
+                        <a:lnSpc>
+                          <a:spcPct val="100000"/>
+                        </a:lnSpc>
+                        <a:spcBef>
+                          <a:spcPts val="0"/>
+                        </a:spcBef>
+                        <a:spcAft>
+                          <a:spcPts val="0"/>
+                        </a:spcAft>
+                      </a:pPr>
                       <a:r>
                         <a:rPr sz="1100" b="0">
                           <a:solidFill>
@@ -11275,7 +13075,7 @@
                       </a:r>
                     </a:p>
                   </a:txBody>
-                  <a:tcPr anchor="ctr" marL="50800" marR="50800" marT="25400" marB="25400">
+                  <a:tcPr anchor="ctr" marL="38100" marR="38100" marT="25400" marB="25400">
                     <a:solidFill>
                       <a:srgbClr val="FFFFFF"/>
                     </a:solidFill>
@@ -11302,13 +13102,23 @@
                   </a:tcPr>
                 </a:tc>
               </a:tr>
-              <a:tr h="725805">
-                <a:tc>
-                  <a:txBody>
-                    <a:bodyPr/>
-                    <a:lstStyle/>
-                    <a:p>
-                      <a:pPr algn="ctr"/>
+              <a:tr h="678484">
+                <a:tc>
+                  <a:txBody>
+                    <a:bodyPr/>
+                    <a:lstStyle/>
+                    <a:p>
+                      <a:pPr algn="ctr">
+                        <a:lnSpc>
+                          <a:spcPct val="100000"/>
+                        </a:lnSpc>
+                        <a:spcBef>
+                          <a:spcPts val="0"/>
+                        </a:spcBef>
+                        <a:spcAft>
+                          <a:spcPts val="0"/>
+                        </a:spcAft>
+                      </a:pPr>
                       <a:r>
                         <a:rPr sz="1100" b="0">
                           <a:solidFill>
@@ -11320,7 +13130,7 @@
                       </a:r>
                     </a:p>
                   </a:txBody>
-                  <a:tcPr anchor="ctr" marL="50800" marR="50800" marT="25400" marB="25400">
+                  <a:tcPr anchor="ctr" marL="38100" marR="38100" marT="25400" marB="25400">
                     <a:solidFill>
                       <a:srgbClr val="F8E7E8"/>
                     </a:solidFill>
@@ -11351,7 +13161,17 @@
                     <a:bodyPr/>
                     <a:lstStyle/>
                     <a:p>
-                      <a:pPr algn="l"/>
+                      <a:pPr algn="l">
+                        <a:lnSpc>
+                          <a:spcPct val="100000"/>
+                        </a:lnSpc>
+                        <a:spcBef>
+                          <a:spcPts val="0"/>
+                        </a:spcBef>
+                        <a:spcAft>
+                          <a:spcPts val="0"/>
+                        </a:spcAft>
+                      </a:pPr>
                       <a:r>
                         <a:rPr sz="1100" b="0">
                           <a:solidFill>
@@ -11363,7 +13183,7 @@
                       </a:r>
                     </a:p>
                   </a:txBody>
-                  <a:tcPr anchor="ctr" marL="50800" marR="50800" marT="25400" marB="25400">
+                  <a:tcPr anchor="ctr" marL="38100" marR="38100" marT="25400" marB="25400">
                     <a:solidFill>
                       <a:srgbClr val="F8E7E8"/>
                     </a:solidFill>
@@ -11394,7 +13214,17 @@
                     <a:bodyPr/>
                     <a:lstStyle/>
                     <a:p>
-                      <a:pPr algn="l"/>
+                      <a:pPr algn="l">
+                        <a:lnSpc>
+                          <a:spcPct val="100000"/>
+                        </a:lnSpc>
+                        <a:spcBef>
+                          <a:spcPts val="0"/>
+                        </a:spcBef>
+                        <a:spcAft>
+                          <a:spcPts val="0"/>
+                        </a:spcAft>
+                      </a:pPr>
                       <a:r>
                         <a:rPr sz="1100" b="0">
                           <a:solidFill>
@@ -11406,7 +13236,7 @@
                       </a:r>
                     </a:p>
                   </a:txBody>
-                  <a:tcPr anchor="ctr" marL="50800" marR="50800" marT="25400" marB="25400">
+                  <a:tcPr anchor="ctr" marL="38100" marR="38100" marT="25400" marB="25400">
                     <a:solidFill>
                       <a:srgbClr val="F8E7E8"/>
                     </a:solidFill>
@@ -11437,7 +13267,17 @@
                     <a:bodyPr/>
                     <a:lstStyle/>
                     <a:p>
-                      <a:pPr algn="l"/>
+                      <a:pPr algn="l">
+                        <a:lnSpc>
+                          <a:spcPct val="100000"/>
+                        </a:lnSpc>
+                        <a:spcBef>
+                          <a:spcPts val="0"/>
+                        </a:spcBef>
+                        <a:spcAft>
+                          <a:spcPts val="0"/>
+                        </a:spcAft>
+                      </a:pPr>
                       <a:r>
                         <a:rPr sz="1100" b="0">
                           <a:solidFill>
@@ -11449,7 +13289,7 @@
                       </a:r>
                     </a:p>
                   </a:txBody>
-                  <a:tcPr anchor="ctr" marL="50800" marR="50800" marT="25400" marB="25400">
+                  <a:tcPr anchor="ctr" marL="38100" marR="38100" marT="25400" marB="25400">
                     <a:solidFill>
                       <a:srgbClr val="F8E7E8"/>
                     </a:solidFill>
@@ -11480,7 +13320,17 @@
                     <a:bodyPr/>
                     <a:lstStyle/>
                     <a:p>
-                      <a:pPr algn="ctr"/>
+                      <a:pPr algn="r">
+                        <a:lnSpc>
+                          <a:spcPct val="100000"/>
+                        </a:lnSpc>
+                        <a:spcBef>
+                          <a:spcPts val="0"/>
+                        </a:spcBef>
+                        <a:spcAft>
+                          <a:spcPts val="0"/>
+                        </a:spcAft>
+                      </a:pPr>
                       <a:r>
                         <a:rPr sz="1100" b="0">
                           <a:solidFill>
@@ -11492,7 +13342,7 @@
                       </a:r>
                     </a:p>
                   </a:txBody>
-                  <a:tcPr anchor="ctr" marL="50800" marR="50800" marT="25400" marB="25400">
+                  <a:tcPr anchor="ctr" marL="38100" marR="38100" marT="25400" marB="25400">
                     <a:solidFill>
                       <a:srgbClr val="F8E7E8"/>
                     </a:solidFill>
@@ -11523,7 +13373,17 @@
                     <a:bodyPr/>
                     <a:lstStyle/>
                     <a:p>
-                      <a:pPr algn="l"/>
+                      <a:pPr algn="l">
+                        <a:lnSpc>
+                          <a:spcPct val="100000"/>
+                        </a:lnSpc>
+                        <a:spcBef>
+                          <a:spcPts val="0"/>
+                        </a:spcBef>
+                        <a:spcAft>
+                          <a:spcPts val="0"/>
+                        </a:spcAft>
+                      </a:pPr>
                       <a:r>
                         <a:rPr sz="1100" b="0">
                           <a:solidFill>
@@ -11535,7 +13395,7 @@
                       </a:r>
                     </a:p>
                   </a:txBody>
-                  <a:tcPr anchor="ctr" marL="50800" marR="50800" marT="25400" marB="25400">
+                  <a:tcPr anchor="ctr" marL="38100" marR="38100" marT="25400" marB="25400">
                     <a:solidFill>
                       <a:srgbClr val="F8E7E8"/>
                     </a:solidFill>
@@ -11562,13 +13422,23 @@
                   </a:tcPr>
                 </a:tc>
               </a:tr>
-              <a:tr h="725805">
-                <a:tc>
-                  <a:txBody>
-                    <a:bodyPr/>
-                    <a:lstStyle/>
-                    <a:p>
-                      <a:pPr algn="ctr"/>
+              <a:tr h="678484">
+                <a:tc>
+                  <a:txBody>
+                    <a:bodyPr/>
+                    <a:lstStyle/>
+                    <a:p>
+                      <a:pPr algn="ctr">
+                        <a:lnSpc>
+                          <a:spcPct val="100000"/>
+                        </a:lnSpc>
+                        <a:spcBef>
+                          <a:spcPts val="0"/>
+                        </a:spcBef>
+                        <a:spcAft>
+                          <a:spcPts val="0"/>
+                        </a:spcAft>
+                      </a:pPr>
                       <a:r>
                         <a:rPr sz="1100" b="0">
                           <a:solidFill>
@@ -11580,7 +13450,7 @@
                       </a:r>
                     </a:p>
                   </a:txBody>
-                  <a:tcPr anchor="ctr" marL="50800" marR="50800" marT="25400" marB="25400">
+                  <a:tcPr anchor="ctr" marL="38100" marR="38100" marT="25400" marB="25400">
                     <a:solidFill>
                       <a:srgbClr val="FFFFFF"/>
                     </a:solidFill>
@@ -11611,7 +13481,17 @@
                     <a:bodyPr/>
                     <a:lstStyle/>
                     <a:p>
-                      <a:pPr algn="l"/>
+                      <a:pPr algn="l">
+                        <a:lnSpc>
+                          <a:spcPct val="100000"/>
+                        </a:lnSpc>
+                        <a:spcBef>
+                          <a:spcPts val="0"/>
+                        </a:spcBef>
+                        <a:spcAft>
+                          <a:spcPts val="0"/>
+                        </a:spcAft>
+                      </a:pPr>
                       <a:r>
                         <a:rPr sz="1100" b="0">
                           <a:solidFill>
@@ -11623,7 +13503,7 @@
                       </a:r>
                     </a:p>
                   </a:txBody>
-                  <a:tcPr anchor="ctr" marL="50800" marR="50800" marT="25400" marB="25400">
+                  <a:tcPr anchor="ctr" marL="38100" marR="38100" marT="25400" marB="25400">
                     <a:solidFill>
                       <a:srgbClr val="FFFFFF"/>
                     </a:solidFill>
@@ -11654,7 +13534,17 @@
                     <a:bodyPr/>
                     <a:lstStyle/>
                     <a:p>
-                      <a:pPr algn="l"/>
+                      <a:pPr algn="l">
+                        <a:lnSpc>
+                          <a:spcPct val="100000"/>
+                        </a:lnSpc>
+                        <a:spcBef>
+                          <a:spcPts val="0"/>
+                        </a:spcBef>
+                        <a:spcAft>
+                          <a:spcPts val="0"/>
+                        </a:spcAft>
+                      </a:pPr>
                       <a:r>
                         <a:rPr sz="1100" b="0">
                           <a:solidFill>
@@ -11666,7 +13556,7 @@
                       </a:r>
                     </a:p>
                   </a:txBody>
-                  <a:tcPr anchor="ctr" marL="50800" marR="50800" marT="25400" marB="25400">
+                  <a:tcPr anchor="ctr" marL="38100" marR="38100" marT="25400" marB="25400">
                     <a:solidFill>
                       <a:srgbClr val="FFFFFF"/>
                     </a:solidFill>
@@ -11697,7 +13587,17 @@
                     <a:bodyPr/>
                     <a:lstStyle/>
                     <a:p>
-                      <a:pPr algn="l"/>
+                      <a:pPr algn="l">
+                        <a:lnSpc>
+                          <a:spcPct val="100000"/>
+                        </a:lnSpc>
+                        <a:spcBef>
+                          <a:spcPts val="0"/>
+                        </a:spcBef>
+                        <a:spcAft>
+                          <a:spcPts val="0"/>
+                        </a:spcAft>
+                      </a:pPr>
                       <a:r>
                         <a:rPr sz="1100" b="0">
                           <a:solidFill>
@@ -11709,7 +13609,7 @@
                       </a:r>
                     </a:p>
                   </a:txBody>
-                  <a:tcPr anchor="ctr" marL="50800" marR="50800" marT="25400" marB="25400">
+                  <a:tcPr anchor="ctr" marL="38100" marR="38100" marT="25400" marB="25400">
                     <a:solidFill>
                       <a:srgbClr val="FFFFFF"/>
                     </a:solidFill>
@@ -11740,7 +13640,17 @@
                     <a:bodyPr/>
                     <a:lstStyle/>
                     <a:p>
-                      <a:pPr algn="ctr"/>
+                      <a:pPr algn="r">
+                        <a:lnSpc>
+                          <a:spcPct val="100000"/>
+                        </a:lnSpc>
+                        <a:spcBef>
+                          <a:spcPts val="0"/>
+                        </a:spcBef>
+                        <a:spcAft>
+                          <a:spcPts val="0"/>
+                        </a:spcAft>
+                      </a:pPr>
                       <a:r>
                         <a:rPr sz="1100" b="0">
                           <a:solidFill>
@@ -11752,7 +13662,7 @@
                       </a:r>
                     </a:p>
                   </a:txBody>
-                  <a:tcPr anchor="ctr" marL="50800" marR="50800" marT="25400" marB="25400">
+                  <a:tcPr anchor="ctr" marL="38100" marR="38100" marT="25400" marB="25400">
                     <a:solidFill>
                       <a:srgbClr val="FFFFFF"/>
                     </a:solidFill>
@@ -11783,7 +13693,17 @@
                     <a:bodyPr/>
                     <a:lstStyle/>
                     <a:p>
-                      <a:pPr algn="l"/>
+                      <a:pPr algn="l">
+                        <a:lnSpc>
+                          <a:spcPct val="100000"/>
+                        </a:lnSpc>
+                        <a:spcBef>
+                          <a:spcPts val="0"/>
+                        </a:spcBef>
+                        <a:spcAft>
+                          <a:spcPts val="0"/>
+                        </a:spcAft>
+                      </a:pPr>
                       <a:r>
                         <a:rPr sz="1100" b="0">
                           <a:solidFill>
@@ -11795,7 +13715,7 @@
                       </a:r>
                     </a:p>
                   </a:txBody>
-                  <a:tcPr anchor="ctr" marL="50800" marR="50800" marT="25400" marB="25400">
+                  <a:tcPr anchor="ctr" marL="38100" marR="38100" marT="25400" marB="25400">
                     <a:solidFill>
                       <a:srgbClr val="FFFFFF"/>
                     </a:solidFill>
@@ -11860,8 +13780,8 @@
         </p:blipFill>
         <p:spPr>
           <a:xfrm>
-            <a:off x="9646920" y="73152"/>
-            <a:ext cx="2148840" cy="792454"/>
+            <a:off x="9377172" y="102412"/>
+            <a:ext cx="2423160" cy="893618"/>
           </a:xfrm>
           <a:prstGeom prst="rect">
             <a:avLst/>
@@ -11876,8 +13796,8 @@
         </p:nvSpPr>
         <p:spPr>
           <a:xfrm>
-            <a:off x="320040" y="109728"/>
-            <a:ext cx="8686800" cy="502920"/>
+            <a:off x="561441" y="330098"/>
+            <a:ext cx="7772400" cy="411480"/>
           </a:xfrm>
           <a:prstGeom prst="rect">
             <a:avLst/>
@@ -11912,8 +13832,8 @@
           <p:nvPr/>
         </p:nvGraphicFramePr>
         <p:xfrm>
-          <a:off x="320040" y="685800"/>
-          <a:ext cx="10469880" cy="5806440"/>
+          <a:off x="533095" y="1030528"/>
+          <a:ext cx="11415367" cy="5488223"/>
         </p:xfrm>
         <a:graphic>
           <a:graphicData uri="http://schemas.openxmlformats.org/drawingml/2006/table">
@@ -11922,20 +13842,30 @@
                 <a:tableStyleId>{5C22544A-7EE6-4342-B048-85BDC9FD1C3A}</a:tableStyleId>
               </a:tblPr>
               <a:tblGrid>
-                <a:gridCol w="411480"/>
-                <a:gridCol w="777240"/>
-                <a:gridCol w="3429000"/>
-                <a:gridCol w="3246120"/>
-                <a:gridCol w="1097280"/>
-                <a:gridCol w="1508760"/>
+                <a:gridCol w="480974"/>
+                <a:gridCol w="863193"/>
+                <a:gridCol w="3704234"/>
+                <a:gridCol w="3461004"/>
+                <a:gridCol w="1194206"/>
+                <a:gridCol w="1711756"/>
               </a:tblGrid>
-              <a:tr h="725805">
-                <a:tc>
-                  <a:txBody>
-                    <a:bodyPr/>
-                    <a:lstStyle/>
-                    <a:p>
-                      <a:pPr algn="ctr"/>
+              <a:tr h="738835">
+                <a:tc>
+                  <a:txBody>
+                    <a:bodyPr/>
+                    <a:lstStyle/>
+                    <a:p>
+                      <a:pPr algn="ctr">
+                        <a:lnSpc>
+                          <a:spcPct val="100000"/>
+                        </a:lnSpc>
+                        <a:spcBef>
+                          <a:spcPts val="0"/>
+                        </a:spcBef>
+                        <a:spcAft>
+                          <a:spcPts val="0"/>
+                        </a:spcAft>
+                      </a:pPr>
                       <a:r>
                         <a:rPr sz="1200" b="1">
                           <a:solidFill>
@@ -11947,7 +13877,7 @@
                       </a:r>
                     </a:p>
                   </a:txBody>
-                  <a:tcPr anchor="ctr" marL="50800" marR="50800" marT="25400" marB="25400">
+                  <a:tcPr anchor="ctr" marL="38100" marR="38100" marT="25400" marB="25400">
                     <a:solidFill>
                       <a:srgbClr val="AF182E"/>
                     </a:solidFill>
@@ -11978,7 +13908,17 @@
                     <a:bodyPr/>
                     <a:lstStyle/>
                     <a:p>
-                      <a:pPr algn="ctr"/>
+                      <a:pPr algn="ctr">
+                        <a:lnSpc>
+                          <a:spcPct val="100000"/>
+                        </a:lnSpc>
+                        <a:spcBef>
+                          <a:spcPts val="0"/>
+                        </a:spcBef>
+                        <a:spcAft>
+                          <a:spcPts val="0"/>
+                        </a:spcAft>
+                      </a:pPr>
                       <a:r>
                         <a:rPr sz="1200" b="1">
                           <a:solidFill>
@@ -11990,7 +13930,7 @@
                       </a:r>
                     </a:p>
                   </a:txBody>
-                  <a:tcPr anchor="ctr" marL="50800" marR="50800" marT="25400" marB="25400">
+                  <a:tcPr anchor="ctr" marL="38100" marR="38100" marT="25400" marB="25400">
                     <a:solidFill>
                       <a:srgbClr val="AF182E"/>
                     </a:solidFill>
@@ -12021,7 +13961,17 @@
                     <a:bodyPr/>
                     <a:lstStyle/>
                     <a:p>
-                      <a:pPr algn="ctr"/>
+                      <a:pPr algn="ctr">
+                        <a:lnSpc>
+                          <a:spcPct val="100000"/>
+                        </a:lnSpc>
+                        <a:spcBef>
+                          <a:spcPts val="0"/>
+                        </a:spcBef>
+                        <a:spcAft>
+                          <a:spcPts val="0"/>
+                        </a:spcAft>
+                      </a:pPr>
                       <a:r>
                         <a:rPr sz="1200" b="1">
                           <a:solidFill>
@@ -12033,7 +13983,7 @@
                       </a:r>
                     </a:p>
                   </a:txBody>
-                  <a:tcPr anchor="ctr" marL="50800" marR="50800" marT="25400" marB="25400">
+                  <a:tcPr anchor="ctr" marL="38100" marR="38100" marT="25400" marB="25400">
                     <a:solidFill>
                       <a:srgbClr val="AF182E"/>
                     </a:solidFill>
@@ -12064,7 +14014,17 @@
                     <a:bodyPr/>
                     <a:lstStyle/>
                     <a:p>
-                      <a:pPr algn="ctr"/>
+                      <a:pPr algn="ctr">
+                        <a:lnSpc>
+                          <a:spcPct val="100000"/>
+                        </a:lnSpc>
+                        <a:spcBef>
+                          <a:spcPts val="0"/>
+                        </a:spcBef>
+                        <a:spcAft>
+                          <a:spcPts val="0"/>
+                        </a:spcAft>
+                      </a:pPr>
                       <a:r>
                         <a:rPr sz="1200" b="1">
                           <a:solidFill>
@@ -12076,7 +14036,7 @@
                       </a:r>
                     </a:p>
                   </a:txBody>
-                  <a:tcPr anchor="ctr" marL="50800" marR="50800" marT="25400" marB="25400">
+                  <a:tcPr anchor="ctr" marL="38100" marR="38100" marT="25400" marB="25400">
                     <a:solidFill>
                       <a:srgbClr val="AF182E"/>
                     </a:solidFill>
@@ -12107,7 +14067,17 @@
                     <a:bodyPr/>
                     <a:lstStyle/>
                     <a:p>
-                      <a:pPr algn="ctr"/>
+                      <a:pPr algn="ctr">
+                        <a:lnSpc>
+                          <a:spcPct val="100000"/>
+                        </a:lnSpc>
+                        <a:spcBef>
+                          <a:spcPts val="0"/>
+                        </a:spcBef>
+                        <a:spcAft>
+                          <a:spcPts val="0"/>
+                        </a:spcAft>
+                      </a:pPr>
                       <a:r>
                         <a:rPr sz="1200" b="1">
                           <a:solidFill>
@@ -12122,7 +14092,7 @@
                       </a:r>
                     </a:p>
                   </a:txBody>
-                  <a:tcPr anchor="ctr" marL="50800" marR="50800" marT="25400" marB="25400">
+                  <a:tcPr anchor="ctr" marL="38100" marR="38100" marT="25400" marB="25400">
                     <a:solidFill>
                       <a:srgbClr val="AF182E"/>
                     </a:solidFill>
@@ -12153,7 +14123,17 @@
                     <a:bodyPr/>
                     <a:lstStyle/>
                     <a:p>
-                      <a:pPr algn="ctr"/>
+                      <a:pPr algn="ctr">
+                        <a:lnSpc>
+                          <a:spcPct val="100000"/>
+                        </a:lnSpc>
+                        <a:spcBef>
+                          <a:spcPts val="0"/>
+                        </a:spcBef>
+                        <a:spcAft>
+                          <a:spcPts val="0"/>
+                        </a:spcAft>
+                      </a:pPr>
                       <a:r>
                         <a:rPr sz="1200" b="1">
                           <a:solidFill>
@@ -12165,7 +14145,7 @@
                       </a:r>
                     </a:p>
                   </a:txBody>
-                  <a:tcPr anchor="ctr" marL="50800" marR="50800" marT="25400" marB="25400">
+                  <a:tcPr anchor="ctr" marL="38100" marR="38100" marT="25400" marB="25400">
                     <a:solidFill>
                       <a:srgbClr val="AF182E"/>
                     </a:solidFill>
@@ -12192,13 +14172,23 @@
                   </a:tcPr>
                 </a:tc>
               </a:tr>
-              <a:tr h="725805">
-                <a:tc>
-                  <a:txBody>
-                    <a:bodyPr/>
-                    <a:lstStyle/>
-                    <a:p>
-                      <a:pPr algn="ctr"/>
+              <a:tr h="678484">
+                <a:tc>
+                  <a:txBody>
+                    <a:bodyPr/>
+                    <a:lstStyle/>
+                    <a:p>
+                      <a:pPr algn="ctr">
+                        <a:lnSpc>
+                          <a:spcPct val="100000"/>
+                        </a:lnSpc>
+                        <a:spcBef>
+                          <a:spcPts val="0"/>
+                        </a:spcBef>
+                        <a:spcAft>
+                          <a:spcPts val="0"/>
+                        </a:spcAft>
+                      </a:pPr>
                       <a:r>
                         <a:rPr sz="1100" b="0">
                           <a:solidFill>
@@ -12210,7 +14200,7 @@
                       </a:r>
                     </a:p>
                   </a:txBody>
-                  <a:tcPr anchor="ctr" marL="50800" marR="50800" marT="25400" marB="25400">
+                  <a:tcPr anchor="ctr" marL="38100" marR="38100" marT="25400" marB="25400">
                     <a:solidFill>
                       <a:srgbClr val="FFFFFF"/>
                     </a:solidFill>
@@ -12241,7 +14231,17 @@
                     <a:bodyPr/>
                     <a:lstStyle/>
                     <a:p>
-                      <a:pPr algn="l"/>
+                      <a:pPr algn="l">
+                        <a:lnSpc>
+                          <a:spcPct val="100000"/>
+                        </a:lnSpc>
+                        <a:spcBef>
+                          <a:spcPts val="0"/>
+                        </a:spcBef>
+                        <a:spcAft>
+                          <a:spcPts val="0"/>
+                        </a:spcAft>
+                      </a:pPr>
                       <a:r>
                         <a:rPr sz="1100" b="0">
                           <a:solidFill>
@@ -12253,7 +14253,7 @@
                       </a:r>
                     </a:p>
                   </a:txBody>
-                  <a:tcPr anchor="ctr" marL="50800" marR="50800" marT="25400" marB="25400">
+                  <a:tcPr anchor="ctr" marL="38100" marR="38100" marT="25400" marB="25400">
                     <a:solidFill>
                       <a:srgbClr val="FFFFFF"/>
                     </a:solidFill>
@@ -12284,7 +14284,17 @@
                     <a:bodyPr/>
                     <a:lstStyle/>
                     <a:p>
-                      <a:pPr algn="l"/>
+                      <a:pPr algn="l">
+                        <a:lnSpc>
+                          <a:spcPct val="100000"/>
+                        </a:lnSpc>
+                        <a:spcBef>
+                          <a:spcPts val="0"/>
+                        </a:spcBef>
+                        <a:spcAft>
+                          <a:spcPts val="0"/>
+                        </a:spcAft>
+                      </a:pPr>
                       <a:r>
                         <a:rPr sz="1100" b="0">
                           <a:solidFill>
@@ -12296,7 +14306,7 @@
                       </a:r>
                     </a:p>
                   </a:txBody>
-                  <a:tcPr anchor="ctr" marL="50800" marR="50800" marT="25400" marB="25400">
+                  <a:tcPr anchor="ctr" marL="38100" marR="38100" marT="25400" marB="25400">
                     <a:solidFill>
                       <a:srgbClr val="FFFFFF"/>
                     </a:solidFill>
@@ -12327,7 +14337,17 @@
                     <a:bodyPr/>
                     <a:lstStyle/>
                     <a:p>
-                      <a:pPr algn="l"/>
+                      <a:pPr algn="l">
+                        <a:lnSpc>
+                          <a:spcPct val="100000"/>
+                        </a:lnSpc>
+                        <a:spcBef>
+                          <a:spcPts val="0"/>
+                        </a:spcBef>
+                        <a:spcAft>
+                          <a:spcPts val="0"/>
+                        </a:spcAft>
+                      </a:pPr>
                       <a:r>
                         <a:rPr sz="1100" b="0">
                           <a:solidFill>
@@ -12339,7 +14359,7 @@
                       </a:r>
                     </a:p>
                   </a:txBody>
-                  <a:tcPr anchor="ctr" marL="50800" marR="50800" marT="25400" marB="25400">
+                  <a:tcPr anchor="ctr" marL="38100" marR="38100" marT="25400" marB="25400">
                     <a:solidFill>
                       <a:srgbClr val="FFFFFF"/>
                     </a:solidFill>
@@ -12370,7 +14390,17 @@
                     <a:bodyPr/>
                     <a:lstStyle/>
                     <a:p>
-                      <a:pPr algn="ctr"/>
+                      <a:pPr algn="r">
+                        <a:lnSpc>
+                          <a:spcPct val="100000"/>
+                        </a:lnSpc>
+                        <a:spcBef>
+                          <a:spcPts val="0"/>
+                        </a:spcBef>
+                        <a:spcAft>
+                          <a:spcPts val="0"/>
+                        </a:spcAft>
+                      </a:pPr>
                       <a:r>
                         <a:rPr sz="1100" b="0">
                           <a:solidFill>
@@ -12382,7 +14412,7 @@
                       </a:r>
                     </a:p>
                   </a:txBody>
-                  <a:tcPr anchor="ctr" marL="50800" marR="50800" marT="25400" marB="25400">
+                  <a:tcPr anchor="ctr" marL="38100" marR="38100" marT="25400" marB="25400">
                     <a:solidFill>
                       <a:srgbClr val="FFFFFF"/>
                     </a:solidFill>
@@ -12413,7 +14443,17 @@
                     <a:bodyPr/>
                     <a:lstStyle/>
                     <a:p>
-                      <a:pPr algn="l"/>
+                      <a:pPr algn="l">
+                        <a:lnSpc>
+                          <a:spcPct val="100000"/>
+                        </a:lnSpc>
+                        <a:spcBef>
+                          <a:spcPts val="0"/>
+                        </a:spcBef>
+                        <a:spcAft>
+                          <a:spcPts val="0"/>
+                        </a:spcAft>
+                      </a:pPr>
                       <a:r>
                         <a:rPr sz="1100" b="0">
                           <a:solidFill>
@@ -12425,7 +14465,7 @@
                       </a:r>
                     </a:p>
                   </a:txBody>
-                  <a:tcPr anchor="ctr" marL="50800" marR="50800" marT="25400" marB="25400">
+                  <a:tcPr anchor="ctr" marL="38100" marR="38100" marT="25400" marB="25400">
                     <a:solidFill>
                       <a:srgbClr val="FFFFFF"/>
                     </a:solidFill>
@@ -12452,13 +14492,23 @@
                   </a:tcPr>
                 </a:tc>
               </a:tr>
-              <a:tr h="725805">
-                <a:tc>
-                  <a:txBody>
-                    <a:bodyPr/>
-                    <a:lstStyle/>
-                    <a:p>
-                      <a:pPr algn="ctr"/>
+              <a:tr h="678484">
+                <a:tc>
+                  <a:txBody>
+                    <a:bodyPr/>
+                    <a:lstStyle/>
+                    <a:p>
+                      <a:pPr algn="ctr">
+                        <a:lnSpc>
+                          <a:spcPct val="100000"/>
+                        </a:lnSpc>
+                        <a:spcBef>
+                          <a:spcPts val="0"/>
+                        </a:spcBef>
+                        <a:spcAft>
+                          <a:spcPts val="0"/>
+                        </a:spcAft>
+                      </a:pPr>
                       <a:r>
                         <a:rPr sz="1100" b="0">
                           <a:solidFill>
@@ -12470,7 +14520,7 @@
                       </a:r>
                     </a:p>
                   </a:txBody>
-                  <a:tcPr anchor="ctr" marL="50800" marR="50800" marT="25400" marB="25400">
+                  <a:tcPr anchor="ctr" marL="38100" marR="38100" marT="25400" marB="25400">
                     <a:solidFill>
                       <a:srgbClr val="F8E7E8"/>
                     </a:solidFill>
@@ -12501,7 +14551,17 @@
                     <a:bodyPr/>
                     <a:lstStyle/>
                     <a:p>
-                      <a:pPr algn="l"/>
+                      <a:pPr algn="l">
+                        <a:lnSpc>
+                          <a:spcPct val="100000"/>
+                        </a:lnSpc>
+                        <a:spcBef>
+                          <a:spcPts val="0"/>
+                        </a:spcBef>
+                        <a:spcAft>
+                          <a:spcPts val="0"/>
+                        </a:spcAft>
+                      </a:pPr>
                       <a:r>
                         <a:rPr sz="1100" b="0">
                           <a:solidFill>
@@ -12513,7 +14573,7 @@
                       </a:r>
                     </a:p>
                   </a:txBody>
-                  <a:tcPr anchor="ctr" marL="50800" marR="50800" marT="25400" marB="25400">
+                  <a:tcPr anchor="ctr" marL="38100" marR="38100" marT="25400" marB="25400">
                     <a:solidFill>
                       <a:srgbClr val="F8E7E8"/>
                     </a:solidFill>
@@ -12544,7 +14604,17 @@
                     <a:bodyPr/>
                     <a:lstStyle/>
                     <a:p>
-                      <a:pPr algn="l"/>
+                      <a:pPr algn="l">
+                        <a:lnSpc>
+                          <a:spcPct val="100000"/>
+                        </a:lnSpc>
+                        <a:spcBef>
+                          <a:spcPts val="0"/>
+                        </a:spcBef>
+                        <a:spcAft>
+                          <a:spcPts val="0"/>
+                        </a:spcAft>
+                      </a:pPr>
                       <a:r>
                         <a:rPr sz="1100" b="0">
                           <a:solidFill>
@@ -12556,7 +14626,7 @@
                       </a:r>
                     </a:p>
                   </a:txBody>
-                  <a:tcPr anchor="ctr" marL="50800" marR="50800" marT="25400" marB="25400">
+                  <a:tcPr anchor="ctr" marL="38100" marR="38100" marT="25400" marB="25400">
                     <a:solidFill>
                       <a:srgbClr val="F8E7E8"/>
                     </a:solidFill>
@@ -12587,7 +14657,17 @@
                     <a:bodyPr/>
                     <a:lstStyle/>
                     <a:p>
-                      <a:pPr algn="l"/>
+                      <a:pPr algn="l">
+                        <a:lnSpc>
+                          <a:spcPct val="100000"/>
+                        </a:lnSpc>
+                        <a:spcBef>
+                          <a:spcPts val="0"/>
+                        </a:spcBef>
+                        <a:spcAft>
+                          <a:spcPts val="0"/>
+                        </a:spcAft>
+                      </a:pPr>
                       <a:r>
                         <a:rPr sz="1100" b="0">
                           <a:solidFill>
@@ -12599,7 +14679,7 @@
                       </a:r>
                     </a:p>
                   </a:txBody>
-                  <a:tcPr anchor="ctr" marL="50800" marR="50800" marT="25400" marB="25400">
+                  <a:tcPr anchor="ctr" marL="38100" marR="38100" marT="25400" marB="25400">
                     <a:solidFill>
                       <a:srgbClr val="F8E7E8"/>
                     </a:solidFill>
@@ -12630,7 +14710,17 @@
                     <a:bodyPr/>
                     <a:lstStyle/>
                     <a:p>
-                      <a:pPr algn="ctr"/>
+                      <a:pPr algn="r">
+                        <a:lnSpc>
+                          <a:spcPct val="100000"/>
+                        </a:lnSpc>
+                        <a:spcBef>
+                          <a:spcPts val="0"/>
+                        </a:spcBef>
+                        <a:spcAft>
+                          <a:spcPts val="0"/>
+                        </a:spcAft>
+                      </a:pPr>
                       <a:r>
                         <a:rPr sz="1100" b="0">
                           <a:solidFill>
@@ -12642,7 +14732,7 @@
                       </a:r>
                     </a:p>
                   </a:txBody>
-                  <a:tcPr anchor="ctr" marL="50800" marR="50800" marT="25400" marB="25400">
+                  <a:tcPr anchor="ctr" marL="38100" marR="38100" marT="25400" marB="25400">
                     <a:solidFill>
                       <a:srgbClr val="F8E7E8"/>
                     </a:solidFill>
@@ -12673,7 +14763,17 @@
                     <a:bodyPr/>
                     <a:lstStyle/>
                     <a:p>
-                      <a:pPr algn="l"/>
+                      <a:pPr algn="l">
+                        <a:lnSpc>
+                          <a:spcPct val="100000"/>
+                        </a:lnSpc>
+                        <a:spcBef>
+                          <a:spcPts val="0"/>
+                        </a:spcBef>
+                        <a:spcAft>
+                          <a:spcPts val="0"/>
+                        </a:spcAft>
+                      </a:pPr>
                       <a:r>
                         <a:rPr sz="1100" b="0">
                           <a:solidFill>
@@ -12685,7 +14785,7 @@
                       </a:r>
                     </a:p>
                   </a:txBody>
-                  <a:tcPr anchor="ctr" marL="50800" marR="50800" marT="25400" marB="25400">
+                  <a:tcPr anchor="ctr" marL="38100" marR="38100" marT="25400" marB="25400">
                     <a:solidFill>
                       <a:srgbClr val="F8E7E8"/>
                     </a:solidFill>
@@ -12712,13 +14812,23 @@
                   </a:tcPr>
                 </a:tc>
               </a:tr>
-              <a:tr h="725805">
-                <a:tc>
-                  <a:txBody>
-                    <a:bodyPr/>
-                    <a:lstStyle/>
-                    <a:p>
-                      <a:pPr algn="ctr"/>
+              <a:tr h="678484">
+                <a:tc>
+                  <a:txBody>
+                    <a:bodyPr/>
+                    <a:lstStyle/>
+                    <a:p>
+                      <a:pPr algn="ctr">
+                        <a:lnSpc>
+                          <a:spcPct val="100000"/>
+                        </a:lnSpc>
+                        <a:spcBef>
+                          <a:spcPts val="0"/>
+                        </a:spcBef>
+                        <a:spcAft>
+                          <a:spcPts val="0"/>
+                        </a:spcAft>
+                      </a:pPr>
                       <a:r>
                         <a:rPr sz="1100" b="0">
                           <a:solidFill>
@@ -12730,7 +14840,7 @@
                       </a:r>
                     </a:p>
                   </a:txBody>
-                  <a:tcPr anchor="ctr" marL="50800" marR="50800" marT="25400" marB="25400">
+                  <a:tcPr anchor="ctr" marL="38100" marR="38100" marT="25400" marB="25400">
                     <a:solidFill>
                       <a:srgbClr val="FFFFFF"/>
                     </a:solidFill>
@@ -12761,7 +14871,17 @@
                     <a:bodyPr/>
                     <a:lstStyle/>
                     <a:p>
-                      <a:pPr algn="l"/>
+                      <a:pPr algn="l">
+                        <a:lnSpc>
+                          <a:spcPct val="100000"/>
+                        </a:lnSpc>
+                        <a:spcBef>
+                          <a:spcPts val="0"/>
+                        </a:spcBef>
+                        <a:spcAft>
+                          <a:spcPts val="0"/>
+                        </a:spcAft>
+                      </a:pPr>
                       <a:r>
                         <a:rPr sz="1100" b="0">
                           <a:solidFill>
@@ -12773,7 +14893,7 @@
                       </a:r>
                     </a:p>
                   </a:txBody>
-                  <a:tcPr anchor="ctr" marL="50800" marR="50800" marT="25400" marB="25400">
+                  <a:tcPr anchor="ctr" marL="38100" marR="38100" marT="25400" marB="25400">
                     <a:solidFill>
                       <a:srgbClr val="FFFFFF"/>
                     </a:solidFill>
@@ -12804,7 +14924,17 @@
                     <a:bodyPr/>
                     <a:lstStyle/>
                     <a:p>
-                      <a:pPr algn="l"/>
+                      <a:pPr algn="l">
+                        <a:lnSpc>
+                          <a:spcPct val="100000"/>
+                        </a:lnSpc>
+                        <a:spcBef>
+                          <a:spcPts val="0"/>
+                        </a:spcBef>
+                        <a:spcAft>
+                          <a:spcPts val="0"/>
+                        </a:spcAft>
+                      </a:pPr>
                       <a:r>
                         <a:rPr sz="1100" b="0">
                           <a:solidFill>
@@ -12816,7 +14946,7 @@
                       </a:r>
                     </a:p>
                   </a:txBody>
-                  <a:tcPr anchor="ctr" marL="50800" marR="50800" marT="25400" marB="25400">
+                  <a:tcPr anchor="ctr" marL="38100" marR="38100" marT="25400" marB="25400">
                     <a:solidFill>
                       <a:srgbClr val="FFFFFF"/>
                     </a:solidFill>
@@ -12847,7 +14977,17 @@
                     <a:bodyPr/>
                     <a:lstStyle/>
                     <a:p>
-                      <a:pPr algn="l"/>
+                      <a:pPr algn="l">
+                        <a:lnSpc>
+                          <a:spcPct val="100000"/>
+                        </a:lnSpc>
+                        <a:spcBef>
+                          <a:spcPts val="0"/>
+                        </a:spcBef>
+                        <a:spcAft>
+                          <a:spcPts val="0"/>
+                        </a:spcAft>
+                      </a:pPr>
                       <a:r>
                         <a:rPr sz="1100" b="0">
                           <a:solidFill>
@@ -12859,7 +14999,7 @@
                       </a:r>
                     </a:p>
                   </a:txBody>
-                  <a:tcPr anchor="ctr" marL="50800" marR="50800" marT="25400" marB="25400">
+                  <a:tcPr anchor="ctr" marL="38100" marR="38100" marT="25400" marB="25400">
                     <a:solidFill>
                       <a:srgbClr val="FFFFFF"/>
                     </a:solidFill>
@@ -12890,7 +15030,17 @@
                     <a:bodyPr/>
                     <a:lstStyle/>
                     <a:p>
-                      <a:pPr algn="ctr"/>
+                      <a:pPr algn="r">
+                        <a:lnSpc>
+                          <a:spcPct val="100000"/>
+                        </a:lnSpc>
+                        <a:spcBef>
+                          <a:spcPts val="0"/>
+                        </a:spcBef>
+                        <a:spcAft>
+                          <a:spcPts val="0"/>
+                        </a:spcAft>
+                      </a:pPr>
                       <a:r>
                         <a:rPr sz="1100" b="0">
                           <a:solidFill>
@@ -12902,7 +15052,7 @@
                       </a:r>
                     </a:p>
                   </a:txBody>
-                  <a:tcPr anchor="ctr" marL="50800" marR="50800" marT="25400" marB="25400">
+                  <a:tcPr anchor="ctr" marL="38100" marR="38100" marT="25400" marB="25400">
                     <a:solidFill>
                       <a:srgbClr val="FFFFFF"/>
                     </a:solidFill>
@@ -12933,7 +15083,17 @@
                     <a:bodyPr/>
                     <a:lstStyle/>
                     <a:p>
-                      <a:pPr algn="l"/>
+                      <a:pPr algn="l">
+                        <a:lnSpc>
+                          <a:spcPct val="100000"/>
+                        </a:lnSpc>
+                        <a:spcBef>
+                          <a:spcPts val="0"/>
+                        </a:spcBef>
+                        <a:spcAft>
+                          <a:spcPts val="0"/>
+                        </a:spcAft>
+                      </a:pPr>
                       <a:r>
                         <a:rPr sz="1100" b="0">
                           <a:solidFill>
@@ -12945,7 +15105,7 @@
                       </a:r>
                     </a:p>
                   </a:txBody>
-                  <a:tcPr anchor="ctr" marL="50800" marR="50800" marT="25400" marB="25400">
+                  <a:tcPr anchor="ctr" marL="38100" marR="38100" marT="25400" marB="25400">
                     <a:solidFill>
                       <a:srgbClr val="FFFFFF"/>
                     </a:solidFill>
@@ -12972,13 +15132,23 @@
                   </a:tcPr>
                 </a:tc>
               </a:tr>
-              <a:tr h="725805">
-                <a:tc>
-                  <a:txBody>
-                    <a:bodyPr/>
-                    <a:lstStyle/>
-                    <a:p>
-                      <a:pPr algn="ctr"/>
+              <a:tr h="678484">
+                <a:tc>
+                  <a:txBody>
+                    <a:bodyPr/>
+                    <a:lstStyle/>
+                    <a:p>
+                      <a:pPr algn="ctr">
+                        <a:lnSpc>
+                          <a:spcPct val="100000"/>
+                        </a:lnSpc>
+                        <a:spcBef>
+                          <a:spcPts val="0"/>
+                        </a:spcBef>
+                        <a:spcAft>
+                          <a:spcPts val="0"/>
+                        </a:spcAft>
+                      </a:pPr>
                       <a:r>
                         <a:rPr sz="1100" b="0">
                           <a:solidFill>
@@ -12990,7 +15160,7 @@
                       </a:r>
                     </a:p>
                   </a:txBody>
-                  <a:tcPr anchor="ctr" marL="50800" marR="50800" marT="25400" marB="25400">
+                  <a:tcPr anchor="ctr" marL="38100" marR="38100" marT="25400" marB="25400">
                     <a:solidFill>
                       <a:srgbClr val="F8E7E8"/>
                     </a:solidFill>
@@ -13021,7 +15191,17 @@
                     <a:bodyPr/>
                     <a:lstStyle/>
                     <a:p>
-                      <a:pPr algn="l"/>
+                      <a:pPr algn="l">
+                        <a:lnSpc>
+                          <a:spcPct val="100000"/>
+                        </a:lnSpc>
+                        <a:spcBef>
+                          <a:spcPts val="0"/>
+                        </a:spcBef>
+                        <a:spcAft>
+                          <a:spcPts val="0"/>
+                        </a:spcAft>
+                      </a:pPr>
                       <a:r>
                         <a:rPr sz="1100" b="0">
                           <a:solidFill>
@@ -13033,7 +15213,7 @@
                       </a:r>
                     </a:p>
                   </a:txBody>
-                  <a:tcPr anchor="ctr" marL="50800" marR="50800" marT="25400" marB="25400">
+                  <a:tcPr anchor="ctr" marL="38100" marR="38100" marT="25400" marB="25400">
                     <a:solidFill>
                       <a:srgbClr val="F8E7E8"/>
                     </a:solidFill>
@@ -13064,7 +15244,17 @@
                     <a:bodyPr/>
                     <a:lstStyle/>
                     <a:p>
-                      <a:pPr algn="l"/>
+                      <a:pPr algn="l">
+                        <a:lnSpc>
+                          <a:spcPct val="100000"/>
+                        </a:lnSpc>
+                        <a:spcBef>
+                          <a:spcPts val="0"/>
+                        </a:spcBef>
+                        <a:spcAft>
+                          <a:spcPts val="0"/>
+                        </a:spcAft>
+                      </a:pPr>
                       <a:r>
                         <a:rPr sz="1100" b="0">
                           <a:solidFill>
@@ -13076,7 +15266,7 @@
                       </a:r>
                     </a:p>
                   </a:txBody>
-                  <a:tcPr anchor="ctr" marL="50800" marR="50800" marT="25400" marB="25400">
+                  <a:tcPr anchor="ctr" marL="38100" marR="38100" marT="25400" marB="25400">
                     <a:solidFill>
                       <a:srgbClr val="F8E7E8"/>
                     </a:solidFill>
@@ -13107,7 +15297,17 @@
                     <a:bodyPr/>
                     <a:lstStyle/>
                     <a:p>
-                      <a:pPr algn="l"/>
+                      <a:pPr algn="l">
+                        <a:lnSpc>
+                          <a:spcPct val="100000"/>
+                        </a:lnSpc>
+                        <a:spcBef>
+                          <a:spcPts val="0"/>
+                        </a:spcBef>
+                        <a:spcAft>
+                          <a:spcPts val="0"/>
+                        </a:spcAft>
+                      </a:pPr>
                       <a:r>
                         <a:rPr sz="1100" b="0">
                           <a:solidFill>
@@ -13119,7 +15319,7 @@
                       </a:r>
                     </a:p>
                   </a:txBody>
-                  <a:tcPr anchor="ctr" marL="50800" marR="50800" marT="25400" marB="25400">
+                  <a:tcPr anchor="ctr" marL="38100" marR="38100" marT="25400" marB="25400">
                     <a:solidFill>
                       <a:srgbClr val="F8E7E8"/>
                     </a:solidFill>
@@ -13150,7 +15350,17 @@
                     <a:bodyPr/>
                     <a:lstStyle/>
                     <a:p>
-                      <a:pPr algn="ctr"/>
+                      <a:pPr algn="r">
+                        <a:lnSpc>
+                          <a:spcPct val="100000"/>
+                        </a:lnSpc>
+                        <a:spcBef>
+                          <a:spcPts val="0"/>
+                        </a:spcBef>
+                        <a:spcAft>
+                          <a:spcPts val="0"/>
+                        </a:spcAft>
+                      </a:pPr>
                       <a:r>
                         <a:rPr sz="1100" b="0">
                           <a:solidFill>
@@ -13162,7 +15372,7 @@
                       </a:r>
                     </a:p>
                   </a:txBody>
-                  <a:tcPr anchor="ctr" marL="50800" marR="50800" marT="25400" marB="25400">
+                  <a:tcPr anchor="ctr" marL="38100" marR="38100" marT="25400" marB="25400">
                     <a:solidFill>
                       <a:srgbClr val="F8E7E8"/>
                     </a:solidFill>
@@ -13193,7 +15403,17 @@
                     <a:bodyPr/>
                     <a:lstStyle/>
                     <a:p>
-                      <a:pPr algn="l"/>
+                      <a:pPr algn="l">
+                        <a:lnSpc>
+                          <a:spcPct val="100000"/>
+                        </a:lnSpc>
+                        <a:spcBef>
+                          <a:spcPts val="0"/>
+                        </a:spcBef>
+                        <a:spcAft>
+                          <a:spcPts val="0"/>
+                        </a:spcAft>
+                      </a:pPr>
                       <a:r>
                         <a:rPr sz="1100" b="0">
                           <a:solidFill>
@@ -13205,7 +15425,7 @@
                       </a:r>
                     </a:p>
                   </a:txBody>
-                  <a:tcPr anchor="ctr" marL="50800" marR="50800" marT="25400" marB="25400">
+                  <a:tcPr anchor="ctr" marL="38100" marR="38100" marT="25400" marB="25400">
                     <a:solidFill>
                       <a:srgbClr val="F8E7E8"/>
                     </a:solidFill>
@@ -13232,13 +15452,23 @@
                   </a:tcPr>
                 </a:tc>
               </a:tr>
-              <a:tr h="725805">
-                <a:tc>
-                  <a:txBody>
-                    <a:bodyPr/>
-                    <a:lstStyle/>
-                    <a:p>
-                      <a:pPr algn="ctr"/>
+              <a:tr h="678484">
+                <a:tc>
+                  <a:txBody>
+                    <a:bodyPr/>
+                    <a:lstStyle/>
+                    <a:p>
+                      <a:pPr algn="ctr">
+                        <a:lnSpc>
+                          <a:spcPct val="100000"/>
+                        </a:lnSpc>
+                        <a:spcBef>
+                          <a:spcPts val="0"/>
+                        </a:spcBef>
+                        <a:spcAft>
+                          <a:spcPts val="0"/>
+                        </a:spcAft>
+                      </a:pPr>
                       <a:r>
                         <a:rPr sz="1100" b="0">
                           <a:solidFill>
@@ -13250,7 +15480,7 @@
                       </a:r>
                     </a:p>
                   </a:txBody>
-                  <a:tcPr anchor="ctr" marL="50800" marR="50800" marT="25400" marB="25400">
+                  <a:tcPr anchor="ctr" marL="38100" marR="38100" marT="25400" marB="25400">
                     <a:solidFill>
                       <a:srgbClr val="FFFFFF"/>
                     </a:solidFill>
@@ -13281,7 +15511,17 @@
                     <a:bodyPr/>
                     <a:lstStyle/>
                     <a:p>
-                      <a:pPr algn="l"/>
+                      <a:pPr algn="l">
+                        <a:lnSpc>
+                          <a:spcPct val="100000"/>
+                        </a:lnSpc>
+                        <a:spcBef>
+                          <a:spcPts val="0"/>
+                        </a:spcBef>
+                        <a:spcAft>
+                          <a:spcPts val="0"/>
+                        </a:spcAft>
+                      </a:pPr>
                       <a:r>
                         <a:rPr sz="1100" b="0">
                           <a:solidFill>
@@ -13293,7 +15533,7 @@
                       </a:r>
                     </a:p>
                   </a:txBody>
-                  <a:tcPr anchor="ctr" marL="50800" marR="50800" marT="25400" marB="25400">
+                  <a:tcPr anchor="ctr" marL="38100" marR="38100" marT="25400" marB="25400">
                     <a:solidFill>
                       <a:srgbClr val="FFFFFF"/>
                     </a:solidFill>
@@ -13324,7 +15564,17 @@
                     <a:bodyPr/>
                     <a:lstStyle/>
                     <a:p>
-                      <a:pPr algn="l"/>
+                      <a:pPr algn="l">
+                        <a:lnSpc>
+                          <a:spcPct val="100000"/>
+                        </a:lnSpc>
+                        <a:spcBef>
+                          <a:spcPts val="0"/>
+                        </a:spcBef>
+                        <a:spcAft>
+                          <a:spcPts val="0"/>
+                        </a:spcAft>
+                      </a:pPr>
                       <a:r>
                         <a:rPr sz="1100" b="0">
                           <a:solidFill>
@@ -13336,7 +15586,7 @@
                       </a:r>
                     </a:p>
                   </a:txBody>
-                  <a:tcPr anchor="ctr" marL="50800" marR="50800" marT="25400" marB="25400">
+                  <a:tcPr anchor="ctr" marL="38100" marR="38100" marT="25400" marB="25400">
                     <a:solidFill>
                       <a:srgbClr val="FFFFFF"/>
                     </a:solidFill>
@@ -13367,7 +15617,17 @@
                     <a:bodyPr/>
                     <a:lstStyle/>
                     <a:p>
-                      <a:pPr algn="l"/>
+                      <a:pPr algn="l">
+                        <a:lnSpc>
+                          <a:spcPct val="100000"/>
+                        </a:lnSpc>
+                        <a:spcBef>
+                          <a:spcPts val="0"/>
+                        </a:spcBef>
+                        <a:spcAft>
+                          <a:spcPts val="0"/>
+                        </a:spcAft>
+                      </a:pPr>
                       <a:r>
                         <a:rPr sz="1100" b="0">
                           <a:solidFill>
@@ -13379,7 +15639,7 @@
                       </a:r>
                     </a:p>
                   </a:txBody>
-                  <a:tcPr anchor="ctr" marL="50800" marR="50800" marT="25400" marB="25400">
+                  <a:tcPr anchor="ctr" marL="38100" marR="38100" marT="25400" marB="25400">
                     <a:solidFill>
                       <a:srgbClr val="FFFFFF"/>
                     </a:solidFill>
@@ -13410,7 +15670,17 @@
                     <a:bodyPr/>
                     <a:lstStyle/>
                     <a:p>
-                      <a:pPr algn="ctr"/>
+                      <a:pPr algn="r">
+                        <a:lnSpc>
+                          <a:spcPct val="100000"/>
+                        </a:lnSpc>
+                        <a:spcBef>
+                          <a:spcPts val="0"/>
+                        </a:spcBef>
+                        <a:spcAft>
+                          <a:spcPts val="0"/>
+                        </a:spcAft>
+                      </a:pPr>
                       <a:r>
                         <a:rPr sz="1100" b="0">
                           <a:solidFill>
@@ -13422,7 +15692,7 @@
                       </a:r>
                     </a:p>
                   </a:txBody>
-                  <a:tcPr anchor="ctr" marL="50800" marR="50800" marT="25400" marB="25400">
+                  <a:tcPr anchor="ctr" marL="38100" marR="38100" marT="25400" marB="25400">
                     <a:solidFill>
                       <a:srgbClr val="FFFFFF"/>
                     </a:solidFill>
@@ -13453,7 +15723,17 @@
                     <a:bodyPr/>
                     <a:lstStyle/>
                     <a:p>
-                      <a:pPr algn="l"/>
+                      <a:pPr algn="l">
+                        <a:lnSpc>
+                          <a:spcPct val="100000"/>
+                        </a:lnSpc>
+                        <a:spcBef>
+                          <a:spcPts val="0"/>
+                        </a:spcBef>
+                        <a:spcAft>
+                          <a:spcPts val="0"/>
+                        </a:spcAft>
+                      </a:pPr>
                       <a:r>
                         <a:rPr sz="1100" b="0">
                           <a:solidFill>
@@ -13465,7 +15745,7 @@
                       </a:r>
                     </a:p>
                   </a:txBody>
-                  <a:tcPr anchor="ctr" marL="50800" marR="50800" marT="25400" marB="25400">
+                  <a:tcPr anchor="ctr" marL="38100" marR="38100" marT="25400" marB="25400">
                     <a:solidFill>
                       <a:srgbClr val="FFFFFF"/>
                     </a:solidFill>
@@ -13492,13 +15772,23 @@
                   </a:tcPr>
                 </a:tc>
               </a:tr>
-              <a:tr h="725805">
-                <a:tc>
-                  <a:txBody>
-                    <a:bodyPr/>
-                    <a:lstStyle/>
-                    <a:p>
-                      <a:pPr algn="ctr"/>
+              <a:tr h="678484">
+                <a:tc>
+                  <a:txBody>
+                    <a:bodyPr/>
+                    <a:lstStyle/>
+                    <a:p>
+                      <a:pPr algn="ctr">
+                        <a:lnSpc>
+                          <a:spcPct val="100000"/>
+                        </a:lnSpc>
+                        <a:spcBef>
+                          <a:spcPts val="0"/>
+                        </a:spcBef>
+                        <a:spcAft>
+                          <a:spcPts val="0"/>
+                        </a:spcAft>
+                      </a:pPr>
                       <a:r>
                         <a:rPr sz="1100" b="0">
                           <a:solidFill>
@@ -13510,7 +15800,7 @@
                       </a:r>
                     </a:p>
                   </a:txBody>
-                  <a:tcPr anchor="ctr" marL="50800" marR="50800" marT="25400" marB="25400">
+                  <a:tcPr anchor="ctr" marL="38100" marR="38100" marT="25400" marB="25400">
                     <a:solidFill>
                       <a:srgbClr val="F8E7E8"/>
                     </a:solidFill>
@@ -13541,7 +15831,17 @@
                     <a:bodyPr/>
                     <a:lstStyle/>
                     <a:p>
-                      <a:pPr algn="l"/>
+                      <a:pPr algn="l">
+                        <a:lnSpc>
+                          <a:spcPct val="100000"/>
+                        </a:lnSpc>
+                        <a:spcBef>
+                          <a:spcPts val="0"/>
+                        </a:spcBef>
+                        <a:spcAft>
+                          <a:spcPts val="0"/>
+                        </a:spcAft>
+                      </a:pPr>
                       <a:r>
                         <a:rPr sz="1100" b="0">
                           <a:solidFill>
@@ -13553,7 +15853,7 @@
                       </a:r>
                     </a:p>
                   </a:txBody>
-                  <a:tcPr anchor="ctr" marL="50800" marR="50800" marT="25400" marB="25400">
+                  <a:tcPr anchor="ctr" marL="38100" marR="38100" marT="25400" marB="25400">
                     <a:solidFill>
                       <a:srgbClr val="F8E7E8"/>
                     </a:solidFill>
@@ -13584,7 +15884,17 @@
                     <a:bodyPr/>
                     <a:lstStyle/>
                     <a:p>
-                      <a:pPr algn="l"/>
+                      <a:pPr algn="l">
+                        <a:lnSpc>
+                          <a:spcPct val="100000"/>
+                        </a:lnSpc>
+                        <a:spcBef>
+                          <a:spcPts val="0"/>
+                        </a:spcBef>
+                        <a:spcAft>
+                          <a:spcPts val="0"/>
+                        </a:spcAft>
+                      </a:pPr>
                       <a:r>
                         <a:rPr sz="1100" b="0">
                           <a:solidFill>
@@ -13596,7 +15906,7 @@
                       </a:r>
                     </a:p>
                   </a:txBody>
-                  <a:tcPr anchor="ctr" marL="50800" marR="50800" marT="25400" marB="25400">
+                  <a:tcPr anchor="ctr" marL="38100" marR="38100" marT="25400" marB="25400">
                     <a:solidFill>
                       <a:srgbClr val="F8E7E8"/>
                     </a:solidFill>
@@ -13627,7 +15937,17 @@
                     <a:bodyPr/>
                     <a:lstStyle/>
                     <a:p>
-                      <a:pPr algn="l"/>
+                      <a:pPr algn="l">
+                        <a:lnSpc>
+                          <a:spcPct val="100000"/>
+                        </a:lnSpc>
+                        <a:spcBef>
+                          <a:spcPts val="0"/>
+                        </a:spcBef>
+                        <a:spcAft>
+                          <a:spcPts val="0"/>
+                        </a:spcAft>
+                      </a:pPr>
                       <a:r>
                         <a:rPr sz="1100" b="0">
                           <a:solidFill>
@@ -13639,7 +15959,7 @@
                       </a:r>
                     </a:p>
                   </a:txBody>
-                  <a:tcPr anchor="ctr" marL="50800" marR="50800" marT="25400" marB="25400">
+                  <a:tcPr anchor="ctr" marL="38100" marR="38100" marT="25400" marB="25400">
                     <a:solidFill>
                       <a:srgbClr val="F8E7E8"/>
                     </a:solidFill>
@@ -13670,7 +15990,17 @@
                     <a:bodyPr/>
                     <a:lstStyle/>
                     <a:p>
-                      <a:pPr algn="ctr"/>
+                      <a:pPr algn="r">
+                        <a:lnSpc>
+                          <a:spcPct val="100000"/>
+                        </a:lnSpc>
+                        <a:spcBef>
+                          <a:spcPts val="0"/>
+                        </a:spcBef>
+                        <a:spcAft>
+                          <a:spcPts val="0"/>
+                        </a:spcAft>
+                      </a:pPr>
                       <a:r>
                         <a:rPr sz="1100" b="0">
                           <a:solidFill>
@@ -13682,7 +16012,7 @@
                       </a:r>
                     </a:p>
                   </a:txBody>
-                  <a:tcPr anchor="ctr" marL="50800" marR="50800" marT="25400" marB="25400">
+                  <a:tcPr anchor="ctr" marL="38100" marR="38100" marT="25400" marB="25400">
                     <a:solidFill>
                       <a:srgbClr val="F8E7E8"/>
                     </a:solidFill>
@@ -13713,7 +16043,17 @@
                     <a:bodyPr/>
                     <a:lstStyle/>
                     <a:p>
-                      <a:pPr algn="l"/>
+                      <a:pPr algn="l">
+                        <a:lnSpc>
+                          <a:spcPct val="100000"/>
+                        </a:lnSpc>
+                        <a:spcBef>
+                          <a:spcPts val="0"/>
+                        </a:spcBef>
+                        <a:spcAft>
+                          <a:spcPts val="0"/>
+                        </a:spcAft>
+                      </a:pPr>
                       <a:r>
                         <a:rPr sz="1100" b="0">
                           <a:solidFill>
@@ -13725,7 +16065,7 @@
                       </a:r>
                     </a:p>
                   </a:txBody>
-                  <a:tcPr anchor="ctr" marL="50800" marR="50800" marT="25400" marB="25400">
+                  <a:tcPr anchor="ctr" marL="38100" marR="38100" marT="25400" marB="25400">
                     <a:solidFill>
                       <a:srgbClr val="F8E7E8"/>
                     </a:solidFill>
@@ -13752,13 +16092,23 @@
                   </a:tcPr>
                 </a:tc>
               </a:tr>
-              <a:tr h="725805">
-                <a:tc>
-                  <a:txBody>
-                    <a:bodyPr/>
-                    <a:lstStyle/>
-                    <a:p>
-                      <a:pPr algn="ctr"/>
+              <a:tr h="678484">
+                <a:tc>
+                  <a:txBody>
+                    <a:bodyPr/>
+                    <a:lstStyle/>
+                    <a:p>
+                      <a:pPr algn="ctr">
+                        <a:lnSpc>
+                          <a:spcPct val="100000"/>
+                        </a:lnSpc>
+                        <a:spcBef>
+                          <a:spcPts val="0"/>
+                        </a:spcBef>
+                        <a:spcAft>
+                          <a:spcPts val="0"/>
+                        </a:spcAft>
+                      </a:pPr>
                       <a:r>
                         <a:rPr sz="1100" b="0">
                           <a:solidFill>
@@ -13770,7 +16120,7 @@
                       </a:r>
                     </a:p>
                   </a:txBody>
-                  <a:tcPr anchor="ctr" marL="50800" marR="50800" marT="25400" marB="25400">
+                  <a:tcPr anchor="ctr" marL="38100" marR="38100" marT="25400" marB="25400">
                     <a:solidFill>
                       <a:srgbClr val="FFFFFF"/>
                     </a:solidFill>
@@ -13801,7 +16151,17 @@
                     <a:bodyPr/>
                     <a:lstStyle/>
                     <a:p>
-                      <a:pPr algn="l"/>
+                      <a:pPr algn="l">
+                        <a:lnSpc>
+                          <a:spcPct val="100000"/>
+                        </a:lnSpc>
+                        <a:spcBef>
+                          <a:spcPts val="0"/>
+                        </a:spcBef>
+                        <a:spcAft>
+                          <a:spcPts val="0"/>
+                        </a:spcAft>
+                      </a:pPr>
                       <a:r>
                         <a:rPr sz="1100" b="0">
                           <a:solidFill>
@@ -13813,7 +16173,7 @@
                       </a:r>
                     </a:p>
                   </a:txBody>
-                  <a:tcPr anchor="ctr" marL="50800" marR="50800" marT="25400" marB="25400">
+                  <a:tcPr anchor="ctr" marL="38100" marR="38100" marT="25400" marB="25400">
                     <a:solidFill>
                       <a:srgbClr val="FFFFFF"/>
                     </a:solidFill>
@@ -13844,7 +16204,17 @@
                     <a:bodyPr/>
                     <a:lstStyle/>
                     <a:p>
-                      <a:pPr algn="l"/>
+                      <a:pPr algn="l">
+                        <a:lnSpc>
+                          <a:spcPct val="100000"/>
+                        </a:lnSpc>
+                        <a:spcBef>
+                          <a:spcPts val="0"/>
+                        </a:spcBef>
+                        <a:spcAft>
+                          <a:spcPts val="0"/>
+                        </a:spcAft>
+                      </a:pPr>
                       <a:r>
                         <a:rPr sz="1100" b="0">
                           <a:solidFill>
@@ -13856,7 +16226,7 @@
                       </a:r>
                     </a:p>
                   </a:txBody>
-                  <a:tcPr anchor="ctr" marL="50800" marR="50800" marT="25400" marB="25400">
+                  <a:tcPr anchor="ctr" marL="38100" marR="38100" marT="25400" marB="25400">
                     <a:solidFill>
                       <a:srgbClr val="FFFFFF"/>
                     </a:solidFill>
@@ -13887,7 +16257,17 @@
                     <a:bodyPr/>
                     <a:lstStyle/>
                     <a:p>
-                      <a:pPr algn="l"/>
+                      <a:pPr algn="l">
+                        <a:lnSpc>
+                          <a:spcPct val="100000"/>
+                        </a:lnSpc>
+                        <a:spcBef>
+                          <a:spcPts val="0"/>
+                        </a:spcBef>
+                        <a:spcAft>
+                          <a:spcPts val="0"/>
+                        </a:spcAft>
+                      </a:pPr>
                       <a:r>
                         <a:rPr sz="1100" b="0">
                           <a:solidFill>
@@ -13899,7 +16279,7 @@
                       </a:r>
                     </a:p>
                   </a:txBody>
-                  <a:tcPr anchor="ctr" marL="50800" marR="50800" marT="25400" marB="25400">
+                  <a:tcPr anchor="ctr" marL="38100" marR="38100" marT="25400" marB="25400">
                     <a:solidFill>
                       <a:srgbClr val="FFFFFF"/>
                     </a:solidFill>
@@ -13930,7 +16310,17 @@
                     <a:bodyPr/>
                     <a:lstStyle/>
                     <a:p>
-                      <a:pPr algn="ctr"/>
+                      <a:pPr algn="r">
+                        <a:lnSpc>
+                          <a:spcPct val="100000"/>
+                        </a:lnSpc>
+                        <a:spcBef>
+                          <a:spcPts val="0"/>
+                        </a:spcBef>
+                        <a:spcAft>
+                          <a:spcPts val="0"/>
+                        </a:spcAft>
+                      </a:pPr>
                       <a:r>
                         <a:rPr sz="1100" b="0">
                           <a:solidFill>
@@ -13942,7 +16332,7 @@
                       </a:r>
                     </a:p>
                   </a:txBody>
-                  <a:tcPr anchor="ctr" marL="50800" marR="50800" marT="25400" marB="25400">
+                  <a:tcPr anchor="ctr" marL="38100" marR="38100" marT="25400" marB="25400">
                     <a:solidFill>
                       <a:srgbClr val="FFFFFF"/>
                     </a:solidFill>
@@ -13973,7 +16363,17 @@
                     <a:bodyPr/>
                     <a:lstStyle/>
                     <a:p>
-                      <a:pPr algn="l"/>
+                      <a:pPr algn="l">
+                        <a:lnSpc>
+                          <a:spcPct val="100000"/>
+                        </a:lnSpc>
+                        <a:spcBef>
+                          <a:spcPts val="0"/>
+                        </a:spcBef>
+                        <a:spcAft>
+                          <a:spcPts val="0"/>
+                        </a:spcAft>
+                      </a:pPr>
                       <a:r>
                         <a:rPr sz="1100" b="0">
                           <a:solidFill>
@@ -13985,7 +16385,7 @@
                       </a:r>
                     </a:p>
                   </a:txBody>
-                  <a:tcPr anchor="ctr" marL="50800" marR="50800" marT="25400" marB="25400">
+                  <a:tcPr anchor="ctr" marL="38100" marR="38100" marT="25400" marB="25400">
                     <a:solidFill>
                       <a:srgbClr val="FFFFFF"/>
                     </a:solidFill>
@@ -14050,8 +16450,8 @@
         </p:blipFill>
         <p:spPr>
           <a:xfrm>
-            <a:off x="9646920" y="73152"/>
-            <a:ext cx="2148840" cy="792454"/>
+            <a:off x="9377172" y="102412"/>
+            <a:ext cx="2423160" cy="893618"/>
           </a:xfrm>
           <a:prstGeom prst="rect">
             <a:avLst/>
@@ -14066,8 +16466,8 @@
         </p:nvSpPr>
         <p:spPr>
           <a:xfrm>
-            <a:off x="320040" y="109728"/>
-            <a:ext cx="8686800" cy="502920"/>
+            <a:off x="561441" y="330098"/>
+            <a:ext cx="7772400" cy="411480"/>
           </a:xfrm>
           <a:prstGeom prst="rect">
             <a:avLst/>
@@ -14102,8 +16502,8 @@
           <p:nvPr/>
         </p:nvGraphicFramePr>
         <p:xfrm>
-          <a:off x="320040" y="685800"/>
-          <a:ext cx="10469880" cy="5806440"/>
+          <a:off x="533095" y="1030528"/>
+          <a:ext cx="11415367" cy="4809739"/>
         </p:xfrm>
         <a:graphic>
           <a:graphicData uri="http://schemas.openxmlformats.org/drawingml/2006/table">
@@ -14112,20 +16512,30 @@
                 <a:tableStyleId>{5C22544A-7EE6-4342-B048-85BDC9FD1C3A}</a:tableStyleId>
               </a:tblPr>
               <a:tblGrid>
-                <a:gridCol w="411480"/>
-                <a:gridCol w="777240"/>
-                <a:gridCol w="3429000"/>
-                <a:gridCol w="3246120"/>
-                <a:gridCol w="1097280"/>
-                <a:gridCol w="1508760"/>
+                <a:gridCol w="480974"/>
+                <a:gridCol w="863193"/>
+                <a:gridCol w="3704234"/>
+                <a:gridCol w="3461004"/>
+                <a:gridCol w="1194206"/>
+                <a:gridCol w="1711756"/>
               </a:tblGrid>
-              <a:tr h="829491">
-                <a:tc>
-                  <a:txBody>
-                    <a:bodyPr/>
-                    <a:lstStyle/>
-                    <a:p>
-                      <a:pPr algn="ctr"/>
+              <a:tr h="738835">
+                <a:tc>
+                  <a:txBody>
+                    <a:bodyPr/>
+                    <a:lstStyle/>
+                    <a:p>
+                      <a:pPr algn="ctr">
+                        <a:lnSpc>
+                          <a:spcPct val="100000"/>
+                        </a:lnSpc>
+                        <a:spcBef>
+                          <a:spcPts val="0"/>
+                        </a:spcBef>
+                        <a:spcAft>
+                          <a:spcPts val="0"/>
+                        </a:spcAft>
+                      </a:pPr>
                       <a:r>
                         <a:rPr sz="1200" b="1">
                           <a:solidFill>
@@ -14137,7 +16547,7 @@
                       </a:r>
                     </a:p>
                   </a:txBody>
-                  <a:tcPr anchor="ctr" marL="50800" marR="50800" marT="25400" marB="25400">
+                  <a:tcPr anchor="ctr" marL="38100" marR="38100" marT="25400" marB="25400">
                     <a:solidFill>
                       <a:srgbClr val="AF182E"/>
                     </a:solidFill>
@@ -14168,7 +16578,17 @@
                     <a:bodyPr/>
                     <a:lstStyle/>
                     <a:p>
-                      <a:pPr algn="ctr"/>
+                      <a:pPr algn="ctr">
+                        <a:lnSpc>
+                          <a:spcPct val="100000"/>
+                        </a:lnSpc>
+                        <a:spcBef>
+                          <a:spcPts val="0"/>
+                        </a:spcBef>
+                        <a:spcAft>
+                          <a:spcPts val="0"/>
+                        </a:spcAft>
+                      </a:pPr>
                       <a:r>
                         <a:rPr sz="1200" b="1">
                           <a:solidFill>
@@ -14180,7 +16600,7 @@
                       </a:r>
                     </a:p>
                   </a:txBody>
-                  <a:tcPr anchor="ctr" marL="50800" marR="50800" marT="25400" marB="25400">
+                  <a:tcPr anchor="ctr" marL="38100" marR="38100" marT="25400" marB="25400">
                     <a:solidFill>
                       <a:srgbClr val="AF182E"/>
                     </a:solidFill>
@@ -14211,7 +16631,17 @@
                     <a:bodyPr/>
                     <a:lstStyle/>
                     <a:p>
-                      <a:pPr algn="ctr"/>
+                      <a:pPr algn="ctr">
+                        <a:lnSpc>
+                          <a:spcPct val="100000"/>
+                        </a:lnSpc>
+                        <a:spcBef>
+                          <a:spcPts val="0"/>
+                        </a:spcBef>
+                        <a:spcAft>
+                          <a:spcPts val="0"/>
+                        </a:spcAft>
+                      </a:pPr>
                       <a:r>
                         <a:rPr sz="1200" b="1">
                           <a:solidFill>
@@ -14223,7 +16653,7 @@
                       </a:r>
                     </a:p>
                   </a:txBody>
-                  <a:tcPr anchor="ctr" marL="50800" marR="50800" marT="25400" marB="25400">
+                  <a:tcPr anchor="ctr" marL="38100" marR="38100" marT="25400" marB="25400">
                     <a:solidFill>
                       <a:srgbClr val="AF182E"/>
                     </a:solidFill>
@@ -14254,7 +16684,17 @@
                     <a:bodyPr/>
                     <a:lstStyle/>
                     <a:p>
-                      <a:pPr algn="ctr"/>
+                      <a:pPr algn="ctr">
+                        <a:lnSpc>
+                          <a:spcPct val="100000"/>
+                        </a:lnSpc>
+                        <a:spcBef>
+                          <a:spcPts val="0"/>
+                        </a:spcBef>
+                        <a:spcAft>
+                          <a:spcPts val="0"/>
+                        </a:spcAft>
+                      </a:pPr>
                       <a:r>
                         <a:rPr sz="1200" b="1">
                           <a:solidFill>
@@ -14266,7 +16706,7 @@
                       </a:r>
                     </a:p>
                   </a:txBody>
-                  <a:tcPr anchor="ctr" marL="50800" marR="50800" marT="25400" marB="25400">
+                  <a:tcPr anchor="ctr" marL="38100" marR="38100" marT="25400" marB="25400">
                     <a:solidFill>
                       <a:srgbClr val="AF182E"/>
                     </a:solidFill>
@@ -14297,7 +16737,17 @@
                     <a:bodyPr/>
                     <a:lstStyle/>
                     <a:p>
-                      <a:pPr algn="ctr"/>
+                      <a:pPr algn="ctr">
+                        <a:lnSpc>
+                          <a:spcPct val="100000"/>
+                        </a:lnSpc>
+                        <a:spcBef>
+                          <a:spcPts val="0"/>
+                        </a:spcBef>
+                        <a:spcAft>
+                          <a:spcPts val="0"/>
+                        </a:spcAft>
+                      </a:pPr>
                       <a:r>
                         <a:rPr sz="1200" b="1">
                           <a:solidFill>
@@ -14312,7 +16762,7 @@
                       </a:r>
                     </a:p>
                   </a:txBody>
-                  <a:tcPr anchor="ctr" marL="50800" marR="50800" marT="25400" marB="25400">
+                  <a:tcPr anchor="ctr" marL="38100" marR="38100" marT="25400" marB="25400">
                     <a:solidFill>
                       <a:srgbClr val="AF182E"/>
                     </a:solidFill>
@@ -14343,7 +16793,17 @@
                     <a:bodyPr/>
                     <a:lstStyle/>
                     <a:p>
-                      <a:pPr algn="ctr"/>
+                      <a:pPr algn="ctr">
+                        <a:lnSpc>
+                          <a:spcPct val="100000"/>
+                        </a:lnSpc>
+                        <a:spcBef>
+                          <a:spcPts val="0"/>
+                        </a:spcBef>
+                        <a:spcAft>
+                          <a:spcPts val="0"/>
+                        </a:spcAft>
+                      </a:pPr>
                       <a:r>
                         <a:rPr sz="1200" b="1">
                           <a:solidFill>
@@ -14355,7 +16815,7 @@
                       </a:r>
                     </a:p>
                   </a:txBody>
-                  <a:tcPr anchor="ctr" marL="50800" marR="50800" marT="25400" marB="25400">
+                  <a:tcPr anchor="ctr" marL="38100" marR="38100" marT="25400" marB="25400">
                     <a:solidFill>
                       <a:srgbClr val="AF182E"/>
                     </a:solidFill>
@@ -14382,13 +16842,23 @@
                   </a:tcPr>
                 </a:tc>
               </a:tr>
-              <a:tr h="829491">
-                <a:tc>
-                  <a:txBody>
-                    <a:bodyPr/>
-                    <a:lstStyle/>
-                    <a:p>
-                      <a:pPr algn="ctr"/>
+              <a:tr h="678484">
+                <a:tc>
+                  <a:txBody>
+                    <a:bodyPr/>
+                    <a:lstStyle/>
+                    <a:p>
+                      <a:pPr algn="ctr">
+                        <a:lnSpc>
+                          <a:spcPct val="100000"/>
+                        </a:lnSpc>
+                        <a:spcBef>
+                          <a:spcPts val="0"/>
+                        </a:spcBef>
+                        <a:spcAft>
+                          <a:spcPts val="0"/>
+                        </a:spcAft>
+                      </a:pPr>
                       <a:r>
                         <a:rPr sz="1100" b="0">
                           <a:solidFill>
@@ -14400,7 +16870,7 @@
                       </a:r>
                     </a:p>
                   </a:txBody>
-                  <a:tcPr anchor="ctr" marL="50800" marR="50800" marT="25400" marB="25400">
+                  <a:tcPr anchor="ctr" marL="38100" marR="38100" marT="25400" marB="25400">
                     <a:solidFill>
                       <a:srgbClr val="FFFFFF"/>
                     </a:solidFill>
@@ -14431,7 +16901,17 @@
                     <a:bodyPr/>
                     <a:lstStyle/>
                     <a:p>
-                      <a:pPr algn="l"/>
+                      <a:pPr algn="l">
+                        <a:lnSpc>
+                          <a:spcPct val="100000"/>
+                        </a:lnSpc>
+                        <a:spcBef>
+                          <a:spcPts val="0"/>
+                        </a:spcBef>
+                        <a:spcAft>
+                          <a:spcPts val="0"/>
+                        </a:spcAft>
+                      </a:pPr>
                       <a:r>
                         <a:rPr sz="1100" b="0">
                           <a:solidFill>
@@ -14443,7 +16923,7 @@
                       </a:r>
                     </a:p>
                   </a:txBody>
-                  <a:tcPr anchor="ctr" marL="50800" marR="50800" marT="25400" marB="25400">
+                  <a:tcPr anchor="ctr" marL="38100" marR="38100" marT="25400" marB="25400">
                     <a:solidFill>
                       <a:srgbClr val="FFFFFF"/>
                     </a:solidFill>
@@ -14474,7 +16954,17 @@
                     <a:bodyPr/>
                     <a:lstStyle/>
                     <a:p>
-                      <a:pPr algn="l"/>
+                      <a:pPr algn="l">
+                        <a:lnSpc>
+                          <a:spcPct val="100000"/>
+                        </a:lnSpc>
+                        <a:spcBef>
+                          <a:spcPts val="0"/>
+                        </a:spcBef>
+                        <a:spcAft>
+                          <a:spcPts val="0"/>
+                        </a:spcAft>
+                      </a:pPr>
                       <a:r>
                         <a:rPr sz="1100" b="0">
                           <a:solidFill>
@@ -14486,7 +16976,7 @@
                       </a:r>
                     </a:p>
                   </a:txBody>
-                  <a:tcPr anchor="ctr" marL="50800" marR="50800" marT="25400" marB="25400">
+                  <a:tcPr anchor="ctr" marL="38100" marR="38100" marT="25400" marB="25400">
                     <a:solidFill>
                       <a:srgbClr val="FFFFFF"/>
                     </a:solidFill>
@@ -14517,7 +17007,17 @@
                     <a:bodyPr/>
                     <a:lstStyle/>
                     <a:p>
-                      <a:pPr algn="l"/>
+                      <a:pPr algn="l">
+                        <a:lnSpc>
+                          <a:spcPct val="100000"/>
+                        </a:lnSpc>
+                        <a:spcBef>
+                          <a:spcPts val="0"/>
+                        </a:spcBef>
+                        <a:spcAft>
+                          <a:spcPts val="0"/>
+                        </a:spcAft>
+                      </a:pPr>
                       <a:r>
                         <a:rPr sz="1100" b="0">
                           <a:solidFill>
@@ -14529,7 +17029,7 @@
                       </a:r>
                     </a:p>
                   </a:txBody>
-                  <a:tcPr anchor="ctr" marL="50800" marR="50800" marT="25400" marB="25400">
+                  <a:tcPr anchor="ctr" marL="38100" marR="38100" marT="25400" marB="25400">
                     <a:solidFill>
                       <a:srgbClr val="FFFFFF"/>
                     </a:solidFill>
@@ -14560,7 +17060,17 @@
                     <a:bodyPr/>
                     <a:lstStyle/>
                     <a:p>
-                      <a:pPr algn="ctr"/>
+                      <a:pPr algn="r">
+                        <a:lnSpc>
+                          <a:spcPct val="100000"/>
+                        </a:lnSpc>
+                        <a:spcBef>
+                          <a:spcPts val="0"/>
+                        </a:spcBef>
+                        <a:spcAft>
+                          <a:spcPts val="0"/>
+                        </a:spcAft>
+                      </a:pPr>
                       <a:r>
                         <a:rPr sz="1100" b="0">
                           <a:solidFill>
@@ -14572,7 +17082,7 @@
                       </a:r>
                     </a:p>
                   </a:txBody>
-                  <a:tcPr anchor="ctr" marL="50800" marR="50800" marT="25400" marB="25400">
+                  <a:tcPr anchor="ctr" marL="38100" marR="38100" marT="25400" marB="25400">
                     <a:solidFill>
                       <a:srgbClr val="FFFFFF"/>
                     </a:solidFill>
@@ -14603,7 +17113,17 @@
                     <a:bodyPr/>
                     <a:lstStyle/>
                     <a:p>
-                      <a:pPr algn="l"/>
+                      <a:pPr algn="l">
+                        <a:lnSpc>
+                          <a:spcPct val="100000"/>
+                        </a:lnSpc>
+                        <a:spcBef>
+                          <a:spcPts val="0"/>
+                        </a:spcBef>
+                        <a:spcAft>
+                          <a:spcPts val="0"/>
+                        </a:spcAft>
+                      </a:pPr>
                       <a:r>
                         <a:rPr sz="1100" b="0">
                           <a:solidFill>
@@ -14615,7 +17135,7 @@
                       </a:r>
                     </a:p>
                   </a:txBody>
-                  <a:tcPr anchor="ctr" marL="50800" marR="50800" marT="25400" marB="25400">
+                  <a:tcPr anchor="ctr" marL="38100" marR="38100" marT="25400" marB="25400">
                     <a:solidFill>
                       <a:srgbClr val="FFFFFF"/>
                     </a:solidFill>
@@ -14642,13 +17162,23 @@
                   </a:tcPr>
                 </a:tc>
               </a:tr>
-              <a:tr h="829491">
-                <a:tc>
-                  <a:txBody>
-                    <a:bodyPr/>
-                    <a:lstStyle/>
-                    <a:p>
-                      <a:pPr algn="ctr"/>
+              <a:tr h="678484">
+                <a:tc>
+                  <a:txBody>
+                    <a:bodyPr/>
+                    <a:lstStyle/>
+                    <a:p>
+                      <a:pPr algn="ctr">
+                        <a:lnSpc>
+                          <a:spcPct val="100000"/>
+                        </a:lnSpc>
+                        <a:spcBef>
+                          <a:spcPts val="0"/>
+                        </a:spcBef>
+                        <a:spcAft>
+                          <a:spcPts val="0"/>
+                        </a:spcAft>
+                      </a:pPr>
                       <a:r>
                         <a:rPr sz="1100" b="0">
                           <a:solidFill>
@@ -14660,7 +17190,7 @@
                       </a:r>
                     </a:p>
                   </a:txBody>
-                  <a:tcPr anchor="ctr" marL="50800" marR="50800" marT="25400" marB="25400">
+                  <a:tcPr anchor="ctr" marL="38100" marR="38100" marT="25400" marB="25400">
                     <a:solidFill>
                       <a:srgbClr val="F8E7E8"/>
                     </a:solidFill>
@@ -14691,7 +17221,17 @@
                     <a:bodyPr/>
                     <a:lstStyle/>
                     <a:p>
-                      <a:pPr algn="l"/>
+                      <a:pPr algn="l">
+                        <a:lnSpc>
+                          <a:spcPct val="100000"/>
+                        </a:lnSpc>
+                        <a:spcBef>
+                          <a:spcPts val="0"/>
+                        </a:spcBef>
+                        <a:spcAft>
+                          <a:spcPts val="0"/>
+                        </a:spcAft>
+                      </a:pPr>
                       <a:r>
                         <a:rPr sz="1100" b="0">
                           <a:solidFill>
@@ -14703,7 +17243,7 @@
                       </a:r>
                     </a:p>
                   </a:txBody>
-                  <a:tcPr anchor="ctr" marL="50800" marR="50800" marT="25400" marB="25400">
+                  <a:tcPr anchor="ctr" marL="38100" marR="38100" marT="25400" marB="25400">
                     <a:solidFill>
                       <a:srgbClr val="F8E7E8"/>
                     </a:solidFill>
@@ -14734,7 +17274,17 @@
                     <a:bodyPr/>
                     <a:lstStyle/>
                     <a:p>
-                      <a:pPr algn="l"/>
+                      <a:pPr algn="l">
+                        <a:lnSpc>
+                          <a:spcPct val="100000"/>
+                        </a:lnSpc>
+                        <a:spcBef>
+                          <a:spcPts val="0"/>
+                        </a:spcBef>
+                        <a:spcAft>
+                          <a:spcPts val="0"/>
+                        </a:spcAft>
+                      </a:pPr>
                       <a:r>
                         <a:rPr sz="1100" b="0">
                           <a:solidFill>
@@ -14746,7 +17296,7 @@
                       </a:r>
                     </a:p>
                   </a:txBody>
-                  <a:tcPr anchor="ctr" marL="50800" marR="50800" marT="25400" marB="25400">
+                  <a:tcPr anchor="ctr" marL="38100" marR="38100" marT="25400" marB="25400">
                     <a:solidFill>
                       <a:srgbClr val="F8E7E8"/>
                     </a:solidFill>
@@ -14777,7 +17327,17 @@
                     <a:bodyPr/>
                     <a:lstStyle/>
                     <a:p>
-                      <a:pPr algn="l"/>
+                      <a:pPr algn="l">
+                        <a:lnSpc>
+                          <a:spcPct val="100000"/>
+                        </a:lnSpc>
+                        <a:spcBef>
+                          <a:spcPts val="0"/>
+                        </a:spcBef>
+                        <a:spcAft>
+                          <a:spcPts val="0"/>
+                        </a:spcAft>
+                      </a:pPr>
                       <a:r>
                         <a:rPr sz="1100" b="0">
                           <a:solidFill>
@@ -14789,7 +17349,7 @@
                       </a:r>
                     </a:p>
                   </a:txBody>
-                  <a:tcPr anchor="ctr" marL="50800" marR="50800" marT="25400" marB="25400">
+                  <a:tcPr anchor="ctr" marL="38100" marR="38100" marT="25400" marB="25400">
                     <a:solidFill>
                       <a:srgbClr val="F8E7E8"/>
                     </a:solidFill>
@@ -14820,7 +17380,17 @@
                     <a:bodyPr/>
                     <a:lstStyle/>
                     <a:p>
-                      <a:pPr algn="ctr"/>
+                      <a:pPr algn="r">
+                        <a:lnSpc>
+                          <a:spcPct val="100000"/>
+                        </a:lnSpc>
+                        <a:spcBef>
+                          <a:spcPts val="0"/>
+                        </a:spcBef>
+                        <a:spcAft>
+                          <a:spcPts val="0"/>
+                        </a:spcAft>
+                      </a:pPr>
                       <a:r>
                         <a:rPr sz="1100" b="0">
                           <a:solidFill>
@@ -14832,7 +17402,7 @@
                       </a:r>
                     </a:p>
                   </a:txBody>
-                  <a:tcPr anchor="ctr" marL="50800" marR="50800" marT="25400" marB="25400">
+                  <a:tcPr anchor="ctr" marL="38100" marR="38100" marT="25400" marB="25400">
                     <a:solidFill>
                       <a:srgbClr val="F8E7E8"/>
                     </a:solidFill>
@@ -14863,7 +17433,17 @@
                     <a:bodyPr/>
                     <a:lstStyle/>
                     <a:p>
-                      <a:pPr algn="l"/>
+                      <a:pPr algn="l">
+                        <a:lnSpc>
+                          <a:spcPct val="100000"/>
+                        </a:lnSpc>
+                        <a:spcBef>
+                          <a:spcPts val="0"/>
+                        </a:spcBef>
+                        <a:spcAft>
+                          <a:spcPts val="0"/>
+                        </a:spcAft>
+                      </a:pPr>
                       <a:r>
                         <a:rPr sz="1100" b="0">
                           <a:solidFill>
@@ -14875,7 +17455,7 @@
                       </a:r>
                     </a:p>
                   </a:txBody>
-                  <a:tcPr anchor="ctr" marL="50800" marR="50800" marT="25400" marB="25400">
+                  <a:tcPr anchor="ctr" marL="38100" marR="38100" marT="25400" marB="25400">
                     <a:solidFill>
                       <a:srgbClr val="F8E7E8"/>
                     </a:solidFill>
@@ -14902,13 +17482,23 @@
                   </a:tcPr>
                 </a:tc>
               </a:tr>
-              <a:tr h="829491">
-                <a:tc>
-                  <a:txBody>
-                    <a:bodyPr/>
-                    <a:lstStyle/>
-                    <a:p>
-                      <a:pPr algn="ctr"/>
+              <a:tr h="678484">
+                <a:tc>
+                  <a:txBody>
+                    <a:bodyPr/>
+                    <a:lstStyle/>
+                    <a:p>
+                      <a:pPr algn="ctr">
+                        <a:lnSpc>
+                          <a:spcPct val="100000"/>
+                        </a:lnSpc>
+                        <a:spcBef>
+                          <a:spcPts val="0"/>
+                        </a:spcBef>
+                        <a:spcAft>
+                          <a:spcPts val="0"/>
+                        </a:spcAft>
+                      </a:pPr>
                       <a:r>
                         <a:rPr sz="1100" b="0">
                           <a:solidFill>
@@ -14920,7 +17510,7 @@
                       </a:r>
                     </a:p>
                   </a:txBody>
-                  <a:tcPr anchor="ctr" marL="50800" marR="50800" marT="25400" marB="25400">
+                  <a:tcPr anchor="ctr" marL="38100" marR="38100" marT="25400" marB="25400">
                     <a:solidFill>
                       <a:srgbClr val="FFFFFF"/>
                     </a:solidFill>
@@ -14951,7 +17541,17 @@
                     <a:bodyPr/>
                     <a:lstStyle/>
                     <a:p>
-                      <a:pPr algn="l"/>
+                      <a:pPr algn="l">
+                        <a:lnSpc>
+                          <a:spcPct val="100000"/>
+                        </a:lnSpc>
+                        <a:spcBef>
+                          <a:spcPts val="0"/>
+                        </a:spcBef>
+                        <a:spcAft>
+                          <a:spcPts val="0"/>
+                        </a:spcAft>
+                      </a:pPr>
                       <a:r>
                         <a:rPr sz="1100" b="0">
                           <a:solidFill>
@@ -14963,7 +17563,7 @@
                       </a:r>
                     </a:p>
                   </a:txBody>
-                  <a:tcPr anchor="ctr" marL="50800" marR="50800" marT="25400" marB="25400">
+                  <a:tcPr anchor="ctr" marL="38100" marR="38100" marT="25400" marB="25400">
                     <a:solidFill>
                       <a:srgbClr val="FFFFFF"/>
                     </a:solidFill>
@@ -14994,7 +17594,17 @@
                     <a:bodyPr/>
                     <a:lstStyle/>
                     <a:p>
-                      <a:pPr algn="l"/>
+                      <a:pPr algn="l">
+                        <a:lnSpc>
+                          <a:spcPct val="100000"/>
+                        </a:lnSpc>
+                        <a:spcBef>
+                          <a:spcPts val="0"/>
+                        </a:spcBef>
+                        <a:spcAft>
+                          <a:spcPts val="0"/>
+                        </a:spcAft>
+                      </a:pPr>
                       <a:r>
                         <a:rPr sz="1100" b="0">
                           <a:solidFill>
@@ -15006,7 +17616,7 @@
                       </a:r>
                     </a:p>
                   </a:txBody>
-                  <a:tcPr anchor="ctr" marL="50800" marR="50800" marT="25400" marB="25400">
+                  <a:tcPr anchor="ctr" marL="38100" marR="38100" marT="25400" marB="25400">
                     <a:solidFill>
                       <a:srgbClr val="FFFFFF"/>
                     </a:solidFill>
@@ -15037,7 +17647,17 @@
                     <a:bodyPr/>
                     <a:lstStyle/>
                     <a:p>
-                      <a:pPr algn="l"/>
+                      <a:pPr algn="l">
+                        <a:lnSpc>
+                          <a:spcPct val="100000"/>
+                        </a:lnSpc>
+                        <a:spcBef>
+                          <a:spcPts val="0"/>
+                        </a:spcBef>
+                        <a:spcAft>
+                          <a:spcPts val="0"/>
+                        </a:spcAft>
+                      </a:pPr>
                       <a:r>
                         <a:rPr sz="1100" b="0">
                           <a:solidFill>
@@ -15049,7 +17669,7 @@
                       </a:r>
                     </a:p>
                   </a:txBody>
-                  <a:tcPr anchor="ctr" marL="50800" marR="50800" marT="25400" marB="25400">
+                  <a:tcPr anchor="ctr" marL="38100" marR="38100" marT="25400" marB="25400">
                     <a:solidFill>
                       <a:srgbClr val="FFFFFF"/>
                     </a:solidFill>
@@ -15080,7 +17700,17 @@
                     <a:bodyPr/>
                     <a:lstStyle/>
                     <a:p>
-                      <a:pPr algn="ctr"/>
+                      <a:pPr algn="r">
+                        <a:lnSpc>
+                          <a:spcPct val="100000"/>
+                        </a:lnSpc>
+                        <a:spcBef>
+                          <a:spcPts val="0"/>
+                        </a:spcBef>
+                        <a:spcAft>
+                          <a:spcPts val="0"/>
+                        </a:spcAft>
+                      </a:pPr>
                       <a:r>
                         <a:rPr sz="1100" b="0">
                           <a:solidFill>
@@ -15092,7 +17722,7 @@
                       </a:r>
                     </a:p>
                   </a:txBody>
-                  <a:tcPr anchor="ctr" marL="50800" marR="50800" marT="25400" marB="25400">
+                  <a:tcPr anchor="ctr" marL="38100" marR="38100" marT="25400" marB="25400">
                     <a:solidFill>
                       <a:srgbClr val="FFFFFF"/>
                     </a:solidFill>
@@ -15123,7 +17753,17 @@
                     <a:bodyPr/>
                     <a:lstStyle/>
                     <a:p>
-                      <a:pPr algn="l"/>
+                      <a:pPr algn="l">
+                        <a:lnSpc>
+                          <a:spcPct val="100000"/>
+                        </a:lnSpc>
+                        <a:spcBef>
+                          <a:spcPts val="0"/>
+                        </a:spcBef>
+                        <a:spcAft>
+                          <a:spcPts val="0"/>
+                        </a:spcAft>
+                      </a:pPr>
                       <a:r>
                         <a:rPr sz="1100" b="0">
                           <a:solidFill>
@@ -15135,7 +17775,7 @@
                       </a:r>
                     </a:p>
                   </a:txBody>
-                  <a:tcPr anchor="ctr" marL="50800" marR="50800" marT="25400" marB="25400">
+                  <a:tcPr anchor="ctr" marL="38100" marR="38100" marT="25400" marB="25400">
                     <a:solidFill>
                       <a:srgbClr val="FFFFFF"/>
                     </a:solidFill>
@@ -15162,13 +17802,23 @@
                   </a:tcPr>
                 </a:tc>
               </a:tr>
-              <a:tr h="829491">
-                <a:tc>
-                  <a:txBody>
-                    <a:bodyPr/>
-                    <a:lstStyle/>
-                    <a:p>
-                      <a:pPr algn="ctr"/>
+              <a:tr h="678484">
+                <a:tc>
+                  <a:txBody>
+                    <a:bodyPr/>
+                    <a:lstStyle/>
+                    <a:p>
+                      <a:pPr algn="ctr">
+                        <a:lnSpc>
+                          <a:spcPct val="100000"/>
+                        </a:lnSpc>
+                        <a:spcBef>
+                          <a:spcPts val="0"/>
+                        </a:spcBef>
+                        <a:spcAft>
+                          <a:spcPts val="0"/>
+                        </a:spcAft>
+                      </a:pPr>
                       <a:r>
                         <a:rPr sz="1100" b="0">
                           <a:solidFill>
@@ -15180,7 +17830,7 @@
                       </a:r>
                     </a:p>
                   </a:txBody>
-                  <a:tcPr anchor="ctr" marL="50800" marR="50800" marT="25400" marB="25400">
+                  <a:tcPr anchor="ctr" marL="38100" marR="38100" marT="25400" marB="25400">
                     <a:solidFill>
                       <a:srgbClr val="F8E7E8"/>
                     </a:solidFill>
@@ -15211,7 +17861,17 @@
                     <a:bodyPr/>
                     <a:lstStyle/>
                     <a:p>
-                      <a:pPr algn="l"/>
+                      <a:pPr algn="l">
+                        <a:lnSpc>
+                          <a:spcPct val="100000"/>
+                        </a:lnSpc>
+                        <a:spcBef>
+                          <a:spcPts val="0"/>
+                        </a:spcBef>
+                        <a:spcAft>
+                          <a:spcPts val="0"/>
+                        </a:spcAft>
+                      </a:pPr>
                       <a:r>
                         <a:rPr sz="1100" b="0">
                           <a:solidFill>
@@ -15223,7 +17883,7 @@
                       </a:r>
                     </a:p>
                   </a:txBody>
-                  <a:tcPr anchor="ctr" marL="50800" marR="50800" marT="25400" marB="25400">
+                  <a:tcPr anchor="ctr" marL="38100" marR="38100" marT="25400" marB="25400">
                     <a:solidFill>
                       <a:srgbClr val="F8E7E8"/>
                     </a:solidFill>
@@ -15254,7 +17914,17 @@
                     <a:bodyPr/>
                     <a:lstStyle/>
                     <a:p>
-                      <a:pPr algn="l"/>
+                      <a:pPr algn="l">
+                        <a:lnSpc>
+                          <a:spcPct val="100000"/>
+                        </a:lnSpc>
+                        <a:spcBef>
+                          <a:spcPts val="0"/>
+                        </a:spcBef>
+                        <a:spcAft>
+                          <a:spcPts val="0"/>
+                        </a:spcAft>
+                      </a:pPr>
                       <a:r>
                         <a:rPr sz="1100" b="0">
                           <a:solidFill>
@@ -15266,7 +17936,7 @@
                       </a:r>
                     </a:p>
                   </a:txBody>
-                  <a:tcPr anchor="ctr" marL="50800" marR="50800" marT="25400" marB="25400">
+                  <a:tcPr anchor="ctr" marL="38100" marR="38100" marT="25400" marB="25400">
                     <a:solidFill>
                       <a:srgbClr val="F8E7E8"/>
                     </a:solidFill>
@@ -15297,7 +17967,17 @@
                     <a:bodyPr/>
                     <a:lstStyle/>
                     <a:p>
-                      <a:pPr algn="l"/>
+                      <a:pPr algn="l">
+                        <a:lnSpc>
+                          <a:spcPct val="100000"/>
+                        </a:lnSpc>
+                        <a:spcBef>
+                          <a:spcPts val="0"/>
+                        </a:spcBef>
+                        <a:spcAft>
+                          <a:spcPts val="0"/>
+                        </a:spcAft>
+                      </a:pPr>
                       <a:r>
                         <a:rPr sz="1100" b="0">
                           <a:solidFill>
@@ -15309,7 +17989,7 @@
                       </a:r>
                     </a:p>
                   </a:txBody>
-                  <a:tcPr anchor="ctr" marL="50800" marR="50800" marT="25400" marB="25400">
+                  <a:tcPr anchor="ctr" marL="38100" marR="38100" marT="25400" marB="25400">
                     <a:solidFill>
                       <a:srgbClr val="F8E7E8"/>
                     </a:solidFill>
@@ -15340,7 +18020,17 @@
                     <a:bodyPr/>
                     <a:lstStyle/>
                     <a:p>
-                      <a:pPr algn="ctr"/>
+                      <a:pPr algn="r">
+                        <a:lnSpc>
+                          <a:spcPct val="100000"/>
+                        </a:lnSpc>
+                        <a:spcBef>
+                          <a:spcPts val="0"/>
+                        </a:spcBef>
+                        <a:spcAft>
+                          <a:spcPts val="0"/>
+                        </a:spcAft>
+                      </a:pPr>
                       <a:r>
                         <a:rPr sz="1100" b="0">
                           <a:solidFill>
@@ -15352,7 +18042,7 @@
                       </a:r>
                     </a:p>
                   </a:txBody>
-                  <a:tcPr anchor="ctr" marL="50800" marR="50800" marT="25400" marB="25400">
+                  <a:tcPr anchor="ctr" marL="38100" marR="38100" marT="25400" marB="25400">
                     <a:solidFill>
                       <a:srgbClr val="F8E7E8"/>
                     </a:solidFill>
@@ -15383,7 +18073,17 @@
                     <a:bodyPr/>
                     <a:lstStyle/>
                     <a:p>
-                      <a:pPr algn="l"/>
+                      <a:pPr algn="l">
+                        <a:lnSpc>
+                          <a:spcPct val="100000"/>
+                        </a:lnSpc>
+                        <a:spcBef>
+                          <a:spcPts val="0"/>
+                        </a:spcBef>
+                        <a:spcAft>
+                          <a:spcPts val="0"/>
+                        </a:spcAft>
+                      </a:pPr>
                       <a:r>
                         <a:rPr sz="1100" b="0">
                           <a:solidFill>
@@ -15395,7 +18095,7 @@
                       </a:r>
                     </a:p>
                   </a:txBody>
-                  <a:tcPr anchor="ctr" marL="50800" marR="50800" marT="25400" marB="25400">
+                  <a:tcPr anchor="ctr" marL="38100" marR="38100" marT="25400" marB="25400">
                     <a:solidFill>
                       <a:srgbClr val="F8E7E8"/>
                     </a:solidFill>
@@ -15422,13 +18122,23 @@
                   </a:tcPr>
                 </a:tc>
               </a:tr>
-              <a:tr h="829491">
-                <a:tc>
-                  <a:txBody>
-                    <a:bodyPr/>
-                    <a:lstStyle/>
-                    <a:p>
-                      <a:pPr algn="ctr"/>
+              <a:tr h="678484">
+                <a:tc>
+                  <a:txBody>
+                    <a:bodyPr/>
+                    <a:lstStyle/>
+                    <a:p>
+                      <a:pPr algn="ctr">
+                        <a:lnSpc>
+                          <a:spcPct val="100000"/>
+                        </a:lnSpc>
+                        <a:spcBef>
+                          <a:spcPts val="0"/>
+                        </a:spcBef>
+                        <a:spcAft>
+                          <a:spcPts val="0"/>
+                        </a:spcAft>
+                      </a:pPr>
                       <a:r>
                         <a:rPr sz="1100" b="0">
                           <a:solidFill>
@@ -15440,7 +18150,7 @@
                       </a:r>
                     </a:p>
                   </a:txBody>
-                  <a:tcPr anchor="ctr" marL="50800" marR="50800" marT="25400" marB="25400">
+                  <a:tcPr anchor="ctr" marL="38100" marR="38100" marT="25400" marB="25400">
                     <a:solidFill>
                       <a:srgbClr val="FFFFFF"/>
                     </a:solidFill>
@@ -15471,7 +18181,17 @@
                     <a:bodyPr/>
                     <a:lstStyle/>
                     <a:p>
-                      <a:pPr algn="l"/>
+                      <a:pPr algn="l">
+                        <a:lnSpc>
+                          <a:spcPct val="100000"/>
+                        </a:lnSpc>
+                        <a:spcBef>
+                          <a:spcPts val="0"/>
+                        </a:spcBef>
+                        <a:spcAft>
+                          <a:spcPts val="0"/>
+                        </a:spcAft>
+                      </a:pPr>
                       <a:r>
                         <a:rPr sz="1100" b="0">
                           <a:solidFill>
@@ -15483,7 +18203,7 @@
                       </a:r>
                     </a:p>
                   </a:txBody>
-                  <a:tcPr anchor="ctr" marL="50800" marR="50800" marT="25400" marB="25400">
+                  <a:tcPr anchor="ctr" marL="38100" marR="38100" marT="25400" marB="25400">
                     <a:solidFill>
                       <a:srgbClr val="FFFFFF"/>
                     </a:solidFill>
@@ -15514,7 +18234,17 @@
                     <a:bodyPr/>
                     <a:lstStyle/>
                     <a:p>
-                      <a:pPr algn="l"/>
+                      <a:pPr algn="l">
+                        <a:lnSpc>
+                          <a:spcPct val="100000"/>
+                        </a:lnSpc>
+                        <a:spcBef>
+                          <a:spcPts val="0"/>
+                        </a:spcBef>
+                        <a:spcAft>
+                          <a:spcPts val="0"/>
+                        </a:spcAft>
+                      </a:pPr>
                       <a:r>
                         <a:rPr sz="1100" b="0">
                           <a:solidFill>
@@ -15526,7 +18256,7 @@
                       </a:r>
                     </a:p>
                   </a:txBody>
-                  <a:tcPr anchor="ctr" marL="50800" marR="50800" marT="25400" marB="25400">
+                  <a:tcPr anchor="ctr" marL="38100" marR="38100" marT="25400" marB="25400">
                     <a:solidFill>
                       <a:srgbClr val="FFFFFF"/>
                     </a:solidFill>
@@ -15557,7 +18287,17 @@
                     <a:bodyPr/>
                     <a:lstStyle/>
                     <a:p>
-                      <a:pPr algn="l"/>
+                      <a:pPr algn="l">
+                        <a:lnSpc>
+                          <a:spcPct val="100000"/>
+                        </a:lnSpc>
+                        <a:spcBef>
+                          <a:spcPts val="0"/>
+                        </a:spcBef>
+                        <a:spcAft>
+                          <a:spcPts val="0"/>
+                        </a:spcAft>
+                      </a:pPr>
                       <a:r>
                         <a:rPr sz="1100" b="0">
                           <a:solidFill>
@@ -15569,7 +18309,7 @@
                       </a:r>
                     </a:p>
                   </a:txBody>
-                  <a:tcPr anchor="ctr" marL="50800" marR="50800" marT="25400" marB="25400">
+                  <a:tcPr anchor="ctr" marL="38100" marR="38100" marT="25400" marB="25400">
                     <a:solidFill>
                       <a:srgbClr val="FFFFFF"/>
                     </a:solidFill>
@@ -15600,10 +18340,20 @@
                     <a:bodyPr/>
                     <a:lstStyle/>
                     <a:p>
-                      <a:pPr algn="ctr"/>
-                    </a:p>
-                  </a:txBody>
-                  <a:tcPr anchor="ctr" marL="50800" marR="50800" marT="25400" marB="25400">
+                      <a:pPr algn="r">
+                        <a:lnSpc>
+                          <a:spcPct val="100000"/>
+                        </a:lnSpc>
+                        <a:spcBef>
+                          <a:spcPts val="0"/>
+                        </a:spcBef>
+                        <a:spcAft>
+                          <a:spcPts val="0"/>
+                        </a:spcAft>
+                      </a:pPr>
+                    </a:p>
+                  </a:txBody>
+                  <a:tcPr anchor="ctr" marL="38100" marR="38100" marT="25400" marB="25400">
                     <a:solidFill>
                       <a:srgbClr val="FFFFFF"/>
                     </a:solidFill>
@@ -15634,7 +18384,17 @@
                     <a:bodyPr/>
                     <a:lstStyle/>
                     <a:p>
-                      <a:pPr algn="l"/>
+                      <a:pPr algn="l">
+                        <a:lnSpc>
+                          <a:spcPct val="100000"/>
+                        </a:lnSpc>
+                        <a:spcBef>
+                          <a:spcPts val="0"/>
+                        </a:spcBef>
+                        <a:spcAft>
+                          <a:spcPts val="0"/>
+                        </a:spcAft>
+                      </a:pPr>
                       <a:r>
                         <a:rPr sz="1100" b="0">
                           <a:solidFill>
@@ -15646,7 +18406,7 @@
                       </a:r>
                     </a:p>
                   </a:txBody>
-                  <a:tcPr anchor="ctr" marL="50800" marR="50800" marT="25400" marB="25400">
+                  <a:tcPr anchor="ctr" marL="38100" marR="38100" marT="25400" marB="25400">
                     <a:solidFill>
                       <a:srgbClr val="FFFFFF"/>
                     </a:solidFill>
@@ -15673,13 +18433,23 @@
                   </a:tcPr>
                 </a:tc>
               </a:tr>
-              <a:tr h="829494">
-                <a:tc>
-                  <a:txBody>
-                    <a:bodyPr/>
-                    <a:lstStyle/>
-                    <a:p>
-                      <a:pPr algn="ctr"/>
+              <a:tr h="678484">
+                <a:tc>
+                  <a:txBody>
+                    <a:bodyPr/>
+                    <a:lstStyle/>
+                    <a:p>
+                      <a:pPr algn="ctr">
+                        <a:lnSpc>
+                          <a:spcPct val="100000"/>
+                        </a:lnSpc>
+                        <a:spcBef>
+                          <a:spcPts val="0"/>
+                        </a:spcBef>
+                        <a:spcAft>
+                          <a:spcPts val="0"/>
+                        </a:spcAft>
+                      </a:pPr>
                       <a:r>
                         <a:rPr sz="1100" b="0">
                           <a:solidFill>
@@ -15691,7 +18461,7 @@
                       </a:r>
                     </a:p>
                   </a:txBody>
-                  <a:tcPr anchor="ctr" marL="50800" marR="50800" marT="25400" marB="25400">
+                  <a:tcPr anchor="ctr" marL="38100" marR="38100" marT="25400" marB="25400">
                     <a:solidFill>
                       <a:srgbClr val="F8E7E8"/>
                     </a:solidFill>
@@ -15722,7 +18492,17 @@
                     <a:bodyPr/>
                     <a:lstStyle/>
                     <a:p>
-                      <a:pPr algn="l"/>
+                      <a:pPr algn="l">
+                        <a:lnSpc>
+                          <a:spcPct val="100000"/>
+                        </a:lnSpc>
+                        <a:spcBef>
+                          <a:spcPts val="0"/>
+                        </a:spcBef>
+                        <a:spcAft>
+                          <a:spcPts val="0"/>
+                        </a:spcAft>
+                      </a:pPr>
                       <a:r>
                         <a:rPr sz="1100" b="0">
                           <a:solidFill>
@@ -15734,7 +18514,7 @@
                       </a:r>
                     </a:p>
                   </a:txBody>
-                  <a:tcPr anchor="ctr" marL="50800" marR="50800" marT="25400" marB="25400">
+                  <a:tcPr anchor="ctr" marL="38100" marR="38100" marT="25400" marB="25400">
                     <a:solidFill>
                       <a:srgbClr val="F8E7E8"/>
                     </a:solidFill>
@@ -15765,7 +18545,17 @@
                     <a:bodyPr/>
                     <a:lstStyle/>
                     <a:p>
-                      <a:pPr algn="l"/>
+                      <a:pPr algn="l">
+                        <a:lnSpc>
+                          <a:spcPct val="100000"/>
+                        </a:lnSpc>
+                        <a:spcBef>
+                          <a:spcPts val="0"/>
+                        </a:spcBef>
+                        <a:spcAft>
+                          <a:spcPts val="0"/>
+                        </a:spcAft>
+                      </a:pPr>
                       <a:r>
                         <a:rPr sz="1100" b="0">
                           <a:solidFill>
@@ -15786,7 +18576,7 @@
                       </a:r>
                     </a:p>
                   </a:txBody>
-                  <a:tcPr anchor="ctr" marL="50800" marR="50800" marT="25400" marB="25400">
+                  <a:tcPr anchor="ctr" marL="38100" marR="38100" marT="25400" marB="25400">
                     <a:solidFill>
                       <a:srgbClr val="F8E7E8"/>
                     </a:solidFill>
@@ -15817,10 +18607,20 @@
                     <a:bodyPr/>
                     <a:lstStyle/>
                     <a:p>
-                      <a:pPr algn="l"/>
-                    </a:p>
-                  </a:txBody>
-                  <a:tcPr anchor="ctr" marL="50800" marR="50800" marT="25400" marB="25400">
+                      <a:pPr algn="l">
+                        <a:lnSpc>
+                          <a:spcPct val="100000"/>
+                        </a:lnSpc>
+                        <a:spcBef>
+                          <a:spcPts val="0"/>
+                        </a:spcBef>
+                        <a:spcAft>
+                          <a:spcPts val="0"/>
+                        </a:spcAft>
+                      </a:pPr>
+                    </a:p>
+                  </a:txBody>
+                  <a:tcPr anchor="ctr" marL="38100" marR="38100" marT="25400" marB="25400">
                     <a:solidFill>
                       <a:srgbClr val="F8E7E8"/>
                     </a:solidFill>
@@ -15851,10 +18651,20 @@
                     <a:bodyPr/>
                     <a:lstStyle/>
                     <a:p>
-                      <a:pPr algn="ctr"/>
-                    </a:p>
-                  </a:txBody>
-                  <a:tcPr anchor="ctr" marL="50800" marR="50800" marT="25400" marB="25400">
+                      <a:pPr algn="r">
+                        <a:lnSpc>
+                          <a:spcPct val="100000"/>
+                        </a:lnSpc>
+                        <a:spcBef>
+                          <a:spcPts val="0"/>
+                        </a:spcBef>
+                        <a:spcAft>
+                          <a:spcPts val="0"/>
+                        </a:spcAft>
+                      </a:pPr>
+                    </a:p>
+                  </a:txBody>
+                  <a:tcPr anchor="ctr" marL="38100" marR="38100" marT="25400" marB="25400">
                     <a:solidFill>
                       <a:srgbClr val="F8E7E8"/>
                     </a:solidFill>
@@ -15885,7 +18695,17 @@
                     <a:bodyPr/>
                     <a:lstStyle/>
                     <a:p>
-                      <a:pPr algn="l"/>
+                      <a:pPr algn="l">
+                        <a:lnSpc>
+                          <a:spcPct val="100000"/>
+                        </a:lnSpc>
+                        <a:spcBef>
+                          <a:spcPts val="0"/>
+                        </a:spcBef>
+                        <a:spcAft>
+                          <a:spcPts val="0"/>
+                        </a:spcAft>
+                      </a:pPr>
                       <a:r>
                         <a:rPr sz="1100" b="0">
                           <a:solidFill>
@@ -15897,7 +18717,7 @@
                       </a:r>
                     </a:p>
                   </a:txBody>
-                  <a:tcPr anchor="ctr" marL="50800" marR="50800" marT="25400" marB="25400">
+                  <a:tcPr anchor="ctr" marL="38100" marR="38100" marT="25400" marB="25400">
                     <a:solidFill>
                       <a:srgbClr val="F8E7E8"/>
                     </a:solidFill>

--- a/Дефекты_и_разработки_по_Пилоту.pptx
+++ b/Дефекты_и_разработки_по_Пилоту.pptx
@@ -3162,7 +3162,7 @@
         </p:nvGraphicFramePr>
         <p:xfrm>
           <a:off x="533095" y="1030528"/>
-          <a:ext cx="11415367" cy="5488223"/>
+          <a:ext cx="11415367" cy="5583325"/>
         </p:xfrm>
         <a:graphic>
           <a:graphicData uri="http://schemas.openxmlformats.org/drawingml/2006/table">
@@ -3181,7 +3181,7 @@
               <a:tr h="738835">
                 <a:tc>
                   <a:txBody>
-                    <a:bodyPr/>
+                    <a:bodyPr wrap="square"/>
                     <a:lstStyle/>
                     <a:p>
                       <a:pPr algn="ctr">
@@ -3234,7 +3234,7 @@
                 </a:tc>
                 <a:tc>
                   <a:txBody>
-                    <a:bodyPr/>
+                    <a:bodyPr wrap="square"/>
                     <a:lstStyle/>
                     <a:p>
                       <a:pPr algn="ctr">
@@ -3287,7 +3287,7 @@
                 </a:tc>
                 <a:tc>
                   <a:txBody>
-                    <a:bodyPr/>
+                    <a:bodyPr wrap="square"/>
                     <a:lstStyle/>
                     <a:p>
                       <a:pPr algn="ctr">
@@ -3340,7 +3340,7 @@
                 </a:tc>
                 <a:tc>
                   <a:txBody>
-                    <a:bodyPr/>
+                    <a:bodyPr wrap="square"/>
                     <a:lstStyle/>
                     <a:p>
                       <a:pPr algn="ctr">
@@ -3393,7 +3393,7 @@
                 </a:tc>
                 <a:tc>
                   <a:txBody>
-                    <a:bodyPr/>
+                    <a:bodyPr wrap="square"/>
                     <a:lstStyle/>
                     <a:p>
                       <a:pPr algn="ctr">
@@ -3449,7 +3449,7 @@
                 </a:tc>
                 <a:tc>
                   <a:txBody>
-                    <a:bodyPr/>
+                    <a:bodyPr wrap="square"/>
                     <a:lstStyle/>
                     <a:p>
                       <a:pPr algn="ctr">
@@ -3501,10 +3501,10 @@
                   </a:tcPr>
                 </a:tc>
               </a:tr>
-              <a:tr h="678484">
-                <a:tc>
-                  <a:txBody>
-                    <a:bodyPr/>
+              <a:tr h="692070">
+                <a:tc>
+                  <a:txBody>
+                    <a:bodyPr wrap="square"/>
                     <a:lstStyle/>
                     <a:p>
                       <a:pPr algn="ctr">
@@ -3557,7 +3557,7 @@
                 </a:tc>
                 <a:tc>
                   <a:txBody>
-                    <a:bodyPr/>
+                    <a:bodyPr wrap="square"/>
                     <a:lstStyle/>
                     <a:p>
                       <a:pPr algn="l">
@@ -3610,7 +3610,7 @@
                 </a:tc>
                 <a:tc>
                   <a:txBody>
-                    <a:bodyPr/>
+                    <a:bodyPr wrap="square"/>
                     <a:lstStyle/>
                     <a:p>
                       <a:pPr algn="l">
@@ -3663,7 +3663,7 @@
                 </a:tc>
                 <a:tc>
                   <a:txBody>
-                    <a:bodyPr/>
+                    <a:bodyPr wrap="square"/>
                     <a:lstStyle/>
                     <a:p>
                       <a:pPr algn="l">
@@ -3716,7 +3716,7 @@
                 </a:tc>
                 <a:tc>
                   <a:txBody>
-                    <a:bodyPr/>
+                    <a:bodyPr wrap="square"/>
                     <a:lstStyle/>
                     <a:p>
                       <a:pPr algn="r">
@@ -3769,7 +3769,7 @@
                 </a:tc>
                 <a:tc>
                   <a:txBody>
-                    <a:bodyPr/>
+                    <a:bodyPr wrap="square"/>
                     <a:lstStyle/>
                     <a:p>
                       <a:pPr algn="l">
@@ -3821,10 +3821,10 @@
                   </a:tcPr>
                 </a:tc>
               </a:tr>
-              <a:tr h="678484">
-                <a:tc>
-                  <a:txBody>
-                    <a:bodyPr/>
+              <a:tr h="692070">
+                <a:tc>
+                  <a:txBody>
+                    <a:bodyPr wrap="square"/>
                     <a:lstStyle/>
                     <a:p>
                       <a:pPr algn="ctr">
@@ -3877,7 +3877,7 @@
                 </a:tc>
                 <a:tc>
                   <a:txBody>
-                    <a:bodyPr/>
+                    <a:bodyPr wrap="square"/>
                     <a:lstStyle/>
                     <a:p>
                       <a:pPr algn="l">
@@ -3930,7 +3930,7 @@
                 </a:tc>
                 <a:tc>
                   <a:txBody>
-                    <a:bodyPr/>
+                    <a:bodyPr wrap="square"/>
                     <a:lstStyle/>
                     <a:p>
                       <a:pPr algn="l">
@@ -3983,7 +3983,7 @@
                 </a:tc>
                 <a:tc>
                   <a:txBody>
-                    <a:bodyPr/>
+                    <a:bodyPr wrap="square"/>
                     <a:lstStyle/>
                     <a:p>
                       <a:pPr algn="l">
@@ -4036,7 +4036,7 @@
                 </a:tc>
                 <a:tc>
                   <a:txBody>
-                    <a:bodyPr/>
+                    <a:bodyPr wrap="square"/>
                     <a:lstStyle/>
                     <a:p>
                       <a:pPr algn="r">
@@ -4089,7 +4089,7 @@
                 </a:tc>
                 <a:tc>
                   <a:txBody>
-                    <a:bodyPr/>
+                    <a:bodyPr wrap="square"/>
                     <a:lstStyle/>
                     <a:p>
                       <a:pPr algn="l">
@@ -4141,10 +4141,10 @@
                   </a:tcPr>
                 </a:tc>
               </a:tr>
-              <a:tr h="678484">
-                <a:tc>
-                  <a:txBody>
-                    <a:bodyPr/>
+              <a:tr h="692070">
+                <a:tc>
+                  <a:txBody>
+                    <a:bodyPr wrap="square"/>
                     <a:lstStyle/>
                     <a:p>
                       <a:pPr algn="ctr">
@@ -4197,7 +4197,7 @@
                 </a:tc>
                 <a:tc>
                   <a:txBody>
-                    <a:bodyPr/>
+                    <a:bodyPr wrap="square"/>
                     <a:lstStyle/>
                     <a:p>
                       <a:pPr algn="l">
@@ -4250,7 +4250,7 @@
                 </a:tc>
                 <a:tc>
                   <a:txBody>
-                    <a:bodyPr/>
+                    <a:bodyPr wrap="square"/>
                     <a:lstStyle/>
                     <a:p>
                       <a:pPr algn="l">
@@ -4303,7 +4303,7 @@
                 </a:tc>
                 <a:tc>
                   <a:txBody>
-                    <a:bodyPr/>
+                    <a:bodyPr wrap="square"/>
                     <a:lstStyle/>
                     <a:p>
                       <a:pPr algn="l">
@@ -4356,7 +4356,7 @@
                 </a:tc>
                 <a:tc>
                   <a:txBody>
-                    <a:bodyPr/>
+                    <a:bodyPr wrap="square"/>
                     <a:lstStyle/>
                     <a:p>
                       <a:pPr algn="r">
@@ -4409,7 +4409,7 @@
                 </a:tc>
                 <a:tc>
                   <a:txBody>
-                    <a:bodyPr/>
+                    <a:bodyPr wrap="square"/>
                     <a:lstStyle/>
                     <a:p>
                       <a:pPr algn="l">
@@ -4461,10 +4461,10 @@
                   </a:tcPr>
                 </a:tc>
               </a:tr>
-              <a:tr h="678484">
-                <a:tc>
-                  <a:txBody>
-                    <a:bodyPr/>
+              <a:tr h="692070">
+                <a:tc>
+                  <a:txBody>
+                    <a:bodyPr wrap="square"/>
                     <a:lstStyle/>
                     <a:p>
                       <a:pPr algn="ctr">
@@ -4517,7 +4517,7 @@
                 </a:tc>
                 <a:tc>
                   <a:txBody>
-                    <a:bodyPr/>
+                    <a:bodyPr wrap="square"/>
                     <a:lstStyle/>
                     <a:p>
                       <a:pPr algn="l">
@@ -4570,7 +4570,7 @@
                 </a:tc>
                 <a:tc>
                   <a:txBody>
-                    <a:bodyPr/>
+                    <a:bodyPr wrap="square"/>
                     <a:lstStyle/>
                     <a:p>
                       <a:pPr algn="l">
@@ -4623,7 +4623,7 @@
                 </a:tc>
                 <a:tc>
                   <a:txBody>
-                    <a:bodyPr/>
+                    <a:bodyPr wrap="square"/>
                     <a:lstStyle/>
                     <a:p>
                       <a:pPr algn="l">
@@ -4676,7 +4676,7 @@
                 </a:tc>
                 <a:tc>
                   <a:txBody>
-                    <a:bodyPr/>
+                    <a:bodyPr wrap="square"/>
                     <a:lstStyle/>
                     <a:p>
                       <a:pPr algn="r">
@@ -4729,7 +4729,7 @@
                 </a:tc>
                 <a:tc>
                   <a:txBody>
-                    <a:bodyPr/>
+                    <a:bodyPr wrap="square"/>
                     <a:lstStyle/>
                     <a:p>
                       <a:pPr algn="l">
@@ -4781,10 +4781,10 @@
                   </a:tcPr>
                 </a:tc>
               </a:tr>
-              <a:tr h="678484">
-                <a:tc>
-                  <a:txBody>
-                    <a:bodyPr/>
+              <a:tr h="692070">
+                <a:tc>
+                  <a:txBody>
+                    <a:bodyPr wrap="square"/>
                     <a:lstStyle/>
                     <a:p>
                       <a:pPr algn="ctr">
@@ -4837,7 +4837,7 @@
                 </a:tc>
                 <a:tc>
                   <a:txBody>
-                    <a:bodyPr/>
+                    <a:bodyPr wrap="square"/>
                     <a:lstStyle/>
                     <a:p>
                       <a:pPr algn="l">
@@ -4890,7 +4890,7 @@
                 </a:tc>
                 <a:tc>
                   <a:txBody>
-                    <a:bodyPr/>
+                    <a:bodyPr wrap="square"/>
                     <a:lstStyle/>
                     <a:p>
                       <a:pPr algn="l">
@@ -4943,7 +4943,7 @@
                 </a:tc>
                 <a:tc>
                   <a:txBody>
-                    <a:bodyPr/>
+                    <a:bodyPr wrap="square"/>
                     <a:lstStyle/>
                     <a:p>
                       <a:pPr algn="l">
@@ -4996,7 +4996,7 @@
                 </a:tc>
                 <a:tc>
                   <a:txBody>
-                    <a:bodyPr/>
+                    <a:bodyPr wrap="square"/>
                     <a:lstStyle/>
                     <a:p>
                       <a:pPr algn="r">
@@ -5040,7 +5040,7 @@
                 </a:tc>
                 <a:tc>
                   <a:txBody>
-                    <a:bodyPr/>
+                    <a:bodyPr wrap="square"/>
                     <a:lstStyle/>
                     <a:p>
                       <a:pPr algn="l">
@@ -5092,10 +5092,10 @@
                   </a:tcPr>
                 </a:tc>
               </a:tr>
-              <a:tr h="678484">
-                <a:tc>
-                  <a:txBody>
-                    <a:bodyPr/>
+              <a:tr h="692070">
+                <a:tc>
+                  <a:txBody>
+                    <a:bodyPr wrap="square"/>
                     <a:lstStyle/>
                     <a:p>
                       <a:pPr algn="ctr">
@@ -5148,7 +5148,7 @@
                 </a:tc>
                 <a:tc>
                   <a:txBody>
-                    <a:bodyPr/>
+                    <a:bodyPr wrap="square"/>
                     <a:lstStyle/>
                     <a:p>
                       <a:pPr algn="l">
@@ -5201,7 +5201,7 @@
                 </a:tc>
                 <a:tc>
                   <a:txBody>
-                    <a:bodyPr/>
+                    <a:bodyPr wrap="square"/>
                     <a:lstStyle/>
                     <a:p>
                       <a:pPr algn="l">
@@ -5254,7 +5254,7 @@
                 </a:tc>
                 <a:tc>
                   <a:txBody>
-                    <a:bodyPr/>
+                    <a:bodyPr wrap="square"/>
                     <a:lstStyle/>
                     <a:p>
                       <a:pPr algn="l">
@@ -5307,7 +5307,7 @@
                 </a:tc>
                 <a:tc>
                   <a:txBody>
-                    <a:bodyPr/>
+                    <a:bodyPr wrap="square"/>
                     <a:lstStyle/>
                     <a:p>
                       <a:pPr algn="r">
@@ -5360,7 +5360,7 @@
                 </a:tc>
                 <a:tc>
                   <a:txBody>
-                    <a:bodyPr/>
+                    <a:bodyPr wrap="square"/>
                     <a:lstStyle/>
                     <a:p>
                       <a:pPr algn="l">
@@ -5412,10 +5412,10 @@
                   </a:tcPr>
                 </a:tc>
               </a:tr>
-              <a:tr h="678484">
-                <a:tc>
-                  <a:txBody>
-                    <a:bodyPr/>
+              <a:tr h="692070">
+                <a:tc>
+                  <a:txBody>
+                    <a:bodyPr wrap="square"/>
                     <a:lstStyle/>
                     <a:p>
                       <a:pPr algn="ctr">
@@ -5468,7 +5468,7 @@
                 </a:tc>
                 <a:tc>
                   <a:txBody>
-                    <a:bodyPr/>
+                    <a:bodyPr wrap="square"/>
                     <a:lstStyle/>
                     <a:p>
                       <a:pPr algn="l">
@@ -5521,7 +5521,7 @@
                 </a:tc>
                 <a:tc>
                   <a:txBody>
-                    <a:bodyPr/>
+                    <a:bodyPr wrap="square"/>
                     <a:lstStyle/>
                     <a:p>
                       <a:pPr algn="l">
@@ -5574,7 +5574,7 @@
                 </a:tc>
                 <a:tc>
                   <a:txBody>
-                    <a:bodyPr/>
+                    <a:bodyPr wrap="square"/>
                     <a:lstStyle/>
                     <a:p>
                       <a:pPr algn="l">
@@ -5627,7 +5627,7 @@
                 </a:tc>
                 <a:tc>
                   <a:txBody>
-                    <a:bodyPr/>
+                    <a:bodyPr wrap="square"/>
                     <a:lstStyle/>
                     <a:p>
                       <a:pPr algn="r">
@@ -5680,7 +5680,7 @@
                 </a:tc>
                 <a:tc>
                   <a:txBody>
-                    <a:bodyPr/>
+                    <a:bodyPr wrap="square"/>
                     <a:lstStyle/>
                     <a:p>
                       <a:pPr algn="l">
@@ -5823,7 +5823,7 @@
         </p:nvGraphicFramePr>
         <p:xfrm>
           <a:off x="533095" y="1030528"/>
-          <a:ext cx="11415367" cy="5488223"/>
+          <a:ext cx="11415367" cy="5583325"/>
         </p:xfrm>
         <a:graphic>
           <a:graphicData uri="http://schemas.openxmlformats.org/drawingml/2006/table">
@@ -5842,7 +5842,7 @@
               <a:tr h="738835">
                 <a:tc>
                   <a:txBody>
-                    <a:bodyPr/>
+                    <a:bodyPr wrap="square"/>
                     <a:lstStyle/>
                     <a:p>
                       <a:pPr algn="ctr">
@@ -5895,7 +5895,7 @@
                 </a:tc>
                 <a:tc>
                   <a:txBody>
-                    <a:bodyPr/>
+                    <a:bodyPr wrap="square"/>
                     <a:lstStyle/>
                     <a:p>
                       <a:pPr algn="ctr">
@@ -5948,7 +5948,7 @@
                 </a:tc>
                 <a:tc>
                   <a:txBody>
-                    <a:bodyPr/>
+                    <a:bodyPr wrap="square"/>
                     <a:lstStyle/>
                     <a:p>
                       <a:pPr algn="ctr">
@@ -6001,7 +6001,7 @@
                 </a:tc>
                 <a:tc>
                   <a:txBody>
-                    <a:bodyPr/>
+                    <a:bodyPr wrap="square"/>
                     <a:lstStyle/>
                     <a:p>
                       <a:pPr algn="ctr">
@@ -6054,7 +6054,7 @@
                 </a:tc>
                 <a:tc>
                   <a:txBody>
-                    <a:bodyPr/>
+                    <a:bodyPr wrap="square"/>
                     <a:lstStyle/>
                     <a:p>
                       <a:pPr algn="ctr">
@@ -6110,7 +6110,7 @@
                 </a:tc>
                 <a:tc>
                   <a:txBody>
-                    <a:bodyPr/>
+                    <a:bodyPr wrap="square"/>
                     <a:lstStyle/>
                     <a:p>
                       <a:pPr algn="ctr">
@@ -6162,10 +6162,10 @@
                   </a:tcPr>
                 </a:tc>
               </a:tr>
-              <a:tr h="678484">
-                <a:tc>
-                  <a:txBody>
-                    <a:bodyPr/>
+              <a:tr h="692070">
+                <a:tc>
+                  <a:txBody>
+                    <a:bodyPr wrap="square"/>
                     <a:lstStyle/>
                     <a:p>
                       <a:pPr algn="ctr">
@@ -6218,7 +6218,7 @@
                 </a:tc>
                 <a:tc>
                   <a:txBody>
-                    <a:bodyPr/>
+                    <a:bodyPr wrap="square"/>
                     <a:lstStyle/>
                     <a:p>
                       <a:pPr algn="l">
@@ -6271,7 +6271,7 @@
                 </a:tc>
                 <a:tc>
                   <a:txBody>
-                    <a:bodyPr/>
+                    <a:bodyPr wrap="square"/>
                     <a:lstStyle/>
                     <a:p>
                       <a:pPr algn="l">
@@ -6324,7 +6324,7 @@
                 </a:tc>
                 <a:tc>
                   <a:txBody>
-                    <a:bodyPr/>
+                    <a:bodyPr wrap="square"/>
                     <a:lstStyle/>
                     <a:p>
                       <a:pPr algn="l">
@@ -6377,7 +6377,7 @@
                 </a:tc>
                 <a:tc>
                   <a:txBody>
-                    <a:bodyPr/>
+                    <a:bodyPr wrap="square"/>
                     <a:lstStyle/>
                     <a:p>
                       <a:pPr algn="r">
@@ -6430,7 +6430,7 @@
                 </a:tc>
                 <a:tc>
                   <a:txBody>
-                    <a:bodyPr/>
+                    <a:bodyPr wrap="square"/>
                     <a:lstStyle/>
                     <a:p>
                       <a:pPr algn="l">
@@ -6482,10 +6482,10 @@
                   </a:tcPr>
                 </a:tc>
               </a:tr>
-              <a:tr h="678484">
-                <a:tc>
-                  <a:txBody>
-                    <a:bodyPr/>
+              <a:tr h="692070">
+                <a:tc>
+                  <a:txBody>
+                    <a:bodyPr wrap="square"/>
                     <a:lstStyle/>
                     <a:p>
                       <a:pPr algn="ctr">
@@ -6538,7 +6538,7 @@
                 </a:tc>
                 <a:tc>
                   <a:txBody>
-                    <a:bodyPr/>
+                    <a:bodyPr wrap="square"/>
                     <a:lstStyle/>
                     <a:p>
                       <a:pPr algn="l">
@@ -6591,7 +6591,7 @@
                 </a:tc>
                 <a:tc>
                   <a:txBody>
-                    <a:bodyPr/>
+                    <a:bodyPr wrap="square"/>
                     <a:lstStyle/>
                     <a:p>
                       <a:pPr algn="l">
@@ -6644,7 +6644,7 @@
                 </a:tc>
                 <a:tc>
                   <a:txBody>
-                    <a:bodyPr/>
+                    <a:bodyPr wrap="square"/>
                     <a:lstStyle/>
                     <a:p>
                       <a:pPr algn="l">
@@ -6697,7 +6697,7 @@
                 </a:tc>
                 <a:tc>
                   <a:txBody>
-                    <a:bodyPr/>
+                    <a:bodyPr wrap="square"/>
                     <a:lstStyle/>
                     <a:p>
                       <a:pPr algn="r">
@@ -6750,7 +6750,7 @@
                 </a:tc>
                 <a:tc>
                   <a:txBody>
-                    <a:bodyPr/>
+                    <a:bodyPr wrap="square"/>
                     <a:lstStyle/>
                     <a:p>
                       <a:pPr algn="l">
@@ -6802,10 +6802,10 @@
                   </a:tcPr>
                 </a:tc>
               </a:tr>
-              <a:tr h="678484">
-                <a:tc>
-                  <a:txBody>
-                    <a:bodyPr/>
+              <a:tr h="692070">
+                <a:tc>
+                  <a:txBody>
+                    <a:bodyPr wrap="square"/>
                     <a:lstStyle/>
                     <a:p>
                       <a:pPr algn="ctr">
@@ -6858,7 +6858,7 @@
                 </a:tc>
                 <a:tc>
                   <a:txBody>
-                    <a:bodyPr/>
+                    <a:bodyPr wrap="square"/>
                     <a:lstStyle/>
                     <a:p>
                       <a:pPr algn="l">
@@ -6911,7 +6911,7 @@
                 </a:tc>
                 <a:tc>
                   <a:txBody>
-                    <a:bodyPr/>
+                    <a:bodyPr wrap="square"/>
                     <a:lstStyle/>
                     <a:p>
                       <a:pPr algn="l">
@@ -6964,7 +6964,7 @@
                 </a:tc>
                 <a:tc>
                   <a:txBody>
-                    <a:bodyPr/>
+                    <a:bodyPr wrap="square"/>
                     <a:lstStyle/>
                     <a:p>
                       <a:pPr algn="l">
@@ -7017,7 +7017,7 @@
                 </a:tc>
                 <a:tc>
                   <a:txBody>
-                    <a:bodyPr/>
+                    <a:bodyPr wrap="square"/>
                     <a:lstStyle/>
                     <a:p>
                       <a:pPr algn="r">
@@ -7070,7 +7070,7 @@
                 </a:tc>
                 <a:tc>
                   <a:txBody>
-                    <a:bodyPr/>
+                    <a:bodyPr wrap="square"/>
                     <a:lstStyle/>
                     <a:p>
                       <a:pPr algn="l">
@@ -7122,10 +7122,10 @@
                   </a:tcPr>
                 </a:tc>
               </a:tr>
-              <a:tr h="678484">
-                <a:tc>
-                  <a:txBody>
-                    <a:bodyPr/>
+              <a:tr h="692070">
+                <a:tc>
+                  <a:txBody>
+                    <a:bodyPr wrap="square"/>
                     <a:lstStyle/>
                     <a:p>
                       <a:pPr algn="ctr">
@@ -7178,7 +7178,7 @@
                 </a:tc>
                 <a:tc>
                   <a:txBody>
-                    <a:bodyPr/>
+                    <a:bodyPr wrap="square"/>
                     <a:lstStyle/>
                     <a:p>
                       <a:pPr algn="l">
@@ -7231,7 +7231,7 @@
                 </a:tc>
                 <a:tc>
                   <a:txBody>
-                    <a:bodyPr/>
+                    <a:bodyPr wrap="square"/>
                     <a:lstStyle/>
                     <a:p>
                       <a:pPr algn="l">
@@ -7284,7 +7284,7 @@
                 </a:tc>
                 <a:tc>
                   <a:txBody>
-                    <a:bodyPr/>
+                    <a:bodyPr wrap="square"/>
                     <a:lstStyle/>
                     <a:p>
                       <a:pPr algn="l">
@@ -7337,7 +7337,7 @@
                 </a:tc>
                 <a:tc>
                   <a:txBody>
-                    <a:bodyPr/>
+                    <a:bodyPr wrap="square"/>
                     <a:lstStyle/>
                     <a:p>
                       <a:pPr algn="r">
@@ -7390,7 +7390,7 @@
                 </a:tc>
                 <a:tc>
                   <a:txBody>
-                    <a:bodyPr/>
+                    <a:bodyPr wrap="square"/>
                     <a:lstStyle/>
                     <a:p>
                       <a:pPr algn="l">
@@ -7442,10 +7442,10 @@
                   </a:tcPr>
                 </a:tc>
               </a:tr>
-              <a:tr h="678484">
-                <a:tc>
-                  <a:txBody>
-                    <a:bodyPr/>
+              <a:tr h="692070">
+                <a:tc>
+                  <a:txBody>
+                    <a:bodyPr wrap="square"/>
                     <a:lstStyle/>
                     <a:p>
                       <a:pPr algn="ctr">
@@ -7498,7 +7498,7 @@
                 </a:tc>
                 <a:tc>
                   <a:txBody>
-                    <a:bodyPr/>
+                    <a:bodyPr wrap="square"/>
                     <a:lstStyle/>
                     <a:p>
                       <a:pPr algn="l">
@@ -7551,7 +7551,7 @@
                 </a:tc>
                 <a:tc>
                   <a:txBody>
-                    <a:bodyPr/>
+                    <a:bodyPr wrap="square"/>
                     <a:lstStyle/>
                     <a:p>
                       <a:pPr algn="l">
@@ -7604,7 +7604,7 @@
                 </a:tc>
                 <a:tc>
                   <a:txBody>
-                    <a:bodyPr/>
+                    <a:bodyPr wrap="square"/>
                     <a:lstStyle/>
                     <a:p>
                       <a:pPr algn="l">
@@ -7657,7 +7657,7 @@
                 </a:tc>
                 <a:tc>
                   <a:txBody>
-                    <a:bodyPr/>
+                    <a:bodyPr wrap="square"/>
                     <a:lstStyle/>
                     <a:p>
                       <a:pPr algn="r">
@@ -7710,7 +7710,7 @@
                 </a:tc>
                 <a:tc>
                   <a:txBody>
-                    <a:bodyPr/>
+                    <a:bodyPr wrap="square"/>
                     <a:lstStyle/>
                     <a:p>
                       <a:pPr algn="l">
@@ -7762,10 +7762,10 @@
                   </a:tcPr>
                 </a:tc>
               </a:tr>
-              <a:tr h="678484">
-                <a:tc>
-                  <a:txBody>
-                    <a:bodyPr/>
+              <a:tr h="692070">
+                <a:tc>
+                  <a:txBody>
+                    <a:bodyPr wrap="square"/>
                     <a:lstStyle/>
                     <a:p>
                       <a:pPr algn="ctr">
@@ -7818,7 +7818,7 @@
                 </a:tc>
                 <a:tc>
                   <a:txBody>
-                    <a:bodyPr/>
+                    <a:bodyPr wrap="square"/>
                     <a:lstStyle/>
                     <a:p>
                       <a:pPr algn="l">
@@ -7871,7 +7871,7 @@
                 </a:tc>
                 <a:tc>
                   <a:txBody>
-                    <a:bodyPr/>
+                    <a:bodyPr wrap="square"/>
                     <a:lstStyle/>
                     <a:p>
                       <a:pPr algn="l">
@@ -7924,7 +7924,7 @@
                 </a:tc>
                 <a:tc>
                   <a:txBody>
-                    <a:bodyPr/>
+                    <a:bodyPr wrap="square"/>
                     <a:lstStyle/>
                     <a:p>
                       <a:pPr algn="l">
@@ -7977,7 +7977,7 @@
                 </a:tc>
                 <a:tc>
                   <a:txBody>
-                    <a:bodyPr/>
+                    <a:bodyPr wrap="square"/>
                     <a:lstStyle/>
                     <a:p>
                       <a:pPr algn="r">
@@ -8030,7 +8030,7 @@
                 </a:tc>
                 <a:tc>
                   <a:txBody>
-                    <a:bodyPr/>
+                    <a:bodyPr wrap="square"/>
                     <a:lstStyle/>
                     <a:p>
                       <a:pPr algn="l">
@@ -8082,10 +8082,10 @@
                   </a:tcPr>
                 </a:tc>
               </a:tr>
-              <a:tr h="678484">
-                <a:tc>
-                  <a:txBody>
-                    <a:bodyPr/>
+              <a:tr h="692070">
+                <a:tc>
+                  <a:txBody>
+                    <a:bodyPr wrap="square"/>
                     <a:lstStyle/>
                     <a:p>
                       <a:pPr algn="ctr">
@@ -8138,7 +8138,7 @@
                 </a:tc>
                 <a:tc>
                   <a:txBody>
-                    <a:bodyPr/>
+                    <a:bodyPr wrap="square"/>
                     <a:lstStyle/>
                     <a:p>
                       <a:pPr algn="l">
@@ -8191,7 +8191,7 @@
                 </a:tc>
                 <a:tc>
                   <a:txBody>
-                    <a:bodyPr/>
+                    <a:bodyPr wrap="square"/>
                     <a:lstStyle/>
                     <a:p>
                       <a:pPr algn="l">
@@ -8244,7 +8244,7 @@
                 </a:tc>
                 <a:tc>
                   <a:txBody>
-                    <a:bodyPr/>
+                    <a:bodyPr wrap="square"/>
                     <a:lstStyle/>
                     <a:p>
                       <a:pPr algn="l">
@@ -8297,7 +8297,7 @@
                 </a:tc>
                 <a:tc>
                   <a:txBody>
-                    <a:bodyPr/>
+                    <a:bodyPr wrap="square"/>
                     <a:lstStyle/>
                     <a:p>
                       <a:pPr algn="r">
@@ -8350,7 +8350,7 @@
                 </a:tc>
                 <a:tc>
                   <a:txBody>
-                    <a:bodyPr/>
+                    <a:bodyPr wrap="square"/>
                     <a:lstStyle/>
                     <a:p>
                       <a:pPr algn="l">
@@ -8493,7 +8493,7 @@
         </p:nvGraphicFramePr>
         <p:xfrm>
           <a:off x="533095" y="1030528"/>
-          <a:ext cx="11415367" cy="5488223"/>
+          <a:ext cx="11415367" cy="5583325"/>
         </p:xfrm>
         <a:graphic>
           <a:graphicData uri="http://schemas.openxmlformats.org/drawingml/2006/table">
@@ -8512,7 +8512,7 @@
               <a:tr h="738835">
                 <a:tc>
                   <a:txBody>
-                    <a:bodyPr/>
+                    <a:bodyPr wrap="square"/>
                     <a:lstStyle/>
                     <a:p>
                       <a:pPr algn="ctr">
@@ -8565,7 +8565,7 @@
                 </a:tc>
                 <a:tc>
                   <a:txBody>
-                    <a:bodyPr/>
+                    <a:bodyPr wrap="square"/>
                     <a:lstStyle/>
                     <a:p>
                       <a:pPr algn="ctr">
@@ -8618,7 +8618,7 @@
                 </a:tc>
                 <a:tc>
                   <a:txBody>
-                    <a:bodyPr/>
+                    <a:bodyPr wrap="square"/>
                     <a:lstStyle/>
                     <a:p>
                       <a:pPr algn="ctr">
@@ -8671,7 +8671,7 @@
                 </a:tc>
                 <a:tc>
                   <a:txBody>
-                    <a:bodyPr/>
+                    <a:bodyPr wrap="square"/>
                     <a:lstStyle/>
                     <a:p>
                       <a:pPr algn="ctr">
@@ -8724,7 +8724,7 @@
                 </a:tc>
                 <a:tc>
                   <a:txBody>
-                    <a:bodyPr/>
+                    <a:bodyPr wrap="square"/>
                     <a:lstStyle/>
                     <a:p>
                       <a:pPr algn="ctr">
@@ -8780,7 +8780,7 @@
                 </a:tc>
                 <a:tc>
                   <a:txBody>
-                    <a:bodyPr/>
+                    <a:bodyPr wrap="square"/>
                     <a:lstStyle/>
                     <a:p>
                       <a:pPr algn="ctr">
@@ -8832,10 +8832,10 @@
                   </a:tcPr>
                 </a:tc>
               </a:tr>
-              <a:tr h="678484">
-                <a:tc>
-                  <a:txBody>
-                    <a:bodyPr/>
+              <a:tr h="692070">
+                <a:tc>
+                  <a:txBody>
+                    <a:bodyPr wrap="square"/>
                     <a:lstStyle/>
                     <a:p>
                       <a:pPr algn="ctr">
@@ -8888,7 +8888,7 @@
                 </a:tc>
                 <a:tc>
                   <a:txBody>
-                    <a:bodyPr/>
+                    <a:bodyPr wrap="square"/>
                     <a:lstStyle/>
                     <a:p>
                       <a:pPr algn="l">
@@ -8941,7 +8941,7 @@
                 </a:tc>
                 <a:tc>
                   <a:txBody>
-                    <a:bodyPr/>
+                    <a:bodyPr wrap="square"/>
                     <a:lstStyle/>
                     <a:p>
                       <a:pPr algn="l">
@@ -8994,7 +8994,7 @@
                 </a:tc>
                 <a:tc>
                   <a:txBody>
-                    <a:bodyPr/>
+                    <a:bodyPr wrap="square"/>
                     <a:lstStyle/>
                     <a:p>
                       <a:pPr algn="l">
@@ -9047,7 +9047,7 @@
                 </a:tc>
                 <a:tc>
                   <a:txBody>
-                    <a:bodyPr/>
+                    <a:bodyPr wrap="square"/>
                     <a:lstStyle/>
                     <a:p>
                       <a:pPr algn="r">
@@ -9100,7 +9100,7 @@
                 </a:tc>
                 <a:tc>
                   <a:txBody>
-                    <a:bodyPr/>
+                    <a:bodyPr wrap="square"/>
                     <a:lstStyle/>
                     <a:p>
                       <a:pPr algn="l">
@@ -9152,10 +9152,10 @@
                   </a:tcPr>
                 </a:tc>
               </a:tr>
-              <a:tr h="678484">
-                <a:tc>
-                  <a:txBody>
-                    <a:bodyPr/>
+              <a:tr h="692070">
+                <a:tc>
+                  <a:txBody>
+                    <a:bodyPr wrap="square"/>
                     <a:lstStyle/>
                     <a:p>
                       <a:pPr algn="ctr">
@@ -9208,7 +9208,7 @@
                 </a:tc>
                 <a:tc>
                   <a:txBody>
-                    <a:bodyPr/>
+                    <a:bodyPr wrap="square"/>
                     <a:lstStyle/>
                     <a:p>
                       <a:pPr algn="l">
@@ -9261,7 +9261,7 @@
                 </a:tc>
                 <a:tc>
                   <a:txBody>
-                    <a:bodyPr/>
+                    <a:bodyPr wrap="square"/>
                     <a:lstStyle/>
                     <a:p>
                       <a:pPr algn="l">
@@ -9314,7 +9314,7 @@
                 </a:tc>
                 <a:tc>
                   <a:txBody>
-                    <a:bodyPr/>
+                    <a:bodyPr wrap="square"/>
                     <a:lstStyle/>
                     <a:p>
                       <a:pPr algn="l">
@@ -9367,7 +9367,7 @@
                 </a:tc>
                 <a:tc>
                   <a:txBody>
-                    <a:bodyPr/>
+                    <a:bodyPr wrap="square"/>
                     <a:lstStyle/>
                     <a:p>
                       <a:pPr algn="r">
@@ -9420,7 +9420,7 @@
                 </a:tc>
                 <a:tc>
                   <a:txBody>
-                    <a:bodyPr/>
+                    <a:bodyPr wrap="square"/>
                     <a:lstStyle/>
                     <a:p>
                       <a:pPr algn="l">
@@ -9472,10 +9472,10 @@
                   </a:tcPr>
                 </a:tc>
               </a:tr>
-              <a:tr h="678484">
-                <a:tc>
-                  <a:txBody>
-                    <a:bodyPr/>
+              <a:tr h="692070">
+                <a:tc>
+                  <a:txBody>
+                    <a:bodyPr wrap="square"/>
                     <a:lstStyle/>
                     <a:p>
                       <a:pPr algn="ctr">
@@ -9528,7 +9528,7 @@
                 </a:tc>
                 <a:tc>
                   <a:txBody>
-                    <a:bodyPr/>
+                    <a:bodyPr wrap="square"/>
                     <a:lstStyle/>
                     <a:p>
                       <a:pPr algn="l">
@@ -9581,7 +9581,7 @@
                 </a:tc>
                 <a:tc>
                   <a:txBody>
-                    <a:bodyPr/>
+                    <a:bodyPr wrap="square"/>
                     <a:lstStyle/>
                     <a:p>
                       <a:pPr algn="l">
@@ -9634,7 +9634,7 @@
                 </a:tc>
                 <a:tc>
                   <a:txBody>
-                    <a:bodyPr/>
+                    <a:bodyPr wrap="square"/>
                     <a:lstStyle/>
                     <a:p>
                       <a:pPr algn="l">
@@ -9687,7 +9687,7 @@
                 </a:tc>
                 <a:tc>
                   <a:txBody>
-                    <a:bodyPr/>
+                    <a:bodyPr wrap="square"/>
                     <a:lstStyle/>
                     <a:p>
                       <a:pPr algn="r">
@@ -9740,7 +9740,7 @@
                 </a:tc>
                 <a:tc>
                   <a:txBody>
-                    <a:bodyPr/>
+                    <a:bodyPr wrap="square"/>
                     <a:lstStyle/>
                     <a:p>
                       <a:pPr algn="l">
@@ -9792,10 +9792,10 @@
                   </a:tcPr>
                 </a:tc>
               </a:tr>
-              <a:tr h="678484">
-                <a:tc>
-                  <a:txBody>
-                    <a:bodyPr/>
+              <a:tr h="692070">
+                <a:tc>
+                  <a:txBody>
+                    <a:bodyPr wrap="square"/>
                     <a:lstStyle/>
                     <a:p>
                       <a:pPr algn="ctr">
@@ -9848,7 +9848,7 @@
                 </a:tc>
                 <a:tc>
                   <a:txBody>
-                    <a:bodyPr/>
+                    <a:bodyPr wrap="square"/>
                     <a:lstStyle/>
                     <a:p>
                       <a:pPr algn="l">
@@ -9901,7 +9901,7 @@
                 </a:tc>
                 <a:tc>
                   <a:txBody>
-                    <a:bodyPr/>
+                    <a:bodyPr wrap="square"/>
                     <a:lstStyle/>
                     <a:p>
                       <a:pPr algn="l">
@@ -9954,7 +9954,7 @@
                 </a:tc>
                 <a:tc>
                   <a:txBody>
-                    <a:bodyPr/>
+                    <a:bodyPr wrap="square"/>
                     <a:lstStyle/>
                     <a:p>
                       <a:pPr algn="l">
@@ -10007,7 +10007,7 @@
                 </a:tc>
                 <a:tc>
                   <a:txBody>
-                    <a:bodyPr/>
+                    <a:bodyPr wrap="square"/>
                     <a:lstStyle/>
                     <a:p>
                       <a:pPr algn="r">
@@ -10060,7 +10060,7 @@
                 </a:tc>
                 <a:tc>
                   <a:txBody>
-                    <a:bodyPr/>
+                    <a:bodyPr wrap="square"/>
                     <a:lstStyle/>
                     <a:p>
                       <a:pPr algn="l">
@@ -10112,10 +10112,10 @@
                   </a:tcPr>
                 </a:tc>
               </a:tr>
-              <a:tr h="678484">
-                <a:tc>
-                  <a:txBody>
-                    <a:bodyPr/>
+              <a:tr h="692070">
+                <a:tc>
+                  <a:txBody>
+                    <a:bodyPr wrap="square"/>
                     <a:lstStyle/>
                     <a:p>
                       <a:pPr algn="ctr">
@@ -10168,7 +10168,7 @@
                 </a:tc>
                 <a:tc>
                   <a:txBody>
-                    <a:bodyPr/>
+                    <a:bodyPr wrap="square"/>
                     <a:lstStyle/>
                     <a:p>
                       <a:pPr algn="l">
@@ -10221,7 +10221,7 @@
                 </a:tc>
                 <a:tc>
                   <a:txBody>
-                    <a:bodyPr/>
+                    <a:bodyPr wrap="square"/>
                     <a:lstStyle/>
                     <a:p>
                       <a:pPr algn="l">
@@ -10274,7 +10274,7 @@
                 </a:tc>
                 <a:tc>
                   <a:txBody>
-                    <a:bodyPr/>
+                    <a:bodyPr wrap="square"/>
                     <a:lstStyle/>
                     <a:p>
                       <a:pPr algn="l">
@@ -10327,7 +10327,7 @@
                 </a:tc>
                 <a:tc>
                   <a:txBody>
-                    <a:bodyPr/>
+                    <a:bodyPr wrap="square"/>
                     <a:lstStyle/>
                     <a:p>
                       <a:pPr algn="r">
@@ -10380,7 +10380,7 @@
                 </a:tc>
                 <a:tc>
                   <a:txBody>
-                    <a:bodyPr/>
+                    <a:bodyPr wrap="square"/>
                     <a:lstStyle/>
                     <a:p>
                       <a:pPr algn="l">
@@ -10432,10 +10432,10 @@
                   </a:tcPr>
                 </a:tc>
               </a:tr>
-              <a:tr h="678484">
-                <a:tc>
-                  <a:txBody>
-                    <a:bodyPr/>
+              <a:tr h="692070">
+                <a:tc>
+                  <a:txBody>
+                    <a:bodyPr wrap="square"/>
                     <a:lstStyle/>
                     <a:p>
                       <a:pPr algn="ctr">
@@ -10488,7 +10488,7 @@
                 </a:tc>
                 <a:tc>
                   <a:txBody>
-                    <a:bodyPr/>
+                    <a:bodyPr wrap="square"/>
                     <a:lstStyle/>
                     <a:p>
                       <a:pPr algn="l">
@@ -10541,7 +10541,7 @@
                 </a:tc>
                 <a:tc>
                   <a:txBody>
-                    <a:bodyPr/>
+                    <a:bodyPr wrap="square"/>
                     <a:lstStyle/>
                     <a:p>
                       <a:pPr algn="l">
@@ -10594,7 +10594,7 @@
                 </a:tc>
                 <a:tc>
                   <a:txBody>
-                    <a:bodyPr/>
+                    <a:bodyPr wrap="square"/>
                     <a:lstStyle/>
                     <a:p>
                       <a:pPr algn="l">
@@ -10647,7 +10647,7 @@
                 </a:tc>
                 <a:tc>
                   <a:txBody>
-                    <a:bodyPr/>
+                    <a:bodyPr wrap="square"/>
                     <a:lstStyle/>
                     <a:p>
                       <a:pPr algn="r">
@@ -10700,7 +10700,7 @@
                 </a:tc>
                 <a:tc>
                   <a:txBody>
-                    <a:bodyPr/>
+                    <a:bodyPr wrap="square"/>
                     <a:lstStyle/>
                     <a:p>
                       <a:pPr algn="l">
@@ -10752,10 +10752,10 @@
                   </a:tcPr>
                 </a:tc>
               </a:tr>
-              <a:tr h="678484">
-                <a:tc>
-                  <a:txBody>
-                    <a:bodyPr/>
+              <a:tr h="692070">
+                <a:tc>
+                  <a:txBody>
+                    <a:bodyPr wrap="square"/>
                     <a:lstStyle/>
                     <a:p>
                       <a:pPr algn="ctr">
@@ -10808,7 +10808,7 @@
                 </a:tc>
                 <a:tc>
                   <a:txBody>
-                    <a:bodyPr/>
+                    <a:bodyPr wrap="square"/>
                     <a:lstStyle/>
                     <a:p>
                       <a:pPr algn="l">
@@ -10861,7 +10861,7 @@
                 </a:tc>
                 <a:tc>
                   <a:txBody>
-                    <a:bodyPr/>
+                    <a:bodyPr wrap="square"/>
                     <a:lstStyle/>
                     <a:p>
                       <a:pPr algn="l">
@@ -10914,7 +10914,7 @@
                 </a:tc>
                 <a:tc>
                   <a:txBody>
-                    <a:bodyPr/>
+                    <a:bodyPr wrap="square"/>
                     <a:lstStyle/>
                     <a:p>
                       <a:pPr algn="l">
@@ -10967,7 +10967,7 @@
                 </a:tc>
                 <a:tc>
                   <a:txBody>
-                    <a:bodyPr/>
+                    <a:bodyPr wrap="square"/>
                     <a:lstStyle/>
                     <a:p>
                       <a:pPr algn="r">
@@ -11020,7 +11020,7 @@
                 </a:tc>
                 <a:tc>
                   <a:txBody>
-                    <a:bodyPr/>
+                    <a:bodyPr wrap="square"/>
                     <a:lstStyle/>
                     <a:p>
                       <a:pPr algn="l">
@@ -11163,7 +11163,7 @@
         </p:nvGraphicFramePr>
         <p:xfrm>
           <a:off x="533095" y="1030528"/>
-          <a:ext cx="11415367" cy="5488223"/>
+          <a:ext cx="11415367" cy="5583325"/>
         </p:xfrm>
         <a:graphic>
           <a:graphicData uri="http://schemas.openxmlformats.org/drawingml/2006/table">
@@ -11182,7 +11182,7 @@
               <a:tr h="738835">
                 <a:tc>
                   <a:txBody>
-                    <a:bodyPr/>
+                    <a:bodyPr wrap="square"/>
                     <a:lstStyle/>
                     <a:p>
                       <a:pPr algn="ctr">
@@ -11235,7 +11235,7 @@
                 </a:tc>
                 <a:tc>
                   <a:txBody>
-                    <a:bodyPr/>
+                    <a:bodyPr wrap="square"/>
                     <a:lstStyle/>
                     <a:p>
                       <a:pPr algn="ctr">
@@ -11288,7 +11288,7 @@
                 </a:tc>
                 <a:tc>
                   <a:txBody>
-                    <a:bodyPr/>
+                    <a:bodyPr wrap="square"/>
                     <a:lstStyle/>
                     <a:p>
                       <a:pPr algn="ctr">
@@ -11341,7 +11341,7 @@
                 </a:tc>
                 <a:tc>
                   <a:txBody>
-                    <a:bodyPr/>
+                    <a:bodyPr wrap="square"/>
                     <a:lstStyle/>
                     <a:p>
                       <a:pPr algn="ctr">
@@ -11394,7 +11394,7 @@
                 </a:tc>
                 <a:tc>
                   <a:txBody>
-                    <a:bodyPr/>
+                    <a:bodyPr wrap="square"/>
                     <a:lstStyle/>
                     <a:p>
                       <a:pPr algn="ctr">
@@ -11450,7 +11450,7 @@
                 </a:tc>
                 <a:tc>
                   <a:txBody>
-                    <a:bodyPr/>
+                    <a:bodyPr wrap="square"/>
                     <a:lstStyle/>
                     <a:p>
                       <a:pPr algn="ctr">
@@ -11502,10 +11502,10 @@
                   </a:tcPr>
                 </a:tc>
               </a:tr>
-              <a:tr h="678484">
-                <a:tc>
-                  <a:txBody>
-                    <a:bodyPr/>
+              <a:tr h="692070">
+                <a:tc>
+                  <a:txBody>
+                    <a:bodyPr wrap="square"/>
                     <a:lstStyle/>
                     <a:p>
                       <a:pPr algn="ctr">
@@ -11558,7 +11558,7 @@
                 </a:tc>
                 <a:tc>
                   <a:txBody>
-                    <a:bodyPr/>
+                    <a:bodyPr wrap="square"/>
                     <a:lstStyle/>
                     <a:p>
                       <a:pPr algn="l">
@@ -11611,7 +11611,7 @@
                 </a:tc>
                 <a:tc>
                   <a:txBody>
-                    <a:bodyPr/>
+                    <a:bodyPr wrap="square"/>
                     <a:lstStyle/>
                     <a:p>
                       <a:pPr algn="l">
@@ -11664,7 +11664,7 @@
                 </a:tc>
                 <a:tc>
                   <a:txBody>
-                    <a:bodyPr/>
+                    <a:bodyPr wrap="square"/>
                     <a:lstStyle/>
                     <a:p>
                       <a:pPr algn="l">
@@ -11717,7 +11717,7 @@
                 </a:tc>
                 <a:tc>
                   <a:txBody>
-                    <a:bodyPr/>
+                    <a:bodyPr wrap="square"/>
                     <a:lstStyle/>
                     <a:p>
                       <a:pPr algn="r">
@@ -11770,7 +11770,7 @@
                 </a:tc>
                 <a:tc>
                   <a:txBody>
-                    <a:bodyPr/>
+                    <a:bodyPr wrap="square"/>
                     <a:lstStyle/>
                     <a:p>
                       <a:pPr algn="l">
@@ -11822,10 +11822,10 @@
                   </a:tcPr>
                 </a:tc>
               </a:tr>
-              <a:tr h="678484">
-                <a:tc>
-                  <a:txBody>
-                    <a:bodyPr/>
+              <a:tr h="692070">
+                <a:tc>
+                  <a:txBody>
+                    <a:bodyPr wrap="square"/>
                     <a:lstStyle/>
                     <a:p>
                       <a:pPr algn="ctr">
@@ -11878,7 +11878,7 @@
                 </a:tc>
                 <a:tc>
                   <a:txBody>
-                    <a:bodyPr/>
+                    <a:bodyPr wrap="square"/>
                     <a:lstStyle/>
                     <a:p>
                       <a:pPr algn="l">
@@ -11931,7 +11931,7 @@
                 </a:tc>
                 <a:tc>
                   <a:txBody>
-                    <a:bodyPr/>
+                    <a:bodyPr wrap="square"/>
                     <a:lstStyle/>
                     <a:p>
                       <a:pPr algn="l">
@@ -11984,7 +11984,7 @@
                 </a:tc>
                 <a:tc>
                   <a:txBody>
-                    <a:bodyPr/>
+                    <a:bodyPr wrap="square"/>
                     <a:lstStyle/>
                     <a:p>
                       <a:pPr algn="l">
@@ -12037,7 +12037,7 @@
                 </a:tc>
                 <a:tc>
                   <a:txBody>
-                    <a:bodyPr/>
+                    <a:bodyPr wrap="square"/>
                     <a:lstStyle/>
                     <a:p>
                       <a:pPr algn="r">
@@ -12090,7 +12090,7 @@
                 </a:tc>
                 <a:tc>
                   <a:txBody>
-                    <a:bodyPr/>
+                    <a:bodyPr wrap="square"/>
                     <a:lstStyle/>
                     <a:p>
                       <a:pPr algn="l">
@@ -12142,10 +12142,10 @@
                   </a:tcPr>
                 </a:tc>
               </a:tr>
-              <a:tr h="678484">
-                <a:tc>
-                  <a:txBody>
-                    <a:bodyPr/>
+              <a:tr h="692070">
+                <a:tc>
+                  <a:txBody>
+                    <a:bodyPr wrap="square"/>
                     <a:lstStyle/>
                     <a:p>
                       <a:pPr algn="ctr">
@@ -12198,7 +12198,7 @@
                 </a:tc>
                 <a:tc>
                   <a:txBody>
-                    <a:bodyPr/>
+                    <a:bodyPr wrap="square"/>
                     <a:lstStyle/>
                     <a:p>
                       <a:pPr algn="l">
@@ -12251,7 +12251,7 @@
                 </a:tc>
                 <a:tc>
                   <a:txBody>
-                    <a:bodyPr/>
+                    <a:bodyPr wrap="square"/>
                     <a:lstStyle/>
                     <a:p>
                       <a:pPr algn="l">
@@ -12304,7 +12304,7 @@
                 </a:tc>
                 <a:tc>
                   <a:txBody>
-                    <a:bodyPr/>
+                    <a:bodyPr wrap="square"/>
                     <a:lstStyle/>
                     <a:p>
                       <a:pPr algn="l">
@@ -12357,7 +12357,7 @@
                 </a:tc>
                 <a:tc>
                   <a:txBody>
-                    <a:bodyPr/>
+                    <a:bodyPr wrap="square"/>
                     <a:lstStyle/>
                     <a:p>
                       <a:pPr algn="r">
@@ -12401,7 +12401,7 @@
                 </a:tc>
                 <a:tc>
                   <a:txBody>
-                    <a:bodyPr/>
+                    <a:bodyPr wrap="square"/>
                     <a:lstStyle/>
                     <a:p>
                       <a:pPr algn="l">
@@ -12453,10 +12453,10 @@
                   </a:tcPr>
                 </a:tc>
               </a:tr>
-              <a:tr h="678484">
-                <a:tc>
-                  <a:txBody>
-                    <a:bodyPr/>
+              <a:tr h="692070">
+                <a:tc>
+                  <a:txBody>
+                    <a:bodyPr wrap="square"/>
                     <a:lstStyle/>
                     <a:p>
                       <a:pPr algn="ctr">
@@ -12509,7 +12509,7 @@
                 </a:tc>
                 <a:tc>
                   <a:txBody>
-                    <a:bodyPr/>
+                    <a:bodyPr wrap="square"/>
                     <a:lstStyle/>
                     <a:p>
                       <a:pPr algn="l">
@@ -12562,7 +12562,7 @@
                 </a:tc>
                 <a:tc>
                   <a:txBody>
-                    <a:bodyPr/>
+                    <a:bodyPr wrap="square"/>
                     <a:lstStyle/>
                     <a:p>
                       <a:pPr algn="l">
@@ -12624,7 +12624,7 @@
                 </a:tc>
                 <a:tc>
                   <a:txBody>
-                    <a:bodyPr/>
+                    <a:bodyPr wrap="square"/>
                     <a:lstStyle/>
                     <a:p>
                       <a:pPr algn="l">
@@ -12677,7 +12677,7 @@
                 </a:tc>
                 <a:tc>
                   <a:txBody>
-                    <a:bodyPr/>
+                    <a:bodyPr wrap="square"/>
                     <a:lstStyle/>
                     <a:p>
                       <a:pPr algn="r">
@@ -12730,7 +12730,7 @@
                 </a:tc>
                 <a:tc>
                   <a:txBody>
-                    <a:bodyPr/>
+                    <a:bodyPr wrap="square"/>
                     <a:lstStyle/>
                     <a:p>
                       <a:pPr algn="l">
@@ -12782,10 +12782,10 @@
                   </a:tcPr>
                 </a:tc>
               </a:tr>
-              <a:tr h="678484">
-                <a:tc>
-                  <a:txBody>
-                    <a:bodyPr/>
+              <a:tr h="692070">
+                <a:tc>
+                  <a:txBody>
+                    <a:bodyPr wrap="square"/>
                     <a:lstStyle/>
                     <a:p>
                       <a:pPr algn="ctr">
@@ -12838,7 +12838,7 @@
                 </a:tc>
                 <a:tc>
                   <a:txBody>
-                    <a:bodyPr/>
+                    <a:bodyPr wrap="square"/>
                     <a:lstStyle/>
                     <a:p>
                       <a:pPr algn="l">
@@ -12891,7 +12891,7 @@
                 </a:tc>
                 <a:tc>
                   <a:txBody>
-                    <a:bodyPr/>
+                    <a:bodyPr wrap="square"/>
                     <a:lstStyle/>
                     <a:p>
                       <a:pPr algn="l">
@@ -12944,7 +12944,7 @@
                 </a:tc>
                 <a:tc>
                   <a:txBody>
-                    <a:bodyPr/>
+                    <a:bodyPr wrap="square"/>
                     <a:lstStyle/>
                     <a:p>
                       <a:pPr algn="l">
@@ -12997,7 +12997,7 @@
                 </a:tc>
                 <a:tc>
                   <a:txBody>
-                    <a:bodyPr/>
+                    <a:bodyPr wrap="square"/>
                     <a:lstStyle/>
                     <a:p>
                       <a:pPr algn="r">
@@ -13050,7 +13050,7 @@
                 </a:tc>
                 <a:tc>
                   <a:txBody>
-                    <a:bodyPr/>
+                    <a:bodyPr wrap="square"/>
                     <a:lstStyle/>
                     <a:p>
                       <a:pPr algn="l">
@@ -13102,10 +13102,10 @@
                   </a:tcPr>
                 </a:tc>
               </a:tr>
-              <a:tr h="678484">
-                <a:tc>
-                  <a:txBody>
-                    <a:bodyPr/>
+              <a:tr h="692070">
+                <a:tc>
+                  <a:txBody>
+                    <a:bodyPr wrap="square"/>
                     <a:lstStyle/>
                     <a:p>
                       <a:pPr algn="ctr">
@@ -13158,7 +13158,7 @@
                 </a:tc>
                 <a:tc>
                   <a:txBody>
-                    <a:bodyPr/>
+                    <a:bodyPr wrap="square"/>
                     <a:lstStyle/>
                     <a:p>
                       <a:pPr algn="l">
@@ -13211,7 +13211,7 @@
                 </a:tc>
                 <a:tc>
                   <a:txBody>
-                    <a:bodyPr/>
+                    <a:bodyPr wrap="square"/>
                     <a:lstStyle/>
                     <a:p>
                       <a:pPr algn="l">
@@ -13264,7 +13264,7 @@
                 </a:tc>
                 <a:tc>
                   <a:txBody>
-                    <a:bodyPr/>
+                    <a:bodyPr wrap="square"/>
                     <a:lstStyle/>
                     <a:p>
                       <a:pPr algn="l">
@@ -13317,7 +13317,7 @@
                 </a:tc>
                 <a:tc>
                   <a:txBody>
-                    <a:bodyPr/>
+                    <a:bodyPr wrap="square"/>
                     <a:lstStyle/>
                     <a:p>
                       <a:pPr algn="r">
@@ -13370,7 +13370,7 @@
                 </a:tc>
                 <a:tc>
                   <a:txBody>
-                    <a:bodyPr/>
+                    <a:bodyPr wrap="square"/>
                     <a:lstStyle/>
                     <a:p>
                       <a:pPr algn="l">
@@ -13422,10 +13422,10 @@
                   </a:tcPr>
                 </a:tc>
               </a:tr>
-              <a:tr h="678484">
-                <a:tc>
-                  <a:txBody>
-                    <a:bodyPr/>
+              <a:tr h="692070">
+                <a:tc>
+                  <a:txBody>
+                    <a:bodyPr wrap="square"/>
                     <a:lstStyle/>
                     <a:p>
                       <a:pPr algn="ctr">
@@ -13478,7 +13478,7 @@
                 </a:tc>
                 <a:tc>
                   <a:txBody>
-                    <a:bodyPr/>
+                    <a:bodyPr wrap="square"/>
                     <a:lstStyle/>
                     <a:p>
                       <a:pPr algn="l">
@@ -13531,7 +13531,7 @@
                 </a:tc>
                 <a:tc>
                   <a:txBody>
-                    <a:bodyPr/>
+                    <a:bodyPr wrap="square"/>
                     <a:lstStyle/>
                     <a:p>
                       <a:pPr algn="l">
@@ -13584,7 +13584,7 @@
                 </a:tc>
                 <a:tc>
                   <a:txBody>
-                    <a:bodyPr/>
+                    <a:bodyPr wrap="square"/>
                     <a:lstStyle/>
                     <a:p>
                       <a:pPr algn="l">
@@ -13637,7 +13637,7 @@
                 </a:tc>
                 <a:tc>
                   <a:txBody>
-                    <a:bodyPr/>
+                    <a:bodyPr wrap="square"/>
                     <a:lstStyle/>
                     <a:p>
                       <a:pPr algn="r">
@@ -13690,7 +13690,7 @@
                 </a:tc>
                 <a:tc>
                   <a:txBody>
-                    <a:bodyPr/>
+                    <a:bodyPr wrap="square"/>
                     <a:lstStyle/>
                     <a:p>
                       <a:pPr algn="l">
@@ -13833,7 +13833,7 @@
         </p:nvGraphicFramePr>
         <p:xfrm>
           <a:off x="533095" y="1030528"/>
-          <a:ext cx="11415367" cy="5488223"/>
+          <a:ext cx="11415367" cy="5583325"/>
         </p:xfrm>
         <a:graphic>
           <a:graphicData uri="http://schemas.openxmlformats.org/drawingml/2006/table">
@@ -13852,7 +13852,7 @@
               <a:tr h="738835">
                 <a:tc>
                   <a:txBody>
-                    <a:bodyPr/>
+                    <a:bodyPr wrap="square"/>
                     <a:lstStyle/>
                     <a:p>
                       <a:pPr algn="ctr">
@@ -13905,7 +13905,7 @@
                 </a:tc>
                 <a:tc>
                   <a:txBody>
-                    <a:bodyPr/>
+                    <a:bodyPr wrap="square"/>
                     <a:lstStyle/>
                     <a:p>
                       <a:pPr algn="ctr">
@@ -13958,7 +13958,7 @@
                 </a:tc>
                 <a:tc>
                   <a:txBody>
-                    <a:bodyPr/>
+                    <a:bodyPr wrap="square"/>
                     <a:lstStyle/>
                     <a:p>
                       <a:pPr algn="ctr">
@@ -14011,7 +14011,7 @@
                 </a:tc>
                 <a:tc>
                   <a:txBody>
-                    <a:bodyPr/>
+                    <a:bodyPr wrap="square"/>
                     <a:lstStyle/>
                     <a:p>
                       <a:pPr algn="ctr">
@@ -14064,7 +14064,7 @@
                 </a:tc>
                 <a:tc>
                   <a:txBody>
-                    <a:bodyPr/>
+                    <a:bodyPr wrap="square"/>
                     <a:lstStyle/>
                     <a:p>
                       <a:pPr algn="ctr">
@@ -14120,7 +14120,7 @@
                 </a:tc>
                 <a:tc>
                   <a:txBody>
-                    <a:bodyPr/>
+                    <a:bodyPr wrap="square"/>
                     <a:lstStyle/>
                     <a:p>
                       <a:pPr algn="ctr">
@@ -14172,10 +14172,10 @@
                   </a:tcPr>
                 </a:tc>
               </a:tr>
-              <a:tr h="678484">
-                <a:tc>
-                  <a:txBody>
-                    <a:bodyPr/>
+              <a:tr h="692070">
+                <a:tc>
+                  <a:txBody>
+                    <a:bodyPr wrap="square"/>
                     <a:lstStyle/>
                     <a:p>
                       <a:pPr algn="ctr">
@@ -14228,7 +14228,7 @@
                 </a:tc>
                 <a:tc>
                   <a:txBody>
-                    <a:bodyPr/>
+                    <a:bodyPr wrap="square"/>
                     <a:lstStyle/>
                     <a:p>
                       <a:pPr algn="l">
@@ -14281,7 +14281,7 @@
                 </a:tc>
                 <a:tc>
                   <a:txBody>
-                    <a:bodyPr/>
+                    <a:bodyPr wrap="square"/>
                     <a:lstStyle/>
                     <a:p>
                       <a:pPr algn="l">
@@ -14334,7 +14334,7 @@
                 </a:tc>
                 <a:tc>
                   <a:txBody>
-                    <a:bodyPr/>
+                    <a:bodyPr wrap="square"/>
                     <a:lstStyle/>
                     <a:p>
                       <a:pPr algn="l">
@@ -14387,7 +14387,7 @@
                 </a:tc>
                 <a:tc>
                   <a:txBody>
-                    <a:bodyPr/>
+                    <a:bodyPr wrap="square"/>
                     <a:lstStyle/>
                     <a:p>
                       <a:pPr algn="r">
@@ -14440,7 +14440,7 @@
                 </a:tc>
                 <a:tc>
                   <a:txBody>
-                    <a:bodyPr/>
+                    <a:bodyPr wrap="square"/>
                     <a:lstStyle/>
                     <a:p>
                       <a:pPr algn="l">
@@ -14492,10 +14492,10 @@
                   </a:tcPr>
                 </a:tc>
               </a:tr>
-              <a:tr h="678484">
-                <a:tc>
-                  <a:txBody>
-                    <a:bodyPr/>
+              <a:tr h="692070">
+                <a:tc>
+                  <a:txBody>
+                    <a:bodyPr wrap="square"/>
                     <a:lstStyle/>
                     <a:p>
                       <a:pPr algn="ctr">
@@ -14548,7 +14548,7 @@
                 </a:tc>
                 <a:tc>
                   <a:txBody>
-                    <a:bodyPr/>
+                    <a:bodyPr wrap="square"/>
                     <a:lstStyle/>
                     <a:p>
                       <a:pPr algn="l">
@@ -14601,7 +14601,7 @@
                 </a:tc>
                 <a:tc>
                   <a:txBody>
-                    <a:bodyPr/>
+                    <a:bodyPr wrap="square"/>
                     <a:lstStyle/>
                     <a:p>
                       <a:pPr algn="l">
@@ -14654,7 +14654,7 @@
                 </a:tc>
                 <a:tc>
                   <a:txBody>
-                    <a:bodyPr/>
+                    <a:bodyPr wrap="square"/>
                     <a:lstStyle/>
                     <a:p>
                       <a:pPr algn="l">
@@ -14707,7 +14707,7 @@
                 </a:tc>
                 <a:tc>
                   <a:txBody>
-                    <a:bodyPr/>
+                    <a:bodyPr wrap="square"/>
                     <a:lstStyle/>
                     <a:p>
                       <a:pPr algn="r">
@@ -14760,7 +14760,7 @@
                 </a:tc>
                 <a:tc>
                   <a:txBody>
-                    <a:bodyPr/>
+                    <a:bodyPr wrap="square"/>
                     <a:lstStyle/>
                     <a:p>
                       <a:pPr algn="l">
@@ -14812,10 +14812,10 @@
                   </a:tcPr>
                 </a:tc>
               </a:tr>
-              <a:tr h="678484">
-                <a:tc>
-                  <a:txBody>
-                    <a:bodyPr/>
+              <a:tr h="692070">
+                <a:tc>
+                  <a:txBody>
+                    <a:bodyPr wrap="square"/>
                     <a:lstStyle/>
                     <a:p>
                       <a:pPr algn="ctr">
@@ -14868,7 +14868,7 @@
                 </a:tc>
                 <a:tc>
                   <a:txBody>
-                    <a:bodyPr/>
+                    <a:bodyPr wrap="square"/>
                     <a:lstStyle/>
                     <a:p>
                       <a:pPr algn="l">
@@ -14921,7 +14921,7 @@
                 </a:tc>
                 <a:tc>
                   <a:txBody>
-                    <a:bodyPr/>
+                    <a:bodyPr wrap="square"/>
                     <a:lstStyle/>
                     <a:p>
                       <a:pPr algn="l">
@@ -14974,7 +14974,7 @@
                 </a:tc>
                 <a:tc>
                   <a:txBody>
-                    <a:bodyPr/>
+                    <a:bodyPr wrap="square"/>
                     <a:lstStyle/>
                     <a:p>
                       <a:pPr algn="l">
@@ -15027,7 +15027,7 @@
                 </a:tc>
                 <a:tc>
                   <a:txBody>
-                    <a:bodyPr/>
+                    <a:bodyPr wrap="square"/>
                     <a:lstStyle/>
                     <a:p>
                       <a:pPr algn="r">
@@ -15080,7 +15080,7 @@
                 </a:tc>
                 <a:tc>
                   <a:txBody>
-                    <a:bodyPr/>
+                    <a:bodyPr wrap="square"/>
                     <a:lstStyle/>
                     <a:p>
                       <a:pPr algn="l">
@@ -15132,10 +15132,10 @@
                   </a:tcPr>
                 </a:tc>
               </a:tr>
-              <a:tr h="678484">
-                <a:tc>
-                  <a:txBody>
-                    <a:bodyPr/>
+              <a:tr h="692070">
+                <a:tc>
+                  <a:txBody>
+                    <a:bodyPr wrap="square"/>
                     <a:lstStyle/>
                     <a:p>
                       <a:pPr algn="ctr">
@@ -15188,7 +15188,7 @@
                 </a:tc>
                 <a:tc>
                   <a:txBody>
-                    <a:bodyPr/>
+                    <a:bodyPr wrap="square"/>
                     <a:lstStyle/>
                     <a:p>
                       <a:pPr algn="l">
@@ -15241,7 +15241,7 @@
                 </a:tc>
                 <a:tc>
                   <a:txBody>
-                    <a:bodyPr/>
+                    <a:bodyPr wrap="square"/>
                     <a:lstStyle/>
                     <a:p>
                       <a:pPr algn="l">
@@ -15294,7 +15294,7 @@
                 </a:tc>
                 <a:tc>
                   <a:txBody>
-                    <a:bodyPr/>
+                    <a:bodyPr wrap="square"/>
                     <a:lstStyle/>
                     <a:p>
                       <a:pPr algn="l">
@@ -15347,7 +15347,7 @@
                 </a:tc>
                 <a:tc>
                   <a:txBody>
-                    <a:bodyPr/>
+                    <a:bodyPr wrap="square"/>
                     <a:lstStyle/>
                     <a:p>
                       <a:pPr algn="r">
@@ -15400,7 +15400,7 @@
                 </a:tc>
                 <a:tc>
                   <a:txBody>
-                    <a:bodyPr/>
+                    <a:bodyPr wrap="square"/>
                     <a:lstStyle/>
                     <a:p>
                       <a:pPr algn="l">
@@ -15452,10 +15452,10 @@
                   </a:tcPr>
                 </a:tc>
               </a:tr>
-              <a:tr h="678484">
-                <a:tc>
-                  <a:txBody>
-                    <a:bodyPr/>
+              <a:tr h="692070">
+                <a:tc>
+                  <a:txBody>
+                    <a:bodyPr wrap="square"/>
                     <a:lstStyle/>
                     <a:p>
                       <a:pPr algn="ctr">
@@ -15508,7 +15508,7 @@
                 </a:tc>
                 <a:tc>
                   <a:txBody>
-                    <a:bodyPr/>
+                    <a:bodyPr wrap="square"/>
                     <a:lstStyle/>
                     <a:p>
                       <a:pPr algn="l">
@@ -15561,7 +15561,7 @@
                 </a:tc>
                 <a:tc>
                   <a:txBody>
-                    <a:bodyPr/>
+                    <a:bodyPr wrap="square"/>
                     <a:lstStyle/>
                     <a:p>
                       <a:pPr algn="l">
@@ -15614,7 +15614,7 @@
                 </a:tc>
                 <a:tc>
                   <a:txBody>
-                    <a:bodyPr/>
+                    <a:bodyPr wrap="square"/>
                     <a:lstStyle/>
                     <a:p>
                       <a:pPr algn="l">
@@ -15667,7 +15667,7 @@
                 </a:tc>
                 <a:tc>
                   <a:txBody>
-                    <a:bodyPr/>
+                    <a:bodyPr wrap="square"/>
                     <a:lstStyle/>
                     <a:p>
                       <a:pPr algn="r">
@@ -15720,7 +15720,7 @@
                 </a:tc>
                 <a:tc>
                   <a:txBody>
-                    <a:bodyPr/>
+                    <a:bodyPr wrap="square"/>
                     <a:lstStyle/>
                     <a:p>
                       <a:pPr algn="l">
@@ -15772,10 +15772,10 @@
                   </a:tcPr>
                 </a:tc>
               </a:tr>
-              <a:tr h="678484">
-                <a:tc>
-                  <a:txBody>
-                    <a:bodyPr/>
+              <a:tr h="692070">
+                <a:tc>
+                  <a:txBody>
+                    <a:bodyPr wrap="square"/>
                     <a:lstStyle/>
                     <a:p>
                       <a:pPr algn="ctr">
@@ -15828,7 +15828,7 @@
                 </a:tc>
                 <a:tc>
                   <a:txBody>
-                    <a:bodyPr/>
+                    <a:bodyPr wrap="square"/>
                     <a:lstStyle/>
                     <a:p>
                       <a:pPr algn="l">
@@ -15881,7 +15881,7 @@
                 </a:tc>
                 <a:tc>
                   <a:txBody>
-                    <a:bodyPr/>
+                    <a:bodyPr wrap="square"/>
                     <a:lstStyle/>
                     <a:p>
                       <a:pPr algn="l">
@@ -15934,7 +15934,7 @@
                 </a:tc>
                 <a:tc>
                   <a:txBody>
-                    <a:bodyPr/>
+                    <a:bodyPr wrap="square"/>
                     <a:lstStyle/>
                     <a:p>
                       <a:pPr algn="l">
@@ -15987,7 +15987,7 @@
                 </a:tc>
                 <a:tc>
                   <a:txBody>
-                    <a:bodyPr/>
+                    <a:bodyPr wrap="square"/>
                     <a:lstStyle/>
                     <a:p>
                       <a:pPr algn="r">
@@ -16040,7 +16040,7 @@
                 </a:tc>
                 <a:tc>
                   <a:txBody>
-                    <a:bodyPr/>
+                    <a:bodyPr wrap="square"/>
                     <a:lstStyle/>
                     <a:p>
                       <a:pPr algn="l">
@@ -16092,10 +16092,10 @@
                   </a:tcPr>
                 </a:tc>
               </a:tr>
-              <a:tr h="678484">
-                <a:tc>
-                  <a:txBody>
-                    <a:bodyPr/>
+              <a:tr h="692070">
+                <a:tc>
+                  <a:txBody>
+                    <a:bodyPr wrap="square"/>
                     <a:lstStyle/>
                     <a:p>
                       <a:pPr algn="ctr">
@@ -16148,7 +16148,7 @@
                 </a:tc>
                 <a:tc>
                   <a:txBody>
-                    <a:bodyPr/>
+                    <a:bodyPr wrap="square"/>
                     <a:lstStyle/>
                     <a:p>
                       <a:pPr algn="l">
@@ -16201,7 +16201,7 @@
                 </a:tc>
                 <a:tc>
                   <a:txBody>
-                    <a:bodyPr/>
+                    <a:bodyPr wrap="square"/>
                     <a:lstStyle/>
                     <a:p>
                       <a:pPr algn="l">
@@ -16254,7 +16254,7 @@
                 </a:tc>
                 <a:tc>
                   <a:txBody>
-                    <a:bodyPr/>
+                    <a:bodyPr wrap="square"/>
                     <a:lstStyle/>
                     <a:p>
                       <a:pPr algn="l">
@@ -16307,7 +16307,7 @@
                 </a:tc>
                 <a:tc>
                   <a:txBody>
-                    <a:bodyPr/>
+                    <a:bodyPr wrap="square"/>
                     <a:lstStyle/>
                     <a:p>
                       <a:pPr algn="r">
@@ -16360,7 +16360,7 @@
                 </a:tc>
                 <a:tc>
                   <a:txBody>
-                    <a:bodyPr/>
+                    <a:bodyPr wrap="square"/>
                     <a:lstStyle/>
                     <a:p>
                       <a:pPr algn="l">
@@ -16503,7 +16503,7 @@
         </p:nvGraphicFramePr>
         <p:xfrm>
           <a:off x="533095" y="1030528"/>
-          <a:ext cx="11415367" cy="4809739"/>
+          <a:ext cx="11415367" cy="4891255"/>
         </p:xfrm>
         <a:graphic>
           <a:graphicData uri="http://schemas.openxmlformats.org/drawingml/2006/table">
@@ -16522,7 +16522,7 @@
               <a:tr h="738835">
                 <a:tc>
                   <a:txBody>
-                    <a:bodyPr/>
+                    <a:bodyPr wrap="square"/>
                     <a:lstStyle/>
                     <a:p>
                       <a:pPr algn="ctr">
@@ -16575,7 +16575,7 @@
                 </a:tc>
                 <a:tc>
                   <a:txBody>
-                    <a:bodyPr/>
+                    <a:bodyPr wrap="square"/>
                     <a:lstStyle/>
                     <a:p>
                       <a:pPr algn="ctr">
@@ -16628,7 +16628,7 @@
                 </a:tc>
                 <a:tc>
                   <a:txBody>
-                    <a:bodyPr/>
+                    <a:bodyPr wrap="square"/>
                     <a:lstStyle/>
                     <a:p>
                       <a:pPr algn="ctr">
@@ -16681,7 +16681,7 @@
                 </a:tc>
                 <a:tc>
                   <a:txBody>
-                    <a:bodyPr/>
+                    <a:bodyPr wrap="square"/>
                     <a:lstStyle/>
                     <a:p>
                       <a:pPr algn="ctr">
@@ -16734,7 +16734,7 @@
                 </a:tc>
                 <a:tc>
                   <a:txBody>
-                    <a:bodyPr/>
+                    <a:bodyPr wrap="square"/>
                     <a:lstStyle/>
                     <a:p>
                       <a:pPr algn="ctr">
@@ -16790,7 +16790,7 @@
                 </a:tc>
                 <a:tc>
                   <a:txBody>
-                    <a:bodyPr/>
+                    <a:bodyPr wrap="square"/>
                     <a:lstStyle/>
                     <a:p>
                       <a:pPr algn="ctr">
@@ -16842,10 +16842,10 @@
                   </a:tcPr>
                 </a:tc>
               </a:tr>
-              <a:tr h="678484">
-                <a:tc>
-                  <a:txBody>
-                    <a:bodyPr/>
+              <a:tr h="692070">
+                <a:tc>
+                  <a:txBody>
+                    <a:bodyPr wrap="square"/>
                     <a:lstStyle/>
                     <a:p>
                       <a:pPr algn="ctr">
@@ -16898,7 +16898,7 @@
                 </a:tc>
                 <a:tc>
                   <a:txBody>
-                    <a:bodyPr/>
+                    <a:bodyPr wrap="square"/>
                     <a:lstStyle/>
                     <a:p>
                       <a:pPr algn="l">
@@ -16951,7 +16951,7 @@
                 </a:tc>
                 <a:tc>
                   <a:txBody>
-                    <a:bodyPr/>
+                    <a:bodyPr wrap="square"/>
                     <a:lstStyle/>
                     <a:p>
                       <a:pPr algn="l">
@@ -17004,7 +17004,7 @@
                 </a:tc>
                 <a:tc>
                   <a:txBody>
-                    <a:bodyPr/>
+                    <a:bodyPr wrap="square"/>
                     <a:lstStyle/>
                     <a:p>
                       <a:pPr algn="l">
@@ -17057,7 +17057,7 @@
                 </a:tc>
                 <a:tc>
                   <a:txBody>
-                    <a:bodyPr/>
+                    <a:bodyPr wrap="square"/>
                     <a:lstStyle/>
                     <a:p>
                       <a:pPr algn="r">
@@ -17110,7 +17110,7 @@
                 </a:tc>
                 <a:tc>
                   <a:txBody>
-                    <a:bodyPr/>
+                    <a:bodyPr wrap="square"/>
                     <a:lstStyle/>
                     <a:p>
                       <a:pPr algn="l">
@@ -17162,10 +17162,10 @@
                   </a:tcPr>
                 </a:tc>
               </a:tr>
-              <a:tr h="678484">
-                <a:tc>
-                  <a:txBody>
-                    <a:bodyPr/>
+              <a:tr h="692070">
+                <a:tc>
+                  <a:txBody>
+                    <a:bodyPr wrap="square"/>
                     <a:lstStyle/>
                     <a:p>
                       <a:pPr algn="ctr">
@@ -17218,7 +17218,7 @@
                 </a:tc>
                 <a:tc>
                   <a:txBody>
-                    <a:bodyPr/>
+                    <a:bodyPr wrap="square"/>
                     <a:lstStyle/>
                     <a:p>
                       <a:pPr algn="l">
@@ -17271,7 +17271,7 @@
                 </a:tc>
                 <a:tc>
                   <a:txBody>
-                    <a:bodyPr/>
+                    <a:bodyPr wrap="square"/>
                     <a:lstStyle/>
                     <a:p>
                       <a:pPr algn="l">
@@ -17324,7 +17324,7 @@
                 </a:tc>
                 <a:tc>
                   <a:txBody>
-                    <a:bodyPr/>
+                    <a:bodyPr wrap="square"/>
                     <a:lstStyle/>
                     <a:p>
                       <a:pPr algn="l">
@@ -17377,7 +17377,7 @@
                 </a:tc>
                 <a:tc>
                   <a:txBody>
-                    <a:bodyPr/>
+                    <a:bodyPr wrap="square"/>
                     <a:lstStyle/>
                     <a:p>
                       <a:pPr algn="r">
@@ -17430,7 +17430,7 @@
                 </a:tc>
                 <a:tc>
                   <a:txBody>
-                    <a:bodyPr/>
+                    <a:bodyPr wrap="square"/>
                     <a:lstStyle/>
                     <a:p>
                       <a:pPr algn="l">
@@ -17482,10 +17482,10 @@
                   </a:tcPr>
                 </a:tc>
               </a:tr>
-              <a:tr h="678484">
-                <a:tc>
-                  <a:txBody>
-                    <a:bodyPr/>
+              <a:tr h="692070">
+                <a:tc>
+                  <a:txBody>
+                    <a:bodyPr wrap="square"/>
                     <a:lstStyle/>
                     <a:p>
                       <a:pPr algn="ctr">
@@ -17538,7 +17538,7 @@
                 </a:tc>
                 <a:tc>
                   <a:txBody>
-                    <a:bodyPr/>
+                    <a:bodyPr wrap="square"/>
                     <a:lstStyle/>
                     <a:p>
                       <a:pPr algn="l">
@@ -17591,7 +17591,7 @@
                 </a:tc>
                 <a:tc>
                   <a:txBody>
-                    <a:bodyPr/>
+                    <a:bodyPr wrap="square"/>
                     <a:lstStyle/>
                     <a:p>
                       <a:pPr algn="l">
@@ -17644,7 +17644,7 @@
                 </a:tc>
                 <a:tc>
                   <a:txBody>
-                    <a:bodyPr/>
+                    <a:bodyPr wrap="square"/>
                     <a:lstStyle/>
                     <a:p>
                       <a:pPr algn="l">
@@ -17697,7 +17697,7 @@
                 </a:tc>
                 <a:tc>
                   <a:txBody>
-                    <a:bodyPr/>
+                    <a:bodyPr wrap="square"/>
                     <a:lstStyle/>
                     <a:p>
                       <a:pPr algn="r">
@@ -17750,7 +17750,7 @@
                 </a:tc>
                 <a:tc>
                   <a:txBody>
-                    <a:bodyPr/>
+                    <a:bodyPr wrap="square"/>
                     <a:lstStyle/>
                     <a:p>
                       <a:pPr algn="l">
@@ -17802,10 +17802,10 @@
                   </a:tcPr>
                 </a:tc>
               </a:tr>
-              <a:tr h="678484">
-                <a:tc>
-                  <a:txBody>
-                    <a:bodyPr/>
+              <a:tr h="692070">
+                <a:tc>
+                  <a:txBody>
+                    <a:bodyPr wrap="square"/>
                     <a:lstStyle/>
                     <a:p>
                       <a:pPr algn="ctr">
@@ -17858,7 +17858,7 @@
                 </a:tc>
                 <a:tc>
                   <a:txBody>
-                    <a:bodyPr/>
+                    <a:bodyPr wrap="square"/>
                     <a:lstStyle/>
                     <a:p>
                       <a:pPr algn="l">
@@ -17911,7 +17911,7 @@
                 </a:tc>
                 <a:tc>
                   <a:txBody>
-                    <a:bodyPr/>
+                    <a:bodyPr wrap="square"/>
                     <a:lstStyle/>
                     <a:p>
                       <a:pPr algn="l">
@@ -17964,7 +17964,7 @@
                 </a:tc>
                 <a:tc>
                   <a:txBody>
-                    <a:bodyPr/>
+                    <a:bodyPr wrap="square"/>
                     <a:lstStyle/>
                     <a:p>
                       <a:pPr algn="l">
@@ -18017,7 +18017,7 @@
                 </a:tc>
                 <a:tc>
                   <a:txBody>
-                    <a:bodyPr/>
+                    <a:bodyPr wrap="square"/>
                     <a:lstStyle/>
                     <a:p>
                       <a:pPr algn="r">
@@ -18070,7 +18070,7 @@
                 </a:tc>
                 <a:tc>
                   <a:txBody>
-                    <a:bodyPr/>
+                    <a:bodyPr wrap="square"/>
                     <a:lstStyle/>
                     <a:p>
                       <a:pPr algn="l">
@@ -18122,10 +18122,10 @@
                   </a:tcPr>
                 </a:tc>
               </a:tr>
-              <a:tr h="678484">
-                <a:tc>
-                  <a:txBody>
-                    <a:bodyPr/>
+              <a:tr h="692070">
+                <a:tc>
+                  <a:txBody>
+                    <a:bodyPr wrap="square"/>
                     <a:lstStyle/>
                     <a:p>
                       <a:pPr algn="ctr">
@@ -18178,7 +18178,7 @@
                 </a:tc>
                 <a:tc>
                   <a:txBody>
-                    <a:bodyPr/>
+                    <a:bodyPr wrap="square"/>
                     <a:lstStyle/>
                     <a:p>
                       <a:pPr algn="l">
@@ -18231,7 +18231,7 @@
                 </a:tc>
                 <a:tc>
                   <a:txBody>
-                    <a:bodyPr/>
+                    <a:bodyPr wrap="square"/>
                     <a:lstStyle/>
                     <a:p>
                       <a:pPr algn="l">
@@ -18284,7 +18284,7 @@
                 </a:tc>
                 <a:tc>
                   <a:txBody>
-                    <a:bodyPr/>
+                    <a:bodyPr wrap="square"/>
                     <a:lstStyle/>
                     <a:p>
                       <a:pPr algn="l">
@@ -18337,7 +18337,7 @@
                 </a:tc>
                 <a:tc>
                   <a:txBody>
-                    <a:bodyPr/>
+                    <a:bodyPr wrap="square"/>
                     <a:lstStyle/>
                     <a:p>
                       <a:pPr algn="r">
@@ -18381,7 +18381,7 @@
                 </a:tc>
                 <a:tc>
                   <a:txBody>
-                    <a:bodyPr/>
+                    <a:bodyPr wrap="square"/>
                     <a:lstStyle/>
                     <a:p>
                       <a:pPr algn="l">
@@ -18433,10 +18433,10 @@
                   </a:tcPr>
                 </a:tc>
               </a:tr>
-              <a:tr h="678484">
-                <a:tc>
-                  <a:txBody>
-                    <a:bodyPr/>
+              <a:tr h="692070">
+                <a:tc>
+                  <a:txBody>
+                    <a:bodyPr wrap="square"/>
                     <a:lstStyle/>
                     <a:p>
                       <a:pPr algn="ctr">
@@ -18489,7 +18489,7 @@
                 </a:tc>
                 <a:tc>
                   <a:txBody>
-                    <a:bodyPr/>
+                    <a:bodyPr wrap="square"/>
                     <a:lstStyle/>
                     <a:p>
                       <a:pPr algn="l">
@@ -18542,7 +18542,7 @@
                 </a:tc>
                 <a:tc>
                   <a:txBody>
-                    <a:bodyPr/>
+                    <a:bodyPr wrap="square"/>
                     <a:lstStyle/>
                     <a:p>
                       <a:pPr algn="l">
@@ -18604,7 +18604,7 @@
                 </a:tc>
                 <a:tc>
                   <a:txBody>
-                    <a:bodyPr/>
+                    <a:bodyPr wrap="square"/>
                     <a:lstStyle/>
                     <a:p>
                       <a:pPr algn="l">
@@ -18648,7 +18648,7 @@
                 </a:tc>
                 <a:tc>
                   <a:txBody>
-                    <a:bodyPr/>
+                    <a:bodyPr wrap="square"/>
                     <a:lstStyle/>
                     <a:p>
                       <a:pPr algn="r">
@@ -18692,7 +18692,7 @@
                 </a:tc>
                 <a:tc>
                   <a:txBody>
-                    <a:bodyPr/>
+                    <a:bodyPr wrap="square"/>
                     <a:lstStyle/>
                     <a:p>
                       <a:pPr algn="l">

--- a/Дефекты_и_разработки_по_Пилоту.pptx
+++ b/Дефекты_и_разработки_по_Пилоту.pptx
@@ -11,6 +11,7 @@
     <p:sldId id="259" r:id="rId10"/>
     <p:sldId id="260" r:id="rId11"/>
     <p:sldId id="261" r:id="rId12"/>
+    <p:sldId id="262" r:id="rId13"/>
   </p:sldIdLst>
   <p:sldSz cx="12191695" cy="6858000" type="screen4x3"/>
   <p:notesSz cx="6858000" cy="9144000"/>
@@ -3147,7 +3148,7 @@
                 </a:solidFill>
                 <a:latin typeface="Verdana"/>
               </a:rPr>
-              <a:t>Дефекты и разработки по Пилоту (1/6)</a:t>
+              <a:t>Дефекты и разработки по Пилоту (1/7)</a:t>
             </a:r>
           </a:p>
         </p:txBody>
@@ -5808,7 +5809,7 @@
                 </a:solidFill>
                 <a:latin typeface="Verdana"/>
               </a:rPr>
-              <a:t>Дефекты и разработки по Пилоту (2/6)</a:t>
+              <a:t>Дефекты и разработки по Пилоту (2/7)</a:t>
             </a:r>
           </a:p>
         </p:txBody>
@@ -8478,7 +8479,7 @@
                 </a:solidFill>
                 <a:latin typeface="Verdana"/>
               </a:rPr>
-              <a:t>Дефекты и разработки по Пилоту (3/6)</a:t>
+              <a:t>Дефекты и разработки по Пилоту (3/7)</a:t>
             </a:r>
           </a:p>
         </p:txBody>
@@ -8493,7 +8494,7 @@
         </p:nvGraphicFramePr>
         <p:xfrm>
           <a:off x="533095" y="1030528"/>
-          <a:ext cx="11415367" cy="5583325"/>
+          <a:ext cx="11415367" cy="5583324"/>
         </p:xfrm>
         <a:graphic>
           <a:graphicData uri="http://schemas.openxmlformats.org/drawingml/2006/table">
@@ -8832,7 +8833,7 @@
                   </a:tcPr>
                 </a:tc>
               </a:tr>
-              <a:tr h="692070">
+              <a:tr h="756756">
                 <a:tc>
                   <a:txBody>
                     <a:bodyPr wrap="square"/>
@@ -9152,7 +9153,7 @@
                   </a:tcPr>
                 </a:tc>
               </a:tr>
-              <a:tr h="692070">
+              <a:tr h="756756">
                 <a:tc>
                   <a:txBody>
                     <a:bodyPr wrap="square"/>
@@ -9472,7 +9473,7 @@
                   </a:tcPr>
                 </a:tc>
               </a:tr>
-              <a:tr h="692070">
+              <a:tr h="977533">
                 <a:tc>
                   <a:txBody>
                     <a:bodyPr wrap="square"/>
@@ -9792,7 +9793,7 @@
                   </a:tcPr>
                 </a:tc>
               </a:tr>
-              <a:tr h="692070">
+              <a:tr h="798344">
                 <a:tc>
                   <a:txBody>
                     <a:bodyPr wrap="square"/>
@@ -10112,7 +10113,7 @@
                   </a:tcPr>
                 </a:tc>
               </a:tr>
-              <a:tr h="692070">
+              <a:tr h="756756">
                 <a:tc>
                   <a:txBody>
                     <a:bodyPr wrap="square"/>
@@ -10432,7 +10433,7 @@
                   </a:tcPr>
                 </a:tc>
               </a:tr>
-              <a:tr h="692070">
+              <a:tr h="798344">
                 <a:tc>
                   <a:txBody>
                     <a:bodyPr wrap="square"/>
@@ -10728,326 +10729,6 @@
                   <a:tcPr anchor="ctr" marL="38100" marR="38100" marT="25400" marB="25400">
                     <a:solidFill>
                       <a:srgbClr val="F8E7E8"/>
-                    </a:solidFill>
-                    <a:lnL w="6350" cap="flat" cmpd="sng" algn="ctr">
-                      <a:solidFill>
-                        <a:srgbClr val="000000"/>
-                      </a:solidFill>
-                    </a:lnL>
-                    <a:lnR w="6350" cap="flat" cmpd="sng" algn="ctr">
-                      <a:solidFill>
-                        <a:srgbClr val="000000"/>
-                      </a:solidFill>
-                    </a:lnR>
-                    <a:lnT w="6350" cap="flat" cmpd="sng" algn="ctr">
-                      <a:solidFill>
-                        <a:srgbClr val="000000"/>
-                      </a:solidFill>
-                    </a:lnT>
-                    <a:lnB w="6350" cap="flat" cmpd="sng" algn="ctr">
-                      <a:solidFill>
-                        <a:srgbClr val="000000"/>
-                      </a:solidFill>
-                    </a:lnB>
-                  </a:tcPr>
-                </a:tc>
-              </a:tr>
-              <a:tr h="692070">
-                <a:tc>
-                  <a:txBody>
-                    <a:bodyPr wrap="square"/>
-                    <a:lstStyle/>
-                    <a:p>
-                      <a:pPr algn="ctr">
-                        <a:lnSpc>
-                          <a:spcPct val="100000"/>
-                        </a:lnSpc>
-                        <a:spcBef>
-                          <a:spcPts val="0"/>
-                        </a:spcBef>
-                        <a:spcAft>
-                          <a:spcPts val="0"/>
-                        </a:spcAft>
-                      </a:pPr>
-                      <a:r>
-                        <a:rPr sz="1100" b="0">
-                          <a:solidFill>
-                            <a:srgbClr val="000000"/>
-                          </a:solidFill>
-                          <a:latin typeface="Calibri"/>
-                        </a:rPr>
-                        <a:t>21</a:t>
-                      </a:r>
-                    </a:p>
-                  </a:txBody>
-                  <a:tcPr anchor="ctr" marL="38100" marR="38100" marT="25400" marB="25400">
-                    <a:solidFill>
-                      <a:srgbClr val="FFFFFF"/>
-                    </a:solidFill>
-                    <a:lnL w="6350" cap="flat" cmpd="sng" algn="ctr">
-                      <a:solidFill>
-                        <a:srgbClr val="000000"/>
-                      </a:solidFill>
-                    </a:lnL>
-                    <a:lnR w="6350" cap="flat" cmpd="sng" algn="ctr">
-                      <a:solidFill>
-                        <a:srgbClr val="000000"/>
-                      </a:solidFill>
-                    </a:lnR>
-                    <a:lnT w="6350" cap="flat" cmpd="sng" algn="ctr">
-                      <a:solidFill>
-                        <a:srgbClr val="000000"/>
-                      </a:solidFill>
-                    </a:lnT>
-                    <a:lnB w="6350" cap="flat" cmpd="sng" algn="ctr">
-                      <a:solidFill>
-                        <a:srgbClr val="000000"/>
-                      </a:solidFill>
-                    </a:lnB>
-                  </a:tcPr>
-                </a:tc>
-                <a:tc>
-                  <a:txBody>
-                    <a:bodyPr wrap="square"/>
-                    <a:lstStyle/>
-                    <a:p>
-                      <a:pPr algn="l">
-                        <a:lnSpc>
-                          <a:spcPct val="100000"/>
-                        </a:lnSpc>
-                        <a:spcBef>
-                          <a:spcPts val="0"/>
-                        </a:spcBef>
-                        <a:spcAft>
-                          <a:spcPts val="0"/>
-                        </a:spcAft>
-                      </a:pPr>
-                      <a:r>
-                        <a:rPr sz="1100" b="0">
-                          <a:solidFill>
-                            <a:srgbClr val="77777A"/>
-                          </a:solidFill>
-                          <a:latin typeface="Calibri"/>
-                        </a:rPr>
-                        <a:t>DEFPROD-4335</a:t>
-                      </a:r>
-                    </a:p>
-                  </a:txBody>
-                  <a:tcPr anchor="ctr" marL="38100" marR="38100" marT="25400" marB="25400">
-                    <a:solidFill>
-                      <a:srgbClr val="FFFFFF"/>
-                    </a:solidFill>
-                    <a:lnL w="6350" cap="flat" cmpd="sng" algn="ctr">
-                      <a:solidFill>
-                        <a:srgbClr val="000000"/>
-                      </a:solidFill>
-                    </a:lnL>
-                    <a:lnR w="6350" cap="flat" cmpd="sng" algn="ctr">
-                      <a:solidFill>
-                        <a:srgbClr val="000000"/>
-                      </a:solidFill>
-                    </a:lnR>
-                    <a:lnT w="6350" cap="flat" cmpd="sng" algn="ctr">
-                      <a:solidFill>
-                        <a:srgbClr val="000000"/>
-                      </a:solidFill>
-                    </a:lnT>
-                    <a:lnB w="6350" cap="flat" cmpd="sng" algn="ctr">
-                      <a:solidFill>
-                        <a:srgbClr val="000000"/>
-                      </a:solidFill>
-                    </a:lnB>
-                  </a:tcPr>
-                </a:tc>
-                <a:tc>
-                  <a:txBody>
-                    <a:bodyPr wrap="square"/>
-                    <a:lstStyle/>
-                    <a:p>
-                      <a:pPr algn="l">
-                        <a:lnSpc>
-                          <a:spcPct val="100000"/>
-                        </a:lnSpc>
-                        <a:spcBef>
-                          <a:spcPts val="0"/>
-                        </a:spcBef>
-                        <a:spcAft>
-                          <a:spcPts val="0"/>
-                        </a:spcAft>
-                      </a:pPr>
-                      <a:r>
-                        <a:rPr sz="1100" b="0">
-                          <a:solidFill>
-                            <a:srgbClr val="000000"/>
-                          </a:solidFill>
-                          <a:latin typeface="Calibri"/>
-                        </a:rPr>
-                        <a:t>DEFPROD-4335: Ошибка функциональности - В Этапах универсального процесса необходимо на активном этапе (синим) также отображать пользователя</a:t>
-                      </a:r>
-                    </a:p>
-                  </a:txBody>
-                  <a:tcPr anchor="ctr" marL="38100" marR="38100" marT="25400" marB="25400">
-                    <a:solidFill>
-                      <a:srgbClr val="FFFFFF"/>
-                    </a:solidFill>
-                    <a:lnL w="6350" cap="flat" cmpd="sng" algn="ctr">
-                      <a:solidFill>
-                        <a:srgbClr val="000000"/>
-                      </a:solidFill>
-                    </a:lnL>
-                    <a:lnR w="6350" cap="flat" cmpd="sng" algn="ctr">
-                      <a:solidFill>
-                        <a:srgbClr val="000000"/>
-                      </a:solidFill>
-                    </a:lnR>
-                    <a:lnT w="6350" cap="flat" cmpd="sng" algn="ctr">
-                      <a:solidFill>
-                        <a:srgbClr val="000000"/>
-                      </a:solidFill>
-                    </a:lnT>
-                    <a:lnB w="6350" cap="flat" cmpd="sng" algn="ctr">
-                      <a:solidFill>
-                        <a:srgbClr val="000000"/>
-                      </a:solidFill>
-                    </a:lnB>
-                  </a:tcPr>
-                </a:tc>
-                <a:tc>
-                  <a:txBody>
-                    <a:bodyPr wrap="square"/>
-                    <a:lstStyle/>
-                    <a:p>
-                      <a:pPr algn="l">
-                        <a:lnSpc>
-                          <a:spcPct val="100000"/>
-                        </a:lnSpc>
-                        <a:spcBef>
-                          <a:spcPts val="0"/>
-                        </a:spcBef>
-                        <a:spcAft>
-                          <a:spcPts val="0"/>
-                        </a:spcAft>
-                      </a:pPr>
-                      <a:r>
-                        <a:rPr sz="1100" b="0">
-                          <a:solidFill>
-                            <a:srgbClr val="000000"/>
-                          </a:solidFill>
-                          <a:latin typeface="Calibri"/>
-                        </a:rPr>
-                        <a:t>В системе будет корректный и прозрачный маршрут согласования. понятный пользователям</a:t>
-                      </a:r>
-                    </a:p>
-                  </a:txBody>
-                  <a:tcPr anchor="ctr" marL="38100" marR="38100" marT="25400" marB="25400">
-                    <a:solidFill>
-                      <a:srgbClr val="FFFFFF"/>
-                    </a:solidFill>
-                    <a:lnL w="6350" cap="flat" cmpd="sng" algn="ctr">
-                      <a:solidFill>
-                        <a:srgbClr val="000000"/>
-                      </a:solidFill>
-                    </a:lnL>
-                    <a:lnR w="6350" cap="flat" cmpd="sng" algn="ctr">
-                      <a:solidFill>
-                        <a:srgbClr val="000000"/>
-                      </a:solidFill>
-                    </a:lnR>
-                    <a:lnT w="6350" cap="flat" cmpd="sng" algn="ctr">
-                      <a:solidFill>
-                        <a:srgbClr val="000000"/>
-                      </a:solidFill>
-                    </a:lnT>
-                    <a:lnB w="6350" cap="flat" cmpd="sng" algn="ctr">
-                      <a:solidFill>
-                        <a:srgbClr val="000000"/>
-                      </a:solidFill>
-                    </a:lnB>
-                  </a:tcPr>
-                </a:tc>
-                <a:tc>
-                  <a:txBody>
-                    <a:bodyPr wrap="square"/>
-                    <a:lstStyle/>
-                    <a:p>
-                      <a:pPr algn="r">
-                        <a:lnSpc>
-                          <a:spcPct val="100000"/>
-                        </a:lnSpc>
-                        <a:spcBef>
-                          <a:spcPts val="0"/>
-                        </a:spcBef>
-                        <a:spcAft>
-                          <a:spcPts val="0"/>
-                        </a:spcAft>
-                      </a:pPr>
-                      <a:r>
-                        <a:rPr sz="1100" b="0">
-                          <a:solidFill>
-                            <a:srgbClr val="000000"/>
-                          </a:solidFill>
-                          <a:latin typeface="Calibri"/>
-                        </a:rPr>
-                        <a:t>160</a:t>
-                      </a:r>
-                    </a:p>
-                  </a:txBody>
-                  <a:tcPr anchor="ctr" marL="38100" marR="38100" marT="25400" marB="25400">
-                    <a:solidFill>
-                      <a:srgbClr val="FFFFFF"/>
-                    </a:solidFill>
-                    <a:lnL w="6350" cap="flat" cmpd="sng" algn="ctr">
-                      <a:solidFill>
-                        <a:srgbClr val="000000"/>
-                      </a:solidFill>
-                    </a:lnL>
-                    <a:lnR w="6350" cap="flat" cmpd="sng" algn="ctr">
-                      <a:solidFill>
-                        <a:srgbClr val="000000"/>
-                      </a:solidFill>
-                    </a:lnR>
-                    <a:lnT w="6350" cap="flat" cmpd="sng" algn="ctr">
-                      <a:solidFill>
-                        <a:srgbClr val="000000"/>
-                      </a:solidFill>
-                    </a:lnT>
-                    <a:lnB w="6350" cap="flat" cmpd="sng" algn="ctr">
-                      <a:solidFill>
-                        <a:srgbClr val="000000"/>
-                      </a:solidFill>
-                    </a:lnB>
-                  </a:tcPr>
-                </a:tc>
-                <a:tc>
-                  <a:txBody>
-                    <a:bodyPr wrap="square"/>
-                    <a:lstStyle/>
-                    <a:p>
-                      <a:pPr algn="l">
-                        <a:lnSpc>
-                          <a:spcPct val="100000"/>
-                        </a:lnSpc>
-                        <a:spcBef>
-                          <a:spcPts val="0"/>
-                        </a:spcBef>
-                        <a:spcAft>
-                          <a:spcPts val="0"/>
-                        </a:spcAft>
-                      </a:pPr>
-                      <a:r>
-                        <a:rPr sz="1100" b="0">
-                          <a:solidFill>
-                            <a:srgbClr val="000000"/>
-                          </a:solidFill>
-                          <a:latin typeface="Calibri"/>
-                        </a:rPr>
-                        <a:t>32 релиз</a:t>
-                      </a:r>
-                    </a:p>
-                  </a:txBody>
-                  <a:tcPr anchor="ctr" marL="38100" marR="38100" marT="25400" marB="25400">
-                    <a:solidFill>
-                      <a:srgbClr val="FFFFFF"/>
                     </a:solidFill>
                     <a:lnL w="6350" cap="flat" cmpd="sng" algn="ctr">
                       <a:solidFill>
@@ -11148,7 +10829,7 @@
                 </a:solidFill>
                 <a:latin typeface="Verdana"/>
               </a:rPr>
-              <a:t>Дефекты и разработки по Пилоту (4/6)</a:t>
+              <a:t>Дефекты и разработки по Пилоту (4/7)</a:t>
             </a:r>
           </a:p>
         </p:txBody>
@@ -11502,7 +11183,7 @@
                   </a:tcPr>
                 </a:tc>
               </a:tr>
-              <a:tr h="692070">
+              <a:tr h="829008">
                 <a:tc>
                   <a:txBody>
                     <a:bodyPr wrap="square"/>
@@ -11526,12 +11207,652 @@
                           </a:solidFill>
                           <a:latin typeface="Calibri"/>
                         </a:rPr>
+                        <a:t>21</a:t>
+                      </a:r>
+                    </a:p>
+                  </a:txBody>
+                  <a:tcPr anchor="ctr" marL="38100" marR="38100" marT="25400" marB="25400">
+                    <a:solidFill>
+                      <a:srgbClr val="FFFFFF"/>
+                    </a:solidFill>
+                    <a:lnL w="6350" cap="flat" cmpd="sng" algn="ctr">
+                      <a:solidFill>
+                        <a:srgbClr val="000000"/>
+                      </a:solidFill>
+                    </a:lnL>
+                    <a:lnR w="6350" cap="flat" cmpd="sng" algn="ctr">
+                      <a:solidFill>
+                        <a:srgbClr val="000000"/>
+                      </a:solidFill>
+                    </a:lnR>
+                    <a:lnT w="6350" cap="flat" cmpd="sng" algn="ctr">
+                      <a:solidFill>
+                        <a:srgbClr val="000000"/>
+                      </a:solidFill>
+                    </a:lnT>
+                    <a:lnB w="6350" cap="flat" cmpd="sng" algn="ctr">
+                      <a:solidFill>
+                        <a:srgbClr val="000000"/>
+                      </a:solidFill>
+                    </a:lnB>
+                  </a:tcPr>
+                </a:tc>
+                <a:tc>
+                  <a:txBody>
+                    <a:bodyPr wrap="square"/>
+                    <a:lstStyle/>
+                    <a:p>
+                      <a:pPr algn="l">
+                        <a:lnSpc>
+                          <a:spcPct val="100000"/>
+                        </a:lnSpc>
+                        <a:spcBef>
+                          <a:spcPts val="0"/>
+                        </a:spcBef>
+                        <a:spcAft>
+                          <a:spcPts val="0"/>
+                        </a:spcAft>
+                      </a:pPr>
+                      <a:r>
+                        <a:rPr sz="1100" b="0">
+                          <a:solidFill>
+                            <a:srgbClr val="77777A"/>
+                          </a:solidFill>
+                          <a:latin typeface="Calibri"/>
+                        </a:rPr>
+                        <a:t>DEFPROD-4335</a:t>
+                      </a:r>
+                    </a:p>
+                  </a:txBody>
+                  <a:tcPr anchor="ctr" marL="38100" marR="38100" marT="25400" marB="25400">
+                    <a:solidFill>
+                      <a:srgbClr val="FFFFFF"/>
+                    </a:solidFill>
+                    <a:lnL w="6350" cap="flat" cmpd="sng" algn="ctr">
+                      <a:solidFill>
+                        <a:srgbClr val="000000"/>
+                      </a:solidFill>
+                    </a:lnL>
+                    <a:lnR w="6350" cap="flat" cmpd="sng" algn="ctr">
+                      <a:solidFill>
+                        <a:srgbClr val="000000"/>
+                      </a:solidFill>
+                    </a:lnR>
+                    <a:lnT w="6350" cap="flat" cmpd="sng" algn="ctr">
+                      <a:solidFill>
+                        <a:srgbClr val="000000"/>
+                      </a:solidFill>
+                    </a:lnT>
+                    <a:lnB w="6350" cap="flat" cmpd="sng" algn="ctr">
+                      <a:solidFill>
+                        <a:srgbClr val="000000"/>
+                      </a:solidFill>
+                    </a:lnB>
+                  </a:tcPr>
+                </a:tc>
+                <a:tc>
+                  <a:txBody>
+                    <a:bodyPr wrap="square"/>
+                    <a:lstStyle/>
+                    <a:p>
+                      <a:pPr algn="l">
+                        <a:lnSpc>
+                          <a:spcPct val="100000"/>
+                        </a:lnSpc>
+                        <a:spcBef>
+                          <a:spcPts val="0"/>
+                        </a:spcBef>
+                        <a:spcAft>
+                          <a:spcPts val="0"/>
+                        </a:spcAft>
+                      </a:pPr>
+                      <a:r>
+                        <a:rPr sz="1100" b="0">
+                          <a:solidFill>
+                            <a:srgbClr val="000000"/>
+                          </a:solidFill>
+                          <a:latin typeface="Calibri"/>
+                        </a:rPr>
+                        <a:t>DEFPROD-4335: Ошибка функциональности - В Этапах универсального процесса необходимо на активном этапе (синим) также отображать пользователя</a:t>
+                      </a:r>
+                    </a:p>
+                  </a:txBody>
+                  <a:tcPr anchor="ctr" marL="38100" marR="38100" marT="25400" marB="25400">
+                    <a:solidFill>
+                      <a:srgbClr val="FFFFFF"/>
+                    </a:solidFill>
+                    <a:lnL w="6350" cap="flat" cmpd="sng" algn="ctr">
+                      <a:solidFill>
+                        <a:srgbClr val="000000"/>
+                      </a:solidFill>
+                    </a:lnL>
+                    <a:lnR w="6350" cap="flat" cmpd="sng" algn="ctr">
+                      <a:solidFill>
+                        <a:srgbClr val="000000"/>
+                      </a:solidFill>
+                    </a:lnR>
+                    <a:lnT w="6350" cap="flat" cmpd="sng" algn="ctr">
+                      <a:solidFill>
+                        <a:srgbClr val="000000"/>
+                      </a:solidFill>
+                    </a:lnT>
+                    <a:lnB w="6350" cap="flat" cmpd="sng" algn="ctr">
+                      <a:solidFill>
+                        <a:srgbClr val="000000"/>
+                      </a:solidFill>
+                    </a:lnB>
+                  </a:tcPr>
+                </a:tc>
+                <a:tc>
+                  <a:txBody>
+                    <a:bodyPr wrap="square"/>
+                    <a:lstStyle/>
+                    <a:p>
+                      <a:pPr algn="l">
+                        <a:lnSpc>
+                          <a:spcPct val="100000"/>
+                        </a:lnSpc>
+                        <a:spcBef>
+                          <a:spcPts val="0"/>
+                        </a:spcBef>
+                        <a:spcAft>
+                          <a:spcPts val="0"/>
+                        </a:spcAft>
+                      </a:pPr>
+                      <a:r>
+                        <a:rPr sz="1100" b="0">
+                          <a:solidFill>
+                            <a:srgbClr val="000000"/>
+                          </a:solidFill>
+                          <a:latin typeface="Calibri"/>
+                        </a:rPr>
+                        <a:t>В системе будет корректный и прозрачный маршрут согласования. понятный пользователям</a:t>
+                      </a:r>
+                    </a:p>
+                  </a:txBody>
+                  <a:tcPr anchor="ctr" marL="38100" marR="38100" marT="25400" marB="25400">
+                    <a:solidFill>
+                      <a:srgbClr val="FFFFFF"/>
+                    </a:solidFill>
+                    <a:lnL w="6350" cap="flat" cmpd="sng" algn="ctr">
+                      <a:solidFill>
+                        <a:srgbClr val="000000"/>
+                      </a:solidFill>
+                    </a:lnL>
+                    <a:lnR w="6350" cap="flat" cmpd="sng" algn="ctr">
+                      <a:solidFill>
+                        <a:srgbClr val="000000"/>
+                      </a:solidFill>
+                    </a:lnR>
+                    <a:lnT w="6350" cap="flat" cmpd="sng" algn="ctr">
+                      <a:solidFill>
+                        <a:srgbClr val="000000"/>
+                      </a:solidFill>
+                    </a:lnT>
+                    <a:lnB w="6350" cap="flat" cmpd="sng" algn="ctr">
+                      <a:solidFill>
+                        <a:srgbClr val="000000"/>
+                      </a:solidFill>
+                    </a:lnB>
+                  </a:tcPr>
+                </a:tc>
+                <a:tc>
+                  <a:txBody>
+                    <a:bodyPr wrap="square"/>
+                    <a:lstStyle/>
+                    <a:p>
+                      <a:pPr algn="r">
+                        <a:lnSpc>
+                          <a:spcPct val="100000"/>
+                        </a:lnSpc>
+                        <a:spcBef>
+                          <a:spcPts val="0"/>
+                        </a:spcBef>
+                        <a:spcAft>
+                          <a:spcPts val="0"/>
+                        </a:spcAft>
+                      </a:pPr>
+                      <a:r>
+                        <a:rPr sz="1100" b="0">
+                          <a:solidFill>
+                            <a:srgbClr val="000000"/>
+                          </a:solidFill>
+                          <a:latin typeface="Calibri"/>
+                        </a:rPr>
+                        <a:t>160</a:t>
+                      </a:r>
+                    </a:p>
+                  </a:txBody>
+                  <a:tcPr anchor="ctr" marL="38100" marR="38100" marT="25400" marB="25400">
+                    <a:solidFill>
+                      <a:srgbClr val="FFFFFF"/>
+                    </a:solidFill>
+                    <a:lnL w="6350" cap="flat" cmpd="sng" algn="ctr">
+                      <a:solidFill>
+                        <a:srgbClr val="000000"/>
+                      </a:solidFill>
+                    </a:lnL>
+                    <a:lnR w="6350" cap="flat" cmpd="sng" algn="ctr">
+                      <a:solidFill>
+                        <a:srgbClr val="000000"/>
+                      </a:solidFill>
+                    </a:lnR>
+                    <a:lnT w="6350" cap="flat" cmpd="sng" algn="ctr">
+                      <a:solidFill>
+                        <a:srgbClr val="000000"/>
+                      </a:solidFill>
+                    </a:lnT>
+                    <a:lnB w="6350" cap="flat" cmpd="sng" algn="ctr">
+                      <a:solidFill>
+                        <a:srgbClr val="000000"/>
+                      </a:solidFill>
+                    </a:lnB>
+                  </a:tcPr>
+                </a:tc>
+                <a:tc>
+                  <a:txBody>
+                    <a:bodyPr wrap="square"/>
+                    <a:lstStyle/>
+                    <a:p>
+                      <a:pPr algn="l">
+                        <a:lnSpc>
+                          <a:spcPct val="100000"/>
+                        </a:lnSpc>
+                        <a:spcBef>
+                          <a:spcPts val="0"/>
+                        </a:spcBef>
+                        <a:spcAft>
+                          <a:spcPts val="0"/>
+                        </a:spcAft>
+                      </a:pPr>
+                      <a:r>
+                        <a:rPr sz="1100" b="0">
+                          <a:solidFill>
+                            <a:srgbClr val="000000"/>
+                          </a:solidFill>
+                          <a:latin typeface="Calibri"/>
+                        </a:rPr>
+                        <a:t>32 релиз</a:t>
+                      </a:r>
+                    </a:p>
+                  </a:txBody>
+                  <a:tcPr anchor="ctr" marL="38100" marR="38100" marT="25400" marB="25400">
+                    <a:solidFill>
+                      <a:srgbClr val="FFFFFF"/>
+                    </a:solidFill>
+                    <a:lnL w="6350" cap="flat" cmpd="sng" algn="ctr">
+                      <a:solidFill>
+                        <a:srgbClr val="000000"/>
+                      </a:solidFill>
+                    </a:lnL>
+                    <a:lnR w="6350" cap="flat" cmpd="sng" algn="ctr">
+                      <a:solidFill>
+                        <a:srgbClr val="000000"/>
+                      </a:solidFill>
+                    </a:lnR>
+                    <a:lnT w="6350" cap="flat" cmpd="sng" algn="ctr">
+                      <a:solidFill>
+                        <a:srgbClr val="000000"/>
+                      </a:solidFill>
+                    </a:lnT>
+                    <a:lnB w="6350" cap="flat" cmpd="sng" algn="ctr">
+                      <a:solidFill>
+                        <a:srgbClr val="000000"/>
+                      </a:solidFill>
+                    </a:lnB>
+                  </a:tcPr>
+                </a:tc>
+              </a:tr>
+              <a:tr h="829008">
+                <a:tc>
+                  <a:txBody>
+                    <a:bodyPr wrap="square"/>
+                    <a:lstStyle/>
+                    <a:p>
+                      <a:pPr algn="ctr">
+                        <a:lnSpc>
+                          <a:spcPct val="100000"/>
+                        </a:lnSpc>
+                        <a:spcBef>
+                          <a:spcPts val="0"/>
+                        </a:spcBef>
+                        <a:spcAft>
+                          <a:spcPts val="0"/>
+                        </a:spcAft>
+                      </a:pPr>
+                      <a:r>
+                        <a:rPr sz="1100" b="0">
+                          <a:solidFill>
+                            <a:srgbClr val="000000"/>
+                          </a:solidFill>
+                          <a:latin typeface="Calibri"/>
+                        </a:rPr>
                         <a:t>22</a:t>
                       </a:r>
                     </a:p>
                   </a:txBody>
                   <a:tcPr anchor="ctr" marL="38100" marR="38100" marT="25400" marB="25400">
                     <a:solidFill>
+                      <a:srgbClr val="F8E7E8"/>
+                    </a:solidFill>
+                    <a:lnL w="6350" cap="flat" cmpd="sng" algn="ctr">
+                      <a:solidFill>
+                        <a:srgbClr val="000000"/>
+                      </a:solidFill>
+                    </a:lnL>
+                    <a:lnR w="6350" cap="flat" cmpd="sng" algn="ctr">
+                      <a:solidFill>
+                        <a:srgbClr val="000000"/>
+                      </a:solidFill>
+                    </a:lnR>
+                    <a:lnT w="6350" cap="flat" cmpd="sng" algn="ctr">
+                      <a:solidFill>
+                        <a:srgbClr val="000000"/>
+                      </a:solidFill>
+                    </a:lnT>
+                    <a:lnB w="6350" cap="flat" cmpd="sng" algn="ctr">
+                      <a:solidFill>
+                        <a:srgbClr val="000000"/>
+                      </a:solidFill>
+                    </a:lnB>
+                  </a:tcPr>
+                </a:tc>
+                <a:tc>
+                  <a:txBody>
+                    <a:bodyPr wrap="square"/>
+                    <a:lstStyle/>
+                    <a:p>
+                      <a:pPr algn="l">
+                        <a:lnSpc>
+                          <a:spcPct val="100000"/>
+                        </a:lnSpc>
+                        <a:spcBef>
+                          <a:spcPts val="0"/>
+                        </a:spcBef>
+                        <a:spcAft>
+                          <a:spcPts val="0"/>
+                        </a:spcAft>
+                      </a:pPr>
+                      <a:r>
+                        <a:rPr sz="1100" b="0">
+                          <a:solidFill>
+                            <a:srgbClr val="77777A"/>
+                          </a:solidFill>
+                          <a:latin typeface="Calibri"/>
+                        </a:rPr>
+                        <a:t>DEFPROD-4462</a:t>
+                      </a:r>
+                    </a:p>
+                  </a:txBody>
+                  <a:tcPr anchor="ctr" marL="38100" marR="38100" marT="25400" marB="25400">
+                    <a:solidFill>
+                      <a:srgbClr val="F8E7E8"/>
+                    </a:solidFill>
+                    <a:lnL w="6350" cap="flat" cmpd="sng" algn="ctr">
+                      <a:solidFill>
+                        <a:srgbClr val="000000"/>
+                      </a:solidFill>
+                    </a:lnL>
+                    <a:lnR w="6350" cap="flat" cmpd="sng" algn="ctr">
+                      <a:solidFill>
+                        <a:srgbClr val="000000"/>
+                      </a:solidFill>
+                    </a:lnR>
+                    <a:lnT w="6350" cap="flat" cmpd="sng" algn="ctr">
+                      <a:solidFill>
+                        <a:srgbClr val="000000"/>
+                      </a:solidFill>
+                    </a:lnT>
+                    <a:lnB w="6350" cap="flat" cmpd="sng" algn="ctr">
+                      <a:solidFill>
+                        <a:srgbClr val="000000"/>
+                      </a:solidFill>
+                    </a:lnB>
+                  </a:tcPr>
+                </a:tc>
+                <a:tc>
+                  <a:txBody>
+                    <a:bodyPr wrap="square"/>
+                    <a:lstStyle/>
+                    <a:p>
+                      <a:pPr algn="l">
+                        <a:lnSpc>
+                          <a:spcPct val="100000"/>
+                        </a:lnSpc>
+                        <a:spcBef>
+                          <a:spcPts val="0"/>
+                        </a:spcBef>
+                        <a:spcAft>
+                          <a:spcPts val="0"/>
+                        </a:spcAft>
+                      </a:pPr>
+                      <a:r>
+                        <a:rPr sz="1100" b="0">
+                          <a:solidFill>
+                            <a:srgbClr val="000000"/>
+                          </a:solidFill>
+                          <a:latin typeface="Calibri"/>
+                        </a:rPr>
+                        <a:t>DEFPROD-4462: Ошибка функциональности - Дефект реестра платежей (отчет по лимитам) - часть 2</a:t>
+                      </a:r>
+                    </a:p>
+                  </a:txBody>
+                  <a:tcPr anchor="ctr" marL="38100" marR="38100" marT="25400" marB="25400">
+                    <a:solidFill>
+                      <a:srgbClr val="F8E7E8"/>
+                    </a:solidFill>
+                    <a:lnL w="6350" cap="flat" cmpd="sng" algn="ctr">
+                      <a:solidFill>
+                        <a:srgbClr val="000000"/>
+                      </a:solidFill>
+                    </a:lnL>
+                    <a:lnR w="6350" cap="flat" cmpd="sng" algn="ctr">
+                      <a:solidFill>
+                        <a:srgbClr val="000000"/>
+                      </a:solidFill>
+                    </a:lnR>
+                    <a:lnT w="6350" cap="flat" cmpd="sng" algn="ctr">
+                      <a:solidFill>
+                        <a:srgbClr val="000000"/>
+                      </a:solidFill>
+                    </a:lnT>
+                    <a:lnB w="6350" cap="flat" cmpd="sng" algn="ctr">
+                      <a:solidFill>
+                        <a:srgbClr val="000000"/>
+                      </a:solidFill>
+                    </a:lnB>
+                  </a:tcPr>
+                </a:tc>
+                <a:tc>
+                  <a:txBody>
+                    <a:bodyPr wrap="square"/>
+                    <a:lstStyle/>
+                    <a:p>
+                      <a:pPr algn="l">
+                        <a:lnSpc>
+                          <a:spcPct val="100000"/>
+                        </a:lnSpc>
+                        <a:spcBef>
+                          <a:spcPts val="0"/>
+                        </a:spcBef>
+                        <a:spcAft>
+                          <a:spcPts val="0"/>
+                        </a:spcAft>
+                      </a:pPr>
+                      <a:r>
+                        <a:rPr sz="1100" b="0">
+                          <a:solidFill>
+                            <a:srgbClr val="000000"/>
+                          </a:solidFill>
+                          <a:latin typeface="Calibri"/>
+                        </a:rPr>
+                        <a:t>Возможность посмотреть как тот или иной реестр платежей повляет на отклонение от плана. Сейчас это контролируется руками в экселе</a:t>
+                      </a:r>
+                    </a:p>
+                  </a:txBody>
+                  <a:tcPr anchor="ctr" marL="38100" marR="38100" marT="25400" marB="25400">
+                    <a:solidFill>
+                      <a:srgbClr val="F8E7E8"/>
+                    </a:solidFill>
+                    <a:lnL w="6350" cap="flat" cmpd="sng" algn="ctr">
+                      <a:solidFill>
+                        <a:srgbClr val="000000"/>
+                      </a:solidFill>
+                    </a:lnL>
+                    <a:lnR w="6350" cap="flat" cmpd="sng" algn="ctr">
+                      <a:solidFill>
+                        <a:srgbClr val="000000"/>
+                      </a:solidFill>
+                    </a:lnR>
+                    <a:lnT w="6350" cap="flat" cmpd="sng" algn="ctr">
+                      <a:solidFill>
+                        <a:srgbClr val="000000"/>
+                      </a:solidFill>
+                    </a:lnT>
+                    <a:lnB w="6350" cap="flat" cmpd="sng" algn="ctr">
+                      <a:solidFill>
+                        <a:srgbClr val="000000"/>
+                      </a:solidFill>
+                    </a:lnB>
+                  </a:tcPr>
+                </a:tc>
+                <a:tc>
+                  <a:txBody>
+                    <a:bodyPr wrap="square"/>
+                    <a:lstStyle/>
+                    <a:p>
+                      <a:pPr algn="r">
+                        <a:lnSpc>
+                          <a:spcPct val="100000"/>
+                        </a:lnSpc>
+                        <a:spcBef>
+                          <a:spcPts val="0"/>
+                        </a:spcBef>
+                        <a:spcAft>
+                          <a:spcPts val="0"/>
+                        </a:spcAft>
+                      </a:pPr>
+                      <a:r>
+                        <a:rPr sz="1100" b="0">
+                          <a:solidFill>
+                            <a:srgbClr val="000000"/>
+                          </a:solidFill>
+                          <a:latin typeface="Calibri"/>
+                        </a:rPr>
+                        <a:t>800</a:t>
+                      </a:r>
+                    </a:p>
+                  </a:txBody>
+                  <a:tcPr anchor="ctr" marL="38100" marR="38100" marT="25400" marB="25400">
+                    <a:solidFill>
+                      <a:srgbClr val="F8E7E8"/>
+                    </a:solidFill>
+                    <a:lnL w="6350" cap="flat" cmpd="sng" algn="ctr">
+                      <a:solidFill>
+                        <a:srgbClr val="000000"/>
+                      </a:solidFill>
+                    </a:lnL>
+                    <a:lnR w="6350" cap="flat" cmpd="sng" algn="ctr">
+                      <a:solidFill>
+                        <a:srgbClr val="000000"/>
+                      </a:solidFill>
+                    </a:lnR>
+                    <a:lnT w="6350" cap="flat" cmpd="sng" algn="ctr">
+                      <a:solidFill>
+                        <a:srgbClr val="000000"/>
+                      </a:solidFill>
+                    </a:lnT>
+                    <a:lnB w="6350" cap="flat" cmpd="sng" algn="ctr">
+                      <a:solidFill>
+                        <a:srgbClr val="000000"/>
+                      </a:solidFill>
+                    </a:lnB>
+                  </a:tcPr>
+                </a:tc>
+                <a:tc>
+                  <a:txBody>
+                    <a:bodyPr wrap="square"/>
+                    <a:lstStyle/>
+                    <a:p>
+                      <a:pPr algn="l">
+                        <a:lnSpc>
+                          <a:spcPct val="100000"/>
+                        </a:lnSpc>
+                        <a:spcBef>
+                          <a:spcPts val="0"/>
+                        </a:spcBef>
+                        <a:spcAft>
+                          <a:spcPts val="0"/>
+                        </a:spcAft>
+                      </a:pPr>
+                      <a:r>
+                        <a:rPr sz="1100" b="0">
+                          <a:solidFill>
+                            <a:srgbClr val="000000"/>
+                          </a:solidFill>
+                          <a:latin typeface="Calibri"/>
+                        </a:rPr>
+                        <a:t>34 релиз</a:t>
+                      </a:r>
+                    </a:p>
+                  </a:txBody>
+                  <a:tcPr anchor="ctr" marL="38100" marR="38100" marT="25400" marB="25400">
+                    <a:solidFill>
+                      <a:srgbClr val="F8E7E8"/>
+                    </a:solidFill>
+                    <a:lnL w="6350" cap="flat" cmpd="sng" algn="ctr">
+                      <a:solidFill>
+                        <a:srgbClr val="000000"/>
+                      </a:solidFill>
+                    </a:lnL>
+                    <a:lnR w="6350" cap="flat" cmpd="sng" algn="ctr">
+                      <a:solidFill>
+                        <a:srgbClr val="000000"/>
+                      </a:solidFill>
+                    </a:lnR>
+                    <a:lnT w="6350" cap="flat" cmpd="sng" algn="ctr">
+                      <a:solidFill>
+                        <a:srgbClr val="000000"/>
+                      </a:solidFill>
+                    </a:lnT>
+                    <a:lnB w="6350" cap="flat" cmpd="sng" algn="ctr">
+                      <a:solidFill>
+                        <a:srgbClr val="000000"/>
+                      </a:solidFill>
+                    </a:lnB>
+                  </a:tcPr>
+                </a:tc>
+              </a:tr>
+              <a:tr h="785822">
+                <a:tc>
+                  <a:txBody>
+                    <a:bodyPr wrap="square"/>
+                    <a:lstStyle/>
+                    <a:p>
+                      <a:pPr algn="ctr">
+                        <a:lnSpc>
+                          <a:spcPct val="100000"/>
+                        </a:lnSpc>
+                        <a:spcBef>
+                          <a:spcPts val="0"/>
+                        </a:spcBef>
+                        <a:spcAft>
+                          <a:spcPts val="0"/>
+                        </a:spcAft>
+                      </a:pPr>
+                      <a:r>
+                        <a:rPr sz="1100" b="0">
+                          <a:solidFill>
+                            <a:srgbClr val="000000"/>
+                          </a:solidFill>
+                          <a:latin typeface="Calibri"/>
+                        </a:rPr>
+                        <a:t>23</a:t>
+                      </a:r>
+                    </a:p>
+                  </a:txBody>
+                  <a:tcPr anchor="ctr" marL="38100" marR="38100" marT="25400" marB="25400">
+                    <a:solidFill>
                       <a:srgbClr val="FFFFFF"/>
                     </a:solidFill>
                     <a:lnL w="6350" cap="flat" cmpd="sng" algn="ctr">
@@ -11579,7 +11900,7 @@
                           </a:solidFill>
                           <a:latin typeface="Calibri"/>
                         </a:rPr>
-                        <a:t>DEFPROD-4462</a:t>
+                        <a:t>DEFPROD-4686</a:t>
                       </a:r>
                     </a:p>
                   </a:txBody>
@@ -11632,7 +11953,7 @@
                           </a:solidFill>
                           <a:latin typeface="Calibri"/>
                         </a:rPr>
-                        <a:t>DEFPROD-4462: Ошибка функциональности - Дефект реестра платежей (отчет по лимитам) - часть 2</a:t>
+                        <a:t>DEFPROD-4686: Ошибка функциональности - Обновление версий и договоров (автоЗНО)</a:t>
                       </a:r>
                     </a:p>
                   </a:txBody>
@@ -11685,7 +12006,7 @@
                           </a:solidFill>
                           <a:latin typeface="Calibri"/>
                         </a:rPr>
-                        <a:t>Возможность посмотреть как тот или иной реестр платежей повляет на отклонение от плана. Сейчас это контролируется руками в экселе</a:t>
+                        <a:t>Устранение разночтений между карточкой договора и версией договора</a:t>
                       </a:r>
                     </a:p>
                   </a:txBody>
@@ -11738,7 +12059,7 @@
                           </a:solidFill>
                           <a:latin typeface="Calibri"/>
                         </a:rPr>
-                        <a:t>800</a:t>
+                        <a:t>160</a:t>
                       </a:r>
                     </a:p>
                   </a:txBody>
@@ -11822,7 +12143,7 @@
                   </a:tcPr>
                 </a:tc>
               </a:tr>
-              <a:tr h="692070">
+              <a:tr h="785822">
                 <a:tc>
                   <a:txBody>
                     <a:bodyPr wrap="square"/>
@@ -11846,7 +12167,7 @@
                           </a:solidFill>
                           <a:latin typeface="Calibri"/>
                         </a:rPr>
-                        <a:t>23</a:t>
+                        <a:t>24</a:t>
                       </a:r>
                     </a:p>
                   </a:txBody>
@@ -11899,7 +12220,7 @@
                           </a:solidFill>
                           <a:latin typeface="Calibri"/>
                         </a:rPr>
-                        <a:t>DEFPROD-4686</a:t>
+                        <a:t>DEFPROD-5641</a:t>
                       </a:r>
                     </a:p>
                   </a:txBody>
@@ -11952,7 +12273,7 @@
                           </a:solidFill>
                           <a:latin typeface="Calibri"/>
                         </a:rPr>
-                        <a:t>DEFPROD-4686: Ошибка функциональности - Обновление версий и договоров (автоЗНО)</a:t>
+                        <a:t>DEFPROD-5641: Ошибка функциональности - Реализовать процесс ведения БДДС в системе</a:t>
                       </a:r>
                     </a:p>
                   </a:txBody>
@@ -12005,7 +12326,7 @@
                           </a:solidFill>
                           <a:latin typeface="Calibri"/>
                         </a:rPr>
-                        <a:t>Устранение разночтений между карточкой договора и версией договора</a:t>
+                        <a:t>проанализировать Осиповой в системе. Скорее всего Тираж.</a:t>
                       </a:r>
                     </a:p>
                   </a:txBody>
@@ -12051,6 +12372,326 @@
                           <a:spcPts val="0"/>
                         </a:spcAft>
                       </a:pPr>
+                    </a:p>
+                  </a:txBody>
+                  <a:tcPr anchor="ctr" marL="38100" marR="38100" marT="25400" marB="25400">
+                    <a:solidFill>
+                      <a:srgbClr val="F8E7E8"/>
+                    </a:solidFill>
+                    <a:lnL w="6350" cap="flat" cmpd="sng" algn="ctr">
+                      <a:solidFill>
+                        <a:srgbClr val="000000"/>
+                      </a:solidFill>
+                    </a:lnL>
+                    <a:lnR w="6350" cap="flat" cmpd="sng" algn="ctr">
+                      <a:solidFill>
+                        <a:srgbClr val="000000"/>
+                      </a:solidFill>
+                    </a:lnR>
+                    <a:lnT w="6350" cap="flat" cmpd="sng" algn="ctr">
+                      <a:solidFill>
+                        <a:srgbClr val="000000"/>
+                      </a:solidFill>
+                    </a:lnT>
+                    <a:lnB w="6350" cap="flat" cmpd="sng" algn="ctr">
+                      <a:solidFill>
+                        <a:srgbClr val="000000"/>
+                      </a:solidFill>
+                    </a:lnB>
+                  </a:tcPr>
+                </a:tc>
+                <a:tc>
+                  <a:txBody>
+                    <a:bodyPr wrap="square"/>
+                    <a:lstStyle/>
+                    <a:p>
+                      <a:pPr algn="l">
+                        <a:lnSpc>
+                          <a:spcPct val="100000"/>
+                        </a:lnSpc>
+                        <a:spcBef>
+                          <a:spcPts val="0"/>
+                        </a:spcBef>
+                        <a:spcAft>
+                          <a:spcPts val="0"/>
+                        </a:spcAft>
+                      </a:pPr>
+                      <a:r>
+                        <a:rPr sz="1100" b="0">
+                          <a:solidFill>
+                            <a:srgbClr val="000000"/>
+                          </a:solidFill>
+                          <a:latin typeface="Calibri"/>
+                        </a:rPr>
+                        <a:t>уточнить требования релиз</a:t>
+                      </a:r>
+                    </a:p>
+                  </a:txBody>
+                  <a:tcPr anchor="ctr" marL="38100" marR="38100" marT="25400" marB="25400">
+                    <a:solidFill>
+                      <a:srgbClr val="F8E7E8"/>
+                    </a:solidFill>
+                    <a:lnL w="6350" cap="flat" cmpd="sng" algn="ctr">
+                      <a:solidFill>
+                        <a:srgbClr val="000000"/>
+                      </a:solidFill>
+                    </a:lnL>
+                    <a:lnR w="6350" cap="flat" cmpd="sng" algn="ctr">
+                      <a:solidFill>
+                        <a:srgbClr val="000000"/>
+                      </a:solidFill>
+                    </a:lnR>
+                    <a:lnT w="6350" cap="flat" cmpd="sng" algn="ctr">
+                      <a:solidFill>
+                        <a:srgbClr val="000000"/>
+                      </a:solidFill>
+                    </a:lnT>
+                    <a:lnB w="6350" cap="flat" cmpd="sng" algn="ctr">
+                      <a:solidFill>
+                        <a:srgbClr val="000000"/>
+                      </a:solidFill>
+                    </a:lnB>
+                  </a:tcPr>
+                </a:tc>
+              </a:tr>
+              <a:tr h="829008">
+                <a:tc>
+                  <a:txBody>
+                    <a:bodyPr wrap="square"/>
+                    <a:lstStyle/>
+                    <a:p>
+                      <a:pPr algn="ctr">
+                        <a:lnSpc>
+                          <a:spcPct val="100000"/>
+                        </a:lnSpc>
+                        <a:spcBef>
+                          <a:spcPts val="0"/>
+                        </a:spcBef>
+                        <a:spcAft>
+                          <a:spcPts val="0"/>
+                        </a:spcAft>
+                      </a:pPr>
+                      <a:r>
+                        <a:rPr sz="1100" b="0">
+                          <a:solidFill>
+                            <a:srgbClr val="000000"/>
+                          </a:solidFill>
+                          <a:latin typeface="Calibri"/>
+                        </a:rPr>
+                        <a:t>25</a:t>
+                      </a:r>
+                    </a:p>
+                  </a:txBody>
+                  <a:tcPr anchor="ctr" marL="38100" marR="38100" marT="25400" marB="25400">
+                    <a:solidFill>
+                      <a:srgbClr val="FFFFFF"/>
+                    </a:solidFill>
+                    <a:lnL w="6350" cap="flat" cmpd="sng" algn="ctr">
+                      <a:solidFill>
+                        <a:srgbClr val="000000"/>
+                      </a:solidFill>
+                    </a:lnL>
+                    <a:lnR w="6350" cap="flat" cmpd="sng" algn="ctr">
+                      <a:solidFill>
+                        <a:srgbClr val="000000"/>
+                      </a:solidFill>
+                    </a:lnR>
+                    <a:lnT w="6350" cap="flat" cmpd="sng" algn="ctr">
+                      <a:solidFill>
+                        <a:srgbClr val="000000"/>
+                      </a:solidFill>
+                    </a:lnT>
+                    <a:lnB w="6350" cap="flat" cmpd="sng" algn="ctr">
+                      <a:solidFill>
+                        <a:srgbClr val="000000"/>
+                      </a:solidFill>
+                    </a:lnB>
+                  </a:tcPr>
+                </a:tc>
+                <a:tc>
+                  <a:txBody>
+                    <a:bodyPr wrap="square"/>
+                    <a:lstStyle/>
+                    <a:p>
+                      <a:pPr algn="l">
+                        <a:lnSpc>
+                          <a:spcPct val="100000"/>
+                        </a:lnSpc>
+                        <a:spcBef>
+                          <a:spcPts val="0"/>
+                        </a:spcBef>
+                        <a:spcAft>
+                          <a:spcPts val="0"/>
+                        </a:spcAft>
+                      </a:pPr>
+                      <a:r>
+                        <a:rPr sz="1100" b="0">
+                          <a:solidFill>
+                            <a:srgbClr val="77777A"/>
+                          </a:solidFill>
+                          <a:latin typeface="Calibri"/>
+                        </a:rPr>
+                        <a:t>DEFPROD-6026</a:t>
+                      </a:r>
+                    </a:p>
+                  </a:txBody>
+                  <a:tcPr anchor="ctr" marL="38100" marR="38100" marT="25400" marB="25400">
+                    <a:solidFill>
+                      <a:srgbClr val="FFFFFF"/>
+                    </a:solidFill>
+                    <a:lnL w="6350" cap="flat" cmpd="sng" algn="ctr">
+                      <a:solidFill>
+                        <a:srgbClr val="000000"/>
+                      </a:solidFill>
+                    </a:lnL>
+                    <a:lnR w="6350" cap="flat" cmpd="sng" algn="ctr">
+                      <a:solidFill>
+                        <a:srgbClr val="000000"/>
+                      </a:solidFill>
+                    </a:lnR>
+                    <a:lnT w="6350" cap="flat" cmpd="sng" algn="ctr">
+                      <a:solidFill>
+                        <a:srgbClr val="000000"/>
+                      </a:solidFill>
+                    </a:lnT>
+                    <a:lnB w="6350" cap="flat" cmpd="sng" algn="ctr">
+                      <a:solidFill>
+                        <a:srgbClr val="000000"/>
+                      </a:solidFill>
+                    </a:lnB>
+                  </a:tcPr>
+                </a:tc>
+                <a:tc>
+                  <a:txBody>
+                    <a:bodyPr wrap="square"/>
+                    <a:lstStyle/>
+                    <a:p>
+                      <a:pPr algn="l">
+                        <a:lnSpc>
+                          <a:spcPct val="100000"/>
+                        </a:lnSpc>
+                        <a:spcBef>
+                          <a:spcPts val="0"/>
+                        </a:spcBef>
+                        <a:spcAft>
+                          <a:spcPts val="0"/>
+                        </a:spcAft>
+                      </a:pPr>
+                      <a:r>
+                        <a:rPr sz="1100" b="0">
+                          <a:solidFill>
+                            <a:srgbClr val="000000"/>
+                          </a:solidFill>
+                          <a:latin typeface="Calibri"/>
+                        </a:rPr>
+                        <a:t>DEFPROD-6026: Ошибка функциональности - Добавить групповое изменение банковского счета получателя в ЗНО в документе реестр платежей</a:t>
+                      </a:r>
+                      <a:r>
+                        <a:rPr sz="1100" b="1">
+                          <a:solidFill>
+                            <a:srgbClr val="000000"/>
+                          </a:solidFill>
+                          <a:latin typeface="Calibri"/>
+                        </a:rPr>
+                        <a:t> – реализовано в УПП</a:t>
+                      </a:r>
+                    </a:p>
+                  </a:txBody>
+                  <a:tcPr anchor="ctr" marL="38100" marR="38100" marT="25400" marB="25400">
+                    <a:solidFill>
+                      <a:srgbClr val="FFFFFF"/>
+                    </a:solidFill>
+                    <a:lnL w="6350" cap="flat" cmpd="sng" algn="ctr">
+                      <a:solidFill>
+                        <a:srgbClr val="000000"/>
+                      </a:solidFill>
+                    </a:lnL>
+                    <a:lnR w="6350" cap="flat" cmpd="sng" algn="ctr">
+                      <a:solidFill>
+                        <a:srgbClr val="000000"/>
+                      </a:solidFill>
+                    </a:lnR>
+                    <a:lnT w="6350" cap="flat" cmpd="sng" algn="ctr">
+                      <a:solidFill>
+                        <a:srgbClr val="000000"/>
+                      </a:solidFill>
+                    </a:lnT>
+                    <a:lnB w="6350" cap="flat" cmpd="sng" algn="ctr">
+                      <a:solidFill>
+                        <a:srgbClr val="000000"/>
+                      </a:solidFill>
+                    </a:lnB>
+                  </a:tcPr>
+                </a:tc>
+                <a:tc>
+                  <a:txBody>
+                    <a:bodyPr wrap="square"/>
+                    <a:lstStyle/>
+                    <a:p>
+                      <a:pPr algn="l">
+                        <a:lnSpc>
+                          <a:spcPct val="100000"/>
+                        </a:lnSpc>
+                        <a:spcBef>
+                          <a:spcPts val="0"/>
+                        </a:spcBef>
+                        <a:spcAft>
+                          <a:spcPts val="0"/>
+                        </a:spcAft>
+                      </a:pPr>
+                      <a:r>
+                        <a:rPr sz="1100" b="0">
+                          <a:solidFill>
+                            <a:srgbClr val="000000"/>
+                          </a:solidFill>
+                          <a:latin typeface="Calibri"/>
+                        </a:rPr>
+                        <a:t>Оптимизация времени работы с реестром. На изменение одной заявки вручную уходит 1,5 минуты.</a:t>
+                      </a:r>
+                    </a:p>
+                  </a:txBody>
+                  <a:tcPr anchor="ctr" marL="38100" marR="38100" marT="25400" marB="25400">
+                    <a:solidFill>
+                      <a:srgbClr val="FFFFFF"/>
+                    </a:solidFill>
+                    <a:lnL w="6350" cap="flat" cmpd="sng" algn="ctr">
+                      <a:solidFill>
+                        <a:srgbClr val="000000"/>
+                      </a:solidFill>
+                    </a:lnL>
+                    <a:lnR w="6350" cap="flat" cmpd="sng" algn="ctr">
+                      <a:solidFill>
+                        <a:srgbClr val="000000"/>
+                      </a:solidFill>
+                    </a:lnR>
+                    <a:lnT w="6350" cap="flat" cmpd="sng" algn="ctr">
+                      <a:solidFill>
+                        <a:srgbClr val="000000"/>
+                      </a:solidFill>
+                    </a:lnT>
+                    <a:lnB w="6350" cap="flat" cmpd="sng" algn="ctr">
+                      <a:solidFill>
+                        <a:srgbClr val="000000"/>
+                      </a:solidFill>
+                    </a:lnB>
+                  </a:tcPr>
+                </a:tc>
+                <a:tc>
+                  <a:txBody>
+                    <a:bodyPr wrap="square"/>
+                    <a:lstStyle/>
+                    <a:p>
+                      <a:pPr algn="r">
+                        <a:lnSpc>
+                          <a:spcPct val="100000"/>
+                        </a:lnSpc>
+                        <a:spcBef>
+                          <a:spcPts val="0"/>
+                        </a:spcBef>
+                        <a:spcAft>
+                          <a:spcPts val="0"/>
+                        </a:spcAft>
+                      </a:pPr>
                       <a:r>
                         <a:rPr sz="1100" b="0">
                           <a:solidFill>
@@ -12064,6 +12705,114 @@
                   </a:txBody>
                   <a:tcPr anchor="ctr" marL="38100" marR="38100" marT="25400" marB="25400">
                     <a:solidFill>
+                      <a:srgbClr val="FFFFFF"/>
+                    </a:solidFill>
+                    <a:lnL w="6350" cap="flat" cmpd="sng" algn="ctr">
+                      <a:solidFill>
+                        <a:srgbClr val="000000"/>
+                      </a:solidFill>
+                    </a:lnL>
+                    <a:lnR w="6350" cap="flat" cmpd="sng" algn="ctr">
+                      <a:solidFill>
+                        <a:srgbClr val="000000"/>
+                      </a:solidFill>
+                    </a:lnR>
+                    <a:lnT w="6350" cap="flat" cmpd="sng" algn="ctr">
+                      <a:solidFill>
+                        <a:srgbClr val="000000"/>
+                      </a:solidFill>
+                    </a:lnT>
+                    <a:lnB w="6350" cap="flat" cmpd="sng" algn="ctr">
+                      <a:solidFill>
+                        <a:srgbClr val="000000"/>
+                      </a:solidFill>
+                    </a:lnB>
+                  </a:tcPr>
+                </a:tc>
+                <a:tc>
+                  <a:txBody>
+                    <a:bodyPr wrap="square"/>
+                    <a:lstStyle/>
+                    <a:p>
+                      <a:pPr algn="l">
+                        <a:lnSpc>
+                          <a:spcPct val="100000"/>
+                        </a:lnSpc>
+                        <a:spcBef>
+                          <a:spcPts val="0"/>
+                        </a:spcBef>
+                        <a:spcAft>
+                          <a:spcPts val="0"/>
+                        </a:spcAft>
+                      </a:pPr>
+                      <a:r>
+                        <a:rPr sz="1100" b="0">
+                          <a:solidFill>
+                            <a:srgbClr val="000000"/>
+                          </a:solidFill>
+                          <a:latin typeface="Calibri"/>
+                        </a:rPr>
+                        <a:t>34 релиз</a:t>
+                      </a:r>
+                    </a:p>
+                  </a:txBody>
+                  <a:tcPr anchor="ctr" marL="38100" marR="38100" marT="25400" marB="25400">
+                    <a:solidFill>
+                      <a:srgbClr val="FFFFFF"/>
+                    </a:solidFill>
+                    <a:lnL w="6350" cap="flat" cmpd="sng" algn="ctr">
+                      <a:solidFill>
+                        <a:srgbClr val="000000"/>
+                      </a:solidFill>
+                    </a:lnL>
+                    <a:lnR w="6350" cap="flat" cmpd="sng" algn="ctr">
+                      <a:solidFill>
+                        <a:srgbClr val="000000"/>
+                      </a:solidFill>
+                    </a:lnR>
+                    <a:lnT w="6350" cap="flat" cmpd="sng" algn="ctr">
+                      <a:solidFill>
+                        <a:srgbClr val="000000"/>
+                      </a:solidFill>
+                    </a:lnT>
+                    <a:lnB w="6350" cap="flat" cmpd="sng" algn="ctr">
+                      <a:solidFill>
+                        <a:srgbClr val="000000"/>
+                      </a:solidFill>
+                    </a:lnB>
+                  </a:tcPr>
+                </a:tc>
+              </a:tr>
+              <a:tr h="785822">
+                <a:tc>
+                  <a:txBody>
+                    <a:bodyPr wrap="square"/>
+                    <a:lstStyle/>
+                    <a:p>
+                      <a:pPr algn="ctr">
+                        <a:lnSpc>
+                          <a:spcPct val="100000"/>
+                        </a:lnSpc>
+                        <a:spcBef>
+                          <a:spcPts val="0"/>
+                        </a:spcBef>
+                        <a:spcAft>
+                          <a:spcPts val="0"/>
+                        </a:spcAft>
+                      </a:pPr>
+                      <a:r>
+                        <a:rPr sz="1100" b="0">
+                          <a:solidFill>
+                            <a:srgbClr val="000000"/>
+                          </a:solidFill>
+                          <a:latin typeface="Calibri"/>
+                        </a:rPr>
+                        <a:t>26</a:t>
+                      </a:r>
+                    </a:p>
+                  </a:txBody>
+                  <a:tcPr anchor="ctr" marL="38100" marR="38100" marT="25400" marB="25400">
+                    <a:solidFill>
                       <a:srgbClr val="F8E7E8"/>
                     </a:solidFill>
                     <a:lnL w="6350" cap="flat" cmpd="sng" algn="ctr">
@@ -12107,6 +12856,218 @@
                       <a:r>
                         <a:rPr sz="1100" b="0">
                           <a:solidFill>
+                            <a:srgbClr val="77777A"/>
+                          </a:solidFill>
+                          <a:latin typeface="Calibri"/>
+                        </a:rPr>
+                        <a:t>DEFPROD-6290</a:t>
+                      </a:r>
+                    </a:p>
+                  </a:txBody>
+                  <a:tcPr anchor="ctr" marL="38100" marR="38100" marT="25400" marB="25400">
+                    <a:solidFill>
+                      <a:srgbClr val="F8E7E8"/>
+                    </a:solidFill>
+                    <a:lnL w="6350" cap="flat" cmpd="sng" algn="ctr">
+                      <a:solidFill>
+                        <a:srgbClr val="000000"/>
+                      </a:solidFill>
+                    </a:lnL>
+                    <a:lnR w="6350" cap="flat" cmpd="sng" algn="ctr">
+                      <a:solidFill>
+                        <a:srgbClr val="000000"/>
+                      </a:solidFill>
+                    </a:lnR>
+                    <a:lnT w="6350" cap="flat" cmpd="sng" algn="ctr">
+                      <a:solidFill>
+                        <a:srgbClr val="000000"/>
+                      </a:solidFill>
+                    </a:lnT>
+                    <a:lnB w="6350" cap="flat" cmpd="sng" algn="ctr">
+                      <a:solidFill>
+                        <a:srgbClr val="000000"/>
+                      </a:solidFill>
+                    </a:lnB>
+                  </a:tcPr>
+                </a:tc>
+                <a:tc>
+                  <a:txBody>
+                    <a:bodyPr wrap="square"/>
+                    <a:lstStyle/>
+                    <a:p>
+                      <a:pPr algn="l">
+                        <a:lnSpc>
+                          <a:spcPct val="100000"/>
+                        </a:lnSpc>
+                        <a:spcBef>
+                          <a:spcPts val="0"/>
+                        </a:spcBef>
+                        <a:spcAft>
+                          <a:spcPts val="0"/>
+                        </a:spcAft>
+                      </a:pPr>
+                      <a:r>
+                        <a:rPr sz="1100" b="0">
+                          <a:solidFill>
+                            <a:srgbClr val="000000"/>
+                          </a:solidFill>
+                          <a:latin typeface="Calibri"/>
+                        </a:rPr>
+                        <a:t>DEFPROD-6290: Ошибка функциональности - Ошибка заполнения реквизита "Тип договора" в системе-приемнике</a:t>
+                      </a:r>
+                    </a:p>
+                  </a:txBody>
+                  <a:tcPr anchor="ctr" marL="38100" marR="38100" marT="25400" marB="25400">
+                    <a:solidFill>
+                      <a:srgbClr val="F8E7E8"/>
+                    </a:solidFill>
+                    <a:lnL w="6350" cap="flat" cmpd="sng" algn="ctr">
+                      <a:solidFill>
+                        <a:srgbClr val="000000"/>
+                      </a:solidFill>
+                    </a:lnL>
+                    <a:lnR w="6350" cap="flat" cmpd="sng" algn="ctr">
+                      <a:solidFill>
+                        <a:srgbClr val="000000"/>
+                      </a:solidFill>
+                    </a:lnR>
+                    <a:lnT w="6350" cap="flat" cmpd="sng" algn="ctr">
+                      <a:solidFill>
+                        <a:srgbClr val="000000"/>
+                      </a:solidFill>
+                    </a:lnT>
+                    <a:lnB w="6350" cap="flat" cmpd="sng" algn="ctr">
+                      <a:solidFill>
+                        <a:srgbClr val="000000"/>
+                      </a:solidFill>
+                    </a:lnB>
+                  </a:tcPr>
+                </a:tc>
+                <a:tc>
+                  <a:txBody>
+                    <a:bodyPr wrap="square"/>
+                    <a:lstStyle/>
+                    <a:p>
+                      <a:pPr algn="l">
+                        <a:lnSpc>
+                          <a:spcPct val="100000"/>
+                        </a:lnSpc>
+                        <a:spcBef>
+                          <a:spcPts val="0"/>
+                        </a:spcBef>
+                        <a:spcAft>
+                          <a:spcPts val="0"/>
+                        </a:spcAft>
+                      </a:pPr>
+                      <a:r>
+                        <a:rPr sz="1100" b="0">
+                          <a:solidFill>
+                            <a:srgbClr val="000000"/>
+                          </a:solidFill>
+                          <a:latin typeface="Calibri"/>
+                        </a:rPr>
+                        <a:t>Корректная классификация договора с точки зрения учета казначейства</a:t>
+                      </a:r>
+                    </a:p>
+                  </a:txBody>
+                  <a:tcPr anchor="ctr" marL="38100" marR="38100" marT="25400" marB="25400">
+                    <a:solidFill>
+                      <a:srgbClr val="F8E7E8"/>
+                    </a:solidFill>
+                    <a:lnL w="6350" cap="flat" cmpd="sng" algn="ctr">
+                      <a:solidFill>
+                        <a:srgbClr val="000000"/>
+                      </a:solidFill>
+                    </a:lnL>
+                    <a:lnR w="6350" cap="flat" cmpd="sng" algn="ctr">
+                      <a:solidFill>
+                        <a:srgbClr val="000000"/>
+                      </a:solidFill>
+                    </a:lnR>
+                    <a:lnT w="6350" cap="flat" cmpd="sng" algn="ctr">
+                      <a:solidFill>
+                        <a:srgbClr val="000000"/>
+                      </a:solidFill>
+                    </a:lnT>
+                    <a:lnB w="6350" cap="flat" cmpd="sng" algn="ctr">
+                      <a:solidFill>
+                        <a:srgbClr val="000000"/>
+                      </a:solidFill>
+                    </a:lnB>
+                  </a:tcPr>
+                </a:tc>
+                <a:tc>
+                  <a:txBody>
+                    <a:bodyPr wrap="square"/>
+                    <a:lstStyle/>
+                    <a:p>
+                      <a:pPr algn="r">
+                        <a:lnSpc>
+                          <a:spcPct val="100000"/>
+                        </a:lnSpc>
+                        <a:spcBef>
+                          <a:spcPts val="0"/>
+                        </a:spcBef>
+                        <a:spcAft>
+                          <a:spcPts val="0"/>
+                        </a:spcAft>
+                      </a:pPr>
+                      <a:r>
+                        <a:rPr sz="1100" b="0">
+                          <a:solidFill>
+                            <a:srgbClr val="000000"/>
+                          </a:solidFill>
+                          <a:latin typeface="Calibri"/>
+                        </a:rPr>
+                        <a:t>160</a:t>
+                      </a:r>
+                    </a:p>
+                  </a:txBody>
+                  <a:tcPr anchor="ctr" marL="38100" marR="38100" marT="25400" marB="25400">
+                    <a:solidFill>
+                      <a:srgbClr val="F8E7E8"/>
+                    </a:solidFill>
+                    <a:lnL w="6350" cap="flat" cmpd="sng" algn="ctr">
+                      <a:solidFill>
+                        <a:srgbClr val="000000"/>
+                      </a:solidFill>
+                    </a:lnL>
+                    <a:lnR w="6350" cap="flat" cmpd="sng" algn="ctr">
+                      <a:solidFill>
+                        <a:srgbClr val="000000"/>
+                      </a:solidFill>
+                    </a:lnR>
+                    <a:lnT w="6350" cap="flat" cmpd="sng" algn="ctr">
+                      <a:solidFill>
+                        <a:srgbClr val="000000"/>
+                      </a:solidFill>
+                    </a:lnT>
+                    <a:lnB w="6350" cap="flat" cmpd="sng" algn="ctr">
+                      <a:solidFill>
+                        <a:srgbClr val="000000"/>
+                      </a:solidFill>
+                    </a:lnB>
+                  </a:tcPr>
+                </a:tc>
+                <a:tc>
+                  <a:txBody>
+                    <a:bodyPr wrap="square"/>
+                    <a:lstStyle/>
+                    <a:p>
+                      <a:pPr algn="l">
+                        <a:lnSpc>
+                          <a:spcPct val="100000"/>
+                        </a:lnSpc>
+                        <a:spcBef>
+                          <a:spcPts val="0"/>
+                        </a:spcBef>
+                        <a:spcAft>
+                          <a:spcPts val="0"/>
+                        </a:spcAft>
+                      </a:pPr>
+                      <a:r>
+                        <a:rPr sz="1100" b="0">
+                          <a:solidFill>
                             <a:srgbClr val="000000"/>
                           </a:solidFill>
                           <a:latin typeface="Calibri"/>
@@ -12118,1606 +13079,6 @@
                   <a:tcPr anchor="ctr" marL="38100" marR="38100" marT="25400" marB="25400">
                     <a:solidFill>
                       <a:srgbClr val="F8E7E8"/>
-                    </a:solidFill>
-                    <a:lnL w="6350" cap="flat" cmpd="sng" algn="ctr">
-                      <a:solidFill>
-                        <a:srgbClr val="000000"/>
-                      </a:solidFill>
-                    </a:lnL>
-                    <a:lnR w="6350" cap="flat" cmpd="sng" algn="ctr">
-                      <a:solidFill>
-                        <a:srgbClr val="000000"/>
-                      </a:solidFill>
-                    </a:lnR>
-                    <a:lnT w="6350" cap="flat" cmpd="sng" algn="ctr">
-                      <a:solidFill>
-                        <a:srgbClr val="000000"/>
-                      </a:solidFill>
-                    </a:lnT>
-                    <a:lnB w="6350" cap="flat" cmpd="sng" algn="ctr">
-                      <a:solidFill>
-                        <a:srgbClr val="000000"/>
-                      </a:solidFill>
-                    </a:lnB>
-                  </a:tcPr>
-                </a:tc>
-              </a:tr>
-              <a:tr h="692070">
-                <a:tc>
-                  <a:txBody>
-                    <a:bodyPr wrap="square"/>
-                    <a:lstStyle/>
-                    <a:p>
-                      <a:pPr algn="ctr">
-                        <a:lnSpc>
-                          <a:spcPct val="100000"/>
-                        </a:lnSpc>
-                        <a:spcBef>
-                          <a:spcPts val="0"/>
-                        </a:spcBef>
-                        <a:spcAft>
-                          <a:spcPts val="0"/>
-                        </a:spcAft>
-                      </a:pPr>
-                      <a:r>
-                        <a:rPr sz="1100" b="0">
-                          <a:solidFill>
-                            <a:srgbClr val="000000"/>
-                          </a:solidFill>
-                          <a:latin typeface="Calibri"/>
-                        </a:rPr>
-                        <a:t>24</a:t>
-                      </a:r>
-                    </a:p>
-                  </a:txBody>
-                  <a:tcPr anchor="ctr" marL="38100" marR="38100" marT="25400" marB="25400">
-                    <a:solidFill>
-                      <a:srgbClr val="FFFFFF"/>
-                    </a:solidFill>
-                    <a:lnL w="6350" cap="flat" cmpd="sng" algn="ctr">
-                      <a:solidFill>
-                        <a:srgbClr val="000000"/>
-                      </a:solidFill>
-                    </a:lnL>
-                    <a:lnR w="6350" cap="flat" cmpd="sng" algn="ctr">
-                      <a:solidFill>
-                        <a:srgbClr val="000000"/>
-                      </a:solidFill>
-                    </a:lnR>
-                    <a:lnT w="6350" cap="flat" cmpd="sng" algn="ctr">
-                      <a:solidFill>
-                        <a:srgbClr val="000000"/>
-                      </a:solidFill>
-                    </a:lnT>
-                    <a:lnB w="6350" cap="flat" cmpd="sng" algn="ctr">
-                      <a:solidFill>
-                        <a:srgbClr val="000000"/>
-                      </a:solidFill>
-                    </a:lnB>
-                  </a:tcPr>
-                </a:tc>
-                <a:tc>
-                  <a:txBody>
-                    <a:bodyPr wrap="square"/>
-                    <a:lstStyle/>
-                    <a:p>
-                      <a:pPr algn="l">
-                        <a:lnSpc>
-                          <a:spcPct val="100000"/>
-                        </a:lnSpc>
-                        <a:spcBef>
-                          <a:spcPts val="0"/>
-                        </a:spcBef>
-                        <a:spcAft>
-                          <a:spcPts val="0"/>
-                        </a:spcAft>
-                      </a:pPr>
-                      <a:r>
-                        <a:rPr sz="1100" b="0">
-                          <a:solidFill>
-                            <a:srgbClr val="77777A"/>
-                          </a:solidFill>
-                          <a:latin typeface="Calibri"/>
-                        </a:rPr>
-                        <a:t>DEFPROD-5641</a:t>
-                      </a:r>
-                    </a:p>
-                  </a:txBody>
-                  <a:tcPr anchor="ctr" marL="38100" marR="38100" marT="25400" marB="25400">
-                    <a:solidFill>
-                      <a:srgbClr val="FFFFFF"/>
-                    </a:solidFill>
-                    <a:lnL w="6350" cap="flat" cmpd="sng" algn="ctr">
-                      <a:solidFill>
-                        <a:srgbClr val="000000"/>
-                      </a:solidFill>
-                    </a:lnL>
-                    <a:lnR w="6350" cap="flat" cmpd="sng" algn="ctr">
-                      <a:solidFill>
-                        <a:srgbClr val="000000"/>
-                      </a:solidFill>
-                    </a:lnR>
-                    <a:lnT w="6350" cap="flat" cmpd="sng" algn="ctr">
-                      <a:solidFill>
-                        <a:srgbClr val="000000"/>
-                      </a:solidFill>
-                    </a:lnT>
-                    <a:lnB w="6350" cap="flat" cmpd="sng" algn="ctr">
-                      <a:solidFill>
-                        <a:srgbClr val="000000"/>
-                      </a:solidFill>
-                    </a:lnB>
-                  </a:tcPr>
-                </a:tc>
-                <a:tc>
-                  <a:txBody>
-                    <a:bodyPr wrap="square"/>
-                    <a:lstStyle/>
-                    <a:p>
-                      <a:pPr algn="l">
-                        <a:lnSpc>
-                          <a:spcPct val="100000"/>
-                        </a:lnSpc>
-                        <a:spcBef>
-                          <a:spcPts val="0"/>
-                        </a:spcBef>
-                        <a:spcAft>
-                          <a:spcPts val="0"/>
-                        </a:spcAft>
-                      </a:pPr>
-                      <a:r>
-                        <a:rPr sz="1100" b="0">
-                          <a:solidFill>
-                            <a:srgbClr val="000000"/>
-                          </a:solidFill>
-                          <a:latin typeface="Calibri"/>
-                        </a:rPr>
-                        <a:t>DEFPROD-5641: Ошибка функциональности - Реализовать процесс ведения БДДС в системе</a:t>
-                      </a:r>
-                    </a:p>
-                  </a:txBody>
-                  <a:tcPr anchor="ctr" marL="38100" marR="38100" marT="25400" marB="25400">
-                    <a:solidFill>
-                      <a:srgbClr val="FFFFFF"/>
-                    </a:solidFill>
-                    <a:lnL w="6350" cap="flat" cmpd="sng" algn="ctr">
-                      <a:solidFill>
-                        <a:srgbClr val="000000"/>
-                      </a:solidFill>
-                    </a:lnL>
-                    <a:lnR w="6350" cap="flat" cmpd="sng" algn="ctr">
-                      <a:solidFill>
-                        <a:srgbClr val="000000"/>
-                      </a:solidFill>
-                    </a:lnR>
-                    <a:lnT w="6350" cap="flat" cmpd="sng" algn="ctr">
-                      <a:solidFill>
-                        <a:srgbClr val="000000"/>
-                      </a:solidFill>
-                    </a:lnT>
-                    <a:lnB w="6350" cap="flat" cmpd="sng" algn="ctr">
-                      <a:solidFill>
-                        <a:srgbClr val="000000"/>
-                      </a:solidFill>
-                    </a:lnB>
-                  </a:tcPr>
-                </a:tc>
-                <a:tc>
-                  <a:txBody>
-                    <a:bodyPr wrap="square"/>
-                    <a:lstStyle/>
-                    <a:p>
-                      <a:pPr algn="l">
-                        <a:lnSpc>
-                          <a:spcPct val="100000"/>
-                        </a:lnSpc>
-                        <a:spcBef>
-                          <a:spcPts val="0"/>
-                        </a:spcBef>
-                        <a:spcAft>
-                          <a:spcPts val="0"/>
-                        </a:spcAft>
-                      </a:pPr>
-                      <a:r>
-                        <a:rPr sz="1100" b="0">
-                          <a:solidFill>
-                            <a:srgbClr val="000000"/>
-                          </a:solidFill>
-                          <a:latin typeface="Calibri"/>
-                        </a:rPr>
-                        <a:t>проанализировать Осиповой в системе. Скорее всего Тираж.</a:t>
-                      </a:r>
-                    </a:p>
-                  </a:txBody>
-                  <a:tcPr anchor="ctr" marL="38100" marR="38100" marT="25400" marB="25400">
-                    <a:solidFill>
-                      <a:srgbClr val="FFFFFF"/>
-                    </a:solidFill>
-                    <a:lnL w="6350" cap="flat" cmpd="sng" algn="ctr">
-                      <a:solidFill>
-                        <a:srgbClr val="000000"/>
-                      </a:solidFill>
-                    </a:lnL>
-                    <a:lnR w="6350" cap="flat" cmpd="sng" algn="ctr">
-                      <a:solidFill>
-                        <a:srgbClr val="000000"/>
-                      </a:solidFill>
-                    </a:lnR>
-                    <a:lnT w="6350" cap="flat" cmpd="sng" algn="ctr">
-                      <a:solidFill>
-                        <a:srgbClr val="000000"/>
-                      </a:solidFill>
-                    </a:lnT>
-                    <a:lnB w="6350" cap="flat" cmpd="sng" algn="ctr">
-                      <a:solidFill>
-                        <a:srgbClr val="000000"/>
-                      </a:solidFill>
-                    </a:lnB>
-                  </a:tcPr>
-                </a:tc>
-                <a:tc>
-                  <a:txBody>
-                    <a:bodyPr wrap="square"/>
-                    <a:lstStyle/>
-                    <a:p>
-                      <a:pPr algn="r">
-                        <a:lnSpc>
-                          <a:spcPct val="100000"/>
-                        </a:lnSpc>
-                        <a:spcBef>
-                          <a:spcPts val="0"/>
-                        </a:spcBef>
-                        <a:spcAft>
-                          <a:spcPts val="0"/>
-                        </a:spcAft>
-                      </a:pPr>
-                    </a:p>
-                  </a:txBody>
-                  <a:tcPr anchor="ctr" marL="38100" marR="38100" marT="25400" marB="25400">
-                    <a:solidFill>
-                      <a:srgbClr val="FFFFFF"/>
-                    </a:solidFill>
-                    <a:lnL w="6350" cap="flat" cmpd="sng" algn="ctr">
-                      <a:solidFill>
-                        <a:srgbClr val="000000"/>
-                      </a:solidFill>
-                    </a:lnL>
-                    <a:lnR w="6350" cap="flat" cmpd="sng" algn="ctr">
-                      <a:solidFill>
-                        <a:srgbClr val="000000"/>
-                      </a:solidFill>
-                    </a:lnR>
-                    <a:lnT w="6350" cap="flat" cmpd="sng" algn="ctr">
-                      <a:solidFill>
-                        <a:srgbClr val="000000"/>
-                      </a:solidFill>
-                    </a:lnT>
-                    <a:lnB w="6350" cap="flat" cmpd="sng" algn="ctr">
-                      <a:solidFill>
-                        <a:srgbClr val="000000"/>
-                      </a:solidFill>
-                    </a:lnB>
-                  </a:tcPr>
-                </a:tc>
-                <a:tc>
-                  <a:txBody>
-                    <a:bodyPr wrap="square"/>
-                    <a:lstStyle/>
-                    <a:p>
-                      <a:pPr algn="l">
-                        <a:lnSpc>
-                          <a:spcPct val="100000"/>
-                        </a:lnSpc>
-                        <a:spcBef>
-                          <a:spcPts val="0"/>
-                        </a:spcBef>
-                        <a:spcAft>
-                          <a:spcPts val="0"/>
-                        </a:spcAft>
-                      </a:pPr>
-                      <a:r>
-                        <a:rPr sz="1100" b="0">
-                          <a:solidFill>
-                            <a:srgbClr val="000000"/>
-                          </a:solidFill>
-                          <a:latin typeface="Calibri"/>
-                        </a:rPr>
-                        <a:t>уточнить требования релиз</a:t>
-                      </a:r>
-                    </a:p>
-                  </a:txBody>
-                  <a:tcPr anchor="ctr" marL="38100" marR="38100" marT="25400" marB="25400">
-                    <a:solidFill>
-                      <a:srgbClr val="FFFFFF"/>
-                    </a:solidFill>
-                    <a:lnL w="6350" cap="flat" cmpd="sng" algn="ctr">
-                      <a:solidFill>
-                        <a:srgbClr val="000000"/>
-                      </a:solidFill>
-                    </a:lnL>
-                    <a:lnR w="6350" cap="flat" cmpd="sng" algn="ctr">
-                      <a:solidFill>
-                        <a:srgbClr val="000000"/>
-                      </a:solidFill>
-                    </a:lnR>
-                    <a:lnT w="6350" cap="flat" cmpd="sng" algn="ctr">
-                      <a:solidFill>
-                        <a:srgbClr val="000000"/>
-                      </a:solidFill>
-                    </a:lnT>
-                    <a:lnB w="6350" cap="flat" cmpd="sng" algn="ctr">
-                      <a:solidFill>
-                        <a:srgbClr val="000000"/>
-                      </a:solidFill>
-                    </a:lnB>
-                  </a:tcPr>
-                </a:tc>
-              </a:tr>
-              <a:tr h="692070">
-                <a:tc>
-                  <a:txBody>
-                    <a:bodyPr wrap="square"/>
-                    <a:lstStyle/>
-                    <a:p>
-                      <a:pPr algn="ctr">
-                        <a:lnSpc>
-                          <a:spcPct val="100000"/>
-                        </a:lnSpc>
-                        <a:spcBef>
-                          <a:spcPts val="0"/>
-                        </a:spcBef>
-                        <a:spcAft>
-                          <a:spcPts val="0"/>
-                        </a:spcAft>
-                      </a:pPr>
-                      <a:r>
-                        <a:rPr sz="1100" b="0">
-                          <a:solidFill>
-                            <a:srgbClr val="000000"/>
-                          </a:solidFill>
-                          <a:latin typeface="Calibri"/>
-                        </a:rPr>
-                        <a:t>25</a:t>
-                      </a:r>
-                    </a:p>
-                  </a:txBody>
-                  <a:tcPr anchor="ctr" marL="38100" marR="38100" marT="25400" marB="25400">
-                    <a:solidFill>
-                      <a:srgbClr val="F8E7E8"/>
-                    </a:solidFill>
-                    <a:lnL w="6350" cap="flat" cmpd="sng" algn="ctr">
-                      <a:solidFill>
-                        <a:srgbClr val="000000"/>
-                      </a:solidFill>
-                    </a:lnL>
-                    <a:lnR w="6350" cap="flat" cmpd="sng" algn="ctr">
-                      <a:solidFill>
-                        <a:srgbClr val="000000"/>
-                      </a:solidFill>
-                    </a:lnR>
-                    <a:lnT w="6350" cap="flat" cmpd="sng" algn="ctr">
-                      <a:solidFill>
-                        <a:srgbClr val="000000"/>
-                      </a:solidFill>
-                    </a:lnT>
-                    <a:lnB w="6350" cap="flat" cmpd="sng" algn="ctr">
-                      <a:solidFill>
-                        <a:srgbClr val="000000"/>
-                      </a:solidFill>
-                    </a:lnB>
-                  </a:tcPr>
-                </a:tc>
-                <a:tc>
-                  <a:txBody>
-                    <a:bodyPr wrap="square"/>
-                    <a:lstStyle/>
-                    <a:p>
-                      <a:pPr algn="l">
-                        <a:lnSpc>
-                          <a:spcPct val="100000"/>
-                        </a:lnSpc>
-                        <a:spcBef>
-                          <a:spcPts val="0"/>
-                        </a:spcBef>
-                        <a:spcAft>
-                          <a:spcPts val="0"/>
-                        </a:spcAft>
-                      </a:pPr>
-                      <a:r>
-                        <a:rPr sz="1100" b="0">
-                          <a:solidFill>
-                            <a:srgbClr val="77777A"/>
-                          </a:solidFill>
-                          <a:latin typeface="Calibri"/>
-                        </a:rPr>
-                        <a:t>DEFPROD-6026</a:t>
-                      </a:r>
-                    </a:p>
-                  </a:txBody>
-                  <a:tcPr anchor="ctr" marL="38100" marR="38100" marT="25400" marB="25400">
-                    <a:solidFill>
-                      <a:srgbClr val="F8E7E8"/>
-                    </a:solidFill>
-                    <a:lnL w="6350" cap="flat" cmpd="sng" algn="ctr">
-                      <a:solidFill>
-                        <a:srgbClr val="000000"/>
-                      </a:solidFill>
-                    </a:lnL>
-                    <a:lnR w="6350" cap="flat" cmpd="sng" algn="ctr">
-                      <a:solidFill>
-                        <a:srgbClr val="000000"/>
-                      </a:solidFill>
-                    </a:lnR>
-                    <a:lnT w="6350" cap="flat" cmpd="sng" algn="ctr">
-                      <a:solidFill>
-                        <a:srgbClr val="000000"/>
-                      </a:solidFill>
-                    </a:lnT>
-                    <a:lnB w="6350" cap="flat" cmpd="sng" algn="ctr">
-                      <a:solidFill>
-                        <a:srgbClr val="000000"/>
-                      </a:solidFill>
-                    </a:lnB>
-                  </a:tcPr>
-                </a:tc>
-                <a:tc>
-                  <a:txBody>
-                    <a:bodyPr wrap="square"/>
-                    <a:lstStyle/>
-                    <a:p>
-                      <a:pPr algn="l">
-                        <a:lnSpc>
-                          <a:spcPct val="100000"/>
-                        </a:lnSpc>
-                        <a:spcBef>
-                          <a:spcPts val="0"/>
-                        </a:spcBef>
-                        <a:spcAft>
-                          <a:spcPts val="0"/>
-                        </a:spcAft>
-                      </a:pPr>
-                      <a:r>
-                        <a:rPr sz="1100" b="0">
-                          <a:solidFill>
-                            <a:srgbClr val="000000"/>
-                          </a:solidFill>
-                          <a:latin typeface="Calibri"/>
-                        </a:rPr>
-                        <a:t>DEFPROD-6026: Ошибка функциональности - Добавить групповое изменение банковского счета получателя в ЗНО в документе реестр платежей</a:t>
-                      </a:r>
-                      <a:r>
-                        <a:rPr sz="1100" b="1">
-                          <a:solidFill>
-                            <a:srgbClr val="000000"/>
-                          </a:solidFill>
-                          <a:latin typeface="Calibri"/>
-                        </a:rPr>
-                        <a:t> – реализовано в УПП</a:t>
-                      </a:r>
-                    </a:p>
-                  </a:txBody>
-                  <a:tcPr anchor="ctr" marL="38100" marR="38100" marT="25400" marB="25400">
-                    <a:solidFill>
-                      <a:srgbClr val="F8E7E8"/>
-                    </a:solidFill>
-                    <a:lnL w="6350" cap="flat" cmpd="sng" algn="ctr">
-                      <a:solidFill>
-                        <a:srgbClr val="000000"/>
-                      </a:solidFill>
-                    </a:lnL>
-                    <a:lnR w="6350" cap="flat" cmpd="sng" algn="ctr">
-                      <a:solidFill>
-                        <a:srgbClr val="000000"/>
-                      </a:solidFill>
-                    </a:lnR>
-                    <a:lnT w="6350" cap="flat" cmpd="sng" algn="ctr">
-                      <a:solidFill>
-                        <a:srgbClr val="000000"/>
-                      </a:solidFill>
-                    </a:lnT>
-                    <a:lnB w="6350" cap="flat" cmpd="sng" algn="ctr">
-                      <a:solidFill>
-                        <a:srgbClr val="000000"/>
-                      </a:solidFill>
-                    </a:lnB>
-                  </a:tcPr>
-                </a:tc>
-                <a:tc>
-                  <a:txBody>
-                    <a:bodyPr wrap="square"/>
-                    <a:lstStyle/>
-                    <a:p>
-                      <a:pPr algn="l">
-                        <a:lnSpc>
-                          <a:spcPct val="100000"/>
-                        </a:lnSpc>
-                        <a:spcBef>
-                          <a:spcPts val="0"/>
-                        </a:spcBef>
-                        <a:spcAft>
-                          <a:spcPts val="0"/>
-                        </a:spcAft>
-                      </a:pPr>
-                      <a:r>
-                        <a:rPr sz="1100" b="0">
-                          <a:solidFill>
-                            <a:srgbClr val="000000"/>
-                          </a:solidFill>
-                          <a:latin typeface="Calibri"/>
-                        </a:rPr>
-                        <a:t>Оптимизация времени работы с реестром. На изменение одной заявки вручную уходит 1,5 минуты.</a:t>
-                      </a:r>
-                    </a:p>
-                  </a:txBody>
-                  <a:tcPr anchor="ctr" marL="38100" marR="38100" marT="25400" marB="25400">
-                    <a:solidFill>
-                      <a:srgbClr val="F8E7E8"/>
-                    </a:solidFill>
-                    <a:lnL w="6350" cap="flat" cmpd="sng" algn="ctr">
-                      <a:solidFill>
-                        <a:srgbClr val="000000"/>
-                      </a:solidFill>
-                    </a:lnL>
-                    <a:lnR w="6350" cap="flat" cmpd="sng" algn="ctr">
-                      <a:solidFill>
-                        <a:srgbClr val="000000"/>
-                      </a:solidFill>
-                    </a:lnR>
-                    <a:lnT w="6350" cap="flat" cmpd="sng" algn="ctr">
-                      <a:solidFill>
-                        <a:srgbClr val="000000"/>
-                      </a:solidFill>
-                    </a:lnT>
-                    <a:lnB w="6350" cap="flat" cmpd="sng" algn="ctr">
-                      <a:solidFill>
-                        <a:srgbClr val="000000"/>
-                      </a:solidFill>
-                    </a:lnB>
-                  </a:tcPr>
-                </a:tc>
-                <a:tc>
-                  <a:txBody>
-                    <a:bodyPr wrap="square"/>
-                    <a:lstStyle/>
-                    <a:p>
-                      <a:pPr algn="r">
-                        <a:lnSpc>
-                          <a:spcPct val="100000"/>
-                        </a:lnSpc>
-                        <a:spcBef>
-                          <a:spcPts val="0"/>
-                        </a:spcBef>
-                        <a:spcAft>
-                          <a:spcPts val="0"/>
-                        </a:spcAft>
-                      </a:pPr>
-                      <a:r>
-                        <a:rPr sz="1100" b="0">
-                          <a:solidFill>
-                            <a:srgbClr val="000000"/>
-                          </a:solidFill>
-                          <a:latin typeface="Calibri"/>
-                        </a:rPr>
-                        <a:t>160</a:t>
-                      </a:r>
-                    </a:p>
-                  </a:txBody>
-                  <a:tcPr anchor="ctr" marL="38100" marR="38100" marT="25400" marB="25400">
-                    <a:solidFill>
-                      <a:srgbClr val="F8E7E8"/>
-                    </a:solidFill>
-                    <a:lnL w="6350" cap="flat" cmpd="sng" algn="ctr">
-                      <a:solidFill>
-                        <a:srgbClr val="000000"/>
-                      </a:solidFill>
-                    </a:lnL>
-                    <a:lnR w="6350" cap="flat" cmpd="sng" algn="ctr">
-                      <a:solidFill>
-                        <a:srgbClr val="000000"/>
-                      </a:solidFill>
-                    </a:lnR>
-                    <a:lnT w="6350" cap="flat" cmpd="sng" algn="ctr">
-                      <a:solidFill>
-                        <a:srgbClr val="000000"/>
-                      </a:solidFill>
-                    </a:lnT>
-                    <a:lnB w="6350" cap="flat" cmpd="sng" algn="ctr">
-                      <a:solidFill>
-                        <a:srgbClr val="000000"/>
-                      </a:solidFill>
-                    </a:lnB>
-                  </a:tcPr>
-                </a:tc>
-                <a:tc>
-                  <a:txBody>
-                    <a:bodyPr wrap="square"/>
-                    <a:lstStyle/>
-                    <a:p>
-                      <a:pPr algn="l">
-                        <a:lnSpc>
-                          <a:spcPct val="100000"/>
-                        </a:lnSpc>
-                        <a:spcBef>
-                          <a:spcPts val="0"/>
-                        </a:spcBef>
-                        <a:spcAft>
-                          <a:spcPts val="0"/>
-                        </a:spcAft>
-                      </a:pPr>
-                      <a:r>
-                        <a:rPr sz="1100" b="0">
-                          <a:solidFill>
-                            <a:srgbClr val="000000"/>
-                          </a:solidFill>
-                          <a:latin typeface="Calibri"/>
-                        </a:rPr>
-                        <a:t>34 релиз</a:t>
-                      </a:r>
-                    </a:p>
-                  </a:txBody>
-                  <a:tcPr anchor="ctr" marL="38100" marR="38100" marT="25400" marB="25400">
-                    <a:solidFill>
-                      <a:srgbClr val="F8E7E8"/>
-                    </a:solidFill>
-                    <a:lnL w="6350" cap="flat" cmpd="sng" algn="ctr">
-                      <a:solidFill>
-                        <a:srgbClr val="000000"/>
-                      </a:solidFill>
-                    </a:lnL>
-                    <a:lnR w="6350" cap="flat" cmpd="sng" algn="ctr">
-                      <a:solidFill>
-                        <a:srgbClr val="000000"/>
-                      </a:solidFill>
-                    </a:lnR>
-                    <a:lnT w="6350" cap="flat" cmpd="sng" algn="ctr">
-                      <a:solidFill>
-                        <a:srgbClr val="000000"/>
-                      </a:solidFill>
-                    </a:lnT>
-                    <a:lnB w="6350" cap="flat" cmpd="sng" algn="ctr">
-                      <a:solidFill>
-                        <a:srgbClr val="000000"/>
-                      </a:solidFill>
-                    </a:lnB>
-                  </a:tcPr>
-                </a:tc>
-              </a:tr>
-              <a:tr h="692070">
-                <a:tc>
-                  <a:txBody>
-                    <a:bodyPr wrap="square"/>
-                    <a:lstStyle/>
-                    <a:p>
-                      <a:pPr algn="ctr">
-                        <a:lnSpc>
-                          <a:spcPct val="100000"/>
-                        </a:lnSpc>
-                        <a:spcBef>
-                          <a:spcPts val="0"/>
-                        </a:spcBef>
-                        <a:spcAft>
-                          <a:spcPts val="0"/>
-                        </a:spcAft>
-                      </a:pPr>
-                      <a:r>
-                        <a:rPr sz="1100" b="0">
-                          <a:solidFill>
-                            <a:srgbClr val="000000"/>
-                          </a:solidFill>
-                          <a:latin typeface="Calibri"/>
-                        </a:rPr>
-                        <a:t>26</a:t>
-                      </a:r>
-                    </a:p>
-                  </a:txBody>
-                  <a:tcPr anchor="ctr" marL="38100" marR="38100" marT="25400" marB="25400">
-                    <a:solidFill>
-                      <a:srgbClr val="FFFFFF"/>
-                    </a:solidFill>
-                    <a:lnL w="6350" cap="flat" cmpd="sng" algn="ctr">
-                      <a:solidFill>
-                        <a:srgbClr val="000000"/>
-                      </a:solidFill>
-                    </a:lnL>
-                    <a:lnR w="6350" cap="flat" cmpd="sng" algn="ctr">
-                      <a:solidFill>
-                        <a:srgbClr val="000000"/>
-                      </a:solidFill>
-                    </a:lnR>
-                    <a:lnT w="6350" cap="flat" cmpd="sng" algn="ctr">
-                      <a:solidFill>
-                        <a:srgbClr val="000000"/>
-                      </a:solidFill>
-                    </a:lnT>
-                    <a:lnB w="6350" cap="flat" cmpd="sng" algn="ctr">
-                      <a:solidFill>
-                        <a:srgbClr val="000000"/>
-                      </a:solidFill>
-                    </a:lnB>
-                  </a:tcPr>
-                </a:tc>
-                <a:tc>
-                  <a:txBody>
-                    <a:bodyPr wrap="square"/>
-                    <a:lstStyle/>
-                    <a:p>
-                      <a:pPr algn="l">
-                        <a:lnSpc>
-                          <a:spcPct val="100000"/>
-                        </a:lnSpc>
-                        <a:spcBef>
-                          <a:spcPts val="0"/>
-                        </a:spcBef>
-                        <a:spcAft>
-                          <a:spcPts val="0"/>
-                        </a:spcAft>
-                      </a:pPr>
-                      <a:r>
-                        <a:rPr sz="1100" b="0">
-                          <a:solidFill>
-                            <a:srgbClr val="77777A"/>
-                          </a:solidFill>
-                          <a:latin typeface="Calibri"/>
-                        </a:rPr>
-                        <a:t>DEFPROD-6290</a:t>
-                      </a:r>
-                    </a:p>
-                  </a:txBody>
-                  <a:tcPr anchor="ctr" marL="38100" marR="38100" marT="25400" marB="25400">
-                    <a:solidFill>
-                      <a:srgbClr val="FFFFFF"/>
-                    </a:solidFill>
-                    <a:lnL w="6350" cap="flat" cmpd="sng" algn="ctr">
-                      <a:solidFill>
-                        <a:srgbClr val="000000"/>
-                      </a:solidFill>
-                    </a:lnL>
-                    <a:lnR w="6350" cap="flat" cmpd="sng" algn="ctr">
-                      <a:solidFill>
-                        <a:srgbClr val="000000"/>
-                      </a:solidFill>
-                    </a:lnR>
-                    <a:lnT w="6350" cap="flat" cmpd="sng" algn="ctr">
-                      <a:solidFill>
-                        <a:srgbClr val="000000"/>
-                      </a:solidFill>
-                    </a:lnT>
-                    <a:lnB w="6350" cap="flat" cmpd="sng" algn="ctr">
-                      <a:solidFill>
-                        <a:srgbClr val="000000"/>
-                      </a:solidFill>
-                    </a:lnB>
-                  </a:tcPr>
-                </a:tc>
-                <a:tc>
-                  <a:txBody>
-                    <a:bodyPr wrap="square"/>
-                    <a:lstStyle/>
-                    <a:p>
-                      <a:pPr algn="l">
-                        <a:lnSpc>
-                          <a:spcPct val="100000"/>
-                        </a:lnSpc>
-                        <a:spcBef>
-                          <a:spcPts val="0"/>
-                        </a:spcBef>
-                        <a:spcAft>
-                          <a:spcPts val="0"/>
-                        </a:spcAft>
-                      </a:pPr>
-                      <a:r>
-                        <a:rPr sz="1100" b="0">
-                          <a:solidFill>
-                            <a:srgbClr val="000000"/>
-                          </a:solidFill>
-                          <a:latin typeface="Calibri"/>
-                        </a:rPr>
-                        <a:t>DEFPROD-6290: Ошибка функциональности - Ошибка заполнения реквизита "Тип договора" в системе-приемнике</a:t>
-                      </a:r>
-                    </a:p>
-                  </a:txBody>
-                  <a:tcPr anchor="ctr" marL="38100" marR="38100" marT="25400" marB="25400">
-                    <a:solidFill>
-                      <a:srgbClr val="FFFFFF"/>
-                    </a:solidFill>
-                    <a:lnL w="6350" cap="flat" cmpd="sng" algn="ctr">
-                      <a:solidFill>
-                        <a:srgbClr val="000000"/>
-                      </a:solidFill>
-                    </a:lnL>
-                    <a:lnR w="6350" cap="flat" cmpd="sng" algn="ctr">
-                      <a:solidFill>
-                        <a:srgbClr val="000000"/>
-                      </a:solidFill>
-                    </a:lnR>
-                    <a:lnT w="6350" cap="flat" cmpd="sng" algn="ctr">
-                      <a:solidFill>
-                        <a:srgbClr val="000000"/>
-                      </a:solidFill>
-                    </a:lnT>
-                    <a:lnB w="6350" cap="flat" cmpd="sng" algn="ctr">
-                      <a:solidFill>
-                        <a:srgbClr val="000000"/>
-                      </a:solidFill>
-                    </a:lnB>
-                  </a:tcPr>
-                </a:tc>
-                <a:tc>
-                  <a:txBody>
-                    <a:bodyPr wrap="square"/>
-                    <a:lstStyle/>
-                    <a:p>
-                      <a:pPr algn="l">
-                        <a:lnSpc>
-                          <a:spcPct val="100000"/>
-                        </a:lnSpc>
-                        <a:spcBef>
-                          <a:spcPts val="0"/>
-                        </a:spcBef>
-                        <a:spcAft>
-                          <a:spcPts val="0"/>
-                        </a:spcAft>
-                      </a:pPr>
-                      <a:r>
-                        <a:rPr sz="1100" b="0">
-                          <a:solidFill>
-                            <a:srgbClr val="000000"/>
-                          </a:solidFill>
-                          <a:latin typeface="Calibri"/>
-                        </a:rPr>
-                        <a:t>Корректная классификация договора с точки зрения учета казначейства</a:t>
-                      </a:r>
-                    </a:p>
-                  </a:txBody>
-                  <a:tcPr anchor="ctr" marL="38100" marR="38100" marT="25400" marB="25400">
-                    <a:solidFill>
-                      <a:srgbClr val="FFFFFF"/>
-                    </a:solidFill>
-                    <a:lnL w="6350" cap="flat" cmpd="sng" algn="ctr">
-                      <a:solidFill>
-                        <a:srgbClr val="000000"/>
-                      </a:solidFill>
-                    </a:lnL>
-                    <a:lnR w="6350" cap="flat" cmpd="sng" algn="ctr">
-                      <a:solidFill>
-                        <a:srgbClr val="000000"/>
-                      </a:solidFill>
-                    </a:lnR>
-                    <a:lnT w="6350" cap="flat" cmpd="sng" algn="ctr">
-                      <a:solidFill>
-                        <a:srgbClr val="000000"/>
-                      </a:solidFill>
-                    </a:lnT>
-                    <a:lnB w="6350" cap="flat" cmpd="sng" algn="ctr">
-                      <a:solidFill>
-                        <a:srgbClr val="000000"/>
-                      </a:solidFill>
-                    </a:lnB>
-                  </a:tcPr>
-                </a:tc>
-                <a:tc>
-                  <a:txBody>
-                    <a:bodyPr wrap="square"/>
-                    <a:lstStyle/>
-                    <a:p>
-                      <a:pPr algn="r">
-                        <a:lnSpc>
-                          <a:spcPct val="100000"/>
-                        </a:lnSpc>
-                        <a:spcBef>
-                          <a:spcPts val="0"/>
-                        </a:spcBef>
-                        <a:spcAft>
-                          <a:spcPts val="0"/>
-                        </a:spcAft>
-                      </a:pPr>
-                      <a:r>
-                        <a:rPr sz="1100" b="0">
-                          <a:solidFill>
-                            <a:srgbClr val="000000"/>
-                          </a:solidFill>
-                          <a:latin typeface="Calibri"/>
-                        </a:rPr>
-                        <a:t>160</a:t>
-                      </a:r>
-                    </a:p>
-                  </a:txBody>
-                  <a:tcPr anchor="ctr" marL="38100" marR="38100" marT="25400" marB="25400">
-                    <a:solidFill>
-                      <a:srgbClr val="FFFFFF"/>
-                    </a:solidFill>
-                    <a:lnL w="6350" cap="flat" cmpd="sng" algn="ctr">
-                      <a:solidFill>
-                        <a:srgbClr val="000000"/>
-                      </a:solidFill>
-                    </a:lnL>
-                    <a:lnR w="6350" cap="flat" cmpd="sng" algn="ctr">
-                      <a:solidFill>
-                        <a:srgbClr val="000000"/>
-                      </a:solidFill>
-                    </a:lnR>
-                    <a:lnT w="6350" cap="flat" cmpd="sng" algn="ctr">
-                      <a:solidFill>
-                        <a:srgbClr val="000000"/>
-                      </a:solidFill>
-                    </a:lnT>
-                    <a:lnB w="6350" cap="flat" cmpd="sng" algn="ctr">
-                      <a:solidFill>
-                        <a:srgbClr val="000000"/>
-                      </a:solidFill>
-                    </a:lnB>
-                  </a:tcPr>
-                </a:tc>
-                <a:tc>
-                  <a:txBody>
-                    <a:bodyPr wrap="square"/>
-                    <a:lstStyle/>
-                    <a:p>
-                      <a:pPr algn="l">
-                        <a:lnSpc>
-                          <a:spcPct val="100000"/>
-                        </a:lnSpc>
-                        <a:spcBef>
-                          <a:spcPts val="0"/>
-                        </a:spcBef>
-                        <a:spcAft>
-                          <a:spcPts val="0"/>
-                        </a:spcAft>
-                      </a:pPr>
-                      <a:r>
-                        <a:rPr sz="1100" b="0">
-                          <a:solidFill>
-                            <a:srgbClr val="000000"/>
-                          </a:solidFill>
-                          <a:latin typeface="Calibri"/>
-                        </a:rPr>
-                        <a:t>34 релиз</a:t>
-                      </a:r>
-                    </a:p>
-                  </a:txBody>
-                  <a:tcPr anchor="ctr" marL="38100" marR="38100" marT="25400" marB="25400">
-                    <a:solidFill>
-                      <a:srgbClr val="FFFFFF"/>
-                    </a:solidFill>
-                    <a:lnL w="6350" cap="flat" cmpd="sng" algn="ctr">
-                      <a:solidFill>
-                        <a:srgbClr val="000000"/>
-                      </a:solidFill>
-                    </a:lnL>
-                    <a:lnR w="6350" cap="flat" cmpd="sng" algn="ctr">
-                      <a:solidFill>
-                        <a:srgbClr val="000000"/>
-                      </a:solidFill>
-                    </a:lnR>
-                    <a:lnT w="6350" cap="flat" cmpd="sng" algn="ctr">
-                      <a:solidFill>
-                        <a:srgbClr val="000000"/>
-                      </a:solidFill>
-                    </a:lnT>
-                    <a:lnB w="6350" cap="flat" cmpd="sng" algn="ctr">
-                      <a:solidFill>
-                        <a:srgbClr val="000000"/>
-                      </a:solidFill>
-                    </a:lnB>
-                  </a:tcPr>
-                </a:tc>
-              </a:tr>
-              <a:tr h="692070">
-                <a:tc>
-                  <a:txBody>
-                    <a:bodyPr wrap="square"/>
-                    <a:lstStyle/>
-                    <a:p>
-                      <a:pPr algn="ctr">
-                        <a:lnSpc>
-                          <a:spcPct val="100000"/>
-                        </a:lnSpc>
-                        <a:spcBef>
-                          <a:spcPts val="0"/>
-                        </a:spcBef>
-                        <a:spcAft>
-                          <a:spcPts val="0"/>
-                        </a:spcAft>
-                      </a:pPr>
-                      <a:r>
-                        <a:rPr sz="1100" b="0">
-                          <a:solidFill>
-                            <a:srgbClr val="000000"/>
-                          </a:solidFill>
-                          <a:latin typeface="Calibri"/>
-                        </a:rPr>
-                        <a:t>27</a:t>
-                      </a:r>
-                    </a:p>
-                  </a:txBody>
-                  <a:tcPr anchor="ctr" marL="38100" marR="38100" marT="25400" marB="25400">
-                    <a:solidFill>
-                      <a:srgbClr val="F8E7E8"/>
-                    </a:solidFill>
-                    <a:lnL w="6350" cap="flat" cmpd="sng" algn="ctr">
-                      <a:solidFill>
-                        <a:srgbClr val="000000"/>
-                      </a:solidFill>
-                    </a:lnL>
-                    <a:lnR w="6350" cap="flat" cmpd="sng" algn="ctr">
-                      <a:solidFill>
-                        <a:srgbClr val="000000"/>
-                      </a:solidFill>
-                    </a:lnR>
-                    <a:lnT w="6350" cap="flat" cmpd="sng" algn="ctr">
-                      <a:solidFill>
-                        <a:srgbClr val="000000"/>
-                      </a:solidFill>
-                    </a:lnT>
-                    <a:lnB w="6350" cap="flat" cmpd="sng" algn="ctr">
-                      <a:solidFill>
-                        <a:srgbClr val="000000"/>
-                      </a:solidFill>
-                    </a:lnB>
-                  </a:tcPr>
-                </a:tc>
-                <a:tc>
-                  <a:txBody>
-                    <a:bodyPr wrap="square"/>
-                    <a:lstStyle/>
-                    <a:p>
-                      <a:pPr algn="l">
-                        <a:lnSpc>
-                          <a:spcPct val="100000"/>
-                        </a:lnSpc>
-                        <a:spcBef>
-                          <a:spcPts val="0"/>
-                        </a:spcBef>
-                        <a:spcAft>
-                          <a:spcPts val="0"/>
-                        </a:spcAft>
-                      </a:pPr>
-                      <a:r>
-                        <a:rPr sz="1100" b="0">
-                          <a:solidFill>
-                            <a:srgbClr val="77777A"/>
-                          </a:solidFill>
-                          <a:latin typeface="Calibri"/>
-                        </a:rPr>
-                        <a:t>DEFPROD-6703</a:t>
-                      </a:r>
-                    </a:p>
-                  </a:txBody>
-                  <a:tcPr anchor="ctr" marL="38100" marR="38100" marT="25400" marB="25400">
-                    <a:solidFill>
-                      <a:srgbClr val="F8E7E8"/>
-                    </a:solidFill>
-                    <a:lnL w="6350" cap="flat" cmpd="sng" algn="ctr">
-                      <a:solidFill>
-                        <a:srgbClr val="000000"/>
-                      </a:solidFill>
-                    </a:lnL>
-                    <a:lnR w="6350" cap="flat" cmpd="sng" algn="ctr">
-                      <a:solidFill>
-                        <a:srgbClr val="000000"/>
-                      </a:solidFill>
-                    </a:lnR>
-                    <a:lnT w="6350" cap="flat" cmpd="sng" algn="ctr">
-                      <a:solidFill>
-                        <a:srgbClr val="000000"/>
-                      </a:solidFill>
-                    </a:lnT>
-                    <a:lnB w="6350" cap="flat" cmpd="sng" algn="ctr">
-                      <a:solidFill>
-                        <a:srgbClr val="000000"/>
-                      </a:solidFill>
-                    </a:lnB>
-                  </a:tcPr>
-                </a:tc>
-                <a:tc>
-                  <a:txBody>
-                    <a:bodyPr wrap="square"/>
-                    <a:lstStyle/>
-                    <a:p>
-                      <a:pPr algn="l">
-                        <a:lnSpc>
-                          <a:spcPct val="100000"/>
-                        </a:lnSpc>
-                        <a:spcBef>
-                          <a:spcPts val="0"/>
-                        </a:spcBef>
-                        <a:spcAft>
-                          <a:spcPts val="0"/>
-                        </a:spcAft>
-                      </a:pPr>
-                      <a:r>
-                        <a:rPr sz="1100" b="0">
-                          <a:solidFill>
-                            <a:srgbClr val="000000"/>
-                          </a:solidFill>
-                          <a:latin typeface="Calibri"/>
-                        </a:rPr>
-                        <a:t>DEFPROD-6703: Новое требование - АвтоЗНО страны ЕАЭС</a:t>
-                      </a:r>
-                    </a:p>
-                  </a:txBody>
-                  <a:tcPr anchor="ctr" marL="38100" marR="38100" marT="25400" marB="25400">
-                    <a:solidFill>
-                      <a:srgbClr val="F8E7E8"/>
-                    </a:solidFill>
-                    <a:lnL w="6350" cap="flat" cmpd="sng" algn="ctr">
-                      <a:solidFill>
-                        <a:srgbClr val="000000"/>
-                      </a:solidFill>
-                    </a:lnL>
-                    <a:lnR w="6350" cap="flat" cmpd="sng" algn="ctr">
-                      <a:solidFill>
-                        <a:srgbClr val="000000"/>
-                      </a:solidFill>
-                    </a:lnR>
-                    <a:lnT w="6350" cap="flat" cmpd="sng" algn="ctr">
-                      <a:solidFill>
-                        <a:srgbClr val="000000"/>
-                      </a:solidFill>
-                    </a:lnT>
-                    <a:lnB w="6350" cap="flat" cmpd="sng" algn="ctr">
-                      <a:solidFill>
-                        <a:srgbClr val="000000"/>
-                      </a:solidFill>
-                    </a:lnB>
-                  </a:tcPr>
-                </a:tc>
-                <a:tc>
-                  <a:txBody>
-                    <a:bodyPr wrap="square"/>
-                    <a:lstStyle/>
-                    <a:p>
-                      <a:pPr algn="l">
-                        <a:lnSpc>
-                          <a:spcPct val="100000"/>
-                        </a:lnSpc>
-                        <a:spcBef>
-                          <a:spcPts val="0"/>
-                        </a:spcBef>
-                        <a:spcAft>
-                          <a:spcPts val="0"/>
-                        </a:spcAft>
-                      </a:pPr>
-                      <a:r>
-                        <a:rPr sz="1100" b="0">
-                          <a:solidFill>
-                            <a:srgbClr val="000000"/>
-                          </a:solidFill>
-                          <a:latin typeface="Calibri"/>
-                        </a:rPr>
-                        <a:t>Расширение категорий для автоЗНО, уменьшение ручного труда на создание ЗНО</a:t>
-                      </a:r>
-                    </a:p>
-                  </a:txBody>
-                  <a:tcPr anchor="ctr" marL="38100" marR="38100" marT="25400" marB="25400">
-                    <a:solidFill>
-                      <a:srgbClr val="F8E7E8"/>
-                    </a:solidFill>
-                    <a:lnL w="6350" cap="flat" cmpd="sng" algn="ctr">
-                      <a:solidFill>
-                        <a:srgbClr val="000000"/>
-                      </a:solidFill>
-                    </a:lnL>
-                    <a:lnR w="6350" cap="flat" cmpd="sng" algn="ctr">
-                      <a:solidFill>
-                        <a:srgbClr val="000000"/>
-                      </a:solidFill>
-                    </a:lnR>
-                    <a:lnT w="6350" cap="flat" cmpd="sng" algn="ctr">
-                      <a:solidFill>
-                        <a:srgbClr val="000000"/>
-                      </a:solidFill>
-                    </a:lnT>
-                    <a:lnB w="6350" cap="flat" cmpd="sng" algn="ctr">
-                      <a:solidFill>
-                        <a:srgbClr val="000000"/>
-                      </a:solidFill>
-                    </a:lnB>
-                  </a:tcPr>
-                </a:tc>
-                <a:tc>
-                  <a:txBody>
-                    <a:bodyPr wrap="square"/>
-                    <a:lstStyle/>
-                    <a:p>
-                      <a:pPr algn="r">
-                        <a:lnSpc>
-                          <a:spcPct val="100000"/>
-                        </a:lnSpc>
-                        <a:spcBef>
-                          <a:spcPts val="0"/>
-                        </a:spcBef>
-                        <a:spcAft>
-                          <a:spcPts val="0"/>
-                        </a:spcAft>
-                      </a:pPr>
-                      <a:r>
-                        <a:rPr sz="1100" b="0">
-                          <a:solidFill>
-                            <a:srgbClr val="000000"/>
-                          </a:solidFill>
-                          <a:latin typeface="Calibri"/>
-                        </a:rPr>
-                        <a:t>160</a:t>
-                      </a:r>
-                    </a:p>
-                  </a:txBody>
-                  <a:tcPr anchor="ctr" marL="38100" marR="38100" marT="25400" marB="25400">
-                    <a:solidFill>
-                      <a:srgbClr val="F8E7E8"/>
-                    </a:solidFill>
-                    <a:lnL w="6350" cap="flat" cmpd="sng" algn="ctr">
-                      <a:solidFill>
-                        <a:srgbClr val="000000"/>
-                      </a:solidFill>
-                    </a:lnL>
-                    <a:lnR w="6350" cap="flat" cmpd="sng" algn="ctr">
-                      <a:solidFill>
-                        <a:srgbClr val="000000"/>
-                      </a:solidFill>
-                    </a:lnR>
-                    <a:lnT w="6350" cap="flat" cmpd="sng" algn="ctr">
-                      <a:solidFill>
-                        <a:srgbClr val="000000"/>
-                      </a:solidFill>
-                    </a:lnT>
-                    <a:lnB w="6350" cap="flat" cmpd="sng" algn="ctr">
-                      <a:solidFill>
-                        <a:srgbClr val="000000"/>
-                      </a:solidFill>
-                    </a:lnB>
-                  </a:tcPr>
-                </a:tc>
-                <a:tc>
-                  <a:txBody>
-                    <a:bodyPr wrap="square"/>
-                    <a:lstStyle/>
-                    <a:p>
-                      <a:pPr algn="l">
-                        <a:lnSpc>
-                          <a:spcPct val="100000"/>
-                        </a:lnSpc>
-                        <a:spcBef>
-                          <a:spcPts val="0"/>
-                        </a:spcBef>
-                        <a:spcAft>
-                          <a:spcPts val="0"/>
-                        </a:spcAft>
-                      </a:pPr>
-                      <a:r>
-                        <a:rPr sz="1100" b="0">
-                          <a:solidFill>
-                            <a:srgbClr val="000000"/>
-                          </a:solidFill>
-                          <a:latin typeface="Calibri"/>
-                        </a:rPr>
-                        <a:t>34 релиз</a:t>
-                      </a:r>
-                    </a:p>
-                  </a:txBody>
-                  <a:tcPr anchor="ctr" marL="38100" marR="38100" marT="25400" marB="25400">
-                    <a:solidFill>
-                      <a:srgbClr val="F8E7E8"/>
-                    </a:solidFill>
-                    <a:lnL w="6350" cap="flat" cmpd="sng" algn="ctr">
-                      <a:solidFill>
-                        <a:srgbClr val="000000"/>
-                      </a:solidFill>
-                    </a:lnL>
-                    <a:lnR w="6350" cap="flat" cmpd="sng" algn="ctr">
-                      <a:solidFill>
-                        <a:srgbClr val="000000"/>
-                      </a:solidFill>
-                    </a:lnR>
-                    <a:lnT w="6350" cap="flat" cmpd="sng" algn="ctr">
-                      <a:solidFill>
-                        <a:srgbClr val="000000"/>
-                      </a:solidFill>
-                    </a:lnT>
-                    <a:lnB w="6350" cap="flat" cmpd="sng" algn="ctr">
-                      <a:solidFill>
-                        <a:srgbClr val="000000"/>
-                      </a:solidFill>
-                    </a:lnB>
-                  </a:tcPr>
-                </a:tc>
-              </a:tr>
-              <a:tr h="692070">
-                <a:tc>
-                  <a:txBody>
-                    <a:bodyPr wrap="square"/>
-                    <a:lstStyle/>
-                    <a:p>
-                      <a:pPr algn="ctr">
-                        <a:lnSpc>
-                          <a:spcPct val="100000"/>
-                        </a:lnSpc>
-                        <a:spcBef>
-                          <a:spcPts val="0"/>
-                        </a:spcBef>
-                        <a:spcAft>
-                          <a:spcPts val="0"/>
-                        </a:spcAft>
-                      </a:pPr>
-                      <a:r>
-                        <a:rPr sz="1100" b="0">
-                          <a:solidFill>
-                            <a:srgbClr val="000000"/>
-                          </a:solidFill>
-                          <a:latin typeface="Calibri"/>
-                        </a:rPr>
-                        <a:t>28</a:t>
-                      </a:r>
-                    </a:p>
-                  </a:txBody>
-                  <a:tcPr anchor="ctr" marL="38100" marR="38100" marT="25400" marB="25400">
-                    <a:solidFill>
-                      <a:srgbClr val="FFFFFF"/>
-                    </a:solidFill>
-                    <a:lnL w="6350" cap="flat" cmpd="sng" algn="ctr">
-                      <a:solidFill>
-                        <a:srgbClr val="000000"/>
-                      </a:solidFill>
-                    </a:lnL>
-                    <a:lnR w="6350" cap="flat" cmpd="sng" algn="ctr">
-                      <a:solidFill>
-                        <a:srgbClr val="000000"/>
-                      </a:solidFill>
-                    </a:lnR>
-                    <a:lnT w="6350" cap="flat" cmpd="sng" algn="ctr">
-                      <a:solidFill>
-                        <a:srgbClr val="000000"/>
-                      </a:solidFill>
-                    </a:lnT>
-                    <a:lnB w="6350" cap="flat" cmpd="sng" algn="ctr">
-                      <a:solidFill>
-                        <a:srgbClr val="000000"/>
-                      </a:solidFill>
-                    </a:lnB>
-                  </a:tcPr>
-                </a:tc>
-                <a:tc>
-                  <a:txBody>
-                    <a:bodyPr wrap="square"/>
-                    <a:lstStyle/>
-                    <a:p>
-                      <a:pPr algn="l">
-                        <a:lnSpc>
-                          <a:spcPct val="100000"/>
-                        </a:lnSpc>
-                        <a:spcBef>
-                          <a:spcPts val="0"/>
-                        </a:spcBef>
-                        <a:spcAft>
-                          <a:spcPts val="0"/>
-                        </a:spcAft>
-                      </a:pPr>
-                      <a:r>
-                        <a:rPr sz="1100" b="0">
-                          <a:solidFill>
-                            <a:srgbClr val="77777A"/>
-                          </a:solidFill>
-                          <a:latin typeface="Calibri"/>
-                        </a:rPr>
-                        <a:t>DEFPROD-7774</a:t>
-                      </a:r>
-                    </a:p>
-                  </a:txBody>
-                  <a:tcPr anchor="ctr" marL="38100" marR="38100" marT="25400" marB="25400">
-                    <a:solidFill>
-                      <a:srgbClr val="FFFFFF"/>
-                    </a:solidFill>
-                    <a:lnL w="6350" cap="flat" cmpd="sng" algn="ctr">
-                      <a:solidFill>
-                        <a:srgbClr val="000000"/>
-                      </a:solidFill>
-                    </a:lnL>
-                    <a:lnR w="6350" cap="flat" cmpd="sng" algn="ctr">
-                      <a:solidFill>
-                        <a:srgbClr val="000000"/>
-                      </a:solidFill>
-                    </a:lnR>
-                    <a:lnT w="6350" cap="flat" cmpd="sng" algn="ctr">
-                      <a:solidFill>
-                        <a:srgbClr val="000000"/>
-                      </a:solidFill>
-                    </a:lnT>
-                    <a:lnB w="6350" cap="flat" cmpd="sng" algn="ctr">
-                      <a:solidFill>
-                        <a:srgbClr val="000000"/>
-                      </a:solidFill>
-                    </a:lnB>
-                  </a:tcPr>
-                </a:tc>
-                <a:tc>
-                  <a:txBody>
-                    <a:bodyPr wrap="square"/>
-                    <a:lstStyle/>
-                    <a:p>
-                      <a:pPr algn="l">
-                        <a:lnSpc>
-                          <a:spcPct val="100000"/>
-                        </a:lnSpc>
-                        <a:spcBef>
-                          <a:spcPts val="0"/>
-                        </a:spcBef>
-                        <a:spcAft>
-                          <a:spcPts val="0"/>
-                        </a:spcAft>
-                      </a:pPr>
-                      <a:r>
-                        <a:rPr sz="1100" b="0">
-                          <a:solidFill>
-                            <a:srgbClr val="000000"/>
-                          </a:solidFill>
-                          <a:latin typeface="Calibri"/>
-                        </a:rPr>
-                        <a:t>DEFPROD-7774: Ошибка функциональности - В рамках одной заявки на расходы денежных средств инициатор не должен совпадать с согласующим</a:t>
-                      </a:r>
-                    </a:p>
-                  </a:txBody>
-                  <a:tcPr anchor="ctr" marL="38100" marR="38100" marT="25400" marB="25400">
-                    <a:solidFill>
-                      <a:srgbClr val="FFFFFF"/>
-                    </a:solidFill>
-                    <a:lnL w="6350" cap="flat" cmpd="sng" algn="ctr">
-                      <a:solidFill>
-                        <a:srgbClr val="000000"/>
-                      </a:solidFill>
-                    </a:lnL>
-                    <a:lnR w="6350" cap="flat" cmpd="sng" algn="ctr">
-                      <a:solidFill>
-                        <a:srgbClr val="000000"/>
-                      </a:solidFill>
-                    </a:lnR>
-                    <a:lnT w="6350" cap="flat" cmpd="sng" algn="ctr">
-                      <a:solidFill>
-                        <a:srgbClr val="000000"/>
-                      </a:solidFill>
-                    </a:lnT>
-                    <a:lnB w="6350" cap="flat" cmpd="sng" algn="ctr">
-                      <a:solidFill>
-                        <a:srgbClr val="000000"/>
-                      </a:solidFill>
-                    </a:lnB>
-                  </a:tcPr>
-                </a:tc>
-                <a:tc>
-                  <a:txBody>
-                    <a:bodyPr wrap="square"/>
-                    <a:lstStyle/>
-                    <a:p>
-                      <a:pPr algn="l">
-                        <a:lnSpc>
-                          <a:spcPct val="100000"/>
-                        </a:lnSpc>
-                        <a:spcBef>
-                          <a:spcPts val="0"/>
-                        </a:spcBef>
-                        <a:spcAft>
-                          <a:spcPts val="0"/>
-                        </a:spcAft>
-                      </a:pPr>
-                      <a:r>
-                        <a:rPr sz="1100" b="0">
-                          <a:solidFill>
-                            <a:srgbClr val="000000"/>
-                          </a:solidFill>
-                          <a:latin typeface="Calibri"/>
-                        </a:rPr>
-                        <a:t>Обеспечение соблюдения требований внутреннего контроля. Риск - создание и согласование ЗНО одним лицом без доп контроля</a:t>
-                      </a:r>
-                    </a:p>
-                  </a:txBody>
-                  <a:tcPr anchor="ctr" marL="38100" marR="38100" marT="25400" marB="25400">
-                    <a:solidFill>
-                      <a:srgbClr val="FFFFFF"/>
-                    </a:solidFill>
-                    <a:lnL w="6350" cap="flat" cmpd="sng" algn="ctr">
-                      <a:solidFill>
-                        <a:srgbClr val="000000"/>
-                      </a:solidFill>
-                    </a:lnL>
-                    <a:lnR w="6350" cap="flat" cmpd="sng" algn="ctr">
-                      <a:solidFill>
-                        <a:srgbClr val="000000"/>
-                      </a:solidFill>
-                    </a:lnR>
-                    <a:lnT w="6350" cap="flat" cmpd="sng" algn="ctr">
-                      <a:solidFill>
-                        <a:srgbClr val="000000"/>
-                      </a:solidFill>
-                    </a:lnT>
-                    <a:lnB w="6350" cap="flat" cmpd="sng" algn="ctr">
-                      <a:solidFill>
-                        <a:srgbClr val="000000"/>
-                      </a:solidFill>
-                    </a:lnB>
-                  </a:tcPr>
-                </a:tc>
-                <a:tc>
-                  <a:txBody>
-                    <a:bodyPr wrap="square"/>
-                    <a:lstStyle/>
-                    <a:p>
-                      <a:pPr algn="r">
-                        <a:lnSpc>
-                          <a:spcPct val="100000"/>
-                        </a:lnSpc>
-                        <a:spcBef>
-                          <a:spcPts val="0"/>
-                        </a:spcBef>
-                        <a:spcAft>
-                          <a:spcPts val="0"/>
-                        </a:spcAft>
-                      </a:pPr>
-                      <a:r>
-                        <a:rPr sz="1100" b="0">
-                          <a:solidFill>
-                            <a:srgbClr val="000000"/>
-                          </a:solidFill>
-                          <a:latin typeface="Calibri"/>
-                        </a:rPr>
-                        <a:t>320</a:t>
-                      </a:r>
-                    </a:p>
-                  </a:txBody>
-                  <a:tcPr anchor="ctr" marL="38100" marR="38100" marT="25400" marB="25400">
-                    <a:solidFill>
-                      <a:srgbClr val="FFFFFF"/>
-                    </a:solidFill>
-                    <a:lnL w="6350" cap="flat" cmpd="sng" algn="ctr">
-                      <a:solidFill>
-                        <a:srgbClr val="000000"/>
-                      </a:solidFill>
-                    </a:lnL>
-                    <a:lnR w="6350" cap="flat" cmpd="sng" algn="ctr">
-                      <a:solidFill>
-                        <a:srgbClr val="000000"/>
-                      </a:solidFill>
-                    </a:lnR>
-                    <a:lnT w="6350" cap="flat" cmpd="sng" algn="ctr">
-                      <a:solidFill>
-                        <a:srgbClr val="000000"/>
-                      </a:solidFill>
-                    </a:lnT>
-                    <a:lnB w="6350" cap="flat" cmpd="sng" algn="ctr">
-                      <a:solidFill>
-                        <a:srgbClr val="000000"/>
-                      </a:solidFill>
-                    </a:lnB>
-                  </a:tcPr>
-                </a:tc>
-                <a:tc>
-                  <a:txBody>
-                    <a:bodyPr wrap="square"/>
-                    <a:lstStyle/>
-                    <a:p>
-                      <a:pPr algn="l">
-                        <a:lnSpc>
-                          <a:spcPct val="100000"/>
-                        </a:lnSpc>
-                        <a:spcBef>
-                          <a:spcPts val="0"/>
-                        </a:spcBef>
-                        <a:spcAft>
-                          <a:spcPts val="0"/>
-                        </a:spcAft>
-                      </a:pPr>
-                      <a:r>
-                        <a:rPr sz="1100" b="0">
-                          <a:solidFill>
-                            <a:srgbClr val="000000"/>
-                          </a:solidFill>
-                          <a:latin typeface="Calibri"/>
-                        </a:rPr>
-                        <a:t>34 релиз</a:t>
-                      </a:r>
-                    </a:p>
-                  </a:txBody>
-                  <a:tcPr anchor="ctr" marL="38100" marR="38100" marT="25400" marB="25400">
-                    <a:solidFill>
-                      <a:srgbClr val="FFFFFF"/>
                     </a:solidFill>
                     <a:lnL w="6350" cap="flat" cmpd="sng" algn="ctr">
                       <a:solidFill>
@@ -13818,7 +13179,7 @@
                 </a:solidFill>
                 <a:latin typeface="Verdana"/>
               </a:rPr>
-              <a:t>Дефекты и разработки по Пилоту (5/6)</a:t>
+              <a:t>Дефекты и разработки по Пилоту (5/7)</a:t>
             </a:r>
           </a:p>
         </p:txBody>
@@ -13833,7 +13194,7 @@
         </p:nvGraphicFramePr>
         <p:xfrm>
           <a:off x="533095" y="1030528"/>
-          <a:ext cx="11415367" cy="5583325"/>
+          <a:ext cx="11415367" cy="5583324"/>
         </p:xfrm>
         <a:graphic>
           <a:graphicData uri="http://schemas.openxmlformats.org/drawingml/2006/table">
@@ -14172,7 +13533,7 @@
                   </a:tcPr>
                 </a:tc>
               </a:tr>
-              <a:tr h="692070">
+              <a:tr h="681371">
                 <a:tc>
                   <a:txBody>
                     <a:bodyPr wrap="square"/>
@@ -14196,6 +13557,646 @@
                           </a:solidFill>
                           <a:latin typeface="Calibri"/>
                         </a:rPr>
+                        <a:t>27</a:t>
+                      </a:r>
+                    </a:p>
+                  </a:txBody>
+                  <a:tcPr anchor="ctr" marL="38100" marR="38100" marT="25400" marB="25400">
+                    <a:solidFill>
+                      <a:srgbClr val="FFFFFF"/>
+                    </a:solidFill>
+                    <a:lnL w="6350" cap="flat" cmpd="sng" algn="ctr">
+                      <a:solidFill>
+                        <a:srgbClr val="000000"/>
+                      </a:solidFill>
+                    </a:lnL>
+                    <a:lnR w="6350" cap="flat" cmpd="sng" algn="ctr">
+                      <a:solidFill>
+                        <a:srgbClr val="000000"/>
+                      </a:solidFill>
+                    </a:lnR>
+                    <a:lnT w="6350" cap="flat" cmpd="sng" algn="ctr">
+                      <a:solidFill>
+                        <a:srgbClr val="000000"/>
+                      </a:solidFill>
+                    </a:lnT>
+                    <a:lnB w="6350" cap="flat" cmpd="sng" algn="ctr">
+                      <a:solidFill>
+                        <a:srgbClr val="000000"/>
+                      </a:solidFill>
+                    </a:lnB>
+                  </a:tcPr>
+                </a:tc>
+                <a:tc>
+                  <a:txBody>
+                    <a:bodyPr wrap="square"/>
+                    <a:lstStyle/>
+                    <a:p>
+                      <a:pPr algn="l">
+                        <a:lnSpc>
+                          <a:spcPct val="100000"/>
+                        </a:lnSpc>
+                        <a:spcBef>
+                          <a:spcPts val="0"/>
+                        </a:spcBef>
+                        <a:spcAft>
+                          <a:spcPts val="0"/>
+                        </a:spcAft>
+                      </a:pPr>
+                      <a:r>
+                        <a:rPr sz="1100" b="0">
+                          <a:solidFill>
+                            <a:srgbClr val="77777A"/>
+                          </a:solidFill>
+                          <a:latin typeface="Calibri"/>
+                        </a:rPr>
+                        <a:t>DEFPROD-6703</a:t>
+                      </a:r>
+                    </a:p>
+                  </a:txBody>
+                  <a:tcPr anchor="ctr" marL="38100" marR="38100" marT="25400" marB="25400">
+                    <a:solidFill>
+                      <a:srgbClr val="FFFFFF"/>
+                    </a:solidFill>
+                    <a:lnL w="6350" cap="flat" cmpd="sng" algn="ctr">
+                      <a:solidFill>
+                        <a:srgbClr val="000000"/>
+                      </a:solidFill>
+                    </a:lnL>
+                    <a:lnR w="6350" cap="flat" cmpd="sng" algn="ctr">
+                      <a:solidFill>
+                        <a:srgbClr val="000000"/>
+                      </a:solidFill>
+                    </a:lnR>
+                    <a:lnT w="6350" cap="flat" cmpd="sng" algn="ctr">
+                      <a:solidFill>
+                        <a:srgbClr val="000000"/>
+                      </a:solidFill>
+                    </a:lnT>
+                    <a:lnB w="6350" cap="flat" cmpd="sng" algn="ctr">
+                      <a:solidFill>
+                        <a:srgbClr val="000000"/>
+                      </a:solidFill>
+                    </a:lnB>
+                  </a:tcPr>
+                </a:tc>
+                <a:tc>
+                  <a:txBody>
+                    <a:bodyPr wrap="square"/>
+                    <a:lstStyle/>
+                    <a:p>
+                      <a:pPr algn="l">
+                        <a:lnSpc>
+                          <a:spcPct val="100000"/>
+                        </a:lnSpc>
+                        <a:spcBef>
+                          <a:spcPts val="0"/>
+                        </a:spcBef>
+                        <a:spcAft>
+                          <a:spcPts val="0"/>
+                        </a:spcAft>
+                      </a:pPr>
+                      <a:r>
+                        <a:rPr sz="1100" b="0">
+                          <a:solidFill>
+                            <a:srgbClr val="000000"/>
+                          </a:solidFill>
+                          <a:latin typeface="Calibri"/>
+                        </a:rPr>
+                        <a:t>DEFPROD-6703: Новое требование - АвтоЗНО страны ЕАЭС</a:t>
+                      </a:r>
+                    </a:p>
+                  </a:txBody>
+                  <a:tcPr anchor="ctr" marL="38100" marR="38100" marT="25400" marB="25400">
+                    <a:solidFill>
+                      <a:srgbClr val="FFFFFF"/>
+                    </a:solidFill>
+                    <a:lnL w="6350" cap="flat" cmpd="sng" algn="ctr">
+                      <a:solidFill>
+                        <a:srgbClr val="000000"/>
+                      </a:solidFill>
+                    </a:lnL>
+                    <a:lnR w="6350" cap="flat" cmpd="sng" algn="ctr">
+                      <a:solidFill>
+                        <a:srgbClr val="000000"/>
+                      </a:solidFill>
+                    </a:lnR>
+                    <a:lnT w="6350" cap="flat" cmpd="sng" algn="ctr">
+                      <a:solidFill>
+                        <a:srgbClr val="000000"/>
+                      </a:solidFill>
+                    </a:lnT>
+                    <a:lnB w="6350" cap="flat" cmpd="sng" algn="ctr">
+                      <a:solidFill>
+                        <a:srgbClr val="000000"/>
+                      </a:solidFill>
+                    </a:lnB>
+                  </a:tcPr>
+                </a:tc>
+                <a:tc>
+                  <a:txBody>
+                    <a:bodyPr wrap="square"/>
+                    <a:lstStyle/>
+                    <a:p>
+                      <a:pPr algn="l">
+                        <a:lnSpc>
+                          <a:spcPct val="100000"/>
+                        </a:lnSpc>
+                        <a:spcBef>
+                          <a:spcPts val="0"/>
+                        </a:spcBef>
+                        <a:spcAft>
+                          <a:spcPts val="0"/>
+                        </a:spcAft>
+                      </a:pPr>
+                      <a:r>
+                        <a:rPr sz="1100" b="0">
+                          <a:solidFill>
+                            <a:srgbClr val="000000"/>
+                          </a:solidFill>
+                          <a:latin typeface="Calibri"/>
+                        </a:rPr>
+                        <a:t>Расширение категорий для автоЗНО, уменьшение ручного труда на создание ЗНО</a:t>
+                      </a:r>
+                    </a:p>
+                  </a:txBody>
+                  <a:tcPr anchor="ctr" marL="38100" marR="38100" marT="25400" marB="25400">
+                    <a:solidFill>
+                      <a:srgbClr val="FFFFFF"/>
+                    </a:solidFill>
+                    <a:lnL w="6350" cap="flat" cmpd="sng" algn="ctr">
+                      <a:solidFill>
+                        <a:srgbClr val="000000"/>
+                      </a:solidFill>
+                    </a:lnL>
+                    <a:lnR w="6350" cap="flat" cmpd="sng" algn="ctr">
+                      <a:solidFill>
+                        <a:srgbClr val="000000"/>
+                      </a:solidFill>
+                    </a:lnR>
+                    <a:lnT w="6350" cap="flat" cmpd="sng" algn="ctr">
+                      <a:solidFill>
+                        <a:srgbClr val="000000"/>
+                      </a:solidFill>
+                    </a:lnT>
+                    <a:lnB w="6350" cap="flat" cmpd="sng" algn="ctr">
+                      <a:solidFill>
+                        <a:srgbClr val="000000"/>
+                      </a:solidFill>
+                    </a:lnB>
+                  </a:tcPr>
+                </a:tc>
+                <a:tc>
+                  <a:txBody>
+                    <a:bodyPr wrap="square"/>
+                    <a:lstStyle/>
+                    <a:p>
+                      <a:pPr algn="r">
+                        <a:lnSpc>
+                          <a:spcPct val="100000"/>
+                        </a:lnSpc>
+                        <a:spcBef>
+                          <a:spcPts val="0"/>
+                        </a:spcBef>
+                        <a:spcAft>
+                          <a:spcPts val="0"/>
+                        </a:spcAft>
+                      </a:pPr>
+                      <a:r>
+                        <a:rPr sz="1100" b="0">
+                          <a:solidFill>
+                            <a:srgbClr val="000000"/>
+                          </a:solidFill>
+                          <a:latin typeface="Calibri"/>
+                        </a:rPr>
+                        <a:t>160</a:t>
+                      </a:r>
+                    </a:p>
+                  </a:txBody>
+                  <a:tcPr anchor="ctr" marL="38100" marR="38100" marT="25400" marB="25400">
+                    <a:solidFill>
+                      <a:srgbClr val="FFFFFF"/>
+                    </a:solidFill>
+                    <a:lnL w="6350" cap="flat" cmpd="sng" algn="ctr">
+                      <a:solidFill>
+                        <a:srgbClr val="000000"/>
+                      </a:solidFill>
+                    </a:lnL>
+                    <a:lnR w="6350" cap="flat" cmpd="sng" algn="ctr">
+                      <a:solidFill>
+                        <a:srgbClr val="000000"/>
+                      </a:solidFill>
+                    </a:lnR>
+                    <a:lnT w="6350" cap="flat" cmpd="sng" algn="ctr">
+                      <a:solidFill>
+                        <a:srgbClr val="000000"/>
+                      </a:solidFill>
+                    </a:lnT>
+                    <a:lnB w="6350" cap="flat" cmpd="sng" algn="ctr">
+                      <a:solidFill>
+                        <a:srgbClr val="000000"/>
+                      </a:solidFill>
+                    </a:lnB>
+                  </a:tcPr>
+                </a:tc>
+                <a:tc>
+                  <a:txBody>
+                    <a:bodyPr wrap="square"/>
+                    <a:lstStyle/>
+                    <a:p>
+                      <a:pPr algn="l">
+                        <a:lnSpc>
+                          <a:spcPct val="100000"/>
+                        </a:lnSpc>
+                        <a:spcBef>
+                          <a:spcPts val="0"/>
+                        </a:spcBef>
+                        <a:spcAft>
+                          <a:spcPts val="0"/>
+                        </a:spcAft>
+                      </a:pPr>
+                      <a:r>
+                        <a:rPr sz="1100" b="0">
+                          <a:solidFill>
+                            <a:srgbClr val="000000"/>
+                          </a:solidFill>
+                          <a:latin typeface="Calibri"/>
+                        </a:rPr>
+                        <a:t>34 релиз</a:t>
+                      </a:r>
+                    </a:p>
+                  </a:txBody>
+                  <a:tcPr anchor="ctr" marL="38100" marR="38100" marT="25400" marB="25400">
+                    <a:solidFill>
+                      <a:srgbClr val="FFFFFF"/>
+                    </a:solidFill>
+                    <a:lnL w="6350" cap="flat" cmpd="sng" algn="ctr">
+                      <a:solidFill>
+                        <a:srgbClr val="000000"/>
+                      </a:solidFill>
+                    </a:lnL>
+                    <a:lnR w="6350" cap="flat" cmpd="sng" algn="ctr">
+                      <a:solidFill>
+                        <a:srgbClr val="000000"/>
+                      </a:solidFill>
+                    </a:lnR>
+                    <a:lnT w="6350" cap="flat" cmpd="sng" algn="ctr">
+                      <a:solidFill>
+                        <a:srgbClr val="000000"/>
+                      </a:solidFill>
+                    </a:lnT>
+                    <a:lnB w="6350" cap="flat" cmpd="sng" algn="ctr">
+                      <a:solidFill>
+                        <a:srgbClr val="000000"/>
+                      </a:solidFill>
+                    </a:lnB>
+                  </a:tcPr>
+                </a:tc>
+              </a:tr>
+              <a:tr h="718817">
+                <a:tc>
+                  <a:txBody>
+                    <a:bodyPr wrap="square"/>
+                    <a:lstStyle/>
+                    <a:p>
+                      <a:pPr algn="ctr">
+                        <a:lnSpc>
+                          <a:spcPct val="100000"/>
+                        </a:lnSpc>
+                        <a:spcBef>
+                          <a:spcPts val="0"/>
+                        </a:spcBef>
+                        <a:spcAft>
+                          <a:spcPts val="0"/>
+                        </a:spcAft>
+                      </a:pPr>
+                      <a:r>
+                        <a:rPr sz="1100" b="0">
+                          <a:solidFill>
+                            <a:srgbClr val="000000"/>
+                          </a:solidFill>
+                          <a:latin typeface="Calibri"/>
+                        </a:rPr>
+                        <a:t>28</a:t>
+                      </a:r>
+                    </a:p>
+                  </a:txBody>
+                  <a:tcPr anchor="ctr" marL="38100" marR="38100" marT="25400" marB="25400">
+                    <a:solidFill>
+                      <a:srgbClr val="F8E7E8"/>
+                    </a:solidFill>
+                    <a:lnL w="6350" cap="flat" cmpd="sng" algn="ctr">
+                      <a:solidFill>
+                        <a:srgbClr val="000000"/>
+                      </a:solidFill>
+                    </a:lnL>
+                    <a:lnR w="6350" cap="flat" cmpd="sng" algn="ctr">
+                      <a:solidFill>
+                        <a:srgbClr val="000000"/>
+                      </a:solidFill>
+                    </a:lnR>
+                    <a:lnT w="6350" cap="flat" cmpd="sng" algn="ctr">
+                      <a:solidFill>
+                        <a:srgbClr val="000000"/>
+                      </a:solidFill>
+                    </a:lnT>
+                    <a:lnB w="6350" cap="flat" cmpd="sng" algn="ctr">
+                      <a:solidFill>
+                        <a:srgbClr val="000000"/>
+                      </a:solidFill>
+                    </a:lnB>
+                  </a:tcPr>
+                </a:tc>
+                <a:tc>
+                  <a:txBody>
+                    <a:bodyPr wrap="square"/>
+                    <a:lstStyle/>
+                    <a:p>
+                      <a:pPr algn="l">
+                        <a:lnSpc>
+                          <a:spcPct val="100000"/>
+                        </a:lnSpc>
+                        <a:spcBef>
+                          <a:spcPts val="0"/>
+                        </a:spcBef>
+                        <a:spcAft>
+                          <a:spcPts val="0"/>
+                        </a:spcAft>
+                      </a:pPr>
+                      <a:r>
+                        <a:rPr sz="1100" b="0">
+                          <a:solidFill>
+                            <a:srgbClr val="77777A"/>
+                          </a:solidFill>
+                          <a:latin typeface="Calibri"/>
+                        </a:rPr>
+                        <a:t>DEFPROD-7774</a:t>
+                      </a:r>
+                    </a:p>
+                  </a:txBody>
+                  <a:tcPr anchor="ctr" marL="38100" marR="38100" marT="25400" marB="25400">
+                    <a:solidFill>
+                      <a:srgbClr val="F8E7E8"/>
+                    </a:solidFill>
+                    <a:lnL w="6350" cap="flat" cmpd="sng" algn="ctr">
+                      <a:solidFill>
+                        <a:srgbClr val="000000"/>
+                      </a:solidFill>
+                    </a:lnL>
+                    <a:lnR w="6350" cap="flat" cmpd="sng" algn="ctr">
+                      <a:solidFill>
+                        <a:srgbClr val="000000"/>
+                      </a:solidFill>
+                    </a:lnR>
+                    <a:lnT w="6350" cap="flat" cmpd="sng" algn="ctr">
+                      <a:solidFill>
+                        <a:srgbClr val="000000"/>
+                      </a:solidFill>
+                    </a:lnT>
+                    <a:lnB w="6350" cap="flat" cmpd="sng" algn="ctr">
+                      <a:solidFill>
+                        <a:srgbClr val="000000"/>
+                      </a:solidFill>
+                    </a:lnB>
+                  </a:tcPr>
+                </a:tc>
+                <a:tc>
+                  <a:txBody>
+                    <a:bodyPr wrap="square"/>
+                    <a:lstStyle/>
+                    <a:p>
+                      <a:pPr algn="l">
+                        <a:lnSpc>
+                          <a:spcPct val="100000"/>
+                        </a:lnSpc>
+                        <a:spcBef>
+                          <a:spcPts val="0"/>
+                        </a:spcBef>
+                        <a:spcAft>
+                          <a:spcPts val="0"/>
+                        </a:spcAft>
+                      </a:pPr>
+                      <a:r>
+                        <a:rPr sz="1100" b="0">
+                          <a:solidFill>
+                            <a:srgbClr val="000000"/>
+                          </a:solidFill>
+                          <a:latin typeface="Calibri"/>
+                        </a:rPr>
+                        <a:t>DEFPROD-7774: Ошибка функциональности - В рамках одной заявки на расходы денежных средств инициатор не должен совпадать с согласующим</a:t>
+                      </a:r>
+                    </a:p>
+                  </a:txBody>
+                  <a:tcPr anchor="ctr" marL="38100" marR="38100" marT="25400" marB="25400">
+                    <a:solidFill>
+                      <a:srgbClr val="F8E7E8"/>
+                    </a:solidFill>
+                    <a:lnL w="6350" cap="flat" cmpd="sng" algn="ctr">
+                      <a:solidFill>
+                        <a:srgbClr val="000000"/>
+                      </a:solidFill>
+                    </a:lnL>
+                    <a:lnR w="6350" cap="flat" cmpd="sng" algn="ctr">
+                      <a:solidFill>
+                        <a:srgbClr val="000000"/>
+                      </a:solidFill>
+                    </a:lnR>
+                    <a:lnT w="6350" cap="flat" cmpd="sng" algn="ctr">
+                      <a:solidFill>
+                        <a:srgbClr val="000000"/>
+                      </a:solidFill>
+                    </a:lnT>
+                    <a:lnB w="6350" cap="flat" cmpd="sng" algn="ctr">
+                      <a:solidFill>
+                        <a:srgbClr val="000000"/>
+                      </a:solidFill>
+                    </a:lnB>
+                  </a:tcPr>
+                </a:tc>
+                <a:tc>
+                  <a:txBody>
+                    <a:bodyPr wrap="square"/>
+                    <a:lstStyle/>
+                    <a:p>
+                      <a:pPr algn="l">
+                        <a:lnSpc>
+                          <a:spcPct val="100000"/>
+                        </a:lnSpc>
+                        <a:spcBef>
+                          <a:spcPts val="0"/>
+                        </a:spcBef>
+                        <a:spcAft>
+                          <a:spcPts val="0"/>
+                        </a:spcAft>
+                      </a:pPr>
+                      <a:r>
+                        <a:rPr sz="1100" b="0">
+                          <a:solidFill>
+                            <a:srgbClr val="000000"/>
+                          </a:solidFill>
+                          <a:latin typeface="Calibri"/>
+                        </a:rPr>
+                        <a:t>Обеспечение соблюдения требований внутреннего контроля. Риск - создание и согласование ЗНО одним лицом без доп контроля</a:t>
+                      </a:r>
+                    </a:p>
+                  </a:txBody>
+                  <a:tcPr anchor="ctr" marL="38100" marR="38100" marT="25400" marB="25400">
+                    <a:solidFill>
+                      <a:srgbClr val="F8E7E8"/>
+                    </a:solidFill>
+                    <a:lnL w="6350" cap="flat" cmpd="sng" algn="ctr">
+                      <a:solidFill>
+                        <a:srgbClr val="000000"/>
+                      </a:solidFill>
+                    </a:lnL>
+                    <a:lnR w="6350" cap="flat" cmpd="sng" algn="ctr">
+                      <a:solidFill>
+                        <a:srgbClr val="000000"/>
+                      </a:solidFill>
+                    </a:lnR>
+                    <a:lnT w="6350" cap="flat" cmpd="sng" algn="ctr">
+                      <a:solidFill>
+                        <a:srgbClr val="000000"/>
+                      </a:solidFill>
+                    </a:lnT>
+                    <a:lnB w="6350" cap="flat" cmpd="sng" algn="ctr">
+                      <a:solidFill>
+                        <a:srgbClr val="000000"/>
+                      </a:solidFill>
+                    </a:lnB>
+                  </a:tcPr>
+                </a:tc>
+                <a:tc>
+                  <a:txBody>
+                    <a:bodyPr wrap="square"/>
+                    <a:lstStyle/>
+                    <a:p>
+                      <a:pPr algn="r">
+                        <a:lnSpc>
+                          <a:spcPct val="100000"/>
+                        </a:lnSpc>
+                        <a:spcBef>
+                          <a:spcPts val="0"/>
+                        </a:spcBef>
+                        <a:spcAft>
+                          <a:spcPts val="0"/>
+                        </a:spcAft>
+                      </a:pPr>
+                      <a:r>
+                        <a:rPr sz="1100" b="0">
+                          <a:solidFill>
+                            <a:srgbClr val="000000"/>
+                          </a:solidFill>
+                          <a:latin typeface="Calibri"/>
+                        </a:rPr>
+                        <a:t>320</a:t>
+                      </a:r>
+                    </a:p>
+                  </a:txBody>
+                  <a:tcPr anchor="ctr" marL="38100" marR="38100" marT="25400" marB="25400">
+                    <a:solidFill>
+                      <a:srgbClr val="F8E7E8"/>
+                    </a:solidFill>
+                    <a:lnL w="6350" cap="flat" cmpd="sng" algn="ctr">
+                      <a:solidFill>
+                        <a:srgbClr val="000000"/>
+                      </a:solidFill>
+                    </a:lnL>
+                    <a:lnR w="6350" cap="flat" cmpd="sng" algn="ctr">
+                      <a:solidFill>
+                        <a:srgbClr val="000000"/>
+                      </a:solidFill>
+                    </a:lnR>
+                    <a:lnT w="6350" cap="flat" cmpd="sng" algn="ctr">
+                      <a:solidFill>
+                        <a:srgbClr val="000000"/>
+                      </a:solidFill>
+                    </a:lnT>
+                    <a:lnB w="6350" cap="flat" cmpd="sng" algn="ctr">
+                      <a:solidFill>
+                        <a:srgbClr val="000000"/>
+                      </a:solidFill>
+                    </a:lnB>
+                  </a:tcPr>
+                </a:tc>
+                <a:tc>
+                  <a:txBody>
+                    <a:bodyPr wrap="square"/>
+                    <a:lstStyle/>
+                    <a:p>
+                      <a:pPr algn="l">
+                        <a:lnSpc>
+                          <a:spcPct val="100000"/>
+                        </a:lnSpc>
+                        <a:spcBef>
+                          <a:spcPts val="0"/>
+                        </a:spcBef>
+                        <a:spcAft>
+                          <a:spcPts val="0"/>
+                        </a:spcAft>
+                      </a:pPr>
+                      <a:r>
+                        <a:rPr sz="1100" b="0">
+                          <a:solidFill>
+                            <a:srgbClr val="000000"/>
+                          </a:solidFill>
+                          <a:latin typeface="Calibri"/>
+                        </a:rPr>
+                        <a:t>34 релиз</a:t>
+                      </a:r>
+                    </a:p>
+                  </a:txBody>
+                  <a:tcPr anchor="ctr" marL="38100" marR="38100" marT="25400" marB="25400">
+                    <a:solidFill>
+                      <a:srgbClr val="F8E7E8"/>
+                    </a:solidFill>
+                    <a:lnL w="6350" cap="flat" cmpd="sng" algn="ctr">
+                      <a:solidFill>
+                        <a:srgbClr val="000000"/>
+                      </a:solidFill>
+                    </a:lnL>
+                    <a:lnR w="6350" cap="flat" cmpd="sng" algn="ctr">
+                      <a:solidFill>
+                        <a:srgbClr val="000000"/>
+                      </a:solidFill>
+                    </a:lnR>
+                    <a:lnT w="6350" cap="flat" cmpd="sng" algn="ctr">
+                      <a:solidFill>
+                        <a:srgbClr val="000000"/>
+                      </a:solidFill>
+                    </a:lnT>
+                    <a:lnB w="6350" cap="flat" cmpd="sng" algn="ctr">
+                      <a:solidFill>
+                        <a:srgbClr val="000000"/>
+                      </a:solidFill>
+                    </a:lnB>
+                  </a:tcPr>
+                </a:tc>
+              </a:tr>
+              <a:tr h="681371">
+                <a:tc>
+                  <a:txBody>
+                    <a:bodyPr wrap="square"/>
+                    <a:lstStyle/>
+                    <a:p>
+                      <a:pPr algn="ctr">
+                        <a:lnSpc>
+                          <a:spcPct val="100000"/>
+                        </a:lnSpc>
+                        <a:spcBef>
+                          <a:spcPts val="0"/>
+                        </a:spcBef>
+                        <a:spcAft>
+                          <a:spcPts val="0"/>
+                        </a:spcAft>
+                      </a:pPr>
+                      <a:r>
+                        <a:rPr sz="1100" b="0">
+                          <a:solidFill>
+                            <a:srgbClr val="000000"/>
+                          </a:solidFill>
+                          <a:latin typeface="Calibri"/>
+                        </a:rPr>
                         <a:t>29</a:t>
                       </a:r>
                     </a:p>
@@ -14492,7 +14493,7 @@
                   </a:tcPr>
                 </a:tc>
               </a:tr>
-              <a:tr h="692070">
+              <a:tr h="681371">
                 <a:tc>
                   <a:txBody>
                     <a:bodyPr wrap="square"/>
@@ -14812,7 +14813,7 @@
                   </a:tcPr>
                 </a:tc>
               </a:tr>
-              <a:tr h="692070">
+              <a:tr h="681371">
                 <a:tc>
                   <a:txBody>
                     <a:bodyPr wrap="square"/>
@@ -15132,7 +15133,7 @@
                   </a:tcPr>
                 </a:tc>
               </a:tr>
-              <a:tr h="692070">
+              <a:tr h="681371">
                 <a:tc>
                   <a:txBody>
                     <a:bodyPr wrap="square"/>
@@ -15452,7 +15453,7 @@
                   </a:tcPr>
                 </a:tc>
               </a:tr>
-              <a:tr h="692070">
+              <a:tr h="718817">
                 <a:tc>
                   <a:txBody>
                     <a:bodyPr wrap="square"/>
@@ -15742,646 +15743,6 @@
                           <a:latin typeface="Calibri"/>
                         </a:rPr>
                         <a:t>34 релиз</a:t>
-                      </a:r>
-                    </a:p>
-                  </a:txBody>
-                  <a:tcPr anchor="ctr" marL="38100" marR="38100" marT="25400" marB="25400">
-                    <a:solidFill>
-                      <a:srgbClr val="FFFFFF"/>
-                    </a:solidFill>
-                    <a:lnL w="6350" cap="flat" cmpd="sng" algn="ctr">
-                      <a:solidFill>
-                        <a:srgbClr val="000000"/>
-                      </a:solidFill>
-                    </a:lnL>
-                    <a:lnR w="6350" cap="flat" cmpd="sng" algn="ctr">
-                      <a:solidFill>
-                        <a:srgbClr val="000000"/>
-                      </a:solidFill>
-                    </a:lnR>
-                    <a:lnT w="6350" cap="flat" cmpd="sng" algn="ctr">
-                      <a:solidFill>
-                        <a:srgbClr val="000000"/>
-                      </a:solidFill>
-                    </a:lnT>
-                    <a:lnB w="6350" cap="flat" cmpd="sng" algn="ctr">
-                      <a:solidFill>
-                        <a:srgbClr val="000000"/>
-                      </a:solidFill>
-                    </a:lnB>
-                  </a:tcPr>
-                </a:tc>
-              </a:tr>
-              <a:tr h="692070">
-                <a:tc>
-                  <a:txBody>
-                    <a:bodyPr wrap="square"/>
-                    <a:lstStyle/>
-                    <a:p>
-                      <a:pPr algn="ctr">
-                        <a:lnSpc>
-                          <a:spcPct val="100000"/>
-                        </a:lnSpc>
-                        <a:spcBef>
-                          <a:spcPts val="0"/>
-                        </a:spcBef>
-                        <a:spcAft>
-                          <a:spcPts val="0"/>
-                        </a:spcAft>
-                      </a:pPr>
-                      <a:r>
-                        <a:rPr sz="1100" b="0">
-                          <a:solidFill>
-                            <a:srgbClr val="000000"/>
-                          </a:solidFill>
-                          <a:latin typeface="Calibri"/>
-                        </a:rPr>
-                        <a:t>34</a:t>
-                      </a:r>
-                    </a:p>
-                  </a:txBody>
-                  <a:tcPr anchor="ctr" marL="38100" marR="38100" marT="25400" marB="25400">
-                    <a:solidFill>
-                      <a:srgbClr val="F8E7E8"/>
-                    </a:solidFill>
-                    <a:lnL w="6350" cap="flat" cmpd="sng" algn="ctr">
-                      <a:solidFill>
-                        <a:srgbClr val="000000"/>
-                      </a:solidFill>
-                    </a:lnL>
-                    <a:lnR w="6350" cap="flat" cmpd="sng" algn="ctr">
-                      <a:solidFill>
-                        <a:srgbClr val="000000"/>
-                      </a:solidFill>
-                    </a:lnR>
-                    <a:lnT w="6350" cap="flat" cmpd="sng" algn="ctr">
-                      <a:solidFill>
-                        <a:srgbClr val="000000"/>
-                      </a:solidFill>
-                    </a:lnT>
-                    <a:lnB w="6350" cap="flat" cmpd="sng" algn="ctr">
-                      <a:solidFill>
-                        <a:srgbClr val="000000"/>
-                      </a:solidFill>
-                    </a:lnB>
-                  </a:tcPr>
-                </a:tc>
-                <a:tc>
-                  <a:txBody>
-                    <a:bodyPr wrap="square"/>
-                    <a:lstStyle/>
-                    <a:p>
-                      <a:pPr algn="l">
-                        <a:lnSpc>
-                          <a:spcPct val="100000"/>
-                        </a:lnSpc>
-                        <a:spcBef>
-                          <a:spcPts val="0"/>
-                        </a:spcBef>
-                        <a:spcAft>
-                          <a:spcPts val="0"/>
-                        </a:spcAft>
-                      </a:pPr>
-                      <a:r>
-                        <a:rPr sz="1100" b="0">
-                          <a:solidFill>
-                            <a:srgbClr val="77777A"/>
-                          </a:solidFill>
-                          <a:latin typeface="Calibri"/>
-                        </a:rPr>
-                        <a:t>DEFPROD-10282</a:t>
-                      </a:r>
-                    </a:p>
-                  </a:txBody>
-                  <a:tcPr anchor="ctr" marL="38100" marR="38100" marT="25400" marB="25400">
-                    <a:solidFill>
-                      <a:srgbClr val="F8E7E8"/>
-                    </a:solidFill>
-                    <a:lnL w="6350" cap="flat" cmpd="sng" algn="ctr">
-                      <a:solidFill>
-                        <a:srgbClr val="000000"/>
-                      </a:solidFill>
-                    </a:lnL>
-                    <a:lnR w="6350" cap="flat" cmpd="sng" algn="ctr">
-                      <a:solidFill>
-                        <a:srgbClr val="000000"/>
-                      </a:solidFill>
-                    </a:lnR>
-                    <a:lnT w="6350" cap="flat" cmpd="sng" algn="ctr">
-                      <a:solidFill>
-                        <a:srgbClr val="000000"/>
-                      </a:solidFill>
-                    </a:lnT>
-                    <a:lnB w="6350" cap="flat" cmpd="sng" algn="ctr">
-                      <a:solidFill>
-                        <a:srgbClr val="000000"/>
-                      </a:solidFill>
-                    </a:lnB>
-                  </a:tcPr>
-                </a:tc>
-                <a:tc>
-                  <a:txBody>
-                    <a:bodyPr wrap="square"/>
-                    <a:lstStyle/>
-                    <a:p>
-                      <a:pPr algn="l">
-                        <a:lnSpc>
-                          <a:spcPct val="100000"/>
-                        </a:lnSpc>
-                        <a:spcBef>
-                          <a:spcPts val="0"/>
-                        </a:spcBef>
-                        <a:spcAft>
-                          <a:spcPts val="0"/>
-                        </a:spcAft>
-                      </a:pPr>
-                      <a:r>
-                        <a:rPr sz="1100" b="0">
-                          <a:solidFill>
-                            <a:srgbClr val="000000"/>
-                          </a:solidFill>
-                          <a:latin typeface="Calibri"/>
-                        </a:rPr>
-                        <a:t>DEFPROD-10282: Ошибка функциональности - Добавить отбор при выборе БС контрагентов в документе заявка на оплату</a:t>
-                      </a:r>
-                    </a:p>
-                  </a:txBody>
-                  <a:tcPr anchor="ctr" marL="38100" marR="38100" marT="25400" marB="25400">
-                    <a:solidFill>
-                      <a:srgbClr val="F8E7E8"/>
-                    </a:solidFill>
-                    <a:lnL w="6350" cap="flat" cmpd="sng" algn="ctr">
-                      <a:solidFill>
-                        <a:srgbClr val="000000"/>
-                      </a:solidFill>
-                    </a:lnL>
-                    <a:lnR w="6350" cap="flat" cmpd="sng" algn="ctr">
-                      <a:solidFill>
-                        <a:srgbClr val="000000"/>
-                      </a:solidFill>
-                    </a:lnR>
-                    <a:lnT w="6350" cap="flat" cmpd="sng" algn="ctr">
-                      <a:solidFill>
-                        <a:srgbClr val="000000"/>
-                      </a:solidFill>
-                    </a:lnT>
-                    <a:lnB w="6350" cap="flat" cmpd="sng" algn="ctr">
-                      <a:solidFill>
-                        <a:srgbClr val="000000"/>
-                      </a:solidFill>
-                    </a:lnB>
-                  </a:tcPr>
-                </a:tc>
-                <a:tc>
-                  <a:txBody>
-                    <a:bodyPr wrap="square"/>
-                    <a:lstStyle/>
-                    <a:p>
-                      <a:pPr algn="l">
-                        <a:lnSpc>
-                          <a:spcPct val="100000"/>
-                        </a:lnSpc>
-                        <a:spcBef>
-                          <a:spcPts val="0"/>
-                        </a:spcBef>
-                        <a:spcAft>
-                          <a:spcPts val="0"/>
-                        </a:spcAft>
-                      </a:pPr>
-                      <a:r>
-                        <a:rPr sz="1100" b="0">
-                          <a:solidFill>
-                            <a:srgbClr val="000000"/>
-                          </a:solidFill>
-                          <a:latin typeface="Calibri"/>
-                        </a:rPr>
-                        <a:t>Снимет риск по выбору закрытого счета</a:t>
-                      </a:r>
-                    </a:p>
-                  </a:txBody>
-                  <a:tcPr anchor="ctr" marL="38100" marR="38100" marT="25400" marB="25400">
-                    <a:solidFill>
-                      <a:srgbClr val="F8E7E8"/>
-                    </a:solidFill>
-                    <a:lnL w="6350" cap="flat" cmpd="sng" algn="ctr">
-                      <a:solidFill>
-                        <a:srgbClr val="000000"/>
-                      </a:solidFill>
-                    </a:lnL>
-                    <a:lnR w="6350" cap="flat" cmpd="sng" algn="ctr">
-                      <a:solidFill>
-                        <a:srgbClr val="000000"/>
-                      </a:solidFill>
-                    </a:lnR>
-                    <a:lnT w="6350" cap="flat" cmpd="sng" algn="ctr">
-                      <a:solidFill>
-                        <a:srgbClr val="000000"/>
-                      </a:solidFill>
-                    </a:lnT>
-                    <a:lnB w="6350" cap="flat" cmpd="sng" algn="ctr">
-                      <a:solidFill>
-                        <a:srgbClr val="000000"/>
-                      </a:solidFill>
-                    </a:lnB>
-                  </a:tcPr>
-                </a:tc>
-                <a:tc>
-                  <a:txBody>
-                    <a:bodyPr wrap="square"/>
-                    <a:lstStyle/>
-                    <a:p>
-                      <a:pPr algn="r">
-                        <a:lnSpc>
-                          <a:spcPct val="100000"/>
-                        </a:lnSpc>
-                        <a:spcBef>
-                          <a:spcPts val="0"/>
-                        </a:spcBef>
-                        <a:spcAft>
-                          <a:spcPts val="0"/>
-                        </a:spcAft>
-                      </a:pPr>
-                      <a:r>
-                        <a:rPr sz="1100" b="0">
-                          <a:solidFill>
-                            <a:srgbClr val="000000"/>
-                          </a:solidFill>
-                          <a:latin typeface="Calibri"/>
-                        </a:rPr>
-                        <a:t>80</a:t>
-                      </a:r>
-                    </a:p>
-                  </a:txBody>
-                  <a:tcPr anchor="ctr" marL="38100" marR="38100" marT="25400" marB="25400">
-                    <a:solidFill>
-                      <a:srgbClr val="F8E7E8"/>
-                    </a:solidFill>
-                    <a:lnL w="6350" cap="flat" cmpd="sng" algn="ctr">
-                      <a:solidFill>
-                        <a:srgbClr val="000000"/>
-                      </a:solidFill>
-                    </a:lnL>
-                    <a:lnR w="6350" cap="flat" cmpd="sng" algn="ctr">
-                      <a:solidFill>
-                        <a:srgbClr val="000000"/>
-                      </a:solidFill>
-                    </a:lnR>
-                    <a:lnT w="6350" cap="flat" cmpd="sng" algn="ctr">
-                      <a:solidFill>
-                        <a:srgbClr val="000000"/>
-                      </a:solidFill>
-                    </a:lnT>
-                    <a:lnB w="6350" cap="flat" cmpd="sng" algn="ctr">
-                      <a:solidFill>
-                        <a:srgbClr val="000000"/>
-                      </a:solidFill>
-                    </a:lnB>
-                  </a:tcPr>
-                </a:tc>
-                <a:tc>
-                  <a:txBody>
-                    <a:bodyPr wrap="square"/>
-                    <a:lstStyle/>
-                    <a:p>
-                      <a:pPr algn="l">
-                        <a:lnSpc>
-                          <a:spcPct val="100000"/>
-                        </a:lnSpc>
-                        <a:spcBef>
-                          <a:spcPts val="0"/>
-                        </a:spcBef>
-                        <a:spcAft>
-                          <a:spcPts val="0"/>
-                        </a:spcAft>
-                      </a:pPr>
-                      <a:r>
-                        <a:rPr sz="1100" b="0">
-                          <a:solidFill>
-                            <a:srgbClr val="000000"/>
-                          </a:solidFill>
-                          <a:latin typeface="Calibri"/>
-                        </a:rPr>
-                        <a:t>33 релиз</a:t>
-                      </a:r>
-                    </a:p>
-                  </a:txBody>
-                  <a:tcPr anchor="ctr" marL="38100" marR="38100" marT="25400" marB="25400">
-                    <a:solidFill>
-                      <a:srgbClr val="F8E7E8"/>
-                    </a:solidFill>
-                    <a:lnL w="6350" cap="flat" cmpd="sng" algn="ctr">
-                      <a:solidFill>
-                        <a:srgbClr val="000000"/>
-                      </a:solidFill>
-                    </a:lnL>
-                    <a:lnR w="6350" cap="flat" cmpd="sng" algn="ctr">
-                      <a:solidFill>
-                        <a:srgbClr val="000000"/>
-                      </a:solidFill>
-                    </a:lnR>
-                    <a:lnT w="6350" cap="flat" cmpd="sng" algn="ctr">
-                      <a:solidFill>
-                        <a:srgbClr val="000000"/>
-                      </a:solidFill>
-                    </a:lnT>
-                    <a:lnB w="6350" cap="flat" cmpd="sng" algn="ctr">
-                      <a:solidFill>
-                        <a:srgbClr val="000000"/>
-                      </a:solidFill>
-                    </a:lnB>
-                  </a:tcPr>
-                </a:tc>
-              </a:tr>
-              <a:tr h="692070">
-                <a:tc>
-                  <a:txBody>
-                    <a:bodyPr wrap="square"/>
-                    <a:lstStyle/>
-                    <a:p>
-                      <a:pPr algn="ctr">
-                        <a:lnSpc>
-                          <a:spcPct val="100000"/>
-                        </a:lnSpc>
-                        <a:spcBef>
-                          <a:spcPts val="0"/>
-                        </a:spcBef>
-                        <a:spcAft>
-                          <a:spcPts val="0"/>
-                        </a:spcAft>
-                      </a:pPr>
-                      <a:r>
-                        <a:rPr sz="1100" b="0">
-                          <a:solidFill>
-                            <a:srgbClr val="000000"/>
-                          </a:solidFill>
-                          <a:latin typeface="Calibri"/>
-                        </a:rPr>
-                        <a:t>35</a:t>
-                      </a:r>
-                    </a:p>
-                  </a:txBody>
-                  <a:tcPr anchor="ctr" marL="38100" marR="38100" marT="25400" marB="25400">
-                    <a:solidFill>
-                      <a:srgbClr val="FFFFFF"/>
-                    </a:solidFill>
-                    <a:lnL w="6350" cap="flat" cmpd="sng" algn="ctr">
-                      <a:solidFill>
-                        <a:srgbClr val="000000"/>
-                      </a:solidFill>
-                    </a:lnL>
-                    <a:lnR w="6350" cap="flat" cmpd="sng" algn="ctr">
-                      <a:solidFill>
-                        <a:srgbClr val="000000"/>
-                      </a:solidFill>
-                    </a:lnR>
-                    <a:lnT w="6350" cap="flat" cmpd="sng" algn="ctr">
-                      <a:solidFill>
-                        <a:srgbClr val="000000"/>
-                      </a:solidFill>
-                    </a:lnT>
-                    <a:lnB w="6350" cap="flat" cmpd="sng" algn="ctr">
-                      <a:solidFill>
-                        <a:srgbClr val="000000"/>
-                      </a:solidFill>
-                    </a:lnB>
-                  </a:tcPr>
-                </a:tc>
-                <a:tc>
-                  <a:txBody>
-                    <a:bodyPr wrap="square"/>
-                    <a:lstStyle/>
-                    <a:p>
-                      <a:pPr algn="l">
-                        <a:lnSpc>
-                          <a:spcPct val="100000"/>
-                        </a:lnSpc>
-                        <a:spcBef>
-                          <a:spcPts val="0"/>
-                        </a:spcBef>
-                        <a:spcAft>
-                          <a:spcPts val="0"/>
-                        </a:spcAft>
-                      </a:pPr>
-                      <a:r>
-                        <a:rPr sz="1100" b="0">
-                          <a:solidFill>
-                            <a:srgbClr val="77777A"/>
-                          </a:solidFill>
-                          <a:latin typeface="Calibri"/>
-                        </a:rPr>
-                        <a:t>DEFPROD-10579</a:t>
-                      </a:r>
-                    </a:p>
-                  </a:txBody>
-                  <a:tcPr anchor="ctr" marL="38100" marR="38100" marT="25400" marB="25400">
-                    <a:solidFill>
-                      <a:srgbClr val="FFFFFF"/>
-                    </a:solidFill>
-                    <a:lnL w="6350" cap="flat" cmpd="sng" algn="ctr">
-                      <a:solidFill>
-                        <a:srgbClr val="000000"/>
-                      </a:solidFill>
-                    </a:lnL>
-                    <a:lnR w="6350" cap="flat" cmpd="sng" algn="ctr">
-                      <a:solidFill>
-                        <a:srgbClr val="000000"/>
-                      </a:solidFill>
-                    </a:lnR>
-                    <a:lnT w="6350" cap="flat" cmpd="sng" algn="ctr">
-                      <a:solidFill>
-                        <a:srgbClr val="000000"/>
-                      </a:solidFill>
-                    </a:lnT>
-                    <a:lnB w="6350" cap="flat" cmpd="sng" algn="ctr">
-                      <a:solidFill>
-                        <a:srgbClr val="000000"/>
-                      </a:solidFill>
-                    </a:lnB>
-                  </a:tcPr>
-                </a:tc>
-                <a:tc>
-                  <a:txBody>
-                    <a:bodyPr wrap="square"/>
-                    <a:lstStyle/>
-                    <a:p>
-                      <a:pPr algn="l">
-                        <a:lnSpc>
-                          <a:spcPct val="100000"/>
-                        </a:lnSpc>
-                        <a:spcBef>
-                          <a:spcPts val="0"/>
-                        </a:spcBef>
-                        <a:spcAft>
-                          <a:spcPts val="0"/>
-                        </a:spcAft>
-                      </a:pPr>
-                      <a:r>
-                        <a:rPr sz="1100" b="0">
-                          <a:solidFill>
-                            <a:srgbClr val="000000"/>
-                          </a:solidFill>
-                          <a:latin typeface="Calibri"/>
-                        </a:rPr>
-                        <a:t>DEFPROD-10579: Новое требование - Изменение нумерации реестров платежей</a:t>
-                      </a:r>
-                    </a:p>
-                  </a:txBody>
-                  <a:tcPr anchor="ctr" marL="38100" marR="38100" marT="25400" marB="25400">
-                    <a:solidFill>
-                      <a:srgbClr val="FFFFFF"/>
-                    </a:solidFill>
-                    <a:lnL w="6350" cap="flat" cmpd="sng" algn="ctr">
-                      <a:solidFill>
-                        <a:srgbClr val="000000"/>
-                      </a:solidFill>
-                    </a:lnL>
-                    <a:lnR w="6350" cap="flat" cmpd="sng" algn="ctr">
-                      <a:solidFill>
-                        <a:srgbClr val="000000"/>
-                      </a:solidFill>
-                    </a:lnR>
-                    <a:lnT w="6350" cap="flat" cmpd="sng" algn="ctr">
-                      <a:solidFill>
-                        <a:srgbClr val="000000"/>
-                      </a:solidFill>
-                    </a:lnT>
-                    <a:lnB w="6350" cap="flat" cmpd="sng" algn="ctr">
-                      <a:solidFill>
-                        <a:srgbClr val="000000"/>
-                      </a:solidFill>
-                    </a:lnB>
-                  </a:tcPr>
-                </a:tc>
-                <a:tc>
-                  <a:txBody>
-                    <a:bodyPr wrap="square"/>
-                    <a:lstStyle/>
-                    <a:p>
-                      <a:pPr algn="l">
-                        <a:lnSpc>
-                          <a:spcPct val="100000"/>
-                        </a:lnSpc>
-                        <a:spcBef>
-                          <a:spcPts val="0"/>
-                        </a:spcBef>
-                        <a:spcAft>
-                          <a:spcPts val="0"/>
-                        </a:spcAft>
-                      </a:pPr>
-                      <a:r>
-                        <a:rPr sz="1100" b="0">
-                          <a:solidFill>
-                            <a:srgbClr val="000000"/>
-                          </a:solidFill>
-                          <a:latin typeface="Calibri"/>
-                        </a:rPr>
-                        <a:t>Из-за ошибки реестры формирутся позднее, чем должны. Доработка ускорит формирование автореетсров</a:t>
-                      </a:r>
-                    </a:p>
-                  </a:txBody>
-                  <a:tcPr anchor="ctr" marL="38100" marR="38100" marT="25400" marB="25400">
-                    <a:solidFill>
-                      <a:srgbClr val="FFFFFF"/>
-                    </a:solidFill>
-                    <a:lnL w="6350" cap="flat" cmpd="sng" algn="ctr">
-                      <a:solidFill>
-                        <a:srgbClr val="000000"/>
-                      </a:solidFill>
-                    </a:lnL>
-                    <a:lnR w="6350" cap="flat" cmpd="sng" algn="ctr">
-                      <a:solidFill>
-                        <a:srgbClr val="000000"/>
-                      </a:solidFill>
-                    </a:lnR>
-                    <a:lnT w="6350" cap="flat" cmpd="sng" algn="ctr">
-                      <a:solidFill>
-                        <a:srgbClr val="000000"/>
-                      </a:solidFill>
-                    </a:lnT>
-                    <a:lnB w="6350" cap="flat" cmpd="sng" algn="ctr">
-                      <a:solidFill>
-                        <a:srgbClr val="000000"/>
-                      </a:solidFill>
-                    </a:lnB>
-                  </a:tcPr>
-                </a:tc>
-                <a:tc>
-                  <a:txBody>
-                    <a:bodyPr wrap="square"/>
-                    <a:lstStyle/>
-                    <a:p>
-                      <a:pPr algn="r">
-                        <a:lnSpc>
-                          <a:spcPct val="100000"/>
-                        </a:lnSpc>
-                        <a:spcBef>
-                          <a:spcPts val="0"/>
-                        </a:spcBef>
-                        <a:spcAft>
-                          <a:spcPts val="0"/>
-                        </a:spcAft>
-                      </a:pPr>
-                      <a:r>
-                        <a:rPr sz="1100" b="0">
-                          <a:solidFill>
-                            <a:srgbClr val="000000"/>
-                          </a:solidFill>
-                          <a:latin typeface="Calibri"/>
-                        </a:rPr>
-                        <a:t>160</a:t>
-                      </a:r>
-                    </a:p>
-                  </a:txBody>
-                  <a:tcPr anchor="ctr" marL="38100" marR="38100" marT="25400" marB="25400">
-                    <a:solidFill>
-                      <a:srgbClr val="FFFFFF"/>
-                    </a:solidFill>
-                    <a:lnL w="6350" cap="flat" cmpd="sng" algn="ctr">
-                      <a:solidFill>
-                        <a:srgbClr val="000000"/>
-                      </a:solidFill>
-                    </a:lnL>
-                    <a:lnR w="6350" cap="flat" cmpd="sng" algn="ctr">
-                      <a:solidFill>
-                        <a:srgbClr val="000000"/>
-                      </a:solidFill>
-                    </a:lnR>
-                    <a:lnT w="6350" cap="flat" cmpd="sng" algn="ctr">
-                      <a:solidFill>
-                        <a:srgbClr val="000000"/>
-                      </a:solidFill>
-                    </a:lnT>
-                    <a:lnB w="6350" cap="flat" cmpd="sng" algn="ctr">
-                      <a:solidFill>
-                        <a:srgbClr val="000000"/>
-                      </a:solidFill>
-                    </a:lnB>
-                  </a:tcPr>
-                </a:tc>
-                <a:tc>
-                  <a:txBody>
-                    <a:bodyPr wrap="square"/>
-                    <a:lstStyle/>
-                    <a:p>
-                      <a:pPr algn="l">
-                        <a:lnSpc>
-                          <a:spcPct val="100000"/>
-                        </a:lnSpc>
-                        <a:spcBef>
-                          <a:spcPts val="0"/>
-                        </a:spcBef>
-                        <a:spcAft>
-                          <a:spcPts val="0"/>
-                        </a:spcAft>
-                      </a:pPr>
-                      <a:r>
-                        <a:rPr sz="1100" b="0">
-                          <a:solidFill>
-                            <a:srgbClr val="000000"/>
-                          </a:solidFill>
-                          <a:latin typeface="Calibri"/>
-                        </a:rPr>
-                        <a:t>36 релиз</a:t>
                       </a:r>
                     </a:p>
                   </a:txBody>
@@ -16488,7 +15849,7 @@
                 </a:solidFill>
                 <a:latin typeface="Verdana"/>
               </a:rPr>
-              <a:t>Дефекты и разработки по Пилоту (6/6)</a:t>
+              <a:t>Дефекты и разработки по Пилоту (6/7)</a:t>
             </a:r>
           </a:p>
         </p:txBody>
@@ -16503,7 +15864,7 @@
         </p:nvGraphicFramePr>
         <p:xfrm>
           <a:off x="533095" y="1030528"/>
-          <a:ext cx="11415367" cy="4891255"/>
+          <a:ext cx="11415367" cy="5583324"/>
         </p:xfrm>
         <a:graphic>
           <a:graphicData uri="http://schemas.openxmlformats.org/drawingml/2006/table">
@@ -16842,7 +16203,7 @@
                   </a:tcPr>
                 </a:tc>
               </a:tr>
-              <a:tr h="692070">
+              <a:tr h="735855">
                 <a:tc>
                   <a:txBody>
                     <a:bodyPr wrap="square"/>
@@ -16866,6 +16227,646 @@
                           </a:solidFill>
                           <a:latin typeface="Calibri"/>
                         </a:rPr>
+                        <a:t>34</a:t>
+                      </a:r>
+                    </a:p>
+                  </a:txBody>
+                  <a:tcPr anchor="ctr" marL="38100" marR="38100" marT="25400" marB="25400">
+                    <a:solidFill>
+                      <a:srgbClr val="FFFFFF"/>
+                    </a:solidFill>
+                    <a:lnL w="6350" cap="flat" cmpd="sng" algn="ctr">
+                      <a:solidFill>
+                        <a:srgbClr val="000000"/>
+                      </a:solidFill>
+                    </a:lnL>
+                    <a:lnR w="6350" cap="flat" cmpd="sng" algn="ctr">
+                      <a:solidFill>
+                        <a:srgbClr val="000000"/>
+                      </a:solidFill>
+                    </a:lnR>
+                    <a:lnT w="6350" cap="flat" cmpd="sng" algn="ctr">
+                      <a:solidFill>
+                        <a:srgbClr val="000000"/>
+                      </a:solidFill>
+                    </a:lnT>
+                    <a:lnB w="6350" cap="flat" cmpd="sng" algn="ctr">
+                      <a:solidFill>
+                        <a:srgbClr val="000000"/>
+                      </a:solidFill>
+                    </a:lnB>
+                  </a:tcPr>
+                </a:tc>
+                <a:tc>
+                  <a:txBody>
+                    <a:bodyPr wrap="square"/>
+                    <a:lstStyle/>
+                    <a:p>
+                      <a:pPr algn="l">
+                        <a:lnSpc>
+                          <a:spcPct val="100000"/>
+                        </a:lnSpc>
+                        <a:spcBef>
+                          <a:spcPts val="0"/>
+                        </a:spcBef>
+                        <a:spcAft>
+                          <a:spcPts val="0"/>
+                        </a:spcAft>
+                      </a:pPr>
+                      <a:r>
+                        <a:rPr sz="1100" b="0">
+                          <a:solidFill>
+                            <a:srgbClr val="77777A"/>
+                          </a:solidFill>
+                          <a:latin typeface="Calibri"/>
+                        </a:rPr>
+                        <a:t>DEFPROD-10282</a:t>
+                      </a:r>
+                    </a:p>
+                  </a:txBody>
+                  <a:tcPr anchor="ctr" marL="38100" marR="38100" marT="25400" marB="25400">
+                    <a:solidFill>
+                      <a:srgbClr val="FFFFFF"/>
+                    </a:solidFill>
+                    <a:lnL w="6350" cap="flat" cmpd="sng" algn="ctr">
+                      <a:solidFill>
+                        <a:srgbClr val="000000"/>
+                      </a:solidFill>
+                    </a:lnL>
+                    <a:lnR w="6350" cap="flat" cmpd="sng" algn="ctr">
+                      <a:solidFill>
+                        <a:srgbClr val="000000"/>
+                      </a:solidFill>
+                    </a:lnR>
+                    <a:lnT w="6350" cap="flat" cmpd="sng" algn="ctr">
+                      <a:solidFill>
+                        <a:srgbClr val="000000"/>
+                      </a:solidFill>
+                    </a:lnT>
+                    <a:lnB w="6350" cap="flat" cmpd="sng" algn="ctr">
+                      <a:solidFill>
+                        <a:srgbClr val="000000"/>
+                      </a:solidFill>
+                    </a:lnB>
+                  </a:tcPr>
+                </a:tc>
+                <a:tc>
+                  <a:txBody>
+                    <a:bodyPr wrap="square"/>
+                    <a:lstStyle/>
+                    <a:p>
+                      <a:pPr algn="l">
+                        <a:lnSpc>
+                          <a:spcPct val="100000"/>
+                        </a:lnSpc>
+                        <a:spcBef>
+                          <a:spcPts val="0"/>
+                        </a:spcBef>
+                        <a:spcAft>
+                          <a:spcPts val="0"/>
+                        </a:spcAft>
+                      </a:pPr>
+                      <a:r>
+                        <a:rPr sz="1100" b="0">
+                          <a:solidFill>
+                            <a:srgbClr val="000000"/>
+                          </a:solidFill>
+                          <a:latin typeface="Calibri"/>
+                        </a:rPr>
+                        <a:t>DEFPROD-10282: Ошибка функциональности - Добавить отбор при выборе БС контрагентов в документе заявка на оплату</a:t>
+                      </a:r>
+                    </a:p>
+                  </a:txBody>
+                  <a:tcPr anchor="ctr" marL="38100" marR="38100" marT="25400" marB="25400">
+                    <a:solidFill>
+                      <a:srgbClr val="FFFFFF"/>
+                    </a:solidFill>
+                    <a:lnL w="6350" cap="flat" cmpd="sng" algn="ctr">
+                      <a:solidFill>
+                        <a:srgbClr val="000000"/>
+                      </a:solidFill>
+                    </a:lnL>
+                    <a:lnR w="6350" cap="flat" cmpd="sng" algn="ctr">
+                      <a:solidFill>
+                        <a:srgbClr val="000000"/>
+                      </a:solidFill>
+                    </a:lnR>
+                    <a:lnT w="6350" cap="flat" cmpd="sng" algn="ctr">
+                      <a:solidFill>
+                        <a:srgbClr val="000000"/>
+                      </a:solidFill>
+                    </a:lnT>
+                    <a:lnB w="6350" cap="flat" cmpd="sng" algn="ctr">
+                      <a:solidFill>
+                        <a:srgbClr val="000000"/>
+                      </a:solidFill>
+                    </a:lnB>
+                  </a:tcPr>
+                </a:tc>
+                <a:tc>
+                  <a:txBody>
+                    <a:bodyPr wrap="square"/>
+                    <a:lstStyle/>
+                    <a:p>
+                      <a:pPr algn="l">
+                        <a:lnSpc>
+                          <a:spcPct val="100000"/>
+                        </a:lnSpc>
+                        <a:spcBef>
+                          <a:spcPts val="0"/>
+                        </a:spcBef>
+                        <a:spcAft>
+                          <a:spcPts val="0"/>
+                        </a:spcAft>
+                      </a:pPr>
+                      <a:r>
+                        <a:rPr sz="1100" b="0">
+                          <a:solidFill>
+                            <a:srgbClr val="000000"/>
+                          </a:solidFill>
+                          <a:latin typeface="Calibri"/>
+                        </a:rPr>
+                        <a:t>Снимет риск по выбору закрытого счета</a:t>
+                      </a:r>
+                    </a:p>
+                  </a:txBody>
+                  <a:tcPr anchor="ctr" marL="38100" marR="38100" marT="25400" marB="25400">
+                    <a:solidFill>
+                      <a:srgbClr val="FFFFFF"/>
+                    </a:solidFill>
+                    <a:lnL w="6350" cap="flat" cmpd="sng" algn="ctr">
+                      <a:solidFill>
+                        <a:srgbClr val="000000"/>
+                      </a:solidFill>
+                    </a:lnL>
+                    <a:lnR w="6350" cap="flat" cmpd="sng" algn="ctr">
+                      <a:solidFill>
+                        <a:srgbClr val="000000"/>
+                      </a:solidFill>
+                    </a:lnR>
+                    <a:lnT w="6350" cap="flat" cmpd="sng" algn="ctr">
+                      <a:solidFill>
+                        <a:srgbClr val="000000"/>
+                      </a:solidFill>
+                    </a:lnT>
+                    <a:lnB w="6350" cap="flat" cmpd="sng" algn="ctr">
+                      <a:solidFill>
+                        <a:srgbClr val="000000"/>
+                      </a:solidFill>
+                    </a:lnB>
+                  </a:tcPr>
+                </a:tc>
+                <a:tc>
+                  <a:txBody>
+                    <a:bodyPr wrap="square"/>
+                    <a:lstStyle/>
+                    <a:p>
+                      <a:pPr algn="r">
+                        <a:lnSpc>
+                          <a:spcPct val="100000"/>
+                        </a:lnSpc>
+                        <a:spcBef>
+                          <a:spcPts val="0"/>
+                        </a:spcBef>
+                        <a:spcAft>
+                          <a:spcPts val="0"/>
+                        </a:spcAft>
+                      </a:pPr>
+                      <a:r>
+                        <a:rPr sz="1100" b="0">
+                          <a:solidFill>
+                            <a:srgbClr val="000000"/>
+                          </a:solidFill>
+                          <a:latin typeface="Calibri"/>
+                        </a:rPr>
+                        <a:t>80</a:t>
+                      </a:r>
+                    </a:p>
+                  </a:txBody>
+                  <a:tcPr anchor="ctr" marL="38100" marR="38100" marT="25400" marB="25400">
+                    <a:solidFill>
+                      <a:srgbClr val="FFFFFF"/>
+                    </a:solidFill>
+                    <a:lnL w="6350" cap="flat" cmpd="sng" algn="ctr">
+                      <a:solidFill>
+                        <a:srgbClr val="000000"/>
+                      </a:solidFill>
+                    </a:lnL>
+                    <a:lnR w="6350" cap="flat" cmpd="sng" algn="ctr">
+                      <a:solidFill>
+                        <a:srgbClr val="000000"/>
+                      </a:solidFill>
+                    </a:lnR>
+                    <a:lnT w="6350" cap="flat" cmpd="sng" algn="ctr">
+                      <a:solidFill>
+                        <a:srgbClr val="000000"/>
+                      </a:solidFill>
+                    </a:lnT>
+                    <a:lnB w="6350" cap="flat" cmpd="sng" algn="ctr">
+                      <a:solidFill>
+                        <a:srgbClr val="000000"/>
+                      </a:solidFill>
+                    </a:lnB>
+                  </a:tcPr>
+                </a:tc>
+                <a:tc>
+                  <a:txBody>
+                    <a:bodyPr wrap="square"/>
+                    <a:lstStyle/>
+                    <a:p>
+                      <a:pPr algn="l">
+                        <a:lnSpc>
+                          <a:spcPct val="100000"/>
+                        </a:lnSpc>
+                        <a:spcBef>
+                          <a:spcPts val="0"/>
+                        </a:spcBef>
+                        <a:spcAft>
+                          <a:spcPts val="0"/>
+                        </a:spcAft>
+                      </a:pPr>
+                      <a:r>
+                        <a:rPr sz="1100" b="0">
+                          <a:solidFill>
+                            <a:srgbClr val="000000"/>
+                          </a:solidFill>
+                          <a:latin typeface="Calibri"/>
+                        </a:rPr>
+                        <a:t>33 релиз</a:t>
+                      </a:r>
+                    </a:p>
+                  </a:txBody>
+                  <a:tcPr anchor="ctr" marL="38100" marR="38100" marT="25400" marB="25400">
+                    <a:solidFill>
+                      <a:srgbClr val="FFFFFF"/>
+                    </a:solidFill>
+                    <a:lnL w="6350" cap="flat" cmpd="sng" algn="ctr">
+                      <a:solidFill>
+                        <a:srgbClr val="000000"/>
+                      </a:solidFill>
+                    </a:lnL>
+                    <a:lnR w="6350" cap="flat" cmpd="sng" algn="ctr">
+                      <a:solidFill>
+                        <a:srgbClr val="000000"/>
+                      </a:solidFill>
+                    </a:lnR>
+                    <a:lnT w="6350" cap="flat" cmpd="sng" algn="ctr">
+                      <a:solidFill>
+                        <a:srgbClr val="000000"/>
+                      </a:solidFill>
+                    </a:lnT>
+                    <a:lnB w="6350" cap="flat" cmpd="sng" algn="ctr">
+                      <a:solidFill>
+                        <a:srgbClr val="000000"/>
+                      </a:solidFill>
+                    </a:lnB>
+                  </a:tcPr>
+                </a:tc>
+              </a:tr>
+              <a:tr h="735855">
+                <a:tc>
+                  <a:txBody>
+                    <a:bodyPr wrap="square"/>
+                    <a:lstStyle/>
+                    <a:p>
+                      <a:pPr algn="ctr">
+                        <a:lnSpc>
+                          <a:spcPct val="100000"/>
+                        </a:lnSpc>
+                        <a:spcBef>
+                          <a:spcPts val="0"/>
+                        </a:spcBef>
+                        <a:spcAft>
+                          <a:spcPts val="0"/>
+                        </a:spcAft>
+                      </a:pPr>
+                      <a:r>
+                        <a:rPr sz="1100" b="0">
+                          <a:solidFill>
+                            <a:srgbClr val="000000"/>
+                          </a:solidFill>
+                          <a:latin typeface="Calibri"/>
+                        </a:rPr>
+                        <a:t>35</a:t>
+                      </a:r>
+                    </a:p>
+                  </a:txBody>
+                  <a:tcPr anchor="ctr" marL="38100" marR="38100" marT="25400" marB="25400">
+                    <a:solidFill>
+                      <a:srgbClr val="F8E7E8"/>
+                    </a:solidFill>
+                    <a:lnL w="6350" cap="flat" cmpd="sng" algn="ctr">
+                      <a:solidFill>
+                        <a:srgbClr val="000000"/>
+                      </a:solidFill>
+                    </a:lnL>
+                    <a:lnR w="6350" cap="flat" cmpd="sng" algn="ctr">
+                      <a:solidFill>
+                        <a:srgbClr val="000000"/>
+                      </a:solidFill>
+                    </a:lnR>
+                    <a:lnT w="6350" cap="flat" cmpd="sng" algn="ctr">
+                      <a:solidFill>
+                        <a:srgbClr val="000000"/>
+                      </a:solidFill>
+                    </a:lnT>
+                    <a:lnB w="6350" cap="flat" cmpd="sng" algn="ctr">
+                      <a:solidFill>
+                        <a:srgbClr val="000000"/>
+                      </a:solidFill>
+                    </a:lnB>
+                  </a:tcPr>
+                </a:tc>
+                <a:tc>
+                  <a:txBody>
+                    <a:bodyPr wrap="square"/>
+                    <a:lstStyle/>
+                    <a:p>
+                      <a:pPr algn="l">
+                        <a:lnSpc>
+                          <a:spcPct val="100000"/>
+                        </a:lnSpc>
+                        <a:spcBef>
+                          <a:spcPts val="0"/>
+                        </a:spcBef>
+                        <a:spcAft>
+                          <a:spcPts val="0"/>
+                        </a:spcAft>
+                      </a:pPr>
+                      <a:r>
+                        <a:rPr sz="1100" b="0">
+                          <a:solidFill>
+                            <a:srgbClr val="77777A"/>
+                          </a:solidFill>
+                          <a:latin typeface="Calibri"/>
+                        </a:rPr>
+                        <a:t>DEFPROD-10579</a:t>
+                      </a:r>
+                    </a:p>
+                  </a:txBody>
+                  <a:tcPr anchor="ctr" marL="38100" marR="38100" marT="25400" marB="25400">
+                    <a:solidFill>
+                      <a:srgbClr val="F8E7E8"/>
+                    </a:solidFill>
+                    <a:lnL w="6350" cap="flat" cmpd="sng" algn="ctr">
+                      <a:solidFill>
+                        <a:srgbClr val="000000"/>
+                      </a:solidFill>
+                    </a:lnL>
+                    <a:lnR w="6350" cap="flat" cmpd="sng" algn="ctr">
+                      <a:solidFill>
+                        <a:srgbClr val="000000"/>
+                      </a:solidFill>
+                    </a:lnR>
+                    <a:lnT w="6350" cap="flat" cmpd="sng" algn="ctr">
+                      <a:solidFill>
+                        <a:srgbClr val="000000"/>
+                      </a:solidFill>
+                    </a:lnT>
+                    <a:lnB w="6350" cap="flat" cmpd="sng" algn="ctr">
+                      <a:solidFill>
+                        <a:srgbClr val="000000"/>
+                      </a:solidFill>
+                    </a:lnB>
+                  </a:tcPr>
+                </a:tc>
+                <a:tc>
+                  <a:txBody>
+                    <a:bodyPr wrap="square"/>
+                    <a:lstStyle/>
+                    <a:p>
+                      <a:pPr algn="l">
+                        <a:lnSpc>
+                          <a:spcPct val="100000"/>
+                        </a:lnSpc>
+                        <a:spcBef>
+                          <a:spcPts val="0"/>
+                        </a:spcBef>
+                        <a:spcAft>
+                          <a:spcPts val="0"/>
+                        </a:spcAft>
+                      </a:pPr>
+                      <a:r>
+                        <a:rPr sz="1100" b="0">
+                          <a:solidFill>
+                            <a:srgbClr val="000000"/>
+                          </a:solidFill>
+                          <a:latin typeface="Calibri"/>
+                        </a:rPr>
+                        <a:t>DEFPROD-10579: Новое требование - Изменение нумерации реестров платежей</a:t>
+                      </a:r>
+                    </a:p>
+                  </a:txBody>
+                  <a:tcPr anchor="ctr" marL="38100" marR="38100" marT="25400" marB="25400">
+                    <a:solidFill>
+                      <a:srgbClr val="F8E7E8"/>
+                    </a:solidFill>
+                    <a:lnL w="6350" cap="flat" cmpd="sng" algn="ctr">
+                      <a:solidFill>
+                        <a:srgbClr val="000000"/>
+                      </a:solidFill>
+                    </a:lnL>
+                    <a:lnR w="6350" cap="flat" cmpd="sng" algn="ctr">
+                      <a:solidFill>
+                        <a:srgbClr val="000000"/>
+                      </a:solidFill>
+                    </a:lnR>
+                    <a:lnT w="6350" cap="flat" cmpd="sng" algn="ctr">
+                      <a:solidFill>
+                        <a:srgbClr val="000000"/>
+                      </a:solidFill>
+                    </a:lnT>
+                    <a:lnB w="6350" cap="flat" cmpd="sng" algn="ctr">
+                      <a:solidFill>
+                        <a:srgbClr val="000000"/>
+                      </a:solidFill>
+                    </a:lnB>
+                  </a:tcPr>
+                </a:tc>
+                <a:tc>
+                  <a:txBody>
+                    <a:bodyPr wrap="square"/>
+                    <a:lstStyle/>
+                    <a:p>
+                      <a:pPr algn="l">
+                        <a:lnSpc>
+                          <a:spcPct val="100000"/>
+                        </a:lnSpc>
+                        <a:spcBef>
+                          <a:spcPts val="0"/>
+                        </a:spcBef>
+                        <a:spcAft>
+                          <a:spcPts val="0"/>
+                        </a:spcAft>
+                      </a:pPr>
+                      <a:r>
+                        <a:rPr sz="1100" b="0">
+                          <a:solidFill>
+                            <a:srgbClr val="000000"/>
+                          </a:solidFill>
+                          <a:latin typeface="Calibri"/>
+                        </a:rPr>
+                        <a:t>Из-за ошибки реестры формирутся позднее, чем должны. Доработка ускорит формирование автореетсров</a:t>
+                      </a:r>
+                    </a:p>
+                  </a:txBody>
+                  <a:tcPr anchor="ctr" marL="38100" marR="38100" marT="25400" marB="25400">
+                    <a:solidFill>
+                      <a:srgbClr val="F8E7E8"/>
+                    </a:solidFill>
+                    <a:lnL w="6350" cap="flat" cmpd="sng" algn="ctr">
+                      <a:solidFill>
+                        <a:srgbClr val="000000"/>
+                      </a:solidFill>
+                    </a:lnL>
+                    <a:lnR w="6350" cap="flat" cmpd="sng" algn="ctr">
+                      <a:solidFill>
+                        <a:srgbClr val="000000"/>
+                      </a:solidFill>
+                    </a:lnR>
+                    <a:lnT w="6350" cap="flat" cmpd="sng" algn="ctr">
+                      <a:solidFill>
+                        <a:srgbClr val="000000"/>
+                      </a:solidFill>
+                    </a:lnT>
+                    <a:lnB w="6350" cap="flat" cmpd="sng" algn="ctr">
+                      <a:solidFill>
+                        <a:srgbClr val="000000"/>
+                      </a:solidFill>
+                    </a:lnB>
+                  </a:tcPr>
+                </a:tc>
+                <a:tc>
+                  <a:txBody>
+                    <a:bodyPr wrap="square"/>
+                    <a:lstStyle/>
+                    <a:p>
+                      <a:pPr algn="r">
+                        <a:lnSpc>
+                          <a:spcPct val="100000"/>
+                        </a:lnSpc>
+                        <a:spcBef>
+                          <a:spcPts val="0"/>
+                        </a:spcBef>
+                        <a:spcAft>
+                          <a:spcPts val="0"/>
+                        </a:spcAft>
+                      </a:pPr>
+                      <a:r>
+                        <a:rPr sz="1100" b="0">
+                          <a:solidFill>
+                            <a:srgbClr val="000000"/>
+                          </a:solidFill>
+                          <a:latin typeface="Calibri"/>
+                        </a:rPr>
+                        <a:t>160</a:t>
+                      </a:r>
+                    </a:p>
+                  </a:txBody>
+                  <a:tcPr anchor="ctr" marL="38100" marR="38100" marT="25400" marB="25400">
+                    <a:solidFill>
+                      <a:srgbClr val="F8E7E8"/>
+                    </a:solidFill>
+                    <a:lnL w="6350" cap="flat" cmpd="sng" algn="ctr">
+                      <a:solidFill>
+                        <a:srgbClr val="000000"/>
+                      </a:solidFill>
+                    </a:lnL>
+                    <a:lnR w="6350" cap="flat" cmpd="sng" algn="ctr">
+                      <a:solidFill>
+                        <a:srgbClr val="000000"/>
+                      </a:solidFill>
+                    </a:lnR>
+                    <a:lnT w="6350" cap="flat" cmpd="sng" algn="ctr">
+                      <a:solidFill>
+                        <a:srgbClr val="000000"/>
+                      </a:solidFill>
+                    </a:lnT>
+                    <a:lnB w="6350" cap="flat" cmpd="sng" algn="ctr">
+                      <a:solidFill>
+                        <a:srgbClr val="000000"/>
+                      </a:solidFill>
+                    </a:lnB>
+                  </a:tcPr>
+                </a:tc>
+                <a:tc>
+                  <a:txBody>
+                    <a:bodyPr wrap="square"/>
+                    <a:lstStyle/>
+                    <a:p>
+                      <a:pPr algn="l">
+                        <a:lnSpc>
+                          <a:spcPct val="100000"/>
+                        </a:lnSpc>
+                        <a:spcBef>
+                          <a:spcPts val="0"/>
+                        </a:spcBef>
+                        <a:spcAft>
+                          <a:spcPts val="0"/>
+                        </a:spcAft>
+                      </a:pPr>
+                      <a:r>
+                        <a:rPr sz="1100" b="0">
+                          <a:solidFill>
+                            <a:srgbClr val="000000"/>
+                          </a:solidFill>
+                          <a:latin typeface="Calibri"/>
+                        </a:rPr>
+                        <a:t>36 релиз</a:t>
+                      </a:r>
+                    </a:p>
+                  </a:txBody>
+                  <a:tcPr anchor="ctr" marL="38100" marR="38100" marT="25400" marB="25400">
+                    <a:solidFill>
+                      <a:srgbClr val="F8E7E8"/>
+                    </a:solidFill>
+                    <a:lnL w="6350" cap="flat" cmpd="sng" algn="ctr">
+                      <a:solidFill>
+                        <a:srgbClr val="000000"/>
+                      </a:solidFill>
+                    </a:lnL>
+                    <a:lnR w="6350" cap="flat" cmpd="sng" algn="ctr">
+                      <a:solidFill>
+                        <a:srgbClr val="000000"/>
+                      </a:solidFill>
+                    </a:lnR>
+                    <a:lnT w="6350" cap="flat" cmpd="sng" algn="ctr">
+                      <a:solidFill>
+                        <a:srgbClr val="000000"/>
+                      </a:solidFill>
+                    </a:lnT>
+                    <a:lnB w="6350" cap="flat" cmpd="sng" algn="ctr">
+                      <a:solidFill>
+                        <a:srgbClr val="000000"/>
+                      </a:solidFill>
+                    </a:lnB>
+                  </a:tcPr>
+                </a:tc>
+              </a:tr>
+              <a:tr h="1124774">
+                <a:tc>
+                  <a:txBody>
+                    <a:bodyPr wrap="square"/>
+                    <a:lstStyle/>
+                    <a:p>
+                      <a:pPr algn="ctr">
+                        <a:lnSpc>
+                          <a:spcPct val="100000"/>
+                        </a:lnSpc>
+                        <a:spcBef>
+                          <a:spcPts val="0"/>
+                        </a:spcBef>
+                        <a:spcAft>
+                          <a:spcPts val="0"/>
+                        </a:spcAft>
+                      </a:pPr>
+                      <a:r>
+                        <a:rPr sz="1100" b="0">
+                          <a:solidFill>
+                            <a:srgbClr val="000000"/>
+                          </a:solidFill>
+                          <a:latin typeface="Calibri"/>
+                        </a:rPr>
                         <a:t>36</a:t>
                       </a:r>
                     </a:p>
@@ -17162,7 +17163,7 @@
                   </a:tcPr>
                 </a:tc>
               </a:tr>
-              <a:tr h="692070">
+              <a:tr h="776295">
                 <a:tc>
                   <a:txBody>
                     <a:bodyPr wrap="square"/>
@@ -17482,7 +17483,7 @@
                   </a:tcPr>
                 </a:tc>
               </a:tr>
-              <a:tr h="692070">
+              <a:tr h="735855">
                 <a:tc>
                   <a:txBody>
                     <a:bodyPr wrap="square"/>
@@ -17802,7 +17803,7 @@
                   </a:tcPr>
                 </a:tc>
               </a:tr>
-              <a:tr h="692070">
+              <a:tr h="735855">
                 <a:tc>
                   <a:txBody>
                     <a:bodyPr wrap="square"/>
@@ -18122,7 +18123,114 @@
                   </a:tcPr>
                 </a:tc>
               </a:tr>
-              <a:tr h="692070">
+            </a:tbl>
+          </a:graphicData>
+        </a:graphic>
+      </p:graphicFrame>
+    </p:spTree>
+  </p:cSld>
+  <p:clrMapOvr>
+    <a:masterClrMapping/>
+  </p:clrMapOvr>
+</p:sld>
+</file>
+
+<file path=ppt/slides/slide7.xml><?xml version="1.0" encoding="utf-8"?>
+<p:sld xmlns:a="http://schemas.openxmlformats.org/drawingml/2006/main" xmlns:p="http://schemas.openxmlformats.org/presentationml/2006/main" xmlns:r="http://schemas.openxmlformats.org/officeDocument/2006/relationships">
+  <p:cSld>
+    <p:spTree>
+      <p:nvGrpSpPr>
+        <p:cNvPr id="1" name=""/>
+        <p:cNvGrpSpPr/>
+        <p:nvPr/>
+      </p:nvGrpSpPr>
+      <p:grpSpPr/>
+      <p:pic>
+        <p:nvPicPr>
+          <p:cNvPr id="2" name="Picture 1" descr="logo_0.png"/>
+          <p:cNvPicPr>
+            <a:picLocks noChangeAspect="1"/>
+          </p:cNvPicPr>
+          <p:nvPr/>
+        </p:nvPicPr>
+        <p:blipFill>
+          <a:blip r:embed="rId2"/>
+          <a:stretch>
+            <a:fillRect/>
+          </a:stretch>
+        </p:blipFill>
+        <p:spPr>
+          <a:xfrm>
+            <a:off x="9377172" y="102412"/>
+            <a:ext cx="2423160" cy="893618"/>
+          </a:xfrm>
+          <a:prstGeom prst="rect">
+            <a:avLst/>
+          </a:prstGeom>
+        </p:spPr>
+      </p:pic>
+      <p:sp>
+        <p:nvSpPr>
+          <p:cNvPr id="3" name="TextBox 2"/>
+          <p:cNvSpPr txBox="1"/>
+          <p:nvPr/>
+        </p:nvSpPr>
+        <p:spPr>
+          <a:xfrm>
+            <a:off x="561441" y="330098"/>
+            <a:ext cx="7772400" cy="411480"/>
+          </a:xfrm>
+          <a:prstGeom prst="rect">
+            <a:avLst/>
+          </a:prstGeom>
+          <a:noFill/>
+        </p:spPr>
+        <p:txBody>
+          <a:bodyPr wrap="none">
+            <a:spAutoFit/>
+          </a:bodyPr>
+          <a:lstStyle/>
+          <a:p>
+            <a:pPr algn="l"/>
+            <a:r>
+              <a:rPr sz="1800" b="1">
+                <a:solidFill>
+                  <a:srgbClr val="831223"/>
+                </a:solidFill>
+                <a:latin typeface="Verdana"/>
+              </a:rPr>
+              <a:t>Дефекты и разработки по Пилоту (7/7)</a:t>
+            </a:r>
+          </a:p>
+        </p:txBody>
+      </p:sp>
+      <p:graphicFrame>
+        <p:nvGraphicFramePr>
+          <p:cNvPr id="4" name="Table 3"/>
+          <p:cNvGraphicFramePr>
+            <a:graphicFrameLocks noGrp="1"/>
+          </p:cNvGraphicFramePr>
+          <p:nvPr/>
+        </p:nvGraphicFramePr>
+        <p:xfrm>
+          <a:off x="533095" y="1030528"/>
+          <a:ext cx="11415367" cy="5583325"/>
+        </p:xfrm>
+        <a:graphic>
+          <a:graphicData uri="http://schemas.openxmlformats.org/drawingml/2006/table">
+            <a:tbl>
+              <a:tblPr firstRow="1" bandRow="1">
+                <a:tableStyleId>{5C22544A-7EE6-4342-B048-85BDC9FD1C3A}</a:tableStyleId>
+              </a:tblPr>
+              <a:tblGrid>
+                <a:gridCol w="480974"/>
+                <a:gridCol w="863193"/>
+                <a:gridCol w="3704234"/>
+                <a:gridCol w="3461004"/>
+                <a:gridCol w="1194206"/>
+                <a:gridCol w="1711756"/>
+              </a:tblGrid>
+              <a:tr h="738835">
                 <a:tc>
                   <a:txBody>
                     <a:bodyPr wrap="square"/>
@@ -18140,6 +18248,329 @@
                         </a:spcAft>
                       </a:pPr>
                       <a:r>
+                        <a:rPr sz="1200" b="1">
+                          <a:solidFill>
+                            <a:srgbClr val="FFFFFF"/>
+                          </a:solidFill>
+                          <a:latin typeface="Calibri"/>
+                        </a:rPr>
+                        <a:t>№пп</a:t>
+                      </a:r>
+                    </a:p>
+                  </a:txBody>
+                  <a:tcPr anchor="ctr" marL="38100" marR="38100" marT="25400" marB="25400">
+                    <a:solidFill>
+                      <a:srgbClr val="AF182E"/>
+                    </a:solidFill>
+                    <a:lnL w="6350" cap="flat" cmpd="sng" algn="ctr">
+                      <a:solidFill>
+                        <a:srgbClr val="000000"/>
+                      </a:solidFill>
+                    </a:lnL>
+                    <a:lnR w="6350" cap="flat" cmpd="sng" algn="ctr">
+                      <a:solidFill>
+                        <a:srgbClr val="000000"/>
+                      </a:solidFill>
+                    </a:lnR>
+                    <a:lnT w="6350" cap="flat" cmpd="sng" algn="ctr">
+                      <a:solidFill>
+                        <a:srgbClr val="000000"/>
+                      </a:solidFill>
+                    </a:lnT>
+                    <a:lnB w="6350" cap="flat" cmpd="sng" algn="ctr">
+                      <a:solidFill>
+                        <a:srgbClr val="000000"/>
+                      </a:solidFill>
+                    </a:lnB>
+                  </a:tcPr>
+                </a:tc>
+                <a:tc>
+                  <a:txBody>
+                    <a:bodyPr wrap="square"/>
+                    <a:lstStyle/>
+                    <a:p>
+                      <a:pPr algn="ctr">
+                        <a:lnSpc>
+                          <a:spcPct val="100000"/>
+                        </a:lnSpc>
+                        <a:spcBef>
+                          <a:spcPts val="0"/>
+                        </a:spcBef>
+                        <a:spcAft>
+                          <a:spcPts val="0"/>
+                        </a:spcAft>
+                      </a:pPr>
+                      <a:r>
+                        <a:rPr sz="1200" b="1">
+                          <a:solidFill>
+                            <a:srgbClr val="FFFFFF"/>
+                          </a:solidFill>
+                          <a:latin typeface="Calibri"/>
+                        </a:rPr>
+                        <a:t>Ключ</a:t>
+                      </a:r>
+                    </a:p>
+                  </a:txBody>
+                  <a:tcPr anchor="ctr" marL="38100" marR="38100" marT="25400" marB="25400">
+                    <a:solidFill>
+                      <a:srgbClr val="AF182E"/>
+                    </a:solidFill>
+                    <a:lnL w="6350" cap="flat" cmpd="sng" algn="ctr">
+                      <a:solidFill>
+                        <a:srgbClr val="000000"/>
+                      </a:solidFill>
+                    </a:lnL>
+                    <a:lnR w="6350" cap="flat" cmpd="sng" algn="ctr">
+                      <a:solidFill>
+                        <a:srgbClr val="000000"/>
+                      </a:solidFill>
+                    </a:lnR>
+                    <a:lnT w="6350" cap="flat" cmpd="sng" algn="ctr">
+                      <a:solidFill>
+                        <a:srgbClr val="000000"/>
+                      </a:solidFill>
+                    </a:lnT>
+                    <a:lnB w="6350" cap="flat" cmpd="sng" algn="ctr">
+                      <a:solidFill>
+                        <a:srgbClr val="000000"/>
+                      </a:solidFill>
+                    </a:lnB>
+                  </a:tcPr>
+                </a:tc>
+                <a:tc>
+                  <a:txBody>
+                    <a:bodyPr wrap="square"/>
+                    <a:lstStyle/>
+                    <a:p>
+                      <a:pPr algn="ctr">
+                        <a:lnSpc>
+                          <a:spcPct val="100000"/>
+                        </a:lnSpc>
+                        <a:spcBef>
+                          <a:spcPts val="0"/>
+                        </a:spcBef>
+                        <a:spcAft>
+                          <a:spcPts val="0"/>
+                        </a:spcAft>
+                      </a:pPr>
+                      <a:r>
+                        <a:rPr sz="1200" b="1">
+                          <a:solidFill>
+                            <a:srgbClr val="FFFFFF"/>
+                          </a:solidFill>
+                          <a:latin typeface="Calibri"/>
+                        </a:rPr>
+                        <a:t>Задача</a:t>
+                      </a:r>
+                    </a:p>
+                  </a:txBody>
+                  <a:tcPr anchor="ctr" marL="38100" marR="38100" marT="25400" marB="25400">
+                    <a:solidFill>
+                      <a:srgbClr val="AF182E"/>
+                    </a:solidFill>
+                    <a:lnL w="6350" cap="flat" cmpd="sng" algn="ctr">
+                      <a:solidFill>
+                        <a:srgbClr val="000000"/>
+                      </a:solidFill>
+                    </a:lnL>
+                    <a:lnR w="6350" cap="flat" cmpd="sng" algn="ctr">
+                      <a:solidFill>
+                        <a:srgbClr val="000000"/>
+                      </a:solidFill>
+                    </a:lnR>
+                    <a:lnT w="6350" cap="flat" cmpd="sng" algn="ctr">
+                      <a:solidFill>
+                        <a:srgbClr val="000000"/>
+                      </a:solidFill>
+                    </a:lnT>
+                    <a:lnB w="6350" cap="flat" cmpd="sng" algn="ctr">
+                      <a:solidFill>
+                        <a:srgbClr val="000000"/>
+                      </a:solidFill>
+                    </a:lnB>
+                  </a:tcPr>
+                </a:tc>
+                <a:tc>
+                  <a:txBody>
+                    <a:bodyPr wrap="square"/>
+                    <a:lstStyle/>
+                    <a:p>
+                      <a:pPr algn="ctr">
+                        <a:lnSpc>
+                          <a:spcPct val="100000"/>
+                        </a:lnSpc>
+                        <a:spcBef>
+                          <a:spcPts val="0"/>
+                        </a:spcBef>
+                        <a:spcAft>
+                          <a:spcPts val="0"/>
+                        </a:spcAft>
+                      </a:pPr>
+                      <a:r>
+                        <a:rPr sz="1200" b="1">
+                          <a:solidFill>
+                            <a:srgbClr val="FFFFFF"/>
+                          </a:solidFill>
+                          <a:latin typeface="Calibri"/>
+                        </a:rPr>
+                        <a:t>Ценность</a:t>
+                      </a:r>
+                    </a:p>
+                  </a:txBody>
+                  <a:tcPr anchor="ctr" marL="38100" marR="38100" marT="25400" marB="25400">
+                    <a:solidFill>
+                      <a:srgbClr val="AF182E"/>
+                    </a:solidFill>
+                    <a:lnL w="6350" cap="flat" cmpd="sng" algn="ctr">
+                      <a:solidFill>
+                        <a:srgbClr val="000000"/>
+                      </a:solidFill>
+                    </a:lnL>
+                    <a:lnR w="6350" cap="flat" cmpd="sng" algn="ctr">
+                      <a:solidFill>
+                        <a:srgbClr val="000000"/>
+                      </a:solidFill>
+                    </a:lnR>
+                    <a:lnT w="6350" cap="flat" cmpd="sng" algn="ctr">
+                      <a:solidFill>
+                        <a:srgbClr val="000000"/>
+                      </a:solidFill>
+                    </a:lnT>
+                    <a:lnB w="6350" cap="flat" cmpd="sng" algn="ctr">
+                      <a:solidFill>
+                        <a:srgbClr val="000000"/>
+                      </a:solidFill>
+                    </a:lnB>
+                  </a:tcPr>
+                </a:tc>
+                <a:tc>
+                  <a:txBody>
+                    <a:bodyPr wrap="square"/>
+                    <a:lstStyle/>
+                    <a:p>
+                      <a:pPr algn="ctr">
+                        <a:lnSpc>
+                          <a:spcPct val="100000"/>
+                        </a:lnSpc>
+                        <a:spcBef>
+                          <a:spcPts val="0"/>
+                        </a:spcBef>
+                        <a:spcAft>
+                          <a:spcPts val="0"/>
+                        </a:spcAft>
+                      </a:pPr>
+                      <a:r>
+                        <a:rPr sz="1200" b="1">
+                          <a:solidFill>
+                            <a:srgbClr val="FFFFFF"/>
+                          </a:solidFill>
+                          <a:latin typeface="Calibri"/>
+                        </a:rPr>
+                        <a:t>Предварительная
+оценка
+реализации,
+тыс.руб.</a:t>
+                      </a:r>
+                    </a:p>
+                  </a:txBody>
+                  <a:tcPr anchor="ctr" marL="38100" marR="38100" marT="25400" marB="25400">
+                    <a:solidFill>
+                      <a:srgbClr val="AF182E"/>
+                    </a:solidFill>
+                    <a:lnL w="6350" cap="flat" cmpd="sng" algn="ctr">
+                      <a:solidFill>
+                        <a:srgbClr val="000000"/>
+                      </a:solidFill>
+                    </a:lnL>
+                    <a:lnR w="6350" cap="flat" cmpd="sng" algn="ctr">
+                      <a:solidFill>
+                        <a:srgbClr val="000000"/>
+                      </a:solidFill>
+                    </a:lnR>
+                    <a:lnT w="6350" cap="flat" cmpd="sng" algn="ctr">
+                      <a:solidFill>
+                        <a:srgbClr val="000000"/>
+                      </a:solidFill>
+                    </a:lnT>
+                    <a:lnB w="6350" cap="flat" cmpd="sng" algn="ctr">
+                      <a:solidFill>
+                        <a:srgbClr val="000000"/>
+                      </a:solidFill>
+                    </a:lnB>
+                  </a:tcPr>
+                </a:tc>
+                <a:tc>
+                  <a:txBody>
+                    <a:bodyPr wrap="square"/>
+                    <a:lstStyle/>
+                    <a:p>
+                      <a:pPr algn="ctr">
+                        <a:lnSpc>
+                          <a:spcPct val="100000"/>
+                        </a:lnSpc>
+                        <a:spcBef>
+                          <a:spcPts val="0"/>
+                        </a:spcBef>
+                        <a:spcAft>
+                          <a:spcPts val="0"/>
+                        </a:spcAft>
+                      </a:pPr>
+                      <a:r>
+                        <a:rPr sz="1200" b="1">
+                          <a:solidFill>
+                            <a:srgbClr val="FFFFFF"/>
+                          </a:solidFill>
+                          <a:latin typeface="Calibri"/>
+                        </a:rPr>
+                        <a:t>Статус</a:t>
+                      </a:r>
+                    </a:p>
+                  </a:txBody>
+                  <a:tcPr anchor="ctr" marL="38100" marR="38100" marT="25400" marB="25400">
+                    <a:solidFill>
+                      <a:srgbClr val="AF182E"/>
+                    </a:solidFill>
+                    <a:lnL w="6350" cap="flat" cmpd="sng" algn="ctr">
+                      <a:solidFill>
+                        <a:srgbClr val="000000"/>
+                      </a:solidFill>
+                    </a:lnL>
+                    <a:lnR w="6350" cap="flat" cmpd="sng" algn="ctr">
+                      <a:solidFill>
+                        <a:srgbClr val="000000"/>
+                      </a:solidFill>
+                    </a:lnR>
+                    <a:lnT w="6350" cap="flat" cmpd="sng" algn="ctr">
+                      <a:solidFill>
+                        <a:srgbClr val="000000"/>
+                      </a:solidFill>
+                    </a:lnT>
+                    <a:lnB w="6350" cap="flat" cmpd="sng" algn="ctr">
+                      <a:solidFill>
+                        <a:srgbClr val="000000"/>
+                      </a:solidFill>
+                    </a:lnB>
+                  </a:tcPr>
+                </a:tc>
+              </a:tr>
+              <a:tr h="2730600">
+                <a:tc>
+                  <a:txBody>
+                    <a:bodyPr wrap="square"/>
+                    <a:lstStyle/>
+                    <a:p>
+                      <a:pPr algn="ctr">
+                        <a:lnSpc>
+                          <a:spcPct val="100000"/>
+                        </a:lnSpc>
+                        <a:spcBef>
+                          <a:spcPts val="0"/>
+                        </a:spcBef>
+                        <a:spcAft>
+                          <a:spcPts val="0"/>
+                        </a:spcAft>
+                      </a:pPr>
+                      <a:r>
                         <a:rPr sz="1100" b="0">
                           <a:solidFill>
                             <a:srgbClr val="000000"/>
@@ -18433,7 +18864,7 @@
                   </a:tcPr>
                 </a:tc>
               </a:tr>
-              <a:tr h="692070">
+              <a:tr h="2113890">
                 <a:tc>
                   <a:txBody>
                     <a:bodyPr wrap="square"/>

--- a/Дефекты_и_разработки_по_Пилоту.pptx
+++ b/Дефекты_и_разработки_по_Пилоту.pptx
@@ -3163,7 +3163,7 @@
         </p:nvGraphicFramePr>
         <p:xfrm>
           <a:off x="533095" y="1030528"/>
-          <a:ext cx="11415367" cy="5583325"/>
+          <a:ext cx="11415367" cy="5488223"/>
         </p:xfrm>
         <a:graphic>
           <a:graphicData uri="http://schemas.openxmlformats.org/drawingml/2006/table">
@@ -3502,7 +3502,7 @@
                   </a:tcPr>
                 </a:tc>
               </a:tr>
-              <a:tr h="692070">
+              <a:tr h="678484">
                 <a:tc>
                   <a:txBody>
                     <a:bodyPr wrap="square"/>
@@ -3822,7 +3822,7 @@
                   </a:tcPr>
                 </a:tc>
               </a:tr>
-              <a:tr h="692070">
+              <a:tr h="678484">
                 <a:tc>
                   <a:txBody>
                     <a:bodyPr wrap="square"/>
@@ -4142,7 +4142,7 @@
                   </a:tcPr>
                 </a:tc>
               </a:tr>
-              <a:tr h="692070">
+              <a:tr h="678484">
                 <a:tc>
                   <a:txBody>
                     <a:bodyPr wrap="square"/>
@@ -4462,7 +4462,7 @@
                   </a:tcPr>
                 </a:tc>
               </a:tr>
-              <a:tr h="692070">
+              <a:tr h="678484">
                 <a:tc>
                   <a:txBody>
                     <a:bodyPr wrap="square"/>
@@ -4782,7 +4782,7 @@
                   </a:tcPr>
                 </a:tc>
               </a:tr>
-              <a:tr h="692070">
+              <a:tr h="678484">
                 <a:tc>
                   <a:txBody>
                     <a:bodyPr wrap="square"/>
@@ -5093,7 +5093,7 @@
                   </a:tcPr>
                 </a:tc>
               </a:tr>
-              <a:tr h="692070">
+              <a:tr h="678484">
                 <a:tc>
                   <a:txBody>
                     <a:bodyPr wrap="square"/>
@@ -5413,7 +5413,7 @@
                   </a:tcPr>
                 </a:tc>
               </a:tr>
-              <a:tr h="692070">
+              <a:tr h="678484">
                 <a:tc>
                   <a:txBody>
                     <a:bodyPr wrap="square"/>
@@ -5824,7 +5824,7 @@
         </p:nvGraphicFramePr>
         <p:xfrm>
           <a:off x="533095" y="1030528"/>
-          <a:ext cx="11415367" cy="5583325"/>
+          <a:ext cx="11415367" cy="5488223"/>
         </p:xfrm>
         <a:graphic>
           <a:graphicData uri="http://schemas.openxmlformats.org/drawingml/2006/table">
@@ -6163,7 +6163,7 @@
                   </a:tcPr>
                 </a:tc>
               </a:tr>
-              <a:tr h="692070">
+              <a:tr h="678484">
                 <a:tc>
                   <a:txBody>
                     <a:bodyPr wrap="square"/>
@@ -6483,7 +6483,7 @@
                   </a:tcPr>
                 </a:tc>
               </a:tr>
-              <a:tr h="692070">
+              <a:tr h="678484">
                 <a:tc>
                   <a:txBody>
                     <a:bodyPr wrap="square"/>
@@ -6803,7 +6803,7 @@
                   </a:tcPr>
                 </a:tc>
               </a:tr>
-              <a:tr h="692070">
+              <a:tr h="678484">
                 <a:tc>
                   <a:txBody>
                     <a:bodyPr wrap="square"/>
@@ -7123,7 +7123,7 @@
                   </a:tcPr>
                 </a:tc>
               </a:tr>
-              <a:tr h="692070">
+              <a:tr h="678484">
                 <a:tc>
                   <a:txBody>
                     <a:bodyPr wrap="square"/>
@@ -7443,7 +7443,7 @@
                   </a:tcPr>
                 </a:tc>
               </a:tr>
-              <a:tr h="692070">
+              <a:tr h="678484">
                 <a:tc>
                   <a:txBody>
                     <a:bodyPr wrap="square"/>
@@ -7763,7 +7763,7 @@
                   </a:tcPr>
                 </a:tc>
               </a:tr>
-              <a:tr h="692070">
+              <a:tr h="678484">
                 <a:tc>
                   <a:txBody>
                     <a:bodyPr wrap="square"/>
@@ -8083,7 +8083,7 @@
                   </a:tcPr>
                 </a:tc>
               </a:tr>
-              <a:tr h="692070">
+              <a:tr h="678484">
                 <a:tc>
                   <a:txBody>
                     <a:bodyPr wrap="square"/>
@@ -8494,7 +8494,7 @@
         </p:nvGraphicFramePr>
         <p:xfrm>
           <a:off x="533095" y="1030528"/>
-          <a:ext cx="11415367" cy="5583324"/>
+          <a:ext cx="11415367" cy="5082258"/>
         </p:xfrm>
         <a:graphic>
           <a:graphicData uri="http://schemas.openxmlformats.org/drawingml/2006/table">
@@ -8833,7 +8833,7 @@
                   </a:tcPr>
                 </a:tc>
               </a:tr>
-              <a:tr h="756756">
+              <a:tr h="678484">
                 <a:tc>
                   <a:txBody>
                     <a:bodyPr wrap="square"/>
@@ -9153,7 +9153,7 @@
                   </a:tcPr>
                 </a:tc>
               </a:tr>
-              <a:tr h="756756">
+              <a:tr h="678484">
                 <a:tc>
                   <a:txBody>
                     <a:bodyPr wrap="square"/>
@@ -9473,7 +9473,7 @@
                   </a:tcPr>
                 </a:tc>
               </a:tr>
-              <a:tr h="977533">
+              <a:tr h="876427">
                 <a:tc>
                   <a:txBody>
                     <a:bodyPr wrap="square"/>
@@ -9793,7 +9793,7 @@
                   </a:tcPr>
                 </a:tc>
               </a:tr>
-              <a:tr h="798344">
+              <a:tr h="715772">
                 <a:tc>
                   <a:txBody>
                     <a:bodyPr wrap="square"/>
@@ -10113,7 +10113,7 @@
                   </a:tcPr>
                 </a:tc>
               </a:tr>
-              <a:tr h="756756">
+              <a:tr h="678484">
                 <a:tc>
                   <a:txBody>
                     <a:bodyPr wrap="square"/>
@@ -10433,7 +10433,7 @@
                   </a:tcPr>
                 </a:tc>
               </a:tr>
-              <a:tr h="798344">
+              <a:tr h="715772">
                 <a:tc>
                   <a:txBody>
                     <a:bodyPr wrap="square"/>
@@ -10844,7 +10844,7 @@
         </p:nvGraphicFramePr>
         <p:xfrm>
           <a:off x="533095" y="1030528"/>
-          <a:ext cx="11415367" cy="5583325"/>
+          <a:ext cx="11415367" cy="4921603"/>
         </p:xfrm>
         <a:graphic>
           <a:graphicData uri="http://schemas.openxmlformats.org/drawingml/2006/table">
@@ -11183,7 +11183,7 @@
                   </a:tcPr>
                 </a:tc>
               </a:tr>
-              <a:tr h="829008">
+              <a:tr h="715772">
                 <a:tc>
                   <a:txBody>
                     <a:bodyPr wrap="square"/>
@@ -11503,7 +11503,7 @@
                   </a:tcPr>
                 </a:tc>
               </a:tr>
-              <a:tr h="829008">
+              <a:tr h="715772">
                 <a:tc>
                   <a:txBody>
                     <a:bodyPr wrap="square"/>
@@ -11823,7 +11823,7 @@
                   </a:tcPr>
                 </a:tc>
               </a:tr>
-              <a:tr h="785822">
+              <a:tr h="678484">
                 <a:tc>
                   <a:txBody>
                     <a:bodyPr wrap="square"/>
@@ -12143,7 +12143,7 @@
                   </a:tcPr>
                 </a:tc>
               </a:tr>
-              <a:tr h="785822">
+              <a:tr h="678484">
                 <a:tc>
                   <a:txBody>
                     <a:bodyPr wrap="square"/>
@@ -12454,7 +12454,7 @@
                   </a:tcPr>
                 </a:tc>
               </a:tr>
-              <a:tr h="829008">
+              <a:tr h="715772">
                 <a:tc>
                   <a:txBody>
                     <a:bodyPr wrap="square"/>
@@ -12783,7 +12783,7 @@
                   </a:tcPr>
                 </a:tc>
               </a:tr>
-              <a:tr h="785822">
+              <a:tr h="678484">
                 <a:tc>
                   <a:txBody>
                     <a:bodyPr wrap="square"/>
@@ -13194,7 +13194,7 @@
         </p:nvGraphicFramePr>
         <p:xfrm>
           <a:off x="533095" y="1030528"/>
-          <a:ext cx="11415367" cy="5583324"/>
+          <a:ext cx="11415367" cy="5562799"/>
         </p:xfrm>
         <a:graphic>
           <a:graphicData uri="http://schemas.openxmlformats.org/drawingml/2006/table">
@@ -13533,7 +13533,7 @@
                   </a:tcPr>
                 </a:tc>
               </a:tr>
-              <a:tr h="681371">
+              <a:tr h="678484">
                 <a:tc>
                   <a:txBody>
                     <a:bodyPr wrap="square"/>
@@ -13853,7 +13853,7 @@
                   </a:tcPr>
                 </a:tc>
               </a:tr>
-              <a:tr h="718817">
+              <a:tr h="715772">
                 <a:tc>
                   <a:txBody>
                     <a:bodyPr wrap="square"/>
@@ -14173,7 +14173,7 @@
                   </a:tcPr>
                 </a:tc>
               </a:tr>
-              <a:tr h="681371">
+              <a:tr h="678484">
                 <a:tc>
                   <a:txBody>
                     <a:bodyPr wrap="square"/>
@@ -14493,7 +14493,7 @@
                   </a:tcPr>
                 </a:tc>
               </a:tr>
-              <a:tr h="681371">
+              <a:tr h="678484">
                 <a:tc>
                   <a:txBody>
                     <a:bodyPr wrap="square"/>
@@ -14813,7 +14813,7 @@
                   </a:tcPr>
                 </a:tc>
               </a:tr>
-              <a:tr h="681371">
+              <a:tr h="678484">
                 <a:tc>
                   <a:txBody>
                     <a:bodyPr wrap="square"/>
@@ -15133,7 +15133,7 @@
                   </a:tcPr>
                 </a:tc>
               </a:tr>
-              <a:tr h="681371">
+              <a:tr h="678484">
                 <a:tc>
                   <a:txBody>
                     <a:bodyPr wrap="square"/>
@@ -15453,7 +15453,7 @@
                   </a:tcPr>
                 </a:tc>
               </a:tr>
-              <a:tr h="718817">
+              <a:tr h="715772">
                 <a:tc>
                   <a:txBody>
                     <a:bodyPr wrap="square"/>
@@ -15864,7 +15864,7 @@
         </p:nvGraphicFramePr>
         <p:xfrm>
           <a:off x="533095" y="1030528"/>
-          <a:ext cx="11415367" cy="5583324"/>
+          <a:ext cx="11415367" cy="5205625"/>
         </p:xfrm>
         <a:graphic>
           <a:graphicData uri="http://schemas.openxmlformats.org/drawingml/2006/table">
@@ -16203,7 +16203,7 @@
                   </a:tcPr>
                 </a:tc>
               </a:tr>
-              <a:tr h="735855">
+              <a:tr h="678484">
                 <a:tc>
                   <a:txBody>
                     <a:bodyPr wrap="square"/>
@@ -16523,7 +16523,7 @@
                   </a:tcPr>
                 </a:tc>
               </a:tr>
-              <a:tr h="735855">
+              <a:tr h="678484">
                 <a:tc>
                   <a:txBody>
                     <a:bodyPr wrap="square"/>
@@ -16843,7 +16843,7 @@
                   </a:tcPr>
                 </a:tc>
               </a:tr>
-              <a:tr h="1124774">
+              <a:tr h="1037082">
                 <a:tc>
                   <a:txBody>
                     <a:bodyPr wrap="square"/>
@@ -17163,7 +17163,7 @@
                   </a:tcPr>
                 </a:tc>
               </a:tr>
-              <a:tr h="776295">
+              <a:tr h="715772">
                 <a:tc>
                   <a:txBody>
                     <a:bodyPr wrap="square"/>
@@ -17483,7 +17483,7 @@
                   </a:tcPr>
                 </a:tc>
               </a:tr>
-              <a:tr h="735855">
+              <a:tr h="678484">
                 <a:tc>
                   <a:txBody>
                     <a:bodyPr wrap="square"/>
@@ -17803,7 +17803,7 @@
                   </a:tcPr>
                 </a:tc>
               </a:tr>
-              <a:tr h="735855">
+              <a:tr h="678484">
                 <a:tc>
                   <a:txBody>
                     <a:bodyPr wrap="square"/>
@@ -18214,7 +18214,7 @@
         </p:nvGraphicFramePr>
         <p:xfrm>
           <a:off x="533095" y="1030528"/>
-          <a:ext cx="11415367" cy="5583325"/>
+          <a:ext cx="11415367" cy="2293746"/>
         </p:xfrm>
         <a:graphic>
           <a:graphicData uri="http://schemas.openxmlformats.org/drawingml/2006/table">
@@ -18553,7 +18553,7 @@
                   </a:tcPr>
                 </a:tc>
               </a:tr>
-              <a:tr h="2730600">
+              <a:tr h="876427">
                 <a:tc>
                   <a:txBody>
                     <a:bodyPr wrap="square"/>
@@ -18864,7 +18864,7 @@
                   </a:tcPr>
                 </a:tc>
               </a:tr>
-              <a:tr h="2113890">
+              <a:tr h="678484">
                 <a:tc>
                   <a:txBody>
                     <a:bodyPr wrap="square"/>

--- a/Дефекты_и_разработки_по_Пилоту.pptx
+++ b/Дефекты_и_разработки_по_Пилоту.pptx
@@ -3126,7 +3126,7 @@
         </p:nvSpPr>
         <p:spPr>
           <a:xfrm>
-            <a:off x="561441" y="330098"/>
+            <a:off x="533095" y="330098"/>
             <a:ext cx="7772400" cy="411480"/>
           </a:xfrm>
           <a:prstGeom prst="rect">
@@ -3573,11 +3573,12 @@
                         </a:spcAft>
                       </a:pPr>
                       <a:r>
-                        <a:rPr sz="1100" b="0">
+                        <a:rPr sz="1100" b="0" u="sng">
                           <a:solidFill>
                             <a:srgbClr val="77777A"/>
                           </a:solidFill>
                           <a:latin typeface="Calibri"/>
+                          <a:hlinkClick r:id="rId3"/>
                         </a:rPr>
                         <a:t>DEFPROD-6138</a:t>
                       </a:r>
@@ -3893,11 +3894,12 @@
                         </a:spcAft>
                       </a:pPr>
                       <a:r>
-                        <a:rPr sz="1100" b="0">
+                        <a:rPr sz="1100" b="0" u="sng">
                           <a:solidFill>
                             <a:srgbClr val="77777A"/>
                           </a:solidFill>
                           <a:latin typeface="Calibri"/>
+                          <a:hlinkClick r:id="rId4"/>
                         </a:rPr>
                         <a:t>DEFPROD-9222</a:t>
                       </a:r>
@@ -4213,11 +4215,12 @@
                         </a:spcAft>
                       </a:pPr>
                       <a:r>
-                        <a:rPr sz="1100" b="0">
+                        <a:rPr sz="1100" b="0" u="sng">
                           <a:solidFill>
                             <a:srgbClr val="77777A"/>
                           </a:solidFill>
                           <a:latin typeface="Calibri"/>
+                          <a:hlinkClick r:id="rId5"/>
                         </a:rPr>
                         <a:t>DEFPROD-6804</a:t>
                       </a:r>
@@ -4533,11 +4536,12 @@
                         </a:spcAft>
                       </a:pPr>
                       <a:r>
-                        <a:rPr sz="1100" b="0">
+                        <a:rPr sz="1100" b="0" u="sng">
                           <a:solidFill>
                             <a:srgbClr val="77777A"/>
                           </a:solidFill>
                           <a:latin typeface="Calibri"/>
+                          <a:hlinkClick r:id="rId6"/>
                         </a:rPr>
                         <a:t>DEFPROD-10592</a:t>
                       </a:r>
@@ -4853,11 +4857,12 @@
                         </a:spcAft>
                       </a:pPr>
                       <a:r>
-                        <a:rPr sz="1100" b="0">
+                        <a:rPr sz="1100" b="0" u="sng">
                           <a:solidFill>
                             <a:srgbClr val="77777A"/>
                           </a:solidFill>
                           <a:latin typeface="Calibri"/>
+                          <a:hlinkClick r:id="rId7"/>
                         </a:rPr>
                         <a:t>DEFPROD-9603</a:t>
                       </a:r>
@@ -5164,11 +5169,12 @@
                         </a:spcAft>
                       </a:pPr>
                       <a:r>
-                        <a:rPr sz="1100" b="0">
+                        <a:rPr sz="1100" b="0" u="sng">
                           <a:solidFill>
                             <a:srgbClr val="77777A"/>
                           </a:solidFill>
                           <a:latin typeface="Calibri"/>
+                          <a:hlinkClick r:id="rId8"/>
                         </a:rPr>
                         <a:t>DEFPROD-10301</a:t>
                       </a:r>
@@ -5484,11 +5490,12 @@
                         </a:spcAft>
                       </a:pPr>
                       <a:r>
-                        <a:rPr sz="1100" b="0">
+                        <a:rPr sz="1100" b="0" u="sng">
                           <a:solidFill>
                             <a:srgbClr val="77777A"/>
                           </a:solidFill>
                           <a:latin typeface="Calibri"/>
+                          <a:hlinkClick r:id="rId9"/>
                         </a:rPr>
                         <a:t>FTR-7065</a:t>
                       </a:r>
@@ -5787,7 +5794,7 @@
         </p:nvSpPr>
         <p:spPr>
           <a:xfrm>
-            <a:off x="561441" y="330098"/>
+            <a:off x="533095" y="330098"/>
             <a:ext cx="7772400" cy="411480"/>
           </a:xfrm>
           <a:prstGeom prst="rect">
@@ -6234,11 +6241,12 @@
                         </a:spcAft>
                       </a:pPr>
                       <a:r>
-                        <a:rPr sz="1100" b="0">
+                        <a:rPr sz="1100" b="0" u="sng">
                           <a:solidFill>
                             <a:srgbClr val="77777A"/>
                           </a:solidFill>
                           <a:latin typeface="Calibri"/>
+                          <a:hlinkClick r:id="rId3"/>
                         </a:rPr>
                         <a:t>FTR-7063</a:t>
                       </a:r>
@@ -6554,11 +6562,12 @@
                         </a:spcAft>
                       </a:pPr>
                       <a:r>
-                        <a:rPr sz="1100" b="0">
+                        <a:rPr sz="1100" b="0" u="sng">
                           <a:solidFill>
                             <a:srgbClr val="77777A"/>
                           </a:solidFill>
                           <a:latin typeface="Calibri"/>
+                          <a:hlinkClick r:id="rId4"/>
                         </a:rPr>
                         <a:t>FTR-7577</a:t>
                       </a:r>
@@ -6874,11 +6883,12 @@
                         </a:spcAft>
                       </a:pPr>
                       <a:r>
-                        <a:rPr sz="1100" b="0">
+                        <a:rPr sz="1100" b="0" u="sng">
                           <a:solidFill>
                             <a:srgbClr val="77777A"/>
                           </a:solidFill>
                           <a:latin typeface="Calibri"/>
+                          <a:hlinkClick r:id="rId5"/>
                         </a:rPr>
                         <a:t>FTR-7074</a:t>
                       </a:r>
@@ -7194,11 +7204,12 @@
                         </a:spcAft>
                       </a:pPr>
                       <a:r>
-                        <a:rPr sz="1100" b="0">
+                        <a:rPr sz="1100" b="0" u="sng">
                           <a:solidFill>
                             <a:srgbClr val="77777A"/>
                           </a:solidFill>
                           <a:latin typeface="Calibri"/>
+                          <a:hlinkClick r:id="rId6"/>
                         </a:rPr>
                         <a:t>FTR-7057</a:t>
                       </a:r>
@@ -7514,11 +7525,12 @@
                         </a:spcAft>
                       </a:pPr>
                       <a:r>
-                        <a:rPr sz="1100" b="0">
+                        <a:rPr sz="1100" b="0" u="sng">
                           <a:solidFill>
                             <a:srgbClr val="77777A"/>
                           </a:solidFill>
                           <a:latin typeface="Calibri"/>
+                          <a:hlinkClick r:id="rId7"/>
                         </a:rPr>
                         <a:t>FTR-7072</a:t>
                       </a:r>
@@ -7834,11 +7846,12 @@
                         </a:spcAft>
                       </a:pPr>
                       <a:r>
-                        <a:rPr sz="1100" b="0">
+                        <a:rPr sz="1100" b="0" u="sng">
                           <a:solidFill>
                             <a:srgbClr val="77777A"/>
                           </a:solidFill>
                           <a:latin typeface="Calibri"/>
+                          <a:hlinkClick r:id="rId8"/>
                         </a:rPr>
                         <a:t>FTR-7126</a:t>
                       </a:r>
@@ -8154,11 +8167,12 @@
                         </a:spcAft>
                       </a:pPr>
                       <a:r>
-                        <a:rPr sz="1100" b="0">
+                        <a:rPr sz="1100" b="0" u="sng">
                           <a:solidFill>
                             <a:srgbClr val="77777A"/>
                           </a:solidFill>
                           <a:latin typeface="Calibri"/>
+                          <a:hlinkClick r:id="rId9"/>
                         </a:rPr>
                         <a:t>FTR-7110</a:t>
                       </a:r>
@@ -8457,7 +8471,7 @@
         </p:nvSpPr>
         <p:spPr>
           <a:xfrm>
-            <a:off x="561441" y="330098"/>
+            <a:off x="533095" y="330098"/>
             <a:ext cx="7772400" cy="411480"/>
           </a:xfrm>
           <a:prstGeom prst="rect">
@@ -8904,11 +8918,12 @@
                         </a:spcAft>
                       </a:pPr>
                       <a:r>
-                        <a:rPr sz="1100" b="0">
+                        <a:rPr sz="1100" b="0" u="sng">
                           <a:solidFill>
                             <a:srgbClr val="77777A"/>
                           </a:solidFill>
                           <a:latin typeface="Calibri"/>
+                          <a:hlinkClick r:id="rId3"/>
                         </a:rPr>
                         <a:t>FTR-7099</a:t>
                       </a:r>
@@ -9224,11 +9239,12 @@
                         </a:spcAft>
                       </a:pPr>
                       <a:r>
-                        <a:rPr sz="1100" b="0">
+                        <a:rPr sz="1100" b="0" u="sng">
                           <a:solidFill>
                             <a:srgbClr val="77777A"/>
                           </a:solidFill>
                           <a:latin typeface="Calibri"/>
+                          <a:hlinkClick r:id="rId4"/>
                         </a:rPr>
                         <a:t>DEFPROD-7954</a:t>
                       </a:r>
@@ -9544,11 +9560,12 @@
                         </a:spcAft>
                       </a:pPr>
                       <a:r>
-                        <a:rPr sz="1100" b="0">
+                        <a:rPr sz="1100" b="0" u="sng">
                           <a:solidFill>
                             <a:srgbClr val="77777A"/>
                           </a:solidFill>
                           <a:latin typeface="Calibri"/>
+                          <a:hlinkClick r:id="rId5"/>
                         </a:rPr>
                         <a:t>DEFPROD-9229</a:t>
                       </a:r>
@@ -9864,11 +9881,12 @@
                         </a:spcAft>
                       </a:pPr>
                       <a:r>
-                        <a:rPr sz="1100" b="0">
+                        <a:rPr sz="1100" b="0" u="sng">
                           <a:solidFill>
                             <a:srgbClr val="77777A"/>
                           </a:solidFill>
                           <a:latin typeface="Calibri"/>
+                          <a:hlinkClick r:id="rId6"/>
                         </a:rPr>
                         <a:t>DEFPROD-9289</a:t>
                       </a:r>
@@ -10184,11 +10202,12 @@
                         </a:spcAft>
                       </a:pPr>
                       <a:r>
-                        <a:rPr sz="1100" b="0">
+                        <a:rPr sz="1100" b="0" u="sng">
                           <a:solidFill>
                             <a:srgbClr val="77777A"/>
                           </a:solidFill>
                           <a:latin typeface="Calibri"/>
+                          <a:hlinkClick r:id="rId7"/>
                         </a:rPr>
                         <a:t>DEFPROD-9430</a:t>
                       </a:r>
@@ -10504,11 +10523,12 @@
                         </a:spcAft>
                       </a:pPr>
                       <a:r>
-                        <a:rPr sz="1100" b="0">
+                        <a:rPr sz="1100" b="0" u="sng">
                           <a:solidFill>
                             <a:srgbClr val="77777A"/>
                           </a:solidFill>
                           <a:latin typeface="Calibri"/>
+                          <a:hlinkClick r:id="rId8"/>
                         </a:rPr>
                         <a:t>DEFPROD-9604</a:t>
                       </a:r>
@@ -10807,7 +10827,7 @@
         </p:nvSpPr>
         <p:spPr>
           <a:xfrm>
-            <a:off x="561441" y="330098"/>
+            <a:off x="533095" y="330098"/>
             <a:ext cx="7772400" cy="411480"/>
           </a:xfrm>
           <a:prstGeom prst="rect">
@@ -11254,11 +11274,12 @@
                         </a:spcAft>
                       </a:pPr>
                       <a:r>
-                        <a:rPr sz="1100" b="0">
+                        <a:rPr sz="1100" b="0" u="sng">
                           <a:solidFill>
                             <a:srgbClr val="77777A"/>
                           </a:solidFill>
                           <a:latin typeface="Calibri"/>
+                          <a:hlinkClick r:id="rId3"/>
                         </a:rPr>
                         <a:t>DEFPROD-4335</a:t>
                       </a:r>
@@ -11574,11 +11595,12 @@
                         </a:spcAft>
                       </a:pPr>
                       <a:r>
-                        <a:rPr sz="1100" b="0">
+                        <a:rPr sz="1100" b="0" u="sng">
                           <a:solidFill>
                             <a:srgbClr val="77777A"/>
                           </a:solidFill>
                           <a:latin typeface="Calibri"/>
+                          <a:hlinkClick r:id="rId4"/>
                         </a:rPr>
                         <a:t>DEFPROD-4462</a:t>
                       </a:r>
@@ -11894,11 +11916,12 @@
                         </a:spcAft>
                       </a:pPr>
                       <a:r>
-                        <a:rPr sz="1100" b="0">
+                        <a:rPr sz="1100" b="0" u="sng">
                           <a:solidFill>
                             <a:srgbClr val="77777A"/>
                           </a:solidFill>
                           <a:latin typeface="Calibri"/>
+                          <a:hlinkClick r:id="rId5"/>
                         </a:rPr>
                         <a:t>DEFPROD-4686</a:t>
                       </a:r>
@@ -12214,11 +12237,12 @@
                         </a:spcAft>
                       </a:pPr>
                       <a:r>
-                        <a:rPr sz="1100" b="0">
+                        <a:rPr sz="1100" b="0" u="sng">
                           <a:solidFill>
                             <a:srgbClr val="77777A"/>
                           </a:solidFill>
                           <a:latin typeface="Calibri"/>
+                          <a:hlinkClick r:id="rId6"/>
                         </a:rPr>
                         <a:t>DEFPROD-5641</a:t>
                       </a:r>
@@ -12525,11 +12549,12 @@
                         </a:spcAft>
                       </a:pPr>
                       <a:r>
-                        <a:rPr sz="1100" b="0">
+                        <a:rPr sz="1100" b="0" u="sng">
                           <a:solidFill>
                             <a:srgbClr val="77777A"/>
                           </a:solidFill>
                           <a:latin typeface="Calibri"/>
+                          <a:hlinkClick r:id="rId7"/>
                         </a:rPr>
                         <a:t>DEFPROD-6026</a:t>
                       </a:r>
@@ -12854,11 +12879,12 @@
                         </a:spcAft>
                       </a:pPr>
                       <a:r>
-                        <a:rPr sz="1100" b="0">
+                        <a:rPr sz="1100" b="0" u="sng">
                           <a:solidFill>
                             <a:srgbClr val="77777A"/>
                           </a:solidFill>
                           <a:latin typeface="Calibri"/>
+                          <a:hlinkClick r:id="rId8"/>
                         </a:rPr>
                         <a:t>DEFPROD-6290</a:t>
                       </a:r>
@@ -13157,7 +13183,7 @@
         </p:nvSpPr>
         <p:spPr>
           <a:xfrm>
-            <a:off x="561441" y="330098"/>
+            <a:off x="533095" y="330098"/>
             <a:ext cx="7772400" cy="411480"/>
           </a:xfrm>
           <a:prstGeom prst="rect">
@@ -13604,11 +13630,12 @@
                         </a:spcAft>
                       </a:pPr>
                       <a:r>
-                        <a:rPr sz="1100" b="0">
+                        <a:rPr sz="1100" b="0" u="sng">
                           <a:solidFill>
                             <a:srgbClr val="77777A"/>
                           </a:solidFill>
                           <a:latin typeface="Calibri"/>
+                          <a:hlinkClick r:id="rId3"/>
                         </a:rPr>
                         <a:t>DEFPROD-6703</a:t>
                       </a:r>
@@ -13924,11 +13951,12 @@
                         </a:spcAft>
                       </a:pPr>
                       <a:r>
-                        <a:rPr sz="1100" b="0">
+                        <a:rPr sz="1100" b="0" u="sng">
                           <a:solidFill>
                             <a:srgbClr val="77777A"/>
                           </a:solidFill>
                           <a:latin typeface="Calibri"/>
+                          <a:hlinkClick r:id="rId4"/>
                         </a:rPr>
                         <a:t>DEFPROD-7774</a:t>
                       </a:r>
@@ -14244,11 +14272,12 @@
                         </a:spcAft>
                       </a:pPr>
                       <a:r>
-                        <a:rPr sz="1100" b="0">
+                        <a:rPr sz="1100" b="0" u="sng">
                           <a:solidFill>
                             <a:srgbClr val="77777A"/>
                           </a:solidFill>
                           <a:latin typeface="Calibri"/>
+                          <a:hlinkClick r:id="rId5"/>
                         </a:rPr>
                         <a:t>DEFPROD-9034</a:t>
                       </a:r>
@@ -14564,11 +14593,12 @@
                         </a:spcAft>
                       </a:pPr>
                       <a:r>
-                        <a:rPr sz="1100" b="0">
+                        <a:rPr sz="1100" b="0" u="sng">
                           <a:solidFill>
                             <a:srgbClr val="77777A"/>
                           </a:solidFill>
                           <a:latin typeface="Calibri"/>
+                          <a:hlinkClick r:id="rId6"/>
                         </a:rPr>
                         <a:t>DEFPROD-9797</a:t>
                       </a:r>
@@ -14884,11 +14914,12 @@
                         </a:spcAft>
                       </a:pPr>
                       <a:r>
-                        <a:rPr sz="1100" b="0">
+                        <a:rPr sz="1100" b="0" u="sng">
                           <a:solidFill>
                             <a:srgbClr val="77777A"/>
                           </a:solidFill>
                           <a:latin typeface="Calibri"/>
+                          <a:hlinkClick r:id="rId7"/>
                         </a:rPr>
                         <a:t>DEFPROD-9845</a:t>
                       </a:r>
@@ -15204,11 +15235,12 @@
                         </a:spcAft>
                       </a:pPr>
                       <a:r>
-                        <a:rPr sz="1100" b="0">
+                        <a:rPr sz="1100" b="0" u="sng">
                           <a:solidFill>
                             <a:srgbClr val="77777A"/>
                           </a:solidFill>
                           <a:latin typeface="Calibri"/>
+                          <a:hlinkClick r:id="rId8"/>
                         </a:rPr>
                         <a:t>DEFPROD-10152</a:t>
                       </a:r>
@@ -15524,11 +15556,12 @@
                         </a:spcAft>
                       </a:pPr>
                       <a:r>
-                        <a:rPr sz="1100" b="0">
+                        <a:rPr sz="1100" b="0" u="sng">
                           <a:solidFill>
                             <a:srgbClr val="77777A"/>
                           </a:solidFill>
                           <a:latin typeface="Calibri"/>
+                          <a:hlinkClick r:id="rId9"/>
                         </a:rPr>
                         <a:t>DEFPROD-10281</a:t>
                       </a:r>
@@ -15827,7 +15860,7 @@
         </p:nvSpPr>
         <p:spPr>
           <a:xfrm>
-            <a:off x="561441" y="330098"/>
+            <a:off x="533095" y="330098"/>
             <a:ext cx="7772400" cy="411480"/>
           </a:xfrm>
           <a:prstGeom prst="rect">
@@ -16274,11 +16307,12 @@
                         </a:spcAft>
                       </a:pPr>
                       <a:r>
-                        <a:rPr sz="1100" b="0">
+                        <a:rPr sz="1100" b="0" u="sng">
                           <a:solidFill>
                             <a:srgbClr val="77777A"/>
                           </a:solidFill>
                           <a:latin typeface="Calibri"/>
+                          <a:hlinkClick r:id="rId3"/>
                         </a:rPr>
                         <a:t>DEFPROD-10282</a:t>
                       </a:r>
@@ -16594,11 +16628,12 @@
                         </a:spcAft>
                       </a:pPr>
                       <a:r>
-                        <a:rPr sz="1100" b="0">
+                        <a:rPr sz="1100" b="0" u="sng">
                           <a:solidFill>
                             <a:srgbClr val="77777A"/>
                           </a:solidFill>
                           <a:latin typeface="Calibri"/>
+                          <a:hlinkClick r:id="rId4"/>
                         </a:rPr>
                         <a:t>DEFPROD-10579</a:t>
                       </a:r>
@@ -16914,11 +16949,12 @@
                         </a:spcAft>
                       </a:pPr>
                       <a:r>
-                        <a:rPr sz="1100" b="0">
+                        <a:rPr sz="1100" b="0" u="sng">
                           <a:solidFill>
                             <a:srgbClr val="77777A"/>
                           </a:solidFill>
                           <a:latin typeface="Calibri"/>
+                          <a:hlinkClick r:id="rId5"/>
                         </a:rPr>
                         <a:t>DEFPROD-6889</a:t>
                       </a:r>
@@ -17234,11 +17270,12 @@
                         </a:spcAft>
                       </a:pPr>
                       <a:r>
-                        <a:rPr sz="1100" b="0">
+                        <a:rPr sz="1100" b="0" u="sng">
                           <a:solidFill>
                             <a:srgbClr val="77777A"/>
                           </a:solidFill>
                           <a:latin typeface="Calibri"/>
+                          <a:hlinkClick r:id="rId6"/>
                         </a:rPr>
                         <a:t>DEFPROD-8123</a:t>
                       </a:r>
@@ -17554,11 +17591,12 @@
                         </a:spcAft>
                       </a:pPr>
                       <a:r>
-                        <a:rPr sz="1100" b="0">
+                        <a:rPr sz="1100" b="0" u="sng">
                           <a:solidFill>
                             <a:srgbClr val="77777A"/>
                           </a:solidFill>
                           <a:latin typeface="Calibri"/>
+                          <a:hlinkClick r:id="rId7"/>
                         </a:rPr>
                         <a:t>DEV-426</a:t>
                       </a:r>
@@ -17874,11 +17912,12 @@
                         </a:spcAft>
                       </a:pPr>
                       <a:r>
-                        <a:rPr sz="1100" b="0">
+                        <a:rPr sz="1100" b="0" u="sng">
                           <a:solidFill>
                             <a:srgbClr val="77777A"/>
                           </a:solidFill>
                           <a:latin typeface="Calibri"/>
+                          <a:hlinkClick r:id="rId8"/>
                         </a:rPr>
                         <a:t>DEFPROD-3711</a:t>
                       </a:r>
@@ -18177,7 +18216,7 @@
         </p:nvSpPr>
         <p:spPr>
           <a:xfrm>
-            <a:off x="561441" y="330098"/>
+            <a:off x="533095" y="330098"/>
             <a:ext cx="7772400" cy="411480"/>
           </a:xfrm>
           <a:prstGeom prst="rect">
@@ -18624,11 +18663,12 @@
                         </a:spcAft>
                       </a:pPr>
                       <a:r>
-                        <a:rPr sz="1100" b="0">
+                        <a:rPr sz="1100" b="0" u="sng">
                           <a:solidFill>
                             <a:srgbClr val="77777A"/>
                           </a:solidFill>
                           <a:latin typeface="Calibri"/>
+                          <a:hlinkClick r:id="rId3"/>
                         </a:rPr>
                         <a:t>FTR-12144</a:t>
                       </a:r>
@@ -18935,11 +18975,12 @@
                         </a:spcAft>
                       </a:pPr>
                       <a:r>
-                        <a:rPr sz="1100" b="0">
+                        <a:rPr sz="1100" b="0" u="sng">
                           <a:solidFill>
                             <a:srgbClr val="77777A"/>
                           </a:solidFill>
                           <a:latin typeface="Calibri"/>
+                          <a:hlinkClick r:id="rId4"/>
                         </a:rPr>
                         <a:t>DEFPROD-9230</a:t>
                       </a:r>

--- a/Дефекты_и_разработки_по_Пилоту.pptx
+++ b/Дефекты_и_разработки_по_Пилоту.pptx
@@ -19263,10 +19263,10 @@
         <a:srgbClr val="F79646"/>
       </a:accent6>
       <a:hlink>
-        <a:srgbClr val="0000FF"/>
+        <a:srgbClr val="77777A"/>
       </a:hlink>
       <a:folHlink>
-        <a:srgbClr val="800080"/>
+        <a:srgbClr val="77777A"/>
       </a:folHlink>
     </a:clrScheme>
     <a:fontScheme name="Office">

--- a/Дефекты_и_разработки_по_Пилоту.pptx
+++ b/Дефекты_и_разработки_по_Пилоту.pptx
@@ -19229,49 +19229,49 @@
 </file>
 
 <file path=ppt/theme/theme1.xml><?xml version="1.0" encoding="utf-8"?>
-<a:theme xmlns:a="http://schemas.openxmlformats.org/drawingml/2006/main" name="Office Theme">
+<a:theme xmlns:a="http://schemas.openxmlformats.org/drawingml/2006/main" name="МИЧУРИН">
   <a:themeElements>
-    <a:clrScheme name="Office">
+    <a:clrScheme name="МИЧУРИН">
       <a:dk1>
-        <a:sysClr val="windowText" lastClr="000000"/>
+        <a:srgbClr val="000000"/>
       </a:dk1>
       <a:lt1>
-        <a:sysClr val="window" lastClr="FFFFFF"/>
+        <a:srgbClr val="FFFFFF"/>
       </a:lt1>
       <a:dk2>
-        <a:srgbClr val="1F497D"/>
+        <a:srgbClr val="454547"/>
       </a:dk2>
       <a:lt2>
-        <a:srgbClr val="EEECE1"/>
+        <a:srgbClr val="F8E7E8"/>
       </a:lt2>
       <a:accent1>
-        <a:srgbClr val="4F81BD"/>
+        <a:srgbClr val="D70036"/>
       </a:accent1>
       <a:accent2>
-        <a:srgbClr val="C0504D"/>
+        <a:srgbClr val="AF182E"/>
       </a:accent2>
       <a:accent3>
-        <a:srgbClr val="9BBB59"/>
+        <a:srgbClr val="199646"/>
       </a:accent3>
       <a:accent4>
-        <a:srgbClr val="8064A2"/>
+        <a:srgbClr val="831223"/>
       </a:accent4>
       <a:accent5>
-        <a:srgbClr val="4BACC6"/>
+        <a:srgbClr val="F0929F"/>
       </a:accent5>
       <a:accent6>
-        <a:srgbClr val="F79646"/>
+        <a:srgbClr val="8AEE8D"/>
       </a:accent6>
       <a:hlink>
-        <a:srgbClr val="0000FF"/>
+        <a:srgbClr val="77777A"/>
       </a:hlink>
       <a:folHlink>
-        <a:srgbClr val="800080"/>
+        <a:srgbClr val="454547"/>
       </a:folHlink>
     </a:clrScheme>
-    <a:fontScheme name="Office">
+    <a:fontScheme name="МИЧУРИН">
       <a:majorFont>
-        <a:latin typeface="Calibri"/>
+        <a:latin typeface="Verdana"/>
         <a:ea typeface=""/>
         <a:cs typeface=""/>
         <a:font script="Jpan" typeface="ＭＳ Ｐゴシック"/>
@@ -19306,7 +19306,7 @@
         <a:font script="Geor" typeface="Sylfaen"/>
       </a:majorFont>
       <a:minorFont>
-        <a:latin typeface="Calibri"/>
+        <a:latin typeface="Verdana"/>
         <a:ea typeface=""/>
         <a:cs typeface=""/>
         <a:font script="Jpan" typeface="ＭＳ Ｐゴシック"/>
